--- a/slides/week4.pptx
+++ b/slides/week4.pptx
@@ -517,6 +517,2030 @@
         </p:nvSpPr>
         <p:spPr/>
       </p:sp>
+      <p:sp>
+        <p:nvSpPr>
+          <p:cNvPr id="3" name="Segnaposto note 2"/>
+          <p:cNvSpPr>
+            <a:spLocks noGrp="1"/>
+          </p:cNvSpPr>
+          <p:nvPr>
+            <p:ph type="body" idx="1"/>
+          </p:nvPr>
+        </p:nvSpPr>
+        <p:spPr/>
+        <p:txBody>
+          <a:bodyPr/>
+          <a:lstStyle/>
+          <a:p>
+            <a:r>
+              <a:rPr lang="it-IT" dirty="0"/>
+              <a:t>this </a:t>
+            </a:r>
+            <a:r>
+              <a:rPr lang="it-IT" dirty="0" err="1"/>
+              <a:t>analysis</a:t>
+            </a:r>
+            <a:r>
+              <a:rPr lang="it-IT" dirty="0"/>
+              <a:t> </a:t>
+            </a:r>
+            <a:r>
+              <a:rPr lang="it-IT" dirty="0" err="1"/>
+              <a:t>is</a:t>
+            </a:r>
+            <a:r>
+              <a:rPr lang="it-IT" dirty="0"/>
+              <a:t> </a:t>
+            </a:r>
+            <a:r>
+              <a:rPr lang="it-IT" dirty="0" err="1"/>
+              <a:t>based</a:t>
+            </a:r>
+            <a:r>
+              <a:rPr lang="it-IT" dirty="0"/>
+              <a:t> on a 2024 dataset for </a:t>
+            </a:r>
+            <a:r>
+              <a:rPr lang="it-IT" dirty="0" err="1"/>
+              <a:t>two</a:t>
+            </a:r>
+            <a:r>
+              <a:rPr lang="it-IT" dirty="0"/>
+              <a:t> long </a:t>
+            </a:r>
+            <a:r>
+              <a:rPr lang="it-IT" dirty="0" err="1"/>
+              <a:t>crystals</a:t>
+            </a:r>
+            <a:r>
+              <a:rPr lang="it-IT" dirty="0"/>
+              <a:t>, </a:t>
+            </a:r>
+            <a:r>
+              <a:rPr lang="it-IT" dirty="0" err="1"/>
+              <a:t>which</a:t>
+            </a:r>
+            <a:r>
+              <a:rPr lang="it-IT" dirty="0"/>
+              <a:t> we </a:t>
+            </a:r>
+            <a:r>
+              <a:rPr lang="it-IT" dirty="0" err="1"/>
+              <a:t>refer</a:t>
+            </a:r>
+            <a:r>
+              <a:rPr lang="it-IT" dirty="0"/>
+              <a:t> to </a:t>
+            </a:r>
+            <a:r>
+              <a:rPr lang="it-IT" dirty="0" err="1"/>
+              <a:t>as</a:t>
+            </a:r>
+            <a:r>
+              <a:rPr lang="it-IT" dirty="0"/>
+              <a:t> </a:t>
+            </a:r>
+            <a:r>
+              <a:rPr lang="it-IT" dirty="0" err="1"/>
+              <a:t>crystal</a:t>
+            </a:r>
+            <a:r>
+              <a:rPr lang="it-IT" dirty="0"/>
+              <a:t> 1 and </a:t>
+            </a:r>
+            <a:r>
+              <a:rPr lang="it-IT" dirty="0" err="1"/>
+              <a:t>crystal</a:t>
+            </a:r>
+            <a:r>
+              <a:rPr lang="it-IT" dirty="0"/>
+              <a:t> 2</a:t>
+            </a:r>
+          </a:p>
+        </p:txBody>
+      </p:sp>
+      <p:sp>
+        <p:nvSpPr>
+          <p:cNvPr id="4" name="Segnaposto numero diapositiva 3"/>
+          <p:cNvSpPr>
+            <a:spLocks noGrp="1"/>
+          </p:cNvSpPr>
+          <p:nvPr>
+            <p:ph type="sldNum" sz="quarter" idx="5"/>
+          </p:nvPr>
+        </p:nvSpPr>
+        <p:spPr/>
+        <p:txBody>
+          <a:bodyPr/>
+          <a:lstStyle/>
+          <a:p>
+            <a:fld id="{C205392F-55BF-4B8E-AF01-45F81C88C286}" type="slidenum">
+              <a:rPr lang="it-IT" smtClean="0"/>
+              <a:t>2</a:t>
+            </a:fld>
+            <a:endParaRPr lang="it-IT"/>
+          </a:p>
+        </p:txBody>
+      </p:sp>
+    </p:spTree>
+    <p:extLst>
+      <p:ext uri="{BB962C8B-B14F-4D97-AF65-F5344CB8AC3E}">
+        <p14:creationId xmlns:p14="http://schemas.microsoft.com/office/powerpoint/2010/main" val="4234037872"/>
+      </p:ext>
+    </p:extLst>
+  </p:cSld>
+  <p:clrMapOvr>
+    <a:masterClrMapping/>
+  </p:clrMapOvr>
+</p:notes>
+</file>
+
+<file path=ppt/notesSlides/notesSlide10.xml><?xml version="1.0" encoding="utf-8"?>
+<p:notes xmlns:a="http://schemas.openxmlformats.org/drawingml/2006/main" xmlns:r="http://schemas.openxmlformats.org/officeDocument/2006/relationships" xmlns:p="http://schemas.openxmlformats.org/presentationml/2006/main">
+  <p:cSld>
+    <p:spTree>
+      <p:nvGrpSpPr>
+        <p:cNvPr id="1" name=""/>
+        <p:cNvGrpSpPr/>
+        <p:nvPr/>
+      </p:nvGrpSpPr>
+      <p:grpSpPr>
+        <a:xfrm>
+          <a:off x="0" y="0"/>
+          <a:ext cx="0" cy="0"/>
+          <a:chOff x="0" y="0"/>
+          <a:chExt cx="0" cy="0"/>
+        </a:xfrm>
+      </p:grpSpPr>
+      <p:sp>
+        <p:nvSpPr>
+          <p:cNvPr id="2" name="Segnaposto immagine diapositiva 1"/>
+          <p:cNvSpPr>
+            <a:spLocks noGrp="1" noRot="1" noChangeAspect="1"/>
+          </p:cNvSpPr>
+          <p:nvPr>
+            <p:ph type="sldImg"/>
+          </p:nvPr>
+        </p:nvSpPr>
+        <p:spPr/>
+      </p:sp>
+      <p:sp>
+        <p:nvSpPr>
+          <p:cNvPr id="3" name="Segnaposto note 2"/>
+          <p:cNvSpPr>
+            <a:spLocks noGrp="1"/>
+          </p:cNvSpPr>
+          <p:nvPr>
+            <p:ph type="body" idx="1"/>
+          </p:nvPr>
+        </p:nvSpPr>
+        <p:spPr/>
+        <p:txBody>
+          <a:bodyPr/>
+          <a:lstStyle/>
+          <a:p>
+            <a:r>
+              <a:rPr lang="it-IT" dirty="0" err="1"/>
+              <a:t>Applying</a:t>
+            </a:r>
+            <a:r>
+              <a:rPr lang="it-IT" dirty="0"/>
+              <a:t> this </a:t>
+            </a:r>
+            <a:r>
+              <a:rPr lang="it-IT" dirty="0" err="1"/>
+              <a:t>torsion</a:t>
+            </a:r>
+            <a:r>
+              <a:rPr lang="it-IT" dirty="0"/>
+              <a:t> </a:t>
+            </a:r>
+            <a:r>
+              <a:rPr lang="it-IT" dirty="0" err="1"/>
+              <a:t>correction</a:t>
+            </a:r>
+            <a:r>
+              <a:rPr lang="it-IT" dirty="0"/>
+              <a:t> </a:t>
+            </a:r>
+            <a:r>
+              <a:rPr lang="it-IT" dirty="0" err="1"/>
+              <a:t>significantly</a:t>
+            </a:r>
+            <a:r>
+              <a:rPr lang="it-IT" dirty="0"/>
+              <a:t> </a:t>
+            </a:r>
+            <a:r>
+              <a:rPr lang="it-IT" dirty="0" err="1"/>
+              <a:t>improves</a:t>
+            </a:r>
+            <a:r>
+              <a:rPr lang="it-IT" dirty="0"/>
+              <a:t> </a:t>
+            </a:r>
+            <a:r>
+              <a:rPr lang="it-IT" dirty="0" err="1"/>
+              <a:t>our</a:t>
+            </a:r>
+            <a:r>
+              <a:rPr lang="it-IT" dirty="0"/>
+              <a:t> </a:t>
+            </a:r>
+            <a:r>
+              <a:rPr lang="it-IT" dirty="0" err="1"/>
+              <a:t>analysis</a:t>
+            </a:r>
+            <a:r>
+              <a:rPr lang="it-IT" dirty="0"/>
+              <a:t>. </a:t>
+            </a:r>
+            <a:r>
+              <a:rPr lang="it-IT" dirty="0" err="1"/>
+              <a:t>When</a:t>
+            </a:r>
+            <a:r>
+              <a:rPr lang="it-IT" dirty="0"/>
+              <a:t> we plot the </a:t>
+            </a:r>
+            <a:r>
+              <a:rPr lang="it-IT" dirty="0" err="1"/>
+              <a:t>crystal</a:t>
+            </a:r>
+            <a:r>
+              <a:rPr lang="it-IT" dirty="0"/>
+              <a:t> </a:t>
+            </a:r>
+            <a:r>
+              <a:rPr lang="it-IT" dirty="0" err="1"/>
+              <a:t>efficiency</a:t>
+            </a:r>
+            <a:r>
+              <a:rPr lang="it-IT" dirty="0"/>
+              <a:t> </a:t>
+            </a:r>
+            <a:r>
+              <a:rPr lang="it-IT" dirty="0" err="1"/>
+              <a:t>as</a:t>
+            </a:r>
+            <a:r>
+              <a:rPr lang="it-IT" dirty="0"/>
+              <a:t> a function of the </a:t>
+            </a:r>
+            <a:r>
+              <a:rPr lang="it-IT" dirty="0" err="1"/>
+              <a:t>torsion-corrected</a:t>
+            </a:r>
+            <a:r>
+              <a:rPr lang="it-IT" dirty="0"/>
+              <a:t> incoming angle, the </a:t>
+            </a:r>
+            <a:r>
+              <a:rPr lang="it-IT" dirty="0" err="1"/>
+              <a:t>peak</a:t>
+            </a:r>
+            <a:r>
+              <a:rPr lang="it-IT" dirty="0"/>
+              <a:t> of this curve </a:t>
+            </a:r>
+            <a:r>
+              <a:rPr lang="it-IT" dirty="0" err="1"/>
+              <a:t>represents</a:t>
+            </a:r>
+            <a:r>
+              <a:rPr lang="it-IT" dirty="0"/>
+              <a:t> the </a:t>
+            </a:r>
+            <a:r>
+              <a:rPr lang="it-IT" dirty="0" err="1"/>
+              <a:t>efficiency</a:t>
+            </a:r>
+            <a:r>
+              <a:rPr lang="it-IT" dirty="0"/>
+              <a:t> of the </a:t>
+            </a:r>
+            <a:r>
+              <a:rPr lang="it-IT" dirty="0" err="1"/>
+              <a:t>crystal</a:t>
+            </a:r>
+            <a:r>
+              <a:rPr lang="it-IT" dirty="0"/>
+              <a:t> </a:t>
+            </a:r>
+            <a:r>
+              <a:rPr lang="it-IT" dirty="0" err="1"/>
+              <a:t>when</a:t>
+            </a:r>
+            <a:r>
+              <a:rPr lang="it-IT" dirty="0"/>
+              <a:t> it </a:t>
+            </a:r>
+            <a:r>
+              <a:rPr lang="it-IT" dirty="0" err="1"/>
+              <a:t>is</a:t>
+            </a:r>
+            <a:r>
+              <a:rPr lang="it-IT" dirty="0"/>
+              <a:t> </a:t>
+            </a:r>
+            <a:r>
+              <a:rPr lang="it-IT" dirty="0" err="1"/>
+              <a:t>perfectly</a:t>
+            </a:r>
+            <a:r>
+              <a:rPr lang="it-IT" dirty="0"/>
+              <a:t> </a:t>
+            </a:r>
+            <a:r>
+              <a:rPr lang="it-IT" dirty="0" err="1"/>
+              <a:t>aligned</a:t>
+            </a:r>
+            <a:r>
+              <a:rPr lang="it-IT" dirty="0"/>
+              <a:t> to the </a:t>
+            </a:r>
+            <a:r>
+              <a:rPr lang="it-IT" dirty="0" err="1"/>
+              <a:t>beam</a:t>
+            </a:r>
+            <a:r>
+              <a:rPr lang="it-IT" dirty="0"/>
+              <a:t>, </a:t>
+            </a:r>
+            <a:r>
+              <a:rPr lang="it-IT" dirty="0" err="1"/>
+              <a:t>which</a:t>
+            </a:r>
+            <a:r>
+              <a:rPr lang="it-IT" dirty="0"/>
+              <a:t> in this case </a:t>
+            </a:r>
+            <a:r>
+              <a:rPr lang="it-IT" dirty="0" err="1"/>
+              <a:t>reached</a:t>
+            </a:r>
+            <a:r>
+              <a:rPr lang="it-IT" dirty="0"/>
+              <a:t> 18.8%.</a:t>
+            </a:r>
+          </a:p>
+        </p:txBody>
+      </p:sp>
+      <p:sp>
+        <p:nvSpPr>
+          <p:cNvPr id="4" name="Segnaposto numero diapositiva 3"/>
+          <p:cNvSpPr>
+            <a:spLocks noGrp="1"/>
+          </p:cNvSpPr>
+          <p:nvPr>
+            <p:ph type="sldNum" sz="quarter" idx="5"/>
+          </p:nvPr>
+        </p:nvSpPr>
+        <p:spPr/>
+        <p:txBody>
+          <a:bodyPr/>
+          <a:lstStyle/>
+          <a:p>
+            <a:fld id="{C205392F-55BF-4B8E-AF01-45F81C88C286}" type="slidenum">
+              <a:rPr lang="it-IT" smtClean="0"/>
+              <a:t>14</a:t>
+            </a:fld>
+            <a:endParaRPr lang="it-IT"/>
+          </a:p>
+        </p:txBody>
+      </p:sp>
+    </p:spTree>
+    <p:extLst>
+      <p:ext uri="{BB962C8B-B14F-4D97-AF65-F5344CB8AC3E}">
+        <p14:creationId xmlns:p14="http://schemas.microsoft.com/office/powerpoint/2010/main" val="2834989851"/>
+      </p:ext>
+    </p:extLst>
+  </p:cSld>
+  <p:clrMapOvr>
+    <a:masterClrMapping/>
+  </p:clrMapOvr>
+</p:notes>
+</file>
+
+<file path=ppt/notesSlides/notesSlide11.xml><?xml version="1.0" encoding="utf-8"?>
+<p:notes xmlns:a="http://schemas.openxmlformats.org/drawingml/2006/main" xmlns:r="http://schemas.openxmlformats.org/officeDocument/2006/relationships" xmlns:p="http://schemas.openxmlformats.org/presentationml/2006/main">
+  <p:cSld>
+    <p:spTree>
+      <p:nvGrpSpPr>
+        <p:cNvPr id="1" name=""/>
+        <p:cNvGrpSpPr/>
+        <p:nvPr/>
+      </p:nvGrpSpPr>
+      <p:grpSpPr>
+        <a:xfrm>
+          <a:off x="0" y="0"/>
+          <a:ext cx="0" cy="0"/>
+          <a:chOff x="0" y="0"/>
+          <a:chExt cx="0" cy="0"/>
+        </a:xfrm>
+      </p:grpSpPr>
+      <p:sp>
+        <p:nvSpPr>
+          <p:cNvPr id="2" name="Segnaposto immagine diapositiva 1"/>
+          <p:cNvSpPr>
+            <a:spLocks noGrp="1" noRot="1" noChangeAspect="1"/>
+          </p:cNvSpPr>
+          <p:nvPr>
+            <p:ph type="sldImg"/>
+          </p:nvPr>
+        </p:nvSpPr>
+        <p:spPr/>
+      </p:sp>
+      <p:sp>
+        <p:nvSpPr>
+          <p:cNvPr id="3" name="Segnaposto note 2"/>
+          <p:cNvSpPr>
+            <a:spLocks noGrp="1"/>
+          </p:cNvSpPr>
+          <p:nvPr>
+            <p:ph type="body" idx="1"/>
+          </p:nvPr>
+        </p:nvSpPr>
+        <p:spPr/>
+        <p:txBody>
+          <a:bodyPr/>
+          <a:lstStyle/>
+          <a:p>
+            <a:r>
+              <a:rPr lang="it-IT" dirty="0"/>
+              <a:t>By fitting </a:t>
+            </a:r>
+            <a:r>
+              <a:rPr lang="it-IT" dirty="0" err="1"/>
+              <a:t>only</a:t>
+            </a:r>
+            <a:r>
+              <a:rPr lang="it-IT" dirty="0"/>
+              <a:t> the right side of the </a:t>
+            </a:r>
+            <a:r>
+              <a:rPr lang="it-IT" dirty="0" err="1"/>
+              <a:t>peak</a:t>
+            </a:r>
+            <a:r>
+              <a:rPr lang="it-IT" dirty="0"/>
+              <a:t>, we </a:t>
+            </a:r>
+            <a:r>
+              <a:rPr lang="it-IT" dirty="0" err="1"/>
+              <a:t>ensured</a:t>
+            </a:r>
+            <a:r>
+              <a:rPr lang="it-IT" dirty="0"/>
+              <a:t> the </a:t>
+            </a:r>
+            <a:r>
+              <a:rPr lang="it-IT" dirty="0" err="1"/>
+              <a:t>cleanest</a:t>
+            </a:r>
+            <a:r>
+              <a:rPr lang="it-IT" dirty="0"/>
+              <a:t> </a:t>
+            </a:r>
+            <a:r>
+              <a:rPr lang="it-IT" dirty="0" err="1"/>
+              <a:t>possible</a:t>
+            </a:r>
+            <a:r>
+              <a:rPr lang="it-IT" dirty="0"/>
+              <a:t> </a:t>
+            </a:r>
+            <a:r>
+              <a:rPr lang="it-IT" dirty="0" err="1"/>
+              <a:t>measurement</a:t>
+            </a:r>
+            <a:r>
+              <a:rPr lang="it-IT" dirty="0"/>
+              <a:t> by </a:t>
+            </a:r>
+            <a:r>
+              <a:rPr lang="it-IT" dirty="0" err="1"/>
+              <a:t>excluding</a:t>
+            </a:r>
+            <a:r>
+              <a:rPr lang="it-IT" dirty="0"/>
+              <a:t> </a:t>
+            </a:r>
+            <a:r>
+              <a:rPr lang="it-IT" dirty="0" err="1"/>
+              <a:t>any</a:t>
+            </a:r>
+            <a:r>
+              <a:rPr lang="it-IT" dirty="0"/>
+              <a:t> </a:t>
+            </a:r>
+            <a:r>
+              <a:rPr lang="it-IT" dirty="0" err="1"/>
+              <a:t>contribution</a:t>
+            </a:r>
+            <a:r>
+              <a:rPr lang="it-IT" dirty="0"/>
+              <a:t> from </a:t>
+            </a:r>
+            <a:r>
+              <a:rPr lang="it-IT" dirty="0" err="1"/>
+              <a:t>dechanneled</a:t>
+            </a:r>
+            <a:r>
+              <a:rPr lang="it-IT" dirty="0"/>
+              <a:t> </a:t>
+            </a:r>
+            <a:r>
+              <a:rPr lang="it-IT" dirty="0" err="1"/>
+              <a:t>particles</a:t>
+            </a:r>
+            <a:r>
+              <a:rPr lang="it-IT" dirty="0"/>
+              <a:t>.</a:t>
+            </a:r>
+          </a:p>
+        </p:txBody>
+      </p:sp>
+      <p:sp>
+        <p:nvSpPr>
+          <p:cNvPr id="4" name="Segnaposto numero diapositiva 3"/>
+          <p:cNvSpPr>
+            <a:spLocks noGrp="1"/>
+          </p:cNvSpPr>
+          <p:nvPr>
+            <p:ph type="sldNum" sz="quarter" idx="5"/>
+          </p:nvPr>
+        </p:nvSpPr>
+        <p:spPr/>
+        <p:txBody>
+          <a:bodyPr/>
+          <a:lstStyle/>
+          <a:p>
+            <a:fld id="{C205392F-55BF-4B8E-AF01-45F81C88C286}" type="slidenum">
+              <a:rPr lang="it-IT" smtClean="0"/>
+              <a:t>16</a:t>
+            </a:fld>
+            <a:endParaRPr lang="it-IT"/>
+          </a:p>
+        </p:txBody>
+      </p:sp>
+    </p:spTree>
+    <p:extLst>
+      <p:ext uri="{BB962C8B-B14F-4D97-AF65-F5344CB8AC3E}">
+        <p14:creationId xmlns:p14="http://schemas.microsoft.com/office/powerpoint/2010/main" val="3031551864"/>
+      </p:ext>
+    </p:extLst>
+  </p:cSld>
+  <p:clrMapOvr>
+    <a:masterClrMapping/>
+  </p:clrMapOvr>
+</p:notes>
+</file>
+
+<file path=ppt/notesSlides/notesSlide12.xml><?xml version="1.0" encoding="utf-8"?>
+<p:notes xmlns:a="http://schemas.openxmlformats.org/drawingml/2006/main" xmlns:r="http://schemas.openxmlformats.org/officeDocument/2006/relationships" xmlns:p="http://schemas.openxmlformats.org/presentationml/2006/main">
+  <p:cSld>
+    <p:spTree>
+      <p:nvGrpSpPr>
+        <p:cNvPr id="1" name=""/>
+        <p:cNvGrpSpPr/>
+        <p:nvPr/>
+      </p:nvGrpSpPr>
+      <p:grpSpPr>
+        <a:xfrm>
+          <a:off x="0" y="0"/>
+          <a:ext cx="0" cy="0"/>
+          <a:chOff x="0" y="0"/>
+          <a:chExt cx="0" cy="0"/>
+        </a:xfrm>
+      </p:grpSpPr>
+      <p:sp>
+        <p:nvSpPr>
+          <p:cNvPr id="2" name="Segnaposto immagine diapositiva 1"/>
+          <p:cNvSpPr>
+            <a:spLocks noGrp="1" noRot="1" noChangeAspect="1"/>
+          </p:cNvSpPr>
+          <p:nvPr>
+            <p:ph type="sldImg"/>
+          </p:nvPr>
+        </p:nvSpPr>
+        <p:spPr/>
+      </p:sp>
+      <p:sp>
+        <p:nvSpPr>
+          <p:cNvPr id="3" name="Segnaposto note 2"/>
+          <p:cNvSpPr>
+            <a:spLocks noGrp="1"/>
+          </p:cNvSpPr>
+          <p:nvPr>
+            <p:ph type="body" idx="1"/>
+          </p:nvPr>
+        </p:nvSpPr>
+        <p:spPr/>
+        <p:txBody>
+          <a:bodyPr/>
+          <a:lstStyle/>
+          <a:p>
+            <a:r>
+              <a:rPr lang="it-IT" dirty="0"/>
+              <a:t>CONSISTENT ACROSS DIFFERENT RUNS FOR THE SAME CRYSTALS</a:t>
+            </a:r>
+          </a:p>
+        </p:txBody>
+      </p:sp>
+      <p:sp>
+        <p:nvSpPr>
+          <p:cNvPr id="4" name="Segnaposto numero diapositiva 3"/>
+          <p:cNvSpPr>
+            <a:spLocks noGrp="1"/>
+          </p:cNvSpPr>
+          <p:nvPr>
+            <p:ph type="sldNum" sz="quarter" idx="5"/>
+          </p:nvPr>
+        </p:nvSpPr>
+        <p:spPr/>
+        <p:txBody>
+          <a:bodyPr/>
+          <a:lstStyle/>
+          <a:p>
+            <a:fld id="{C205392F-55BF-4B8E-AF01-45F81C88C286}" type="slidenum">
+              <a:rPr lang="it-IT" smtClean="0"/>
+              <a:t>17</a:t>
+            </a:fld>
+            <a:endParaRPr lang="it-IT"/>
+          </a:p>
+        </p:txBody>
+      </p:sp>
+    </p:spTree>
+    <p:extLst>
+      <p:ext uri="{BB962C8B-B14F-4D97-AF65-F5344CB8AC3E}">
+        <p14:creationId xmlns:p14="http://schemas.microsoft.com/office/powerpoint/2010/main" val="290920570"/>
+      </p:ext>
+    </p:extLst>
+  </p:cSld>
+  <p:clrMapOvr>
+    <a:masterClrMapping/>
+  </p:clrMapOvr>
+</p:notes>
+</file>
+
+<file path=ppt/notesSlides/notesSlide13.xml><?xml version="1.0" encoding="utf-8"?>
+<p:notes xmlns:a="http://schemas.openxmlformats.org/drawingml/2006/main" xmlns:r="http://schemas.openxmlformats.org/officeDocument/2006/relationships" xmlns:p="http://schemas.openxmlformats.org/presentationml/2006/main">
+  <p:cSld>
+    <p:spTree>
+      <p:nvGrpSpPr>
+        <p:cNvPr id="1" name=""/>
+        <p:cNvGrpSpPr/>
+        <p:nvPr/>
+      </p:nvGrpSpPr>
+      <p:grpSpPr>
+        <a:xfrm>
+          <a:off x="0" y="0"/>
+          <a:ext cx="0" cy="0"/>
+          <a:chOff x="0" y="0"/>
+          <a:chExt cx="0" cy="0"/>
+        </a:xfrm>
+      </p:grpSpPr>
+      <p:sp>
+        <p:nvSpPr>
+          <p:cNvPr id="2" name="Segnaposto immagine diapositiva 1"/>
+          <p:cNvSpPr>
+            <a:spLocks noGrp="1" noRot="1" noChangeAspect="1"/>
+          </p:cNvSpPr>
+          <p:nvPr>
+            <p:ph type="sldImg"/>
+          </p:nvPr>
+        </p:nvSpPr>
+        <p:spPr/>
+      </p:sp>
+      <p:sp>
+        <p:nvSpPr>
+          <p:cNvPr id="3" name="Segnaposto note 2"/>
+          <p:cNvSpPr>
+            <a:spLocks noGrp="1"/>
+          </p:cNvSpPr>
+          <p:nvPr>
+            <p:ph type="body" idx="1"/>
+          </p:nvPr>
+        </p:nvSpPr>
+        <p:spPr/>
+        <p:txBody>
+          <a:bodyPr/>
+          <a:lstStyle/>
+          <a:p>
+            <a:r>
+              <a:rPr lang="it-IT" dirty="0"/>
+              <a:t>The second </a:t>
+            </a:r>
+            <a:r>
+              <a:rPr lang="it-IT" dirty="0" err="1"/>
+              <a:t>crystal</a:t>
+            </a:r>
+            <a:r>
+              <a:rPr lang="it-IT" dirty="0"/>
+              <a:t> </a:t>
+            </a:r>
+            <a:r>
+              <a:rPr lang="it-IT" dirty="0" err="1"/>
+              <a:t>exhibited</a:t>
+            </a:r>
+            <a:r>
+              <a:rPr lang="it-IT" dirty="0"/>
+              <a:t> a </a:t>
+            </a:r>
+            <a:r>
+              <a:rPr lang="it-IT" dirty="0" err="1"/>
+              <a:t>slightly</a:t>
+            </a:r>
+            <a:r>
+              <a:rPr lang="it-IT" dirty="0"/>
+              <a:t> </a:t>
+            </a:r>
+            <a:r>
+              <a:rPr lang="it-IT" dirty="0" err="1"/>
+              <a:t>lower</a:t>
+            </a:r>
+            <a:r>
+              <a:rPr lang="it-IT" dirty="0"/>
+              <a:t> </a:t>
+            </a:r>
+            <a:r>
+              <a:rPr lang="it-IT" dirty="0" err="1"/>
+              <a:t>torsion</a:t>
+            </a:r>
+            <a:r>
+              <a:rPr lang="it-IT" dirty="0"/>
+              <a:t> </a:t>
+            </a:r>
+            <a:r>
+              <a:rPr lang="it-IT" dirty="0" err="1"/>
+              <a:t>parameter</a:t>
+            </a:r>
+            <a:r>
+              <a:rPr lang="it-IT" dirty="0"/>
+              <a:t> of </a:t>
+            </a:r>
+            <a:r>
+              <a:rPr lang="it-IT" dirty="0" err="1"/>
+              <a:t>about</a:t>
+            </a:r>
+            <a:r>
+              <a:rPr lang="it-IT" dirty="0"/>
+              <a:t> 2.9 </a:t>
+            </a:r>
+            <a:r>
+              <a:rPr lang="it-IT" dirty="0" err="1"/>
+              <a:t>microradians</a:t>
+            </a:r>
+            <a:r>
+              <a:rPr lang="it-IT" dirty="0"/>
+              <a:t> per </a:t>
+            </a:r>
+            <a:r>
+              <a:rPr lang="it-IT" dirty="0" err="1"/>
+              <a:t>millimeter</a:t>
+            </a:r>
+            <a:r>
+              <a:rPr lang="it-IT" dirty="0"/>
+              <a:t>, </a:t>
+            </a:r>
+            <a:r>
+              <a:rPr lang="it-IT" dirty="0" err="1"/>
+              <a:t>yielding</a:t>
+            </a:r>
+            <a:r>
+              <a:rPr lang="it-IT" dirty="0"/>
+              <a:t> an </a:t>
+            </a:r>
+            <a:r>
+              <a:rPr lang="it-IT" dirty="0" err="1"/>
+              <a:t>efficiency</a:t>
+            </a:r>
+            <a:r>
+              <a:rPr lang="it-IT" dirty="0"/>
+              <a:t> of </a:t>
+            </a:r>
+            <a:r>
+              <a:rPr lang="it-IT" dirty="0" err="1"/>
+              <a:t>roughly</a:t>
+            </a:r>
+            <a:r>
+              <a:rPr lang="it-IT"/>
+              <a:t> 17.9%.</a:t>
+            </a:r>
+            <a:endParaRPr lang="it-IT" dirty="0"/>
+          </a:p>
+        </p:txBody>
+      </p:sp>
+      <p:sp>
+        <p:nvSpPr>
+          <p:cNvPr id="4" name="Segnaposto numero diapositiva 3"/>
+          <p:cNvSpPr>
+            <a:spLocks noGrp="1"/>
+          </p:cNvSpPr>
+          <p:nvPr>
+            <p:ph type="sldNum" sz="quarter" idx="5"/>
+          </p:nvPr>
+        </p:nvSpPr>
+        <p:spPr/>
+        <p:txBody>
+          <a:bodyPr/>
+          <a:lstStyle/>
+          <a:p>
+            <a:fld id="{C205392F-55BF-4B8E-AF01-45F81C88C286}" type="slidenum">
+              <a:rPr lang="it-IT" smtClean="0"/>
+              <a:t>18</a:t>
+            </a:fld>
+            <a:endParaRPr lang="it-IT"/>
+          </a:p>
+        </p:txBody>
+      </p:sp>
+    </p:spTree>
+    <p:extLst>
+      <p:ext uri="{BB962C8B-B14F-4D97-AF65-F5344CB8AC3E}">
+        <p14:creationId xmlns:p14="http://schemas.microsoft.com/office/powerpoint/2010/main" val="2038418374"/>
+      </p:ext>
+    </p:extLst>
+  </p:cSld>
+  <p:clrMapOvr>
+    <a:masterClrMapping/>
+  </p:clrMapOvr>
+</p:notes>
+</file>
+
+<file path=ppt/notesSlides/notesSlide2.xml><?xml version="1.0" encoding="utf-8"?>
+<p:notes xmlns:a="http://schemas.openxmlformats.org/drawingml/2006/main" xmlns:r="http://schemas.openxmlformats.org/officeDocument/2006/relationships" xmlns:p="http://schemas.openxmlformats.org/presentationml/2006/main">
+  <p:cSld>
+    <p:spTree>
+      <p:nvGrpSpPr>
+        <p:cNvPr id="1" name=""/>
+        <p:cNvGrpSpPr/>
+        <p:nvPr/>
+      </p:nvGrpSpPr>
+      <p:grpSpPr>
+        <a:xfrm>
+          <a:off x="0" y="0"/>
+          <a:ext cx="0" cy="0"/>
+          <a:chOff x="0" y="0"/>
+          <a:chExt cx="0" cy="0"/>
+        </a:xfrm>
+      </p:grpSpPr>
+      <p:sp>
+        <p:nvSpPr>
+          <p:cNvPr id="2" name="Segnaposto immagine diapositiva 1"/>
+          <p:cNvSpPr>
+            <a:spLocks noGrp="1" noRot="1" noChangeAspect="1"/>
+          </p:cNvSpPr>
+          <p:nvPr>
+            <p:ph type="sldImg"/>
+          </p:nvPr>
+        </p:nvSpPr>
+        <p:spPr/>
+      </p:sp>
+      <p:sp>
+        <p:nvSpPr>
+          <p:cNvPr id="3" name="Segnaposto note 2"/>
+          <p:cNvSpPr>
+            <a:spLocks noGrp="1"/>
+          </p:cNvSpPr>
+          <p:nvPr>
+            <p:ph type="body" idx="1"/>
+          </p:nvPr>
+        </p:nvSpPr>
+        <p:spPr/>
+        <p:txBody>
+          <a:bodyPr/>
+          <a:lstStyle/>
+          <a:p>
+            <a:r>
+              <a:rPr lang="it-IT" dirty="0" err="1"/>
+              <a:t>Before</a:t>
+            </a:r>
+            <a:r>
+              <a:rPr lang="it-IT" dirty="0"/>
+              <a:t> </a:t>
+            </a:r>
+            <a:r>
+              <a:rPr lang="it-IT" dirty="0" err="1"/>
+              <a:t>diving</a:t>
+            </a:r>
+            <a:r>
+              <a:rPr lang="it-IT" dirty="0"/>
+              <a:t> </a:t>
+            </a:r>
+            <a:r>
+              <a:rPr lang="it-IT" dirty="0" err="1"/>
+              <a:t>into</a:t>
+            </a:r>
+            <a:r>
+              <a:rPr lang="it-IT" dirty="0"/>
+              <a:t> the </a:t>
+            </a:r>
+            <a:r>
+              <a:rPr lang="it-IT" dirty="0" err="1"/>
+              <a:t>efficiency</a:t>
+            </a:r>
+            <a:r>
+              <a:rPr lang="it-IT" dirty="0"/>
+              <a:t> </a:t>
+            </a:r>
+            <a:r>
+              <a:rPr lang="it-IT" dirty="0" err="1"/>
+              <a:t>evaluation</a:t>
+            </a:r>
+            <a:r>
+              <a:rPr lang="it-IT" dirty="0"/>
+              <a:t>, we </a:t>
+            </a:r>
+            <a:r>
+              <a:rPr lang="it-IT" dirty="0" err="1"/>
+              <a:t>performed</a:t>
+            </a:r>
+            <a:r>
+              <a:rPr lang="it-IT" dirty="0"/>
+              <a:t> </a:t>
+            </a:r>
+            <a:r>
+              <a:rPr lang="it-IT" dirty="0" err="1"/>
+              <a:t>several</a:t>
+            </a:r>
+            <a:r>
+              <a:rPr lang="it-IT" dirty="0"/>
+              <a:t> </a:t>
+            </a:r>
+            <a:r>
+              <a:rPr lang="it-IT" dirty="0" err="1"/>
+              <a:t>preliminary</a:t>
+            </a:r>
+            <a:r>
+              <a:rPr lang="it-IT" dirty="0"/>
+              <a:t> </a:t>
+            </a:r>
+            <a:r>
+              <a:rPr lang="it-IT" dirty="0" err="1"/>
+              <a:t>analysis</a:t>
+            </a:r>
+            <a:r>
+              <a:rPr lang="it-IT" dirty="0"/>
+              <a:t> steps. </a:t>
+            </a:r>
+          </a:p>
+          <a:p>
+            <a:r>
+              <a:rPr lang="it-IT" dirty="0"/>
+              <a:t>Next, </a:t>
+            </a:r>
+            <a:r>
+              <a:rPr lang="it-IT" dirty="0" err="1"/>
+              <a:t>because</a:t>
+            </a:r>
+            <a:r>
+              <a:rPr lang="it-IT" dirty="0"/>
+              <a:t> the relative </a:t>
+            </a:r>
+            <a:r>
+              <a:rPr lang="it-IT" dirty="0" err="1"/>
+              <a:t>beam</a:t>
+            </a:r>
+            <a:r>
+              <a:rPr lang="it-IT" dirty="0"/>
+              <a:t> position was </a:t>
+            </a:r>
+            <a:r>
+              <a:rPr lang="it-IT" dirty="0" err="1"/>
+              <a:t>unknown</a:t>
+            </a:r>
+            <a:r>
+              <a:rPr lang="it-IT" dirty="0"/>
+              <a:t>, we </a:t>
+            </a:r>
+            <a:r>
+              <a:rPr lang="it-IT" dirty="0" err="1"/>
+              <a:t>had</a:t>
+            </a:r>
+            <a:r>
+              <a:rPr lang="it-IT" dirty="0"/>
+              <a:t> to </a:t>
+            </a:r>
+            <a:r>
+              <a:rPr lang="it-IT" dirty="0" err="1"/>
+              <a:t>algorithmically</a:t>
+            </a:r>
+            <a:r>
+              <a:rPr lang="it-IT" dirty="0"/>
+              <a:t> </a:t>
+            </a:r>
+            <a:r>
+              <a:rPr lang="it-IT" dirty="0" err="1"/>
+              <a:t>identify</a:t>
+            </a:r>
+            <a:r>
+              <a:rPr lang="it-IT" dirty="0"/>
+              <a:t> the </a:t>
+            </a:r>
+            <a:r>
+              <a:rPr lang="it-IT" dirty="0" err="1"/>
+              <a:t>physical</a:t>
+            </a:r>
+            <a:r>
+              <a:rPr lang="it-IT" dirty="0"/>
+              <a:t> </a:t>
+            </a:r>
+            <a:r>
+              <a:rPr lang="it-IT" dirty="0" err="1"/>
+              <a:t>edges</a:t>
+            </a:r>
+            <a:r>
+              <a:rPr lang="it-IT" dirty="0"/>
+              <a:t> of the </a:t>
+            </a:r>
+            <a:r>
+              <a:rPr lang="it-IT" dirty="0" err="1"/>
+              <a:t>crystal</a:t>
+            </a:r>
+            <a:r>
+              <a:rPr lang="it-IT" dirty="0"/>
+              <a:t> to validate </a:t>
+            </a:r>
+            <a:r>
+              <a:rPr lang="it-IT" dirty="0" err="1"/>
+              <a:t>which</a:t>
+            </a:r>
+            <a:r>
+              <a:rPr lang="it-IT" dirty="0"/>
+              <a:t> </a:t>
+            </a:r>
+            <a:r>
+              <a:rPr lang="it-IT" dirty="0" err="1"/>
+              <a:t>particles</a:t>
+            </a:r>
+            <a:r>
+              <a:rPr lang="it-IT" dirty="0"/>
+              <a:t> </a:t>
+            </a:r>
+            <a:r>
+              <a:rPr lang="it-IT" dirty="0" err="1"/>
+              <a:t>successfully</a:t>
+            </a:r>
+            <a:r>
+              <a:rPr lang="it-IT" dirty="0"/>
+              <a:t> </a:t>
+            </a:r>
+            <a:r>
+              <a:rPr lang="it-IT" dirty="0" err="1"/>
+              <a:t>entered</a:t>
+            </a:r>
+            <a:r>
+              <a:rPr lang="it-IT" dirty="0"/>
+              <a:t> it. </a:t>
+            </a:r>
+          </a:p>
+          <a:p>
+            <a:endParaRPr lang="it-IT" dirty="0"/>
+          </a:p>
+        </p:txBody>
+      </p:sp>
+      <p:sp>
+        <p:nvSpPr>
+          <p:cNvPr id="4" name="Segnaposto numero diapositiva 3"/>
+          <p:cNvSpPr>
+            <a:spLocks noGrp="1"/>
+          </p:cNvSpPr>
+          <p:nvPr>
+            <p:ph type="sldNum" sz="quarter" idx="5"/>
+          </p:nvPr>
+        </p:nvSpPr>
+        <p:spPr/>
+        <p:txBody>
+          <a:bodyPr/>
+          <a:lstStyle/>
+          <a:p>
+            <a:fld id="{C205392F-55BF-4B8E-AF01-45F81C88C286}" type="slidenum">
+              <a:rPr lang="it-IT" smtClean="0"/>
+              <a:t>3</a:t>
+            </a:fld>
+            <a:endParaRPr lang="it-IT"/>
+          </a:p>
+        </p:txBody>
+      </p:sp>
+    </p:spTree>
+    <p:extLst>
+      <p:ext uri="{BB962C8B-B14F-4D97-AF65-F5344CB8AC3E}">
+        <p14:creationId xmlns:p14="http://schemas.microsoft.com/office/powerpoint/2010/main" val="1419920756"/>
+      </p:ext>
+    </p:extLst>
+  </p:cSld>
+  <p:clrMapOvr>
+    <a:masterClrMapping/>
+  </p:clrMapOvr>
+</p:notes>
+</file>
+
+<file path=ppt/notesSlides/notesSlide3.xml><?xml version="1.0" encoding="utf-8"?>
+<p:notes xmlns:a="http://schemas.openxmlformats.org/drawingml/2006/main" xmlns:r="http://schemas.openxmlformats.org/officeDocument/2006/relationships" xmlns:p="http://schemas.openxmlformats.org/presentationml/2006/main">
+  <p:cSld>
+    <p:spTree>
+      <p:nvGrpSpPr>
+        <p:cNvPr id="1" name=""/>
+        <p:cNvGrpSpPr/>
+        <p:nvPr/>
+      </p:nvGrpSpPr>
+      <p:grpSpPr>
+        <a:xfrm>
+          <a:off x="0" y="0"/>
+          <a:ext cx="0" cy="0"/>
+          <a:chOff x="0" y="0"/>
+          <a:chExt cx="0" cy="0"/>
+        </a:xfrm>
+      </p:grpSpPr>
+      <p:sp>
+        <p:nvSpPr>
+          <p:cNvPr id="2" name="Segnaposto immagine diapositiva 1"/>
+          <p:cNvSpPr>
+            <a:spLocks noGrp="1" noRot="1" noChangeAspect="1"/>
+          </p:cNvSpPr>
+          <p:nvPr>
+            <p:ph type="sldImg"/>
+          </p:nvPr>
+        </p:nvSpPr>
+        <p:spPr/>
+      </p:sp>
+      <p:sp>
+        <p:nvSpPr>
+          <p:cNvPr id="3" name="Segnaposto note 2"/>
+          <p:cNvSpPr>
+            <a:spLocks noGrp="1"/>
+          </p:cNvSpPr>
+          <p:nvPr>
+            <p:ph type="body" idx="1"/>
+          </p:nvPr>
+        </p:nvSpPr>
+        <p:spPr/>
+        <p:txBody>
+          <a:bodyPr/>
+          <a:lstStyle/>
+          <a:p>
+            <a:r>
+              <a:rPr lang="it-IT" dirty="0"/>
+              <a:t>To </a:t>
+            </a:r>
+            <a:r>
+              <a:rPr lang="it-IT" dirty="0" err="1"/>
+              <a:t>define</a:t>
+            </a:r>
+            <a:r>
+              <a:rPr lang="it-IT" dirty="0"/>
+              <a:t> the position of the </a:t>
+            </a:r>
+            <a:r>
+              <a:rPr lang="it-IT" dirty="0" err="1"/>
+              <a:t>crystal</a:t>
+            </a:r>
+            <a:r>
+              <a:rPr lang="it-IT" dirty="0"/>
+              <a:t> with </a:t>
+            </a:r>
+            <a:r>
+              <a:rPr lang="it-IT" dirty="0" err="1"/>
+              <a:t>respect</a:t>
+            </a:r>
+            <a:r>
+              <a:rPr lang="it-IT" dirty="0"/>
+              <a:t> to the </a:t>
+            </a:r>
+            <a:r>
+              <a:rPr lang="it-IT" dirty="0" err="1"/>
+              <a:t>beam</a:t>
+            </a:r>
+            <a:r>
+              <a:rPr lang="it-IT" dirty="0"/>
+              <a:t>, we </a:t>
+            </a:r>
+            <a:r>
+              <a:rPr lang="it-IT" dirty="0" err="1"/>
+              <a:t>looked</a:t>
+            </a:r>
+            <a:r>
+              <a:rPr lang="it-IT" dirty="0"/>
+              <a:t> </a:t>
+            </a:r>
+            <a:r>
+              <a:rPr lang="it-IT" dirty="0" err="1"/>
+              <a:t>specifically</a:t>
+            </a:r>
+            <a:r>
+              <a:rPr lang="it-IT" dirty="0"/>
+              <a:t> </a:t>
+            </a:r>
+            <a:r>
+              <a:rPr lang="it-IT" dirty="0" err="1"/>
+              <a:t>at</a:t>
+            </a:r>
+            <a:r>
+              <a:rPr lang="it-IT" dirty="0"/>
+              <a:t> </a:t>
+            </a:r>
+            <a:r>
+              <a:rPr lang="it-IT" dirty="0" err="1"/>
+              <a:t>channeled</a:t>
+            </a:r>
+            <a:r>
+              <a:rPr lang="it-IT" dirty="0"/>
+              <a:t> </a:t>
+            </a:r>
+            <a:r>
+              <a:rPr lang="it-IT" dirty="0" err="1"/>
+              <a:t>particles</a:t>
+            </a:r>
+            <a:r>
+              <a:rPr lang="it-IT" dirty="0"/>
+              <a:t>.</a:t>
+            </a:r>
+          </a:p>
+          <a:p>
+            <a:r>
+              <a:rPr lang="it-IT" dirty="0"/>
+              <a:t>The impact points of </a:t>
+            </a:r>
+            <a:r>
+              <a:rPr lang="it-IT" dirty="0" err="1"/>
+              <a:t>these</a:t>
+            </a:r>
+            <a:r>
+              <a:rPr lang="it-IT" dirty="0"/>
+              <a:t> </a:t>
+            </a:r>
+            <a:r>
+              <a:rPr lang="it-IT" dirty="0" err="1"/>
+              <a:t>particles</a:t>
+            </a:r>
+            <a:r>
+              <a:rPr lang="it-IT" dirty="0"/>
+              <a:t> </a:t>
+            </a:r>
+            <a:r>
+              <a:rPr lang="it-IT" dirty="0" err="1"/>
+              <a:t>revealed</a:t>
+            </a:r>
+            <a:r>
+              <a:rPr lang="it-IT" dirty="0"/>
+              <a:t> the </a:t>
+            </a:r>
+            <a:r>
+              <a:rPr lang="it-IT" dirty="0" err="1"/>
+              <a:t>physical</a:t>
+            </a:r>
+            <a:r>
+              <a:rPr lang="it-IT" dirty="0"/>
+              <a:t> location of the </a:t>
+            </a:r>
+            <a:r>
+              <a:rPr lang="it-IT" dirty="0" err="1"/>
+              <a:t>crystal</a:t>
+            </a:r>
+            <a:r>
+              <a:rPr lang="it-IT" dirty="0"/>
+              <a:t>, matching </a:t>
+            </a:r>
+            <a:r>
+              <a:rPr lang="it-IT" dirty="0" err="1"/>
+              <a:t>its</a:t>
+            </a:r>
+            <a:r>
+              <a:rPr lang="it-IT" dirty="0"/>
+              <a:t> </a:t>
+            </a:r>
+            <a:r>
+              <a:rPr lang="it-IT" dirty="0" err="1"/>
+              <a:t>expected</a:t>
+            </a:r>
+            <a:r>
+              <a:rPr lang="it-IT" dirty="0"/>
+              <a:t> </a:t>
+            </a:r>
+            <a:r>
+              <a:rPr lang="it-IT" dirty="0" err="1"/>
+              <a:t>dimensions</a:t>
+            </a:r>
+            <a:r>
+              <a:rPr lang="it-IT" dirty="0"/>
+              <a:t> of 2 by 8 </a:t>
+            </a:r>
+            <a:r>
+              <a:rPr lang="it-IT" dirty="0" err="1"/>
+              <a:t>millimeters</a:t>
+            </a:r>
+            <a:endParaRPr lang="it-IT" dirty="0"/>
+          </a:p>
+        </p:txBody>
+      </p:sp>
+      <p:sp>
+        <p:nvSpPr>
+          <p:cNvPr id="4" name="Segnaposto numero diapositiva 3"/>
+          <p:cNvSpPr>
+            <a:spLocks noGrp="1"/>
+          </p:cNvSpPr>
+          <p:nvPr>
+            <p:ph type="sldNum" sz="quarter" idx="5"/>
+          </p:nvPr>
+        </p:nvSpPr>
+        <p:spPr/>
+        <p:txBody>
+          <a:bodyPr/>
+          <a:lstStyle/>
+          <a:p>
+            <a:fld id="{C205392F-55BF-4B8E-AF01-45F81C88C286}" type="slidenum">
+              <a:rPr lang="it-IT" smtClean="0"/>
+              <a:t>4</a:t>
+            </a:fld>
+            <a:endParaRPr lang="it-IT"/>
+          </a:p>
+        </p:txBody>
+      </p:sp>
+    </p:spTree>
+    <p:extLst>
+      <p:ext uri="{BB962C8B-B14F-4D97-AF65-F5344CB8AC3E}">
+        <p14:creationId xmlns:p14="http://schemas.microsoft.com/office/powerpoint/2010/main" val="2511211759"/>
+      </p:ext>
+    </p:extLst>
+  </p:cSld>
+  <p:clrMapOvr>
+    <a:masterClrMapping/>
+  </p:clrMapOvr>
+</p:notes>
+</file>
+
+<file path=ppt/notesSlides/notesSlide4.xml><?xml version="1.0" encoding="utf-8"?>
+<p:notes xmlns:a="http://schemas.openxmlformats.org/drawingml/2006/main" xmlns:r="http://schemas.openxmlformats.org/officeDocument/2006/relationships" xmlns:p="http://schemas.openxmlformats.org/presentationml/2006/main">
+  <p:cSld>
+    <p:spTree>
+      <p:nvGrpSpPr>
+        <p:cNvPr id="1" name=""/>
+        <p:cNvGrpSpPr/>
+        <p:nvPr/>
+      </p:nvGrpSpPr>
+      <p:grpSpPr>
+        <a:xfrm>
+          <a:off x="0" y="0"/>
+          <a:ext cx="0" cy="0"/>
+          <a:chOff x="0" y="0"/>
+          <a:chExt cx="0" cy="0"/>
+        </a:xfrm>
+      </p:grpSpPr>
+      <p:sp>
+        <p:nvSpPr>
+          <p:cNvPr id="2" name="Segnaposto immagine diapositiva 1"/>
+          <p:cNvSpPr>
+            <a:spLocks noGrp="1" noRot="1" noChangeAspect="1"/>
+          </p:cNvSpPr>
+          <p:nvPr>
+            <p:ph type="sldImg"/>
+          </p:nvPr>
+        </p:nvSpPr>
+        <p:spPr/>
+      </p:sp>
+      <p:sp>
+        <p:nvSpPr>
+          <p:cNvPr id="3" name="Segnaposto note 2"/>
+          <p:cNvSpPr>
+            <a:spLocks noGrp="1"/>
+          </p:cNvSpPr>
+          <p:nvPr>
+            <p:ph type="body" idx="1"/>
+          </p:nvPr>
+        </p:nvSpPr>
+        <p:spPr/>
+        <p:txBody>
+          <a:bodyPr/>
+          <a:lstStyle/>
+          <a:p>
+            <a:r>
+              <a:rPr lang="it-IT" dirty="0" err="1"/>
+              <a:t>As</a:t>
+            </a:r>
+            <a:r>
+              <a:rPr lang="it-IT" dirty="0"/>
+              <a:t> </a:t>
+            </a:r>
+            <a:r>
+              <a:rPr lang="it-IT" dirty="0" err="1"/>
+              <a:t>you</a:t>
+            </a:r>
+            <a:r>
+              <a:rPr lang="it-IT" dirty="0"/>
+              <a:t> can </a:t>
+            </a:r>
+            <a:r>
+              <a:rPr lang="it-IT" dirty="0" err="1"/>
+              <a:t>see</a:t>
+            </a:r>
+            <a:r>
+              <a:rPr lang="it-IT" dirty="0"/>
+              <a:t>, the </a:t>
+            </a:r>
+            <a:r>
+              <a:rPr lang="it-IT" dirty="0" err="1"/>
+              <a:t>deviation</a:t>
+            </a:r>
+            <a:r>
+              <a:rPr lang="it-IT" dirty="0"/>
+              <a:t> </a:t>
+            </a:r>
+            <a:r>
+              <a:rPr lang="it-IT" dirty="0" err="1"/>
+              <a:t>is</a:t>
+            </a:r>
+            <a:r>
+              <a:rPr lang="it-IT" dirty="0"/>
+              <a:t> </a:t>
+            </a:r>
+            <a:r>
+              <a:rPr lang="it-IT" dirty="0" err="1"/>
+              <a:t>essentially</a:t>
+            </a:r>
+            <a:r>
+              <a:rPr lang="it-IT" dirty="0"/>
+              <a:t> zero—with an x-offset of 0.003 </a:t>
+            </a:r>
+            <a:r>
+              <a:rPr lang="it-IT" dirty="0" err="1"/>
+              <a:t>millimeters</a:t>
+            </a:r>
+            <a:r>
+              <a:rPr lang="it-IT" dirty="0"/>
+              <a:t> and a y-offset of 0.004 </a:t>
+            </a:r>
+            <a:r>
+              <a:rPr lang="it-IT" dirty="0" err="1"/>
+              <a:t>millimeters</a:t>
+            </a:r>
+            <a:r>
+              <a:rPr lang="it-IT" dirty="0"/>
+              <a:t>, </a:t>
+            </a:r>
+            <a:r>
+              <a:rPr lang="it-IT" dirty="0" err="1"/>
+              <a:t>both</a:t>
+            </a:r>
+            <a:r>
+              <a:rPr lang="it-IT" dirty="0"/>
+              <a:t> </a:t>
+            </a:r>
+            <a:r>
+              <a:rPr lang="it-IT" dirty="0" err="1"/>
+              <a:t>showing</a:t>
+            </a:r>
+            <a:r>
+              <a:rPr lang="it-IT" dirty="0"/>
+              <a:t> a </a:t>
+            </a:r>
+            <a:r>
+              <a:rPr lang="it-IT" dirty="0" err="1"/>
+              <a:t>skewness</a:t>
+            </a:r>
+            <a:r>
+              <a:rPr lang="it-IT" dirty="0"/>
+              <a:t> </a:t>
+            </a:r>
+            <a:r>
+              <a:rPr lang="it-IT" dirty="0" err="1"/>
+              <a:t>near</a:t>
+            </a:r>
+            <a:r>
+              <a:rPr lang="it-IT" dirty="0"/>
+              <a:t> zero.</a:t>
+            </a:r>
+          </a:p>
+        </p:txBody>
+      </p:sp>
+      <p:sp>
+        <p:nvSpPr>
+          <p:cNvPr id="4" name="Segnaposto numero diapositiva 3"/>
+          <p:cNvSpPr>
+            <a:spLocks noGrp="1"/>
+          </p:cNvSpPr>
+          <p:nvPr>
+            <p:ph type="sldNum" sz="quarter" idx="5"/>
+          </p:nvPr>
+        </p:nvSpPr>
+        <p:spPr/>
+        <p:txBody>
+          <a:bodyPr/>
+          <a:lstStyle/>
+          <a:p>
+            <a:fld id="{C205392F-55BF-4B8E-AF01-45F81C88C286}" type="slidenum">
+              <a:rPr lang="it-IT" smtClean="0"/>
+              <a:t>7</a:t>
+            </a:fld>
+            <a:endParaRPr lang="it-IT"/>
+          </a:p>
+        </p:txBody>
+      </p:sp>
+    </p:spTree>
+    <p:extLst>
+      <p:ext uri="{BB962C8B-B14F-4D97-AF65-F5344CB8AC3E}">
+        <p14:creationId xmlns:p14="http://schemas.microsoft.com/office/powerpoint/2010/main" val="1180237070"/>
+      </p:ext>
+    </p:extLst>
+  </p:cSld>
+  <p:clrMapOvr>
+    <a:masterClrMapping/>
+  </p:clrMapOvr>
+</p:notes>
+</file>
+
+<file path=ppt/notesSlides/notesSlide5.xml><?xml version="1.0" encoding="utf-8"?>
+<p:notes xmlns:a="http://schemas.openxmlformats.org/drawingml/2006/main" xmlns:r="http://schemas.openxmlformats.org/officeDocument/2006/relationships" xmlns:p="http://schemas.openxmlformats.org/presentationml/2006/main">
+  <p:cSld>
+    <p:spTree>
+      <p:nvGrpSpPr>
+        <p:cNvPr id="1" name=""/>
+        <p:cNvGrpSpPr/>
+        <p:nvPr/>
+      </p:nvGrpSpPr>
+      <p:grpSpPr>
+        <a:xfrm>
+          <a:off x="0" y="0"/>
+          <a:ext cx="0" cy="0"/>
+          <a:chOff x="0" y="0"/>
+          <a:chExt cx="0" cy="0"/>
+        </a:xfrm>
+      </p:grpSpPr>
+      <p:sp>
+        <p:nvSpPr>
+          <p:cNvPr id="2" name="Segnaposto immagine diapositiva 1"/>
+          <p:cNvSpPr>
+            <a:spLocks noGrp="1" noRot="1" noChangeAspect="1"/>
+          </p:cNvSpPr>
+          <p:nvPr>
+            <p:ph type="sldImg"/>
+          </p:nvPr>
+        </p:nvSpPr>
+        <p:spPr/>
+      </p:sp>
+      <p:sp>
+        <p:nvSpPr>
+          <p:cNvPr id="3" name="Segnaposto note 2"/>
+          <p:cNvSpPr>
+            <a:spLocks noGrp="1"/>
+          </p:cNvSpPr>
+          <p:nvPr>
+            <p:ph type="body" idx="1"/>
+          </p:nvPr>
+        </p:nvSpPr>
+        <p:spPr/>
+        <p:txBody>
+          <a:bodyPr/>
+          <a:lstStyle/>
+          <a:p>
+            <a:r>
+              <a:rPr lang="it-IT" dirty="0"/>
+              <a:t>A </a:t>
+            </a:r>
+            <a:r>
+              <a:rPr lang="it-IT" dirty="0" err="1"/>
+              <a:t>crucial</a:t>
+            </a:r>
+            <a:r>
+              <a:rPr lang="it-IT" dirty="0"/>
+              <a:t> part of this </a:t>
+            </a:r>
+            <a:r>
+              <a:rPr lang="it-IT" dirty="0" err="1"/>
+              <a:t>analysis</a:t>
+            </a:r>
+            <a:r>
+              <a:rPr lang="it-IT" dirty="0"/>
+              <a:t> </a:t>
+            </a:r>
+            <a:r>
+              <a:rPr lang="it-IT" dirty="0" err="1"/>
+              <a:t>is</a:t>
+            </a:r>
+            <a:r>
+              <a:rPr lang="it-IT" dirty="0"/>
+              <a:t> the angle </a:t>
+            </a:r>
+            <a:r>
+              <a:rPr lang="it-IT" dirty="0" err="1"/>
+              <a:t>correction</a:t>
+            </a:r>
+            <a:r>
+              <a:rPr lang="it-IT" dirty="0"/>
+              <a:t>. In long </a:t>
+            </a:r>
+            <a:r>
+              <a:rPr lang="it-IT" dirty="0" err="1"/>
+              <a:t>crystals</a:t>
+            </a:r>
+            <a:r>
+              <a:rPr lang="it-IT" dirty="0"/>
+              <a:t> </a:t>
+            </a:r>
+            <a:r>
+              <a:rPr lang="it-IT" dirty="0" err="1"/>
+              <a:t>structural</a:t>
+            </a:r>
+            <a:r>
+              <a:rPr lang="it-IT" dirty="0"/>
+              <a:t> </a:t>
+            </a:r>
+            <a:r>
+              <a:rPr lang="it-IT" dirty="0" err="1"/>
+              <a:t>torsion</a:t>
+            </a:r>
+            <a:r>
+              <a:rPr lang="it-IT" dirty="0"/>
+              <a:t> </a:t>
+            </a:r>
+            <a:r>
+              <a:rPr lang="it-IT" dirty="0" err="1"/>
+              <a:t>is</a:t>
+            </a:r>
+            <a:r>
+              <a:rPr lang="it-IT" dirty="0"/>
+              <a:t> non-</a:t>
+            </a:r>
+            <a:r>
+              <a:rPr lang="it-IT" dirty="0" err="1"/>
+              <a:t>negligible</a:t>
+            </a:r>
+            <a:r>
+              <a:rPr lang="it-IT" dirty="0"/>
+              <a:t> and must be </a:t>
+            </a:r>
+            <a:r>
+              <a:rPr lang="it-IT" dirty="0" err="1"/>
+              <a:t>incorporated</a:t>
+            </a:r>
+            <a:r>
+              <a:rPr lang="it-IT" dirty="0"/>
+              <a:t>. The </a:t>
+            </a:r>
+            <a:r>
+              <a:rPr lang="it-IT" dirty="0" err="1"/>
+              <a:t>varying</a:t>
+            </a:r>
+            <a:r>
+              <a:rPr lang="it-IT" dirty="0"/>
+              <a:t> </a:t>
+            </a:r>
+            <a:r>
+              <a:rPr lang="it-IT" dirty="0" err="1"/>
+              <a:t>orientations</a:t>
+            </a:r>
+            <a:r>
+              <a:rPr lang="it-IT" dirty="0"/>
+              <a:t> of the </a:t>
+            </a:r>
+            <a:r>
+              <a:rPr lang="it-IT" dirty="0" err="1"/>
+              <a:t>crystallographic</a:t>
+            </a:r>
+            <a:r>
+              <a:rPr lang="it-IT" dirty="0"/>
+              <a:t> </a:t>
+            </a:r>
+            <a:r>
+              <a:rPr lang="it-IT" dirty="0" err="1"/>
+              <a:t>planes</a:t>
+            </a:r>
+            <a:r>
+              <a:rPr lang="it-IT" dirty="0"/>
+              <a:t> </a:t>
+            </a:r>
+            <a:r>
+              <a:rPr lang="it-IT" dirty="0" err="1"/>
+              <a:t>along</a:t>
+            </a:r>
+            <a:r>
+              <a:rPr lang="it-IT" dirty="0"/>
+              <a:t> the front </a:t>
+            </a:r>
+            <a:r>
+              <a:rPr lang="it-IT" dirty="0" err="1"/>
+              <a:t>surface</a:t>
+            </a:r>
+            <a:r>
+              <a:rPr lang="it-IT" dirty="0"/>
+              <a:t> </a:t>
+            </a:r>
+            <a:r>
+              <a:rPr lang="it-IT" dirty="0" err="1"/>
+              <a:t>influence</a:t>
+            </a:r>
+            <a:r>
+              <a:rPr lang="it-IT" dirty="0"/>
+              <a:t> the </a:t>
+            </a:r>
+            <a:r>
+              <a:rPr lang="it-IT" dirty="0" err="1"/>
+              <a:t>angular</a:t>
+            </a:r>
+            <a:r>
+              <a:rPr lang="it-IT" dirty="0"/>
+              <a:t> range in </a:t>
+            </a:r>
+            <a:r>
+              <a:rPr lang="it-IT" dirty="0" err="1"/>
+              <a:t>which</a:t>
+            </a:r>
+            <a:r>
+              <a:rPr lang="it-IT" dirty="0"/>
+              <a:t> </a:t>
+            </a:r>
+            <a:r>
+              <a:rPr lang="it-IT" dirty="0" err="1"/>
+              <a:t>particles</a:t>
+            </a:r>
+            <a:r>
+              <a:rPr lang="it-IT" dirty="0"/>
+              <a:t> can be </a:t>
+            </a:r>
+            <a:r>
+              <a:rPr lang="it-IT" dirty="0" err="1"/>
+              <a:t>channeled</a:t>
+            </a:r>
+            <a:r>
+              <a:rPr lang="it-IT" dirty="0"/>
+              <a:t>. To </a:t>
+            </a:r>
+            <a:r>
+              <a:rPr lang="it-IT" dirty="0" err="1"/>
+              <a:t>correct</a:t>
+            </a:r>
+            <a:r>
+              <a:rPr lang="it-IT" dirty="0"/>
+              <a:t> this, we </a:t>
+            </a:r>
+            <a:r>
+              <a:rPr lang="it-IT" dirty="0" err="1"/>
+              <a:t>couldn't</a:t>
+            </a:r>
+            <a:r>
+              <a:rPr lang="it-IT" dirty="0"/>
+              <a:t> just </a:t>
+            </a:r>
+            <a:r>
+              <a:rPr lang="it-IT" dirty="0" err="1"/>
+              <a:t>apply</a:t>
+            </a:r>
+            <a:r>
+              <a:rPr lang="it-IT" dirty="0"/>
+              <a:t> a single </a:t>
+            </a:r>
+            <a:r>
+              <a:rPr lang="it-IT" dirty="0" err="1"/>
+              <a:t>angular</a:t>
+            </a:r>
+            <a:r>
+              <a:rPr lang="it-IT" dirty="0"/>
+              <a:t> shift </a:t>
+            </a:r>
+            <a:r>
+              <a:rPr lang="it-IT" dirty="0" err="1"/>
+              <a:t>parameter</a:t>
+            </a:r>
+            <a:r>
+              <a:rPr lang="it-IT" dirty="0"/>
+              <a:t>, theta-zero. </a:t>
+            </a:r>
+            <a:r>
+              <a:rPr lang="it-IT" dirty="0" err="1"/>
+              <a:t>Instead</a:t>
+            </a:r>
+            <a:r>
+              <a:rPr lang="it-IT" dirty="0"/>
+              <a:t>, we </a:t>
+            </a:r>
+            <a:r>
+              <a:rPr lang="it-IT" dirty="0" err="1"/>
+              <a:t>performed</a:t>
+            </a:r>
+            <a:r>
+              <a:rPr lang="it-IT" dirty="0"/>
+              <a:t> a </a:t>
+            </a:r>
+            <a:r>
+              <a:rPr lang="it-IT" dirty="0" err="1"/>
+              <a:t>checkerboard</a:t>
+            </a:r>
+            <a:r>
+              <a:rPr lang="it-IT" dirty="0"/>
+              <a:t> </a:t>
+            </a:r>
+            <a:r>
+              <a:rPr lang="it-IT" dirty="0" err="1"/>
+              <a:t>analysis</a:t>
+            </a:r>
+            <a:r>
+              <a:rPr lang="it-IT" dirty="0"/>
+              <a:t>, </a:t>
+            </a:r>
+            <a:r>
+              <a:rPr lang="it-IT" dirty="0" err="1"/>
+              <a:t>dividing</a:t>
+            </a:r>
+            <a:r>
+              <a:rPr lang="it-IT" dirty="0"/>
+              <a:t> the data sample </a:t>
+            </a:r>
+            <a:r>
+              <a:rPr lang="it-IT" dirty="0" err="1"/>
+              <a:t>into</a:t>
+            </a:r>
+            <a:r>
+              <a:rPr lang="it-IT" dirty="0"/>
+              <a:t> 0.1 by 0.1 </a:t>
+            </a:r>
+            <a:r>
+              <a:rPr lang="it-IT" dirty="0" err="1"/>
+              <a:t>millimeter</a:t>
+            </a:r>
+            <a:r>
+              <a:rPr lang="it-IT" dirty="0"/>
+              <a:t> </a:t>
+            </a:r>
+            <a:r>
+              <a:rPr lang="it-IT" dirty="0" err="1"/>
+              <a:t>square</a:t>
+            </a:r>
+            <a:r>
+              <a:rPr lang="it-IT" dirty="0"/>
+              <a:t> </a:t>
+            </a:r>
+            <a:r>
+              <a:rPr lang="it-IT" dirty="0" err="1"/>
+              <a:t>bins</a:t>
+            </a:r>
+            <a:r>
+              <a:rPr lang="it-IT" dirty="0"/>
+              <a:t>. By </a:t>
+            </a:r>
+            <a:r>
+              <a:rPr lang="it-IT" dirty="0" err="1"/>
+              <a:t>varying</a:t>
+            </a:r>
+            <a:r>
+              <a:rPr lang="it-IT" dirty="0"/>
+              <a:t> the </a:t>
+            </a:r>
+            <a:r>
+              <a:rPr lang="it-IT" dirty="0" err="1"/>
+              <a:t>angular</a:t>
+            </a:r>
+            <a:r>
+              <a:rPr lang="it-IT" dirty="0"/>
+              <a:t> shift to </a:t>
+            </a:r>
+            <a:r>
+              <a:rPr lang="it-IT" dirty="0" err="1"/>
+              <a:t>find</a:t>
+            </a:r>
+            <a:r>
+              <a:rPr lang="it-IT" dirty="0"/>
+              <a:t> the maximum </a:t>
+            </a:r>
+            <a:r>
+              <a:rPr lang="it-IT" dirty="0" err="1"/>
+              <a:t>channeling</a:t>
+            </a:r>
+            <a:r>
+              <a:rPr lang="it-IT" dirty="0"/>
+              <a:t> </a:t>
+            </a:r>
+            <a:r>
+              <a:rPr lang="it-IT" dirty="0" err="1"/>
+              <a:t>efficiency</a:t>
+            </a:r>
+            <a:r>
+              <a:rPr lang="it-IT" dirty="0"/>
+              <a:t> for </a:t>
+            </a:r>
+            <a:r>
+              <a:rPr lang="it-IT" dirty="0" err="1"/>
+              <a:t>each</a:t>
+            </a:r>
+            <a:r>
+              <a:rPr lang="it-IT" dirty="0"/>
+              <a:t> bin, we </a:t>
+            </a:r>
+            <a:r>
+              <a:rPr lang="it-IT" dirty="0" err="1"/>
+              <a:t>generated</a:t>
+            </a:r>
+            <a:r>
+              <a:rPr lang="it-IT" dirty="0"/>
+              <a:t> a 2D </a:t>
+            </a:r>
+            <a:r>
+              <a:rPr lang="it-IT" dirty="0" err="1"/>
+              <a:t>map</a:t>
+            </a:r>
+            <a:r>
+              <a:rPr lang="it-IT" dirty="0"/>
+              <a:t> of the </a:t>
+            </a:r>
+            <a:r>
+              <a:rPr lang="it-IT" dirty="0" err="1"/>
+              <a:t>torsion</a:t>
+            </a:r>
+            <a:r>
+              <a:rPr lang="it-IT" dirty="0"/>
+              <a:t> </a:t>
+            </a:r>
+            <a:r>
+              <a:rPr lang="it-IT" dirty="0" err="1"/>
+              <a:t>across</a:t>
+            </a:r>
+            <a:r>
+              <a:rPr lang="it-IT" dirty="0"/>
+              <a:t> the </a:t>
+            </a:r>
+            <a:r>
+              <a:rPr lang="it-IT" dirty="0" err="1"/>
+              <a:t>crystal's</a:t>
+            </a:r>
+            <a:r>
+              <a:rPr lang="it-IT" dirty="0"/>
+              <a:t> </a:t>
+            </a:r>
+            <a:r>
+              <a:rPr lang="it-IT" dirty="0" err="1"/>
+              <a:t>surface</a:t>
+            </a:r>
+            <a:r>
+              <a:rPr lang="it-IT" dirty="0"/>
+              <a:t>.</a:t>
+            </a:r>
+          </a:p>
+        </p:txBody>
+      </p:sp>
+      <p:sp>
+        <p:nvSpPr>
+          <p:cNvPr id="4" name="Segnaposto numero diapositiva 3"/>
+          <p:cNvSpPr>
+            <a:spLocks noGrp="1"/>
+          </p:cNvSpPr>
+          <p:nvPr>
+            <p:ph type="sldNum" sz="quarter" idx="5"/>
+          </p:nvPr>
+        </p:nvSpPr>
+        <p:spPr/>
+        <p:txBody>
+          <a:bodyPr/>
+          <a:lstStyle/>
+          <a:p>
+            <a:fld id="{C205392F-55BF-4B8E-AF01-45F81C88C286}" type="slidenum">
+              <a:rPr lang="it-IT" smtClean="0"/>
+              <a:t>8</a:t>
+            </a:fld>
+            <a:endParaRPr lang="it-IT"/>
+          </a:p>
+        </p:txBody>
+      </p:sp>
+    </p:spTree>
+    <p:extLst>
+      <p:ext uri="{BB962C8B-B14F-4D97-AF65-F5344CB8AC3E}">
+        <p14:creationId xmlns:p14="http://schemas.microsoft.com/office/powerpoint/2010/main" val="620254025"/>
+      </p:ext>
+    </p:extLst>
+  </p:cSld>
+  <p:clrMapOvr>
+    <a:masterClrMapping/>
+  </p:clrMapOvr>
+</p:notes>
+</file>
+
+<file path=ppt/notesSlides/notesSlide6.xml><?xml version="1.0" encoding="utf-8"?>
+<p:notes xmlns:a="http://schemas.openxmlformats.org/drawingml/2006/main" xmlns:r="http://schemas.openxmlformats.org/officeDocument/2006/relationships" xmlns:p="http://schemas.openxmlformats.org/presentationml/2006/main">
+  <p:cSld>
+    <p:spTree>
+      <p:nvGrpSpPr>
+        <p:cNvPr id="1" name=""/>
+        <p:cNvGrpSpPr/>
+        <p:nvPr/>
+      </p:nvGrpSpPr>
+      <p:grpSpPr>
+        <a:xfrm>
+          <a:off x="0" y="0"/>
+          <a:ext cx="0" cy="0"/>
+          <a:chOff x="0" y="0"/>
+          <a:chExt cx="0" cy="0"/>
+        </a:xfrm>
+      </p:grpSpPr>
+      <p:sp>
+        <p:nvSpPr>
+          <p:cNvPr id="2" name="Segnaposto immagine diapositiva 1"/>
+          <p:cNvSpPr>
+            <a:spLocks noGrp="1" noRot="1" noChangeAspect="1"/>
+          </p:cNvSpPr>
+          <p:nvPr>
+            <p:ph type="sldImg"/>
+          </p:nvPr>
+        </p:nvSpPr>
+        <p:spPr/>
+      </p:sp>
       <mc:AlternateContent xmlns:mc="http://schemas.openxmlformats.org/markup-compatibility/2006">
         <mc:Choice xmlns:a14="http://schemas.microsoft.com/office/drawing/2010/main" Requires="a14">
           <p:sp>
@@ -768,7 +2792,7 @@
 </p:notes>
 </file>
 
-<file path=ppt/notesSlides/notesSlide2.xml><?xml version="1.0" encoding="utf-8"?>
+<file path=ppt/notesSlides/notesSlide7.xml><?xml version="1.0" encoding="utf-8"?>
 <p:notes xmlns:a="http://schemas.openxmlformats.org/drawingml/2006/main" xmlns:r="http://schemas.openxmlformats.org/officeDocument/2006/relationships" xmlns:p="http://schemas.openxmlformats.org/presentationml/2006/main">
   <p:cSld>
     <p:spTree>
@@ -893,7 +2917,7 @@
 </p:notes>
 </file>
 
-<file path=ppt/notesSlides/notesSlide3.xml><?xml version="1.0" encoding="utf-8"?>
+<file path=ppt/notesSlides/notesSlide8.xml><?xml version="1.0" encoding="utf-8"?>
 <p:notes xmlns:a="http://schemas.openxmlformats.org/drawingml/2006/main" xmlns:r="http://schemas.openxmlformats.org/officeDocument/2006/relationships" xmlns:p="http://schemas.openxmlformats.org/presentationml/2006/main">
   <p:cSld>
     <p:spTree>
@@ -939,7 +2963,127 @@
           <a:p>
             <a:r>
               <a:rPr lang="it-IT" dirty="0"/>
-              <a:t>CONSISTENT ACROSS DIFFERENT RUNS FOR THE SAME CRYSTALS</a:t>
+              <a:t>This </a:t>
+            </a:r>
+            <a:r>
+              <a:rPr lang="it-IT" dirty="0" err="1"/>
+              <a:t>allowed</a:t>
+            </a:r>
+            <a:r>
+              <a:rPr lang="it-IT" dirty="0"/>
+              <a:t> </a:t>
+            </a:r>
+            <a:r>
+              <a:rPr lang="it-IT" dirty="0" err="1"/>
+              <a:t>us</a:t>
+            </a:r>
+            <a:r>
+              <a:rPr lang="it-IT" dirty="0"/>
+              <a:t> to </a:t>
+            </a:r>
+            <a:r>
+              <a:rPr lang="it-IT" dirty="0" err="1"/>
+              <a:t>apply</a:t>
+            </a:r>
+            <a:r>
+              <a:rPr lang="it-IT" dirty="0"/>
+              <a:t> a </a:t>
+            </a:r>
+            <a:r>
+              <a:rPr lang="it-IT" dirty="0" err="1"/>
+              <a:t>continuous</a:t>
+            </a:r>
+            <a:r>
+              <a:rPr lang="it-IT" dirty="0"/>
+              <a:t> </a:t>
+            </a:r>
+            <a:r>
+              <a:rPr lang="it-IT" dirty="0" err="1"/>
+              <a:t>torsion</a:t>
+            </a:r>
+            <a:r>
+              <a:rPr lang="it-IT" dirty="0"/>
+              <a:t> </a:t>
+            </a:r>
+            <a:r>
+              <a:rPr lang="it-IT" dirty="0" err="1"/>
+              <a:t>correction</a:t>
+            </a:r>
+            <a:r>
+              <a:rPr lang="it-IT" dirty="0"/>
+              <a:t>. So, </a:t>
+            </a:r>
+            <a:r>
+              <a:rPr lang="it-IT" dirty="0" err="1"/>
+              <a:t>instead</a:t>
+            </a:r>
+            <a:r>
+              <a:rPr lang="it-IT" dirty="0"/>
+              <a:t> of using a standard Lindhard cut </a:t>
+            </a:r>
+            <a:r>
+              <a:rPr lang="it-IT" dirty="0" err="1"/>
+              <a:t>centered</a:t>
+            </a:r>
+            <a:r>
+              <a:rPr lang="it-IT" dirty="0"/>
+              <a:t> </a:t>
+            </a:r>
+            <a:r>
+              <a:rPr lang="it-IT" dirty="0" err="1"/>
+              <a:t>at</a:t>
+            </a:r>
+            <a:r>
+              <a:rPr lang="it-IT" dirty="0"/>
+              <a:t> zero, we </a:t>
+            </a:r>
+            <a:r>
+              <a:rPr lang="it-IT" dirty="0" err="1"/>
+              <a:t>corrected</a:t>
+            </a:r>
+            <a:r>
+              <a:rPr lang="it-IT" dirty="0"/>
+              <a:t> the incoming angle using the </a:t>
+            </a:r>
+            <a:r>
+              <a:rPr lang="it-IT" dirty="0" err="1"/>
+              <a:t>fitted</a:t>
+            </a:r>
+            <a:r>
+              <a:rPr lang="it-IT" dirty="0"/>
+              <a:t> </a:t>
+            </a:r>
+            <a:r>
+              <a:rPr lang="it-IT" dirty="0" err="1"/>
+              <a:t>parameters</a:t>
+            </a:r>
+            <a:r>
+              <a:rPr lang="it-IT" dirty="0"/>
+              <a:t> </a:t>
+            </a:r>
+            <a:r>
+              <a:rPr lang="it-IT" dirty="0" err="1"/>
+              <a:t>found</a:t>
+            </a:r>
+            <a:r>
+              <a:rPr lang="it-IT" dirty="0"/>
+              <a:t> for </a:t>
+            </a:r>
+            <a:r>
+              <a:rPr lang="it-IT" dirty="0" err="1"/>
+              <a:t>each</a:t>
+            </a:r>
+            <a:r>
+              <a:rPr lang="it-IT" dirty="0"/>
+              <a:t> </a:t>
+            </a:r>
+            <a:r>
+              <a:rPr lang="it-IT" dirty="0" err="1"/>
+              <a:t>spatial</a:t>
+            </a:r>
+            <a:r>
+              <a:rPr lang="it-IT" dirty="0"/>
+              <a:t> bin.</a:t>
             </a:r>
           </a:p>
         </p:txBody>
@@ -961,7 +3105,7 @@
           <a:p>
             <a:fld id="{C205392F-55BF-4B8E-AF01-45F81C88C286}" type="slidenum">
               <a:rPr lang="it-IT" smtClean="0"/>
-              <a:t>17</a:t>
+              <a:t>11</a:t>
             </a:fld>
             <a:endParaRPr lang="it-IT"/>
           </a:p>
@@ -970,7 +3114,214 @@
     </p:spTree>
     <p:extLst>
       <p:ext uri="{BB962C8B-B14F-4D97-AF65-F5344CB8AC3E}">
-        <p14:creationId xmlns:p14="http://schemas.microsoft.com/office/powerpoint/2010/main" val="290920570"/>
+        <p14:creationId xmlns:p14="http://schemas.microsoft.com/office/powerpoint/2010/main" val="2998983911"/>
+      </p:ext>
+    </p:extLst>
+  </p:cSld>
+  <p:clrMapOvr>
+    <a:masterClrMapping/>
+  </p:clrMapOvr>
+</p:notes>
+</file>
+
+<file path=ppt/notesSlides/notesSlide9.xml><?xml version="1.0" encoding="utf-8"?>
+<p:notes xmlns:a="http://schemas.openxmlformats.org/drawingml/2006/main" xmlns:r="http://schemas.openxmlformats.org/officeDocument/2006/relationships" xmlns:p="http://schemas.openxmlformats.org/presentationml/2006/main">
+  <p:cSld>
+    <p:spTree>
+      <p:nvGrpSpPr>
+        <p:cNvPr id="1" name=""/>
+        <p:cNvGrpSpPr/>
+        <p:nvPr/>
+      </p:nvGrpSpPr>
+      <p:grpSpPr>
+        <a:xfrm>
+          <a:off x="0" y="0"/>
+          <a:ext cx="0" cy="0"/>
+          <a:chOff x="0" y="0"/>
+          <a:chExt cx="0" cy="0"/>
+        </a:xfrm>
+      </p:grpSpPr>
+      <p:sp>
+        <p:nvSpPr>
+          <p:cNvPr id="2" name="Segnaposto immagine diapositiva 1"/>
+          <p:cNvSpPr>
+            <a:spLocks noGrp="1" noRot="1" noChangeAspect="1"/>
+          </p:cNvSpPr>
+          <p:nvPr>
+            <p:ph type="sldImg"/>
+          </p:nvPr>
+        </p:nvSpPr>
+        <p:spPr/>
+      </p:sp>
+      <p:sp>
+        <p:nvSpPr>
+          <p:cNvPr id="3" name="Segnaposto note 2"/>
+          <p:cNvSpPr>
+            <a:spLocks noGrp="1"/>
+          </p:cNvSpPr>
+          <p:nvPr>
+            <p:ph type="body" idx="1"/>
+          </p:nvPr>
+        </p:nvSpPr>
+        <p:spPr/>
+        <p:txBody>
+          <a:bodyPr/>
+          <a:lstStyle/>
+          <a:p>
+            <a:r>
+              <a:rPr lang="it-IT" dirty="0"/>
+              <a:t>This </a:t>
+            </a:r>
+            <a:r>
+              <a:rPr lang="it-IT" dirty="0" err="1"/>
+              <a:t>allowed</a:t>
+            </a:r>
+            <a:r>
+              <a:rPr lang="it-IT" dirty="0"/>
+              <a:t> </a:t>
+            </a:r>
+            <a:r>
+              <a:rPr lang="it-IT" dirty="0" err="1"/>
+              <a:t>us</a:t>
+            </a:r>
+            <a:r>
+              <a:rPr lang="it-IT" dirty="0"/>
+              <a:t> to </a:t>
+            </a:r>
+            <a:r>
+              <a:rPr lang="it-IT" dirty="0" err="1"/>
+              <a:t>apply</a:t>
+            </a:r>
+            <a:r>
+              <a:rPr lang="it-IT" dirty="0"/>
+              <a:t> a </a:t>
+            </a:r>
+            <a:r>
+              <a:rPr lang="it-IT" dirty="0" err="1"/>
+              <a:t>continuous</a:t>
+            </a:r>
+            <a:r>
+              <a:rPr lang="it-IT" dirty="0"/>
+              <a:t> </a:t>
+            </a:r>
+            <a:r>
+              <a:rPr lang="it-IT" dirty="0" err="1"/>
+              <a:t>torsion</a:t>
+            </a:r>
+            <a:r>
+              <a:rPr lang="it-IT" dirty="0"/>
+              <a:t> </a:t>
+            </a:r>
+            <a:r>
+              <a:rPr lang="it-IT" dirty="0" err="1"/>
+              <a:t>correction</a:t>
+            </a:r>
+            <a:r>
+              <a:rPr lang="it-IT" dirty="0"/>
+              <a:t>. So, </a:t>
+            </a:r>
+            <a:r>
+              <a:rPr lang="it-IT" dirty="0" err="1"/>
+              <a:t>instead</a:t>
+            </a:r>
+            <a:r>
+              <a:rPr lang="it-IT" dirty="0"/>
+              <a:t> of using a standard Lindhard cut </a:t>
+            </a:r>
+            <a:r>
+              <a:rPr lang="it-IT" dirty="0" err="1"/>
+              <a:t>centered</a:t>
+            </a:r>
+            <a:r>
+              <a:rPr lang="it-IT" dirty="0"/>
+              <a:t> </a:t>
+            </a:r>
+            <a:r>
+              <a:rPr lang="it-IT" dirty="0" err="1"/>
+              <a:t>at</a:t>
+            </a:r>
+            <a:r>
+              <a:rPr lang="it-IT" dirty="0"/>
+              <a:t> zero, we </a:t>
+            </a:r>
+            <a:r>
+              <a:rPr lang="it-IT" dirty="0" err="1"/>
+              <a:t>corrected</a:t>
+            </a:r>
+            <a:r>
+              <a:rPr lang="it-IT" dirty="0"/>
+              <a:t> the incoming angle using the </a:t>
+            </a:r>
+            <a:r>
+              <a:rPr lang="it-IT" dirty="0" err="1"/>
+              <a:t>fitted</a:t>
+            </a:r>
+            <a:r>
+              <a:rPr lang="it-IT" dirty="0"/>
+              <a:t> </a:t>
+            </a:r>
+            <a:r>
+              <a:rPr lang="it-IT" dirty="0" err="1"/>
+              <a:t>parameters</a:t>
+            </a:r>
+            <a:r>
+              <a:rPr lang="it-IT" dirty="0"/>
+              <a:t> </a:t>
+            </a:r>
+            <a:r>
+              <a:rPr lang="it-IT" dirty="0" err="1"/>
+              <a:t>found</a:t>
+            </a:r>
+            <a:r>
+              <a:rPr lang="it-IT" dirty="0"/>
+              <a:t> for </a:t>
+            </a:r>
+            <a:r>
+              <a:rPr lang="it-IT" dirty="0" err="1"/>
+              <a:t>each</a:t>
+            </a:r>
+            <a:r>
+              <a:rPr lang="it-IT" dirty="0"/>
+              <a:t> </a:t>
+            </a:r>
+            <a:r>
+              <a:rPr lang="it-IT" dirty="0" err="1"/>
+              <a:t>spatial</a:t>
+            </a:r>
+            <a:r>
+              <a:rPr lang="it-IT" dirty="0"/>
+              <a:t> bin.</a:t>
+            </a:r>
+          </a:p>
+        </p:txBody>
+      </p:sp>
+      <p:sp>
+        <p:nvSpPr>
+          <p:cNvPr id="4" name="Segnaposto numero diapositiva 3"/>
+          <p:cNvSpPr>
+            <a:spLocks noGrp="1"/>
+          </p:cNvSpPr>
+          <p:nvPr>
+            <p:ph type="sldNum" sz="quarter" idx="5"/>
+          </p:nvPr>
+        </p:nvSpPr>
+        <p:spPr/>
+        <p:txBody>
+          <a:bodyPr/>
+          <a:lstStyle/>
+          <a:p>
+            <a:fld id="{C205392F-55BF-4B8E-AF01-45F81C88C286}" type="slidenum">
+              <a:rPr lang="it-IT" smtClean="0"/>
+              <a:t>12</a:t>
+            </a:fld>
+            <a:endParaRPr lang="it-IT"/>
+          </a:p>
+        </p:txBody>
+      </p:sp>
+    </p:spTree>
+    <p:extLst>
+      <p:ext uri="{BB962C8B-B14F-4D97-AF65-F5344CB8AC3E}">
+        <p14:creationId xmlns:p14="http://schemas.microsoft.com/office/powerpoint/2010/main" val="218326917"/>
       </p:ext>
     </p:extLst>
   </p:cSld>
@@ -4438,38 +6789,6 @@
       </p:sp>
       <p:sp>
         <p:nvSpPr>
-          <p:cNvPr id="3" name="Segnaposto contenuto 2">
-            <a:extLst>
-              <a:ext uri="{FF2B5EF4-FFF2-40B4-BE49-F238E27FC236}">
-                <a16:creationId xmlns:a16="http://schemas.microsoft.com/office/drawing/2014/main" id="{19C72B77-E124-C2D2-A337-8E6AFB0497D0}"/>
-              </a:ext>
-            </a:extLst>
-          </p:cNvPr>
-          <p:cNvSpPr>
-            <a:spLocks noGrp="1"/>
-          </p:cNvSpPr>
-          <p:nvPr>
-            <p:ph idx="1"/>
-          </p:nvPr>
-        </p:nvSpPr>
-        <p:spPr>
-          <a:xfrm>
-            <a:off x="838200" y="1401288"/>
-            <a:ext cx="10515600" cy="4776227"/>
-          </a:xfrm>
-        </p:spPr>
-        <p:txBody>
-          <a:bodyPr>
-            <a:normAutofit/>
-          </a:bodyPr>
-          <a:lstStyle/>
-          <a:p>
-            <a:endParaRPr lang="en-US" dirty="0"/>
-          </a:p>
-        </p:txBody>
-      </p:sp>
-      <p:sp>
-        <p:nvSpPr>
           <p:cNvPr id="4" name="Segnaposto data 3">
             <a:extLst>
               <a:ext uri="{FF2B5EF4-FFF2-40B4-BE49-F238E27FC236}">
@@ -5217,7 +7536,7 @@
                 <a:ext cx="10515600" cy="4776227"/>
               </a:xfrm>
               <a:blipFill>
-                <a:blip r:embed="rId2"/>
+                <a:blip r:embed="rId3"/>
                 <a:stretch>
                   <a:fillRect l="-1217" t="-2299"/>
                 </a:stretch>
@@ -5476,7 +7795,7 @@
           <p:nvPr/>
         </p:nvPicPr>
         <p:blipFill>
-          <a:blip r:embed="rId3">
+          <a:blip r:embed="rId4">
             <a:extLst>
               <a:ext uri="{28A0092B-C50C-407E-A947-70E740481C1C}">
                 <a14:useLocalDpi xmlns:a14="http://schemas.microsoft.com/office/drawing/2010/main" val="0"/>
@@ -6433,7 +8752,7 @@
                 <a:ext cx="10515600" cy="4776227"/>
               </a:xfrm>
               <a:blipFill>
-                <a:blip r:embed="rId2"/>
+                <a:blip r:embed="rId3"/>
                 <a:stretch>
                   <a:fillRect l="-1217" t="-2299"/>
                 </a:stretch>
@@ -6692,7 +9011,7 @@
           <p:nvPr/>
         </p:nvPicPr>
         <p:blipFill>
-          <a:blip r:embed="rId3">
+          <a:blip r:embed="rId4">
             <a:extLst>
               <a:ext uri="{28A0092B-C50C-407E-A947-70E740481C1C}">
                 <a14:useLocalDpi xmlns:a14="http://schemas.microsoft.com/office/drawing/2010/main" val="0"/>
@@ -7618,7 +9937,7 @@
           <p:nvPr/>
         </p:nvPicPr>
         <p:blipFill>
-          <a:blip r:embed="rId2">
+          <a:blip r:embed="rId3">
             <a:extLst>
               <a:ext uri="{28A0092B-C50C-407E-A947-70E740481C1C}">
                 <a14:useLocalDpi xmlns:a14="http://schemas.microsoft.com/office/drawing/2010/main" val="0"/>
@@ -8841,7 +11160,7 @@
           <p:nvPr/>
         </p:nvPicPr>
         <p:blipFill>
-          <a:blip r:embed="rId2">
+          <a:blip r:embed="rId3">
             <a:extLst>
               <a:ext uri="{28A0092B-C50C-407E-A947-70E740481C1C}">
                 <a14:useLocalDpi xmlns:a14="http://schemas.microsoft.com/office/drawing/2010/main" val="0"/>
@@ -8878,7 +11197,7 @@
           <p:nvPr/>
         </p:nvPicPr>
         <p:blipFill>
-          <a:blip r:embed="rId3">
+          <a:blip r:embed="rId4">
             <a:extLst>
               <a:ext uri="{28A0092B-C50C-407E-A947-70E740481C1C}">
                 <a14:useLocalDpi xmlns:a14="http://schemas.microsoft.com/office/drawing/2010/main" val="0"/>
@@ -9156,7 +11475,7 @@
                 <a:avLst/>
               </a:prstGeom>
               <a:blipFill>
-                <a:blip r:embed="rId4"/>
+                <a:blip r:embed="rId5"/>
                 <a:stretch>
                   <a:fillRect/>
                 </a:stretch>
@@ -9284,7 +11603,7 @@
                 <a:avLst/>
               </a:prstGeom>
               <a:blipFill>
-                <a:blip r:embed="rId5"/>
+                <a:blip r:embed="rId6"/>
                 <a:stretch>
                   <a:fillRect/>
                 </a:stretch>
@@ -14343,7 +16662,7 @@
                           <a:tailEnd type="none" w="med" len="med"/>
                         </a:lnB>
                         <a:blipFill>
-                          <a:blip r:embed="rId2"/>
+                          <a:blip r:embed="rId3"/>
                           <a:stretch>
                             <a:fillRect l="-182222" t="-5185" r="-197778" b="-295556"/>
                           </a:stretch>
@@ -14415,7 +16734,7 @@
                           <a:tailEnd type="none" w="med" len="med"/>
                         </a:lnB>
                         <a:blipFill>
-                          <a:blip r:embed="rId2"/>
+                          <a:blip r:embed="rId3"/>
                           <a:stretch>
                             <a:fillRect l="-366486" t="-5185" r="-541" b="-295556"/>
                           </a:stretch>
@@ -14559,7 +16878,7 @@
                           <a:tailEnd type="none" w="med" len="med"/>
                         </a:lnB>
                         <a:blipFill>
-                          <a:blip r:embed="rId2"/>
+                          <a:blip r:embed="rId3"/>
                           <a:stretch>
                             <a:fillRect l="-182222" t="-62832" r="-197778" b="-76549"/>
                           </a:stretch>
@@ -14594,7 +16913,7 @@
                           <a:tailEnd type="none" w="med" len="med"/>
                         </a:lnB>
                         <a:blipFill>
-                          <a:blip r:embed="rId2"/>
+                          <a:blip r:embed="rId3"/>
                           <a:stretch>
                             <a:fillRect l="-298824" t="-62832" r="-109412" b="-76549"/>
                           </a:stretch>
@@ -14636,7 +16955,7 @@
                           <a:tailEnd type="none" w="med" len="med"/>
                         </a:lnB>
                         <a:blipFill>
-                          <a:blip r:embed="rId2"/>
+                          <a:blip r:embed="rId3"/>
                           <a:stretch>
                             <a:fillRect l="-366486" t="-62832" r="-541" b="-76549"/>
                           </a:stretch>
@@ -15017,7 +17336,7 @@
                           <a:tailEnd type="none" w="med" len="med"/>
                         </a:lnB>
                         <a:blipFill>
-                          <a:blip r:embed="rId2"/>
+                          <a:blip r:embed="rId3"/>
                           <a:stretch>
                             <a:fillRect l="-182222" t="-245333" r="-197778" b="-15333"/>
                           </a:stretch>
@@ -15050,7 +17369,7 @@
                           <a:tailEnd type="none" w="med" len="med"/>
                         </a:lnB>
                         <a:blipFill>
-                          <a:blip r:embed="rId2"/>
+                          <a:blip r:embed="rId3"/>
                           <a:stretch>
                             <a:fillRect l="-298824" t="-245333" r="-109412" b="-15333"/>
                           </a:stretch>
@@ -15090,7 +17409,7 @@
                           <a:tailEnd type="none" w="med" len="med"/>
                         </a:lnB>
                         <a:blipFill>
-                          <a:blip r:embed="rId2"/>
+                          <a:blip r:embed="rId3"/>
                           <a:stretch>
                             <a:fillRect l="-366486" t="-245333" r="-541" b="-15333"/>
                           </a:stretch>
@@ -20671,7 +22990,7 @@
           <a:blip>
             <a:extLst>
               <a:ext uri="{96DAC541-7B7A-43D3-8B79-37D633B846F1}">
-                <asvg:svgBlip xmlns:asvg="http://schemas.microsoft.com/office/drawing/2016/SVG/main" r:embed="rId2"/>
+                <asvg:svgBlip xmlns:asvg="http://schemas.microsoft.com/office/drawing/2016/SVG/main" r:embed="rId3"/>
               </a:ext>
             </a:extLst>
           </a:blip>
@@ -20707,7 +23026,7 @@
           <a:blip>
             <a:extLst>
               <a:ext uri="{96DAC541-7B7A-43D3-8B79-37D633B846F1}">
-                <asvg:svgBlip xmlns:asvg="http://schemas.microsoft.com/office/drawing/2016/SVG/main" r:embed="rId3"/>
+                <asvg:svgBlip xmlns:asvg="http://schemas.microsoft.com/office/drawing/2016/SVG/main" r:embed="rId4"/>
               </a:ext>
             </a:extLst>
           </a:blip>
@@ -20743,7 +23062,7 @@
           <a:blip>
             <a:extLst>
               <a:ext uri="{96DAC541-7B7A-43D3-8B79-37D633B846F1}">
-                <asvg:svgBlip xmlns:asvg="http://schemas.microsoft.com/office/drawing/2016/SVG/main" r:embed="rId4"/>
+                <asvg:svgBlip xmlns:asvg="http://schemas.microsoft.com/office/drawing/2016/SVG/main" r:embed="rId5"/>
               </a:ext>
             </a:extLst>
           </a:blip>
@@ -20861,7 +23180,7 @@
         <p:spPr>
           <a:xfrm>
             <a:off x="838200" y="1401288"/>
-            <a:ext cx="10515600" cy="4776227"/>
+            <a:ext cx="10766834" cy="4776227"/>
           </a:xfrm>
         </p:spPr>
         <p:txBody>
@@ -20874,79 +23193,79 @@
               <a:buNone/>
             </a:pPr>
             <a:r>
-              <a:rPr lang="it-IT" sz="2300" dirty="0"/>
+              <a:rPr lang="it-IT" sz="2000" dirty="0"/>
               <a:t>To </a:t>
             </a:r>
             <a:r>
-              <a:rPr lang="it-IT" sz="2300" dirty="0" err="1"/>
+              <a:rPr lang="it-IT" sz="2000" dirty="0" err="1"/>
               <a:t>select</a:t>
             </a:r>
             <a:r>
-              <a:rPr lang="it-IT" sz="2300" dirty="0"/>
+              <a:rPr lang="it-IT" sz="2000" dirty="0"/>
               <a:t> the </a:t>
             </a:r>
             <a:r>
-              <a:rPr lang="it-IT" sz="2300" dirty="0" err="1"/>
+              <a:rPr lang="it-IT" sz="2000" dirty="0" err="1"/>
               <a:t>particles</a:t>
             </a:r>
             <a:r>
-              <a:rPr lang="it-IT" sz="2300" dirty="0"/>
+              <a:rPr lang="it-IT" sz="2000" dirty="0"/>
               <a:t> that </a:t>
             </a:r>
             <a:r>
-              <a:rPr lang="it-IT" sz="2300" dirty="0" err="1"/>
+              <a:rPr lang="it-IT" sz="2000" dirty="0" err="1"/>
               <a:t>actually</a:t>
             </a:r>
             <a:r>
-              <a:rPr lang="it-IT" sz="2300" dirty="0"/>
+              <a:rPr lang="it-IT" sz="2000" dirty="0"/>
               <a:t> </a:t>
             </a:r>
             <a:r>
-              <a:rPr lang="it-IT" sz="2300" dirty="0" err="1"/>
+              <a:rPr lang="it-IT" sz="2000" dirty="0" err="1"/>
               <a:t>enter</a:t>
             </a:r>
             <a:r>
-              <a:rPr lang="it-IT" sz="2300" dirty="0"/>
+              <a:rPr lang="it-IT" sz="2000" dirty="0"/>
               <a:t> the </a:t>
             </a:r>
             <a:r>
-              <a:rPr lang="it-IT" sz="2300" dirty="0" err="1"/>
+              <a:rPr lang="it-IT" sz="2000" dirty="0" err="1"/>
               <a:t>crystal</a:t>
             </a:r>
             <a:r>
-              <a:rPr lang="it-IT" sz="2300" dirty="0"/>
+              <a:rPr lang="it-IT" sz="2000" dirty="0"/>
               <a:t> we first </a:t>
             </a:r>
             <a:r>
-              <a:rPr lang="it-IT" sz="2300" dirty="0" err="1"/>
+              <a:rPr lang="it-IT" sz="2000" dirty="0" err="1"/>
               <a:t>need</a:t>
             </a:r>
             <a:r>
-              <a:rPr lang="it-IT" sz="2300" dirty="0"/>
+              <a:rPr lang="it-IT" sz="2000" dirty="0"/>
               <a:t> to know the position of the </a:t>
             </a:r>
             <a:r>
-              <a:rPr lang="it-IT" sz="2300" dirty="0" err="1"/>
+              <a:rPr lang="it-IT" sz="2000" dirty="0" err="1"/>
               <a:t>crystal</a:t>
             </a:r>
             <a:r>
-              <a:rPr lang="it-IT" sz="2300" dirty="0"/>
+              <a:rPr lang="it-IT" sz="2000" dirty="0"/>
               <a:t> with </a:t>
             </a:r>
             <a:r>
-              <a:rPr lang="it-IT" sz="2300" dirty="0" err="1"/>
+              <a:rPr lang="it-IT" sz="2000" dirty="0" err="1"/>
               <a:t>respect</a:t>
             </a:r>
             <a:r>
-              <a:rPr lang="it-IT" sz="2300" dirty="0"/>
+              <a:rPr lang="it-IT" sz="2000" dirty="0"/>
               <a:t> to the </a:t>
             </a:r>
             <a:r>
-              <a:rPr lang="it-IT" sz="2300" dirty="0" err="1"/>
+              <a:rPr lang="it-IT" sz="2000" dirty="0" err="1"/>
               <a:t>beam</a:t>
             </a:r>
             <a:r>
-              <a:rPr lang="it-IT" sz="2300" dirty="0"/>
+              <a:rPr lang="it-IT" sz="2000" dirty="0"/>
               <a:t>.</a:t>
             </a:r>
           </a:p>
@@ -20954,152 +23273,176 @@
             <a:pPr marL="0" indent="0">
               <a:buNone/>
             </a:pPr>
-            <a:endParaRPr lang="it-IT" sz="2300" dirty="0"/>
+            <a:endParaRPr lang="it-IT" sz="2000" dirty="0"/>
           </a:p>
           <a:p>
             <a:pPr marL="0" indent="0">
               <a:buNone/>
             </a:pPr>
-            <a:endParaRPr lang="it-IT" sz="2300" dirty="0"/>
+            <a:endParaRPr lang="it-IT" sz="2000" dirty="0"/>
           </a:p>
           <a:p>
             <a:pPr marL="0" indent="0">
               <a:buNone/>
             </a:pPr>
-            <a:endParaRPr lang="it-IT" sz="2300" dirty="0"/>
+            <a:endParaRPr lang="it-IT" sz="2000" dirty="0"/>
           </a:p>
           <a:p>
             <a:pPr marL="0" indent="0">
               <a:buNone/>
             </a:pPr>
-            <a:endParaRPr lang="it-IT" sz="2300" dirty="0"/>
+            <a:endParaRPr lang="it-IT" sz="2000" dirty="0"/>
           </a:p>
           <a:p>
             <a:pPr marL="0" indent="0">
               <a:buNone/>
             </a:pPr>
-            <a:endParaRPr lang="it-IT" sz="2300" dirty="0"/>
+            <a:endParaRPr lang="it-IT" sz="2000" dirty="0"/>
           </a:p>
           <a:p>
             <a:pPr marL="0" indent="0">
               <a:buNone/>
             </a:pPr>
-            <a:endParaRPr lang="it-IT" sz="1800" dirty="0"/>
+            <a:endParaRPr lang="it-IT" sz="1600" dirty="0"/>
           </a:p>
           <a:p>
             <a:pPr marL="0" indent="0">
               <a:buNone/>
             </a:pPr>
-            <a:endParaRPr lang="it-IT" sz="1800" dirty="0"/>
+            <a:endParaRPr lang="it-IT" sz="1600" dirty="0"/>
           </a:p>
           <a:p>
             <a:pPr marL="0" indent="0">
               <a:buNone/>
             </a:pPr>
-            <a:endParaRPr lang="it-IT" sz="2300" dirty="0"/>
+            <a:endParaRPr lang="it-IT" sz="1600" dirty="0"/>
           </a:p>
           <a:p>
             <a:pPr marL="0" indent="0">
               <a:buNone/>
             </a:pPr>
-            <a:r>
-              <a:rPr lang="it-IT" sz="2300" dirty="0"/>
-              <a:t>We </a:t>
-            </a:r>
-            <a:r>
-              <a:rPr lang="it-IT" sz="2300" dirty="0" err="1"/>
-              <a:t>then</a:t>
-            </a:r>
-            <a:r>
-              <a:rPr lang="it-IT" sz="2300" dirty="0"/>
-              <a:t> look </a:t>
-            </a:r>
-            <a:r>
-              <a:rPr lang="it-IT" sz="2300" dirty="0" err="1"/>
-              <a:t>at</a:t>
-            </a:r>
-            <a:r>
-              <a:rPr lang="it-IT" sz="2300" dirty="0"/>
-              <a:t> </a:t>
-            </a:r>
-            <a:r>
-              <a:rPr lang="it-IT" sz="2300" dirty="0" err="1"/>
-              <a:t>channeled</a:t>
-            </a:r>
-            <a:r>
-              <a:rPr lang="it-IT" sz="2300" dirty="0"/>
-              <a:t> </a:t>
-            </a:r>
-            <a:r>
-              <a:rPr lang="it-IT" sz="2300" dirty="0" err="1"/>
-              <a:t>particles</a:t>
-            </a:r>
-            <a:r>
-              <a:rPr lang="it-IT" sz="2300" dirty="0"/>
-              <a:t> </a:t>
-            </a:r>
-            <a:r>
-              <a:rPr lang="it-IT" sz="2300" dirty="0" err="1"/>
-              <a:t>only</a:t>
-            </a:r>
-            <a:r>
-              <a:rPr lang="it-IT" sz="2300" dirty="0"/>
-              <a:t> using a </a:t>
-            </a:r>
-            <a:r>
-              <a:rPr lang="it-IT" sz="2300" dirty="0" err="1"/>
-              <a:t>preliminary</a:t>
-            </a:r>
-            <a:r>
-              <a:rPr lang="it-IT" sz="2300" dirty="0"/>
-              <a:t> </a:t>
-            </a:r>
-            <a:r>
-              <a:rPr lang="it-IT" sz="2300" dirty="0" err="1"/>
-              <a:t>deflection</a:t>
-            </a:r>
-            <a:r>
-              <a:rPr lang="it-IT" sz="2300" dirty="0"/>
-              <a:t> cut. </a:t>
-            </a:r>
-            <a:r>
-              <a:rPr lang="it-IT" sz="2300" dirty="0" err="1"/>
-              <a:t>Their</a:t>
-            </a:r>
-            <a:r>
-              <a:rPr lang="it-IT" sz="2300" dirty="0"/>
-              <a:t> impact points </a:t>
-            </a:r>
-            <a:r>
-              <a:rPr lang="it-IT" sz="2300" dirty="0" err="1"/>
-              <a:t>reveal</a:t>
-            </a:r>
-            <a:r>
-              <a:rPr lang="it-IT" sz="2300" dirty="0"/>
-              <a:t> the </a:t>
-            </a:r>
-            <a:r>
-              <a:rPr lang="it-IT" sz="2300" dirty="0" err="1"/>
-              <a:t>crystal's</a:t>
-            </a:r>
-            <a:r>
-              <a:rPr lang="it-IT" sz="2300" dirty="0"/>
-              <a:t> </a:t>
-            </a:r>
-            <a:r>
-              <a:rPr lang="it-IT" sz="2300" dirty="0" err="1"/>
-              <a:t>physical</a:t>
-            </a:r>
-            <a:r>
-              <a:rPr lang="it-IT" sz="2300" dirty="0"/>
-              <a:t> location.</a:t>
-            </a:r>
+            <a:endParaRPr lang="it-IT" sz="2000" dirty="0"/>
           </a:p>
           <a:p>
             <a:pPr marL="0" indent="0">
               <a:buNone/>
             </a:pPr>
-            <a:endParaRPr lang="it-IT" sz="2300" dirty="0"/>
+            <a:r>
+              <a:rPr lang="it-IT" sz="2000" dirty="0"/>
+              <a:t>We </a:t>
+            </a:r>
+            <a:r>
+              <a:rPr lang="it-IT" sz="2000" dirty="0" err="1"/>
+              <a:t>then</a:t>
+            </a:r>
+            <a:r>
+              <a:rPr lang="it-IT" sz="2000" dirty="0"/>
+              <a:t> look </a:t>
+            </a:r>
+            <a:r>
+              <a:rPr lang="it-IT" sz="2000" dirty="0" err="1"/>
+              <a:t>at</a:t>
+            </a:r>
+            <a:r>
+              <a:rPr lang="it-IT" sz="2000" dirty="0"/>
+              <a:t> </a:t>
+            </a:r>
+            <a:r>
+              <a:rPr lang="it-IT" sz="2000" dirty="0" err="1"/>
+              <a:t>channeled</a:t>
+            </a:r>
+            <a:r>
+              <a:rPr lang="it-IT" sz="2000" dirty="0"/>
+              <a:t> </a:t>
+            </a:r>
+            <a:r>
+              <a:rPr lang="it-IT" sz="2000" dirty="0" err="1"/>
+              <a:t>particles</a:t>
+            </a:r>
+            <a:r>
+              <a:rPr lang="it-IT" sz="2000" dirty="0"/>
+              <a:t> </a:t>
+            </a:r>
+            <a:r>
+              <a:rPr lang="it-IT" sz="2000" dirty="0" err="1"/>
+              <a:t>only</a:t>
+            </a:r>
+            <a:r>
+              <a:rPr lang="it-IT" sz="2000" dirty="0"/>
+              <a:t> using a </a:t>
+            </a:r>
+            <a:r>
+              <a:rPr lang="it-IT" sz="2000" dirty="0" err="1"/>
+              <a:t>preliminary</a:t>
+            </a:r>
+            <a:r>
+              <a:rPr lang="it-IT" sz="2000" dirty="0"/>
+              <a:t> </a:t>
+            </a:r>
+            <a:r>
+              <a:rPr lang="it-IT" sz="2000" dirty="0" err="1"/>
+              <a:t>deflection</a:t>
+            </a:r>
+            <a:r>
+              <a:rPr lang="it-IT" sz="2000" dirty="0"/>
+              <a:t> cut. </a:t>
+            </a:r>
+            <a:r>
+              <a:rPr lang="it-IT" sz="2000" dirty="0" err="1"/>
+              <a:t>Their</a:t>
+            </a:r>
+            <a:r>
+              <a:rPr lang="it-IT" sz="2000" dirty="0"/>
+              <a:t> impact points </a:t>
+            </a:r>
+            <a:r>
+              <a:rPr lang="it-IT" sz="2000" dirty="0" err="1"/>
+              <a:t>reveal</a:t>
+            </a:r>
+            <a:r>
+              <a:rPr lang="it-IT" sz="2000" dirty="0"/>
+              <a:t> the </a:t>
+            </a:r>
+            <a:r>
+              <a:rPr lang="it-IT" sz="2000" dirty="0" err="1"/>
+              <a:t>crystal's</a:t>
+            </a:r>
+            <a:r>
+              <a:rPr lang="it-IT" sz="2000" dirty="0"/>
+              <a:t> </a:t>
+            </a:r>
+            <a:r>
+              <a:rPr lang="it-IT" sz="2000" dirty="0" err="1"/>
+              <a:t>physical</a:t>
+            </a:r>
+            <a:r>
+              <a:rPr lang="it-IT" sz="2000" dirty="0"/>
+              <a:t> location, matching </a:t>
+            </a:r>
+            <a:r>
+              <a:rPr lang="it-IT" sz="2000" dirty="0" err="1"/>
+              <a:t>its</a:t>
+            </a:r>
+            <a:r>
+              <a:rPr lang="it-IT" sz="2000" dirty="0"/>
+              <a:t> </a:t>
+            </a:r>
+            <a:r>
+              <a:rPr lang="it-IT" sz="2000" dirty="0" err="1"/>
+              <a:t>expected</a:t>
+            </a:r>
+            <a:r>
+              <a:rPr lang="it-IT" sz="2000" dirty="0"/>
+              <a:t> </a:t>
+            </a:r>
+            <a:r>
+              <a:rPr lang="it-IT" sz="2000" dirty="0" err="1"/>
+              <a:t>dimensions</a:t>
+            </a:r>
+            <a:r>
+              <a:rPr lang="it-IT" sz="2000" dirty="0"/>
+              <a:t>.</a:t>
+            </a:r>
           </a:p>
         </p:txBody>
       </p:sp>
@@ -21501,7 +23844,7 @@
               <p:nvPr/>
             </p:nvPicPr>
             <p:blipFill>
-              <a:blip r:embed="rId2">
+              <a:blip r:embed="rId3">
                 <a:extLst>
                   <a:ext uri="{28A0092B-C50C-407E-A947-70E740481C1C}">
                     <a14:useLocalDpi xmlns:a14="http://schemas.microsoft.com/office/drawing/2010/main" val="0"/>
@@ -21989,27 +24332,11 @@
                 </a:pPr>
                 <a:r>
                   <a:rPr lang="it-IT" sz="2400" dirty="0"/>
-                  <a:t>We </a:t>
+                  <a:t>The impact points of </a:t>
                 </a:r>
                 <a:r>
                   <a:rPr lang="it-IT" sz="2400" dirty="0" err="1"/>
-                  <a:t>notice</a:t>
-                </a:r>
-                <a:r>
-                  <a:rPr lang="it-IT" sz="2400" dirty="0"/>
-                  <a:t> that the position in the </a:t>
-                </a:r>
-                <a:r>
-                  <a:rPr lang="it-IT" sz="2400" dirty="0" err="1"/>
-                  <a:t>beam</a:t>
-                </a:r>
-                <a:r>
-                  <a:rPr lang="it-IT" sz="2400" dirty="0"/>
-                  <a:t> of the </a:t>
-                </a:r>
-                <a:r>
-                  <a:rPr lang="it-IT" sz="2400" dirty="0" err="1"/>
-                  <a:t>channeled</a:t>
+                  <a:t>these</a:t>
                 </a:r>
                 <a:r>
                   <a:rPr lang="it-IT" sz="2400" dirty="0"/>
@@ -22025,7 +24352,7 @@
                 </a:r>
                 <a:r>
                   <a:rPr lang="it-IT" sz="2400" dirty="0" err="1"/>
-                  <a:t>has</a:t>
+                  <a:t>revealed</a:t>
                 </a:r>
                 <a:r>
                   <a:rPr lang="it-IT" sz="2400" dirty="0"/>
@@ -22033,11 +24360,11 @@
                 </a:r>
                 <a:r>
                   <a:rPr lang="it-IT" sz="2400" dirty="0" err="1"/>
-                  <a:t>dimension</a:t>
+                  <a:t>physical</a:t>
                 </a:r>
                 <a:r>
                   <a:rPr lang="it-IT" sz="2400" dirty="0"/>
-                  <a:t> of the </a:t>
+                  <a:t> location of the </a:t>
                 </a:r>
                 <a:r>
                   <a:rPr lang="it-IT" sz="2400" dirty="0" err="1"/>
@@ -22045,7 +24372,39 @@
                 </a:r>
                 <a:r>
                   <a:rPr lang="it-IT" sz="2400" dirty="0"/>
-                  <a:t> (2mm x 8mm).</a:t>
+                  <a:t>, matching </a:t>
+                </a:r>
+                <a:r>
+                  <a:rPr lang="it-IT" sz="2400" dirty="0" err="1"/>
+                  <a:t>its</a:t>
+                </a:r>
+                <a:r>
+                  <a:rPr lang="it-IT" sz="2400" dirty="0"/>
+                  <a:t> </a:t>
+                </a:r>
+                <a:r>
+                  <a:rPr lang="it-IT" sz="2400" dirty="0" err="1"/>
+                  <a:t>expected</a:t>
+                </a:r>
+                <a:r>
+                  <a:rPr lang="it-IT" sz="2400" dirty="0"/>
+                  <a:t> </a:t>
+                </a:r>
+                <a:r>
+                  <a:rPr lang="it-IT" sz="2400" dirty="0" err="1"/>
+                  <a:t>dimensions</a:t>
+                </a:r>
+                <a:r>
+                  <a:rPr lang="it-IT" sz="2400" dirty="0"/>
+                  <a:t> of 2 by 8 </a:t>
+                </a:r>
+                <a:r>
+                  <a:rPr lang="it-IT" sz="2400" dirty="0" err="1"/>
+                  <a:t>millimeters</a:t>
+                </a:r>
+                <a:r>
+                  <a:rPr lang="it-IT" sz="2400" dirty="0"/>
+                  <a:t>.</a:t>
                 </a:r>
               </a:p>
               <a:p>
@@ -22427,10 +24786,10 @@
       </p:grpSpPr>
       <p:pic>
         <p:nvPicPr>
-          <p:cNvPr id="27" name="Immagine 26">
+          <p:cNvPr id="26" name="Immagine 25">
             <a:extLst>
               <a:ext uri="{FF2B5EF4-FFF2-40B4-BE49-F238E27FC236}">
-                <a16:creationId xmlns:a16="http://schemas.microsoft.com/office/drawing/2014/main" id="{EBACE3F9-A341-E21B-8BCA-6D5F8B6E762C}"/>
+                <a16:creationId xmlns:a16="http://schemas.microsoft.com/office/drawing/2014/main" id="{2443FA10-0844-9C43-AE75-85975EDBADAB}"/>
               </a:ext>
             </a:extLst>
           </p:cNvPr>
@@ -22447,13 +24806,14 @@
               </a:ext>
             </a:extLst>
           </a:blip>
-          <a:srcRect/>
-          <a:stretch/>
+          <a:stretch>
+            <a:fillRect/>
+          </a:stretch>
         </p:blipFill>
         <p:spPr>
           <a:xfrm>
-            <a:off x="6653454" y="3241606"/>
-            <a:ext cx="3914296" cy="3420000"/>
+            <a:off x="6651267" y="3241606"/>
+            <a:ext cx="3918670" cy="3420000"/>
           </a:xfrm>
           <a:prstGeom prst="rect">
             <a:avLst/>
@@ -22575,27 +24935,11 @@
                 </a:pPr>
                 <a:r>
                   <a:rPr lang="it-IT" sz="2400" dirty="0"/>
-                  <a:t>We </a:t>
+                  <a:t>The impact points of </a:t>
                 </a:r>
                 <a:r>
                   <a:rPr lang="it-IT" sz="2400" dirty="0" err="1"/>
-                  <a:t>notice</a:t>
-                </a:r>
-                <a:r>
-                  <a:rPr lang="it-IT" sz="2400" dirty="0"/>
-                  <a:t> that the position in the </a:t>
-                </a:r>
-                <a:r>
-                  <a:rPr lang="it-IT" sz="2400" dirty="0" err="1"/>
-                  <a:t>beam</a:t>
-                </a:r>
-                <a:r>
-                  <a:rPr lang="it-IT" sz="2400" dirty="0"/>
-                  <a:t> of the </a:t>
-                </a:r>
-                <a:r>
-                  <a:rPr lang="it-IT" sz="2400" dirty="0" err="1"/>
-                  <a:t>channeled</a:t>
+                  <a:t>these</a:t>
                 </a:r>
                 <a:r>
                   <a:rPr lang="it-IT" sz="2400" dirty="0"/>
@@ -22611,7 +24955,7 @@
                 </a:r>
                 <a:r>
                   <a:rPr lang="it-IT" sz="2400" dirty="0" err="1"/>
-                  <a:t>has</a:t>
+                  <a:t>revealed</a:t>
                 </a:r>
                 <a:r>
                   <a:rPr lang="it-IT" sz="2400" dirty="0"/>
@@ -22619,11 +24963,11 @@
                 </a:r>
                 <a:r>
                   <a:rPr lang="it-IT" sz="2400" dirty="0" err="1"/>
-                  <a:t>dimension</a:t>
+                  <a:t>physical</a:t>
                 </a:r>
                 <a:r>
                   <a:rPr lang="it-IT" sz="2400" dirty="0"/>
-                  <a:t> of the </a:t>
+                  <a:t> location of the </a:t>
                 </a:r>
                 <a:r>
                   <a:rPr lang="it-IT" sz="2400" dirty="0" err="1"/>
@@ -22631,7 +24975,39 @@
                 </a:r>
                 <a:r>
                   <a:rPr lang="it-IT" sz="2400" dirty="0"/>
-                  <a:t> (2mm x 8mm).</a:t>
+                  <a:t>, matching </a:t>
+                </a:r>
+                <a:r>
+                  <a:rPr lang="it-IT" sz="2400" dirty="0" err="1"/>
+                  <a:t>its</a:t>
+                </a:r>
+                <a:r>
+                  <a:rPr lang="it-IT" sz="2400" dirty="0"/>
+                  <a:t> </a:t>
+                </a:r>
+                <a:r>
+                  <a:rPr lang="it-IT" sz="2400" dirty="0" err="1"/>
+                  <a:t>expected</a:t>
+                </a:r>
+                <a:r>
+                  <a:rPr lang="it-IT" sz="2400" dirty="0"/>
+                  <a:t> </a:t>
+                </a:r>
+                <a:r>
+                  <a:rPr lang="it-IT" sz="2400" dirty="0" err="1"/>
+                  <a:t>dimensions</a:t>
+                </a:r>
+                <a:r>
+                  <a:rPr lang="it-IT" sz="2400" dirty="0"/>
+                  <a:t> of 2 by 8 </a:t>
+                </a:r>
+                <a:r>
+                  <a:rPr lang="it-IT" sz="2400" dirty="0" err="1"/>
+                  <a:t>millimeters</a:t>
+                </a:r>
+                <a:r>
+                  <a:rPr lang="it-IT" sz="2400" dirty="0"/>
+                  <a:t>.</a:t>
                 </a:r>
               </a:p>
               <a:p>
@@ -23577,7 +25953,23 @@
             </a:r>
             <a:r>
               <a:rPr lang="it-IT" dirty="0"/>
-              <a:t> the upstream and downstream positions of the </a:t>
+              <a:t> the </a:t>
+            </a:r>
+            <a:r>
+              <a:rPr lang="it-IT" dirty="0" err="1"/>
+              <a:t>initial</a:t>
+            </a:r>
+            <a:r>
+              <a:rPr lang="it-IT" dirty="0"/>
+              <a:t> and </a:t>
+            </a:r>
+            <a:r>
+              <a:rPr lang="it-IT" dirty="0" err="1"/>
+              <a:t>final</a:t>
+            </a:r>
+            <a:r>
+              <a:rPr lang="it-IT" dirty="0"/>
+              <a:t> positions of </a:t>
             </a:r>
             <a:r>
               <a:rPr lang="it-IT" dirty="0" err="1"/>
@@ -23804,7 +26196,7 @@
           <p:nvPr/>
         </p:nvPicPr>
         <p:blipFill>
-          <a:blip r:embed="rId2">
+          <a:blip r:embed="rId3">
             <a:extLst>
               <a:ext uri="{28A0092B-C50C-407E-A947-70E740481C1C}">
                 <a14:useLocalDpi xmlns:a14="http://schemas.microsoft.com/office/drawing/2010/main" val="0"/>
@@ -24013,7 +26405,7 @@
                 <a:avLst/>
               </a:prstGeom>
               <a:blipFill>
-                <a:blip r:embed="rId3"/>
+                <a:blip r:embed="rId4"/>
                 <a:stretch>
                   <a:fillRect/>
                 </a:stretch>
@@ -24245,7 +26637,7 @@
                 <a:avLst/>
               </a:prstGeom>
               <a:blipFill>
-                <a:blip r:embed="rId4"/>
+                <a:blip r:embed="rId5"/>
                 <a:stretch>
                   <a:fillRect/>
                 </a:stretch>
@@ -24924,7 +27316,7 @@
                 <a:ext cx="10515600" cy="4776227"/>
               </a:xfrm>
               <a:blipFill>
-                <a:blip r:embed="rId2"/>
+                <a:blip r:embed="rId3"/>
                 <a:stretch>
                   <a:fillRect l="-1043" t="-2299" r="-638"/>
                 </a:stretch>
@@ -25279,6 +27671,9 @@
               </a:bodyPr>
               <a:lstStyle/>
               <a:p>
+                <a:pPr marL="0" indent="0">
+                  <a:buNone/>
+                </a:pPr>
                 <a:r>
                   <a:rPr lang="it-IT" i="1" dirty="0" err="1"/>
                   <a:t>Torsion</a:t>
@@ -25477,7 +27872,7 @@
               <a:blipFill>
                 <a:blip r:embed="rId3"/>
                 <a:stretch>
-                  <a:fillRect l="-1043" t="-2299" r="-1739" b="-639"/>
+                  <a:fillRect l="-1217" t="-2299" r="-1739" b="-639"/>
                 </a:stretch>
               </a:blipFill>
             </p:spPr>

--- a/slides/week4.pptx
+++ b/slides/week4.pptx
@@ -221,7 +221,7 @@
           <a:p>
             <a:fld id="{D7A422DF-4847-4D6E-BB97-9B75D56F5D74}" type="datetimeFigureOut">
               <a:rPr lang="it-IT" smtClean="0"/>
-              <a:t>21/07/2026</a:t>
+              <a:t>22/07/2026</a:t>
             </a:fld>
             <a:endParaRPr lang="it-IT"/>
           </a:p>
@@ -2541,8 +2541,8 @@
         </p:nvSpPr>
         <p:spPr/>
       </p:sp>
-      <mc:AlternateContent xmlns:mc="http://schemas.openxmlformats.org/markup-compatibility/2006">
-        <mc:Choice xmlns:a14="http://schemas.microsoft.com/office/drawing/2010/main" Requires="a14">
+      <mc:AlternateContent xmlns:mc="http://schemas.openxmlformats.org/markup-compatibility/2006" xmlns:a14="http://schemas.microsoft.com/office/drawing/2010/main">
+        <mc:Choice Requires="a14">
           <p:sp>
             <p:nvSpPr>
               <p:cNvPr id="3" name="Segnaposto note 2"/>
@@ -2660,7 +2660,7 @@
             </p:txBody>
           </p:sp>
         </mc:Choice>
-        <mc:Fallback>
+        <mc:Fallback xmlns="">
           <p:sp>
             <p:nvSpPr>
               <p:cNvPr id="3" name="Segnaposto note 2"/>
@@ -3086,6 +3086,237 @@
               <a:t> bin.</a:t>
             </a:r>
           </a:p>
+          <a:p>
+            <a:r>
+              <a:rPr lang="it-IT" sz="1200" b="0" i="0" kern="1200" dirty="0">
+                <a:solidFill>
+                  <a:schemeClr val="tx1"/>
+                </a:solidFill>
+                <a:effectLst/>
+                <a:latin typeface="+mn-lt"/>
+                <a:ea typeface="+mn-ea"/>
+                <a:cs typeface="+mn-cs"/>
+              </a:rPr>
+              <a:t>I </a:t>
+            </a:r>
+            <a:r>
+              <a:rPr lang="it-IT" sz="1200" b="0" i="0" kern="1200" dirty="0" err="1">
+                <a:solidFill>
+                  <a:schemeClr val="tx1"/>
+                </a:solidFill>
+                <a:effectLst/>
+                <a:latin typeface="+mn-lt"/>
+                <a:ea typeface="+mn-ea"/>
+                <a:cs typeface="+mn-cs"/>
+              </a:rPr>
+              <a:t>want</a:t>
+            </a:r>
+            <a:r>
+              <a:rPr lang="it-IT" sz="1200" b="0" i="0" kern="1200" dirty="0">
+                <a:solidFill>
+                  <a:schemeClr val="tx1"/>
+                </a:solidFill>
+                <a:effectLst/>
+                <a:latin typeface="+mn-lt"/>
+                <a:ea typeface="+mn-ea"/>
+                <a:cs typeface="+mn-cs"/>
+              </a:rPr>
+              <a:t> to use the </a:t>
+            </a:r>
+            <a:r>
+              <a:rPr lang="it-IT" sz="1200" b="0" i="0" kern="1200" dirty="0" err="1">
+                <a:solidFill>
+                  <a:schemeClr val="tx1"/>
+                </a:solidFill>
+                <a:effectLst/>
+                <a:latin typeface="+mn-lt"/>
+                <a:ea typeface="+mn-ea"/>
+                <a:cs typeface="+mn-cs"/>
+              </a:rPr>
+              <a:t>simplest</a:t>
+            </a:r>
+            <a:r>
+              <a:rPr lang="it-IT" sz="1200" b="0" i="0" kern="1200" dirty="0">
+                <a:solidFill>
+                  <a:schemeClr val="tx1"/>
+                </a:solidFill>
+                <a:effectLst/>
+                <a:latin typeface="+mn-lt"/>
+                <a:ea typeface="+mn-ea"/>
+                <a:cs typeface="+mn-cs"/>
+              </a:rPr>
+              <a:t> model that can </a:t>
+            </a:r>
+            <a:r>
+              <a:rPr lang="it-IT" sz="1200" b="0" i="0" kern="1200" dirty="0" err="1">
+                <a:solidFill>
+                  <a:schemeClr val="tx1"/>
+                </a:solidFill>
+                <a:effectLst/>
+                <a:latin typeface="+mn-lt"/>
+                <a:ea typeface="+mn-ea"/>
+                <a:cs typeface="+mn-cs"/>
+              </a:rPr>
+              <a:t>accurately</a:t>
+            </a:r>
+            <a:r>
+              <a:rPr lang="it-IT" sz="1200" b="0" i="0" kern="1200" dirty="0">
+                <a:solidFill>
+                  <a:schemeClr val="tx1"/>
+                </a:solidFill>
+                <a:effectLst/>
+                <a:latin typeface="+mn-lt"/>
+                <a:ea typeface="+mn-ea"/>
+                <a:cs typeface="+mn-cs"/>
+              </a:rPr>
+              <a:t> </a:t>
+            </a:r>
+            <a:r>
+              <a:rPr lang="it-IT" sz="1200" b="0" i="0" kern="1200" dirty="0" err="1">
+                <a:solidFill>
+                  <a:schemeClr val="tx1"/>
+                </a:solidFill>
+                <a:effectLst/>
+                <a:latin typeface="+mn-lt"/>
+                <a:ea typeface="+mn-ea"/>
+                <a:cs typeface="+mn-cs"/>
+              </a:rPr>
+              <a:t>describe</a:t>
+            </a:r>
+            <a:r>
+              <a:rPr lang="it-IT" sz="1200" b="0" i="0" kern="1200" dirty="0">
+                <a:solidFill>
+                  <a:schemeClr val="tx1"/>
+                </a:solidFill>
+                <a:effectLst/>
+                <a:latin typeface="+mn-lt"/>
+                <a:ea typeface="+mn-ea"/>
+                <a:cs typeface="+mn-cs"/>
+              </a:rPr>
+              <a:t> the data, </a:t>
+            </a:r>
+            <a:r>
+              <a:rPr lang="it-IT" sz="1200" b="0" i="0" kern="1200" dirty="0" err="1">
+                <a:solidFill>
+                  <a:schemeClr val="tx1"/>
+                </a:solidFill>
+                <a:effectLst/>
+                <a:latin typeface="+mn-lt"/>
+                <a:ea typeface="+mn-ea"/>
+                <a:cs typeface="+mn-cs"/>
+              </a:rPr>
+              <a:t>but</a:t>
+            </a:r>
+            <a:r>
+              <a:rPr lang="it-IT" sz="1200" b="0" i="0" kern="1200" dirty="0">
+                <a:solidFill>
+                  <a:schemeClr val="tx1"/>
+                </a:solidFill>
+                <a:effectLst/>
+                <a:latin typeface="+mn-lt"/>
+                <a:ea typeface="+mn-ea"/>
+                <a:cs typeface="+mn-cs"/>
+              </a:rPr>
+              <a:t> not so </a:t>
+            </a:r>
+            <a:r>
+              <a:rPr lang="it-IT" sz="1200" b="0" i="0" kern="1200" dirty="0" err="1">
+                <a:solidFill>
+                  <a:schemeClr val="tx1"/>
+                </a:solidFill>
+                <a:effectLst/>
+                <a:latin typeface="+mn-lt"/>
+                <a:ea typeface="+mn-ea"/>
+                <a:cs typeface="+mn-cs"/>
+              </a:rPr>
+              <a:t>simple</a:t>
+            </a:r>
+            <a:r>
+              <a:rPr lang="it-IT" sz="1200" b="0" i="0" kern="1200" dirty="0">
+                <a:solidFill>
+                  <a:schemeClr val="tx1"/>
+                </a:solidFill>
+                <a:effectLst/>
+                <a:latin typeface="+mn-lt"/>
+                <a:ea typeface="+mn-ea"/>
+                <a:cs typeface="+mn-cs"/>
+              </a:rPr>
+              <a:t> that it </a:t>
+            </a:r>
+            <a:r>
+              <a:rPr lang="it-IT" sz="1200" b="0" i="0" kern="1200" dirty="0" err="1">
+                <a:solidFill>
+                  <a:schemeClr val="tx1"/>
+                </a:solidFill>
+                <a:effectLst/>
+                <a:latin typeface="+mn-lt"/>
+                <a:ea typeface="+mn-ea"/>
+                <a:cs typeface="+mn-cs"/>
+              </a:rPr>
+              <a:t>hides</a:t>
+            </a:r>
+            <a:r>
+              <a:rPr lang="it-IT" sz="1200" b="0" i="0" kern="1200" dirty="0">
+                <a:solidFill>
+                  <a:schemeClr val="tx1"/>
+                </a:solidFill>
+                <a:effectLst/>
+                <a:latin typeface="+mn-lt"/>
+                <a:ea typeface="+mn-ea"/>
+                <a:cs typeface="+mn-cs"/>
+              </a:rPr>
+              <a:t> the </a:t>
+            </a:r>
+            <a:r>
+              <a:rPr lang="it-IT" sz="1200" b="0" i="0" kern="1200" dirty="0" err="1">
+                <a:solidFill>
+                  <a:schemeClr val="tx1"/>
+                </a:solidFill>
+                <a:effectLst/>
+                <a:latin typeface="+mn-lt"/>
+                <a:ea typeface="+mn-ea"/>
+                <a:cs typeface="+mn-cs"/>
+              </a:rPr>
+              <a:t>actual</a:t>
+            </a:r>
+            <a:r>
+              <a:rPr lang="it-IT" sz="1200" b="0" i="0" kern="1200" dirty="0">
+                <a:solidFill>
+                  <a:schemeClr val="tx1"/>
+                </a:solidFill>
+                <a:effectLst/>
+                <a:latin typeface="+mn-lt"/>
+                <a:ea typeface="+mn-ea"/>
+                <a:cs typeface="+mn-cs"/>
+              </a:rPr>
+              <a:t> </a:t>
+            </a:r>
+            <a:r>
+              <a:rPr lang="it-IT" sz="1200" b="0" i="0" kern="1200" dirty="0" err="1">
+                <a:solidFill>
+                  <a:schemeClr val="tx1"/>
+                </a:solidFill>
+                <a:effectLst/>
+                <a:latin typeface="+mn-lt"/>
+                <a:ea typeface="+mn-ea"/>
+                <a:cs typeface="+mn-cs"/>
+              </a:rPr>
+              <a:t>physics</a:t>
+            </a:r>
+            <a:r>
+              <a:rPr lang="it-IT" sz="1200" b="0" i="0" kern="1200">
+                <a:solidFill>
+                  <a:schemeClr val="tx1"/>
+                </a:solidFill>
+                <a:effectLst/>
+                <a:latin typeface="+mn-lt"/>
+                <a:ea typeface="+mn-ea"/>
+                <a:cs typeface="+mn-cs"/>
+              </a:rPr>
+              <a:t>.</a:t>
+            </a:r>
+            <a:endParaRPr lang="it-IT" dirty="0"/>
+          </a:p>
         </p:txBody>
       </p:sp>
       <p:sp>
@@ -3478,7 +3709,7 @@
           <a:p>
             <a:fld id="{4B734174-4AE7-4BE8-A29D-97641C0FB41A}" type="datetimeFigureOut">
               <a:rPr lang="it-IT" smtClean="0"/>
-              <a:t>21/07/2026</a:t>
+              <a:t>22/07/2026</a:t>
             </a:fld>
             <a:endParaRPr lang="it-IT"/>
           </a:p>
@@ -3676,7 +3907,7 @@
           <a:p>
             <a:fld id="{4B734174-4AE7-4BE8-A29D-97641C0FB41A}" type="datetimeFigureOut">
               <a:rPr lang="it-IT" smtClean="0"/>
-              <a:t>21/07/2026</a:t>
+              <a:t>22/07/2026</a:t>
             </a:fld>
             <a:endParaRPr lang="it-IT"/>
           </a:p>
@@ -3884,7 +4115,7 @@
           <a:p>
             <a:fld id="{4B734174-4AE7-4BE8-A29D-97641C0FB41A}" type="datetimeFigureOut">
               <a:rPr lang="it-IT" smtClean="0"/>
-              <a:t>21/07/2026</a:t>
+              <a:t>22/07/2026</a:t>
             </a:fld>
             <a:endParaRPr lang="it-IT"/>
           </a:p>
@@ -4082,7 +4313,7 @@
           <a:p>
             <a:fld id="{4B734174-4AE7-4BE8-A29D-97641C0FB41A}" type="datetimeFigureOut">
               <a:rPr lang="it-IT" smtClean="0"/>
-              <a:t>21/07/2026</a:t>
+              <a:t>22/07/2026</a:t>
             </a:fld>
             <a:endParaRPr lang="it-IT"/>
           </a:p>
@@ -4357,7 +4588,7 @@
           <a:p>
             <a:fld id="{4B734174-4AE7-4BE8-A29D-97641C0FB41A}" type="datetimeFigureOut">
               <a:rPr lang="it-IT" smtClean="0"/>
-              <a:t>21/07/2026</a:t>
+              <a:t>22/07/2026</a:t>
             </a:fld>
             <a:endParaRPr lang="it-IT"/>
           </a:p>
@@ -4622,7 +4853,7 @@
           <a:p>
             <a:fld id="{4B734174-4AE7-4BE8-A29D-97641C0FB41A}" type="datetimeFigureOut">
               <a:rPr lang="it-IT" smtClean="0"/>
-              <a:t>21/07/2026</a:t>
+              <a:t>22/07/2026</a:t>
             </a:fld>
             <a:endParaRPr lang="it-IT"/>
           </a:p>
@@ -5034,7 +5265,7 @@
           <a:p>
             <a:fld id="{4B734174-4AE7-4BE8-A29D-97641C0FB41A}" type="datetimeFigureOut">
               <a:rPr lang="it-IT" smtClean="0"/>
-              <a:t>21/07/2026</a:t>
+              <a:t>22/07/2026</a:t>
             </a:fld>
             <a:endParaRPr lang="it-IT"/>
           </a:p>
@@ -5175,7 +5406,7 @@
           <a:p>
             <a:fld id="{4B734174-4AE7-4BE8-A29D-97641C0FB41A}" type="datetimeFigureOut">
               <a:rPr lang="it-IT" smtClean="0"/>
-              <a:t>21/07/2026</a:t>
+              <a:t>22/07/2026</a:t>
             </a:fld>
             <a:endParaRPr lang="it-IT"/>
           </a:p>
@@ -5288,7 +5519,7 @@
           <a:p>
             <a:fld id="{4B734174-4AE7-4BE8-A29D-97641C0FB41A}" type="datetimeFigureOut">
               <a:rPr lang="it-IT" smtClean="0"/>
-              <a:t>21/07/2026</a:t>
+              <a:t>22/07/2026</a:t>
             </a:fld>
             <a:endParaRPr lang="it-IT"/>
           </a:p>
@@ -5599,7 +5830,7 @@
           <a:p>
             <a:fld id="{4B734174-4AE7-4BE8-A29D-97641C0FB41A}" type="datetimeFigureOut">
               <a:rPr lang="it-IT" smtClean="0"/>
-              <a:t>21/07/2026</a:t>
+              <a:t>22/07/2026</a:t>
             </a:fld>
             <a:endParaRPr lang="it-IT"/>
           </a:p>
@@ -5887,7 +6118,7 @@
           <a:p>
             <a:fld id="{4B734174-4AE7-4BE8-A29D-97641C0FB41A}" type="datetimeFigureOut">
               <a:rPr lang="it-IT" smtClean="0"/>
-              <a:t>21/07/2026</a:t>
+              <a:t>22/07/2026</a:t>
             </a:fld>
             <a:endParaRPr lang="it-IT"/>
           </a:p>
@@ -6128,7 +6359,7 @@
           <a:p>
             <a:fld id="{4B734174-4AE7-4BE8-A29D-97641C0FB41A}" type="datetimeFigureOut">
               <a:rPr lang="it-IT" smtClean="0"/>
-              <a:t>21/07/2026</a:t>
+              <a:t>22/07/2026</a:t>
             </a:fld>
             <a:endParaRPr lang="it-IT"/>
           </a:p>
@@ -7227,8 +7458,8 @@
           </a:p>
         </p:txBody>
       </p:sp>
-      <mc:AlternateContent xmlns:mc="http://schemas.openxmlformats.org/markup-compatibility/2006">
-        <mc:Choice xmlns:a14="http://schemas.microsoft.com/office/drawing/2010/main" Requires="a14">
+      <mc:AlternateContent xmlns:mc="http://schemas.openxmlformats.org/markup-compatibility/2006" xmlns:a14="http://schemas.microsoft.com/office/drawing/2010/main">
+        <mc:Choice Requires="a14">
           <p:sp>
             <p:nvSpPr>
               <p:cNvPr id="3" name="Segnaposto contenuto 2">
@@ -7513,7 +7744,7 @@
             </p:txBody>
           </p:sp>
         </mc:Choice>
-        <mc:Fallback>
+        <mc:Fallback xmlns="">
           <p:sp>
             <p:nvSpPr>
               <p:cNvPr id="3" name="Segnaposto contenuto 2">
@@ -7897,8 +8128,8 @@
           </a:p>
         </p:txBody>
       </p:sp>
-      <mc:AlternateContent xmlns:mc="http://schemas.openxmlformats.org/markup-compatibility/2006">
-        <mc:Choice xmlns:a14="http://schemas.microsoft.com/office/drawing/2010/main" Requires="a14">
+      <mc:AlternateContent xmlns:mc="http://schemas.openxmlformats.org/markup-compatibility/2006" xmlns:a14="http://schemas.microsoft.com/office/drawing/2010/main">
+        <mc:Choice Requires="a14">
           <p:sp>
             <p:nvSpPr>
               <p:cNvPr id="3" name="Segnaposto contenuto 2">
@@ -8729,7 +8960,7 @@
             </p:txBody>
           </p:sp>
         </mc:Choice>
-        <mc:Fallback>
+        <mc:Fallback xmlns="">
           <p:sp>
             <p:nvSpPr>
               <p:cNvPr id="3" name="Segnaposto contenuto 2">
@@ -10344,8 +10575,8 @@
           </a:prstGeom>
         </p:spPr>
       </p:pic>
-      <mc:AlternateContent xmlns:mc="http://schemas.openxmlformats.org/markup-compatibility/2006">
-        <mc:Choice xmlns:a14="http://schemas.microsoft.com/office/drawing/2010/main" Requires="a14">
+      <mc:AlternateContent xmlns:mc="http://schemas.openxmlformats.org/markup-compatibility/2006" xmlns:a14="http://schemas.microsoft.com/office/drawing/2010/main">
+        <mc:Choice Requires="a14">
           <p:sp>
             <p:nvSpPr>
               <p:cNvPr id="26" name="Rettangolo con angoli arrotondati 25">
@@ -10558,7 +10789,7 @@
             </p:txBody>
           </p:sp>
         </mc:Choice>
-        <mc:Fallback>
+        <mc:Fallback xmlns="">
           <p:sp>
             <p:nvSpPr>
               <p:cNvPr id="26" name="Rettangolo con angoli arrotondati 25">
@@ -11369,8 +11600,8 @@
           </a:fontRef>
         </p:style>
       </p:cxnSp>
-      <mc:AlternateContent xmlns:mc="http://schemas.openxmlformats.org/markup-compatibility/2006">
-        <mc:Choice xmlns:a14="http://schemas.microsoft.com/office/drawing/2010/main" Requires="a14">
+      <mc:AlternateContent xmlns:mc="http://schemas.openxmlformats.org/markup-compatibility/2006" xmlns:a14="http://schemas.microsoft.com/office/drawing/2010/main">
+        <mc:Choice Requires="a14">
           <p:sp>
             <p:nvSpPr>
               <p:cNvPr id="7" name="CasellaDiTesto 6">
@@ -11399,6 +11630,7 @@
               </a:bodyPr>
               <a:lstStyle/>
               <a:p>
+                <a:pPr/>
                 <a14:m>
                   <m:oMathPara xmlns:m="http://schemas.openxmlformats.org/officeDocument/2006/math">
                     <m:oMathParaPr>
@@ -11451,7 +11683,7 @@
             </p:txBody>
           </p:sp>
         </mc:Choice>
-        <mc:Fallback>
+        <mc:Fallback xmlns="">
           <p:sp>
             <p:nvSpPr>
               <p:cNvPr id="7" name="CasellaDiTesto 6">
@@ -11496,8 +11728,8 @@
           </p:sp>
         </mc:Fallback>
       </mc:AlternateContent>
-      <mc:AlternateContent xmlns:mc="http://schemas.openxmlformats.org/markup-compatibility/2006">
-        <mc:Choice xmlns:a14="http://schemas.microsoft.com/office/drawing/2010/main" Requires="a14">
+      <mc:AlternateContent xmlns:mc="http://schemas.openxmlformats.org/markup-compatibility/2006" xmlns:a14="http://schemas.microsoft.com/office/drawing/2010/main">
+        <mc:Choice Requires="a14">
           <p:sp>
             <p:nvSpPr>
               <p:cNvPr id="12" name="CasellaDiTesto 11">
@@ -11579,7 +11811,7 @@
             </p:txBody>
           </p:sp>
         </mc:Choice>
-        <mc:Fallback>
+        <mc:Fallback xmlns="">
           <p:sp>
             <p:nvSpPr>
               <p:cNvPr id="12" name="CasellaDiTesto 11">
@@ -11928,8 +12160,8 @@
           </a:p>
         </p:txBody>
       </p:sp>
-      <mc:AlternateContent xmlns:mc="http://schemas.openxmlformats.org/markup-compatibility/2006">
-        <mc:Choice xmlns:a14="http://schemas.microsoft.com/office/drawing/2010/main" Requires="a14">
+      <mc:AlternateContent xmlns:mc="http://schemas.openxmlformats.org/markup-compatibility/2006" xmlns:a14="http://schemas.microsoft.com/office/drawing/2010/main">
+        <mc:Choice Requires="a14">
           <p:graphicFrame>
             <p:nvGraphicFramePr>
               <p:cNvPr id="11" name="Segnaposto contenuto 10">
@@ -12577,13 +12809,7 @@
                                       <a:rPr lang="it-IT" sz="2400" b="0" i="1" smtClean="0">
                                         <a:latin typeface="Cambria Math" panose="02040503050406030204" pitchFamily="18" charset="0"/>
                                       </a:rPr>
-                                      <m:t>18.8</m:t>
-                                    </m:r>
-                                    <m:r>
-                                      <a:rPr lang="it-IT" sz="2400" b="0" i="1" smtClean="0">
-                                        <a:latin typeface="Cambria Math" panose="02040503050406030204" pitchFamily="18" charset="0"/>
-                                      </a:rPr>
-                                      <m:t>±0.01</m:t>
+                                      <m:t>18.8±0.01</m:t>
                                     </m:r>
                                   </m:e>
                                 </m:d>
@@ -12793,19 +13019,7 @@
                                       <a:rPr lang="it-IT" sz="2400" b="0" i="1" smtClean="0">
                                         <a:latin typeface="Cambria Math" panose="02040503050406030204" pitchFamily="18" charset="0"/>
                                       </a:rPr>
-                                      <m:t>18.</m:t>
-                                    </m:r>
-                                    <m:r>
-                                      <a:rPr lang="it-IT" sz="2400" b="0" i="1" smtClean="0">
-                                        <a:latin typeface="Cambria Math" panose="02040503050406030204" pitchFamily="18" charset="0"/>
-                                      </a:rPr>
-                                      <m:t>4</m:t>
-                                    </m:r>
-                                    <m:r>
-                                      <a:rPr lang="it-IT" sz="2400" b="0" i="1" smtClean="0">
-                                        <a:latin typeface="Cambria Math" panose="02040503050406030204" pitchFamily="18" charset="0"/>
-                                      </a:rPr>
-                                      <m:t>±0.01</m:t>
+                                      <m:t>18.4±0.01</m:t>
                                     </m:r>
                                   </m:e>
                                 </m:d>
@@ -13034,31 +13248,7 @@
                                       <a:rPr lang="it-IT" sz="2400" b="0" i="1" smtClean="0">
                                         <a:latin typeface="Cambria Math" panose="02040503050406030204" pitchFamily="18" charset="0"/>
                                       </a:rPr>
-                                      <m:t>1</m:t>
-                                    </m:r>
-                                    <m:r>
-                                      <a:rPr lang="it-IT" sz="2400" b="0" i="1" smtClean="0">
-                                        <a:latin typeface="Cambria Math" panose="02040503050406030204" pitchFamily="18" charset="0"/>
-                                      </a:rPr>
-                                      <m:t>7</m:t>
-                                    </m:r>
-                                    <m:r>
-                                      <a:rPr lang="it-IT" sz="2400" b="0" i="1" smtClean="0">
-                                        <a:latin typeface="Cambria Math" panose="02040503050406030204" pitchFamily="18" charset="0"/>
-                                      </a:rPr>
-                                      <m:t>.</m:t>
-                                    </m:r>
-                                    <m:r>
-                                      <a:rPr lang="it-IT" sz="2400" b="0" i="1" smtClean="0">
-                                        <a:latin typeface="Cambria Math" panose="02040503050406030204" pitchFamily="18" charset="0"/>
-                                      </a:rPr>
-                                      <m:t>2</m:t>
-                                    </m:r>
-                                    <m:r>
-                                      <a:rPr lang="it-IT" sz="2400" b="0" i="1" smtClean="0">
-                                        <a:latin typeface="Cambria Math" panose="02040503050406030204" pitchFamily="18" charset="0"/>
-                                      </a:rPr>
-                                      <m:t>±0.01</m:t>
+                                      <m:t>17.2±0.01</m:t>
                                     </m:r>
                                   </m:e>
                                 </m:d>
@@ -13341,19 +13531,7 @@
                                       <a:rPr lang="it-IT" sz="2400" b="0" i="1" smtClean="0">
                                         <a:latin typeface="Cambria Math" panose="02040503050406030204" pitchFamily="18" charset="0"/>
                                       </a:rPr>
-                                      <m:t>1</m:t>
-                                    </m:r>
-                                    <m:r>
-                                      <a:rPr lang="it-IT" sz="2400" b="0" i="1" smtClean="0">
-                                        <a:latin typeface="Cambria Math" panose="02040503050406030204" pitchFamily="18" charset="0"/>
-                                      </a:rPr>
-                                      <m:t>7</m:t>
-                                    </m:r>
-                                    <m:r>
-                                      <a:rPr lang="it-IT" sz="2400" b="0" i="1" smtClean="0">
-                                        <a:latin typeface="Cambria Math" panose="02040503050406030204" pitchFamily="18" charset="0"/>
-                                      </a:rPr>
-                                      <m:t>.8±0.01</m:t>
+                                      <m:t>17.8±0.01</m:t>
                                     </m:r>
                                   </m:e>
                                 </m:d>
@@ -13585,19 +13763,7 @@
                                       <a:rPr lang="it-IT" sz="2400" b="0" i="1" smtClean="0">
                                         <a:latin typeface="Cambria Math" panose="02040503050406030204" pitchFamily="18" charset="0"/>
                                       </a:rPr>
-                                      <m:t>18.</m:t>
-                                    </m:r>
-                                    <m:r>
-                                      <a:rPr lang="it-IT" sz="2400" b="0" i="1" smtClean="0">
-                                        <a:latin typeface="Cambria Math" panose="02040503050406030204" pitchFamily="18" charset="0"/>
-                                      </a:rPr>
-                                      <m:t>0</m:t>
-                                    </m:r>
-                                    <m:r>
-                                      <a:rPr lang="it-IT" sz="2400" b="0" i="1" smtClean="0">
-                                        <a:latin typeface="Cambria Math" panose="02040503050406030204" pitchFamily="18" charset="0"/>
-                                      </a:rPr>
-                                      <m:t>±0.01</m:t>
+                                      <m:t>18.0±0.01</m:t>
                                     </m:r>
                                   </m:e>
                                 </m:d>
@@ -13635,7 +13801,7 @@
             </a:graphic>
           </p:graphicFrame>
         </mc:Choice>
-        <mc:Fallback>
+        <mc:Fallback xmlns="">
           <p:graphicFrame>
             <p:nvGraphicFramePr>
               <p:cNvPr id="11" name="Segnaposto contenuto 10">
@@ -15053,8 +15219,8 @@
           </a:p>
         </p:txBody>
       </p:sp>
-      <mc:AlternateContent xmlns:mc="http://schemas.openxmlformats.org/markup-compatibility/2006">
-        <mc:Choice xmlns:a14="http://schemas.microsoft.com/office/drawing/2010/main" Requires="a14">
+      <mc:AlternateContent xmlns:mc="http://schemas.openxmlformats.org/markup-compatibility/2006" xmlns:a14="http://schemas.microsoft.com/office/drawing/2010/main">
+        <mc:Choice Requires="a14">
           <p:graphicFrame>
             <p:nvGraphicFramePr>
               <p:cNvPr id="11" name="Segnaposto contenuto 10">
@@ -15659,19 +15825,7 @@
                                       <a:rPr lang="it-IT" sz="2400" b="0" i="1" smtClean="0">
                                         <a:latin typeface="Cambria Math" panose="02040503050406030204" pitchFamily="18" charset="0"/>
                                       </a:rPr>
-                                      <m:t>18.</m:t>
-                                    </m:r>
-                                    <m:r>
-                                      <a:rPr lang="it-IT" sz="2400" b="0" i="1" smtClean="0">
-                                        <a:latin typeface="Cambria Math" panose="02040503050406030204" pitchFamily="18" charset="0"/>
-                                      </a:rPr>
-                                      <m:t>1</m:t>
-                                    </m:r>
-                                    <m:r>
-                                      <a:rPr lang="it-IT" sz="2400" b="0" i="1" smtClean="0">
-                                        <a:latin typeface="Cambria Math" panose="02040503050406030204" pitchFamily="18" charset="0"/>
-                                      </a:rPr>
-                                      <m:t>±0.01</m:t>
+                                      <m:t>18.1±0.01</m:t>
                                     </m:r>
                                   </m:e>
                                 </m:d>
@@ -15771,7 +15925,6 @@
                         <a:bodyPr/>
                         <a:lstStyle/>
                         <a:p>
-                          <a:pPr/>
                           <a:endParaRPr/>
                         </a:p>
                       </a:txBody>
@@ -15792,7 +15945,6 @@
                         <a:bodyPr/>
                         <a:lstStyle/>
                         <a:p>
-                          <a:pPr/>
                           <a:endParaRPr/>
                         </a:p>
                       </a:txBody>
@@ -15882,7 +16034,6 @@
                         <a:bodyPr/>
                         <a:lstStyle/>
                         <a:p>
-                          <a:pPr/>
                           <a:endParaRPr dirty="0"/>
                         </a:p>
                       </a:txBody>
@@ -15912,7 +16063,6 @@
                         <a:bodyPr/>
                         <a:lstStyle/>
                         <a:p>
-                          <a:pPr/>
                           <a:endParaRPr dirty="0"/>
                         </a:p>
                       </a:txBody>
@@ -16251,19 +16401,7 @@
                                       <a:rPr lang="it-IT" sz="2400" b="0" i="1" smtClean="0">
                                         <a:latin typeface="Cambria Math" panose="02040503050406030204" pitchFamily="18" charset="0"/>
                                       </a:rPr>
-                                      <m:t>17.</m:t>
-                                    </m:r>
-                                    <m:r>
-                                      <a:rPr lang="it-IT" sz="2400" b="0" i="1" smtClean="0">
-                                        <a:latin typeface="Cambria Math" panose="02040503050406030204" pitchFamily="18" charset="0"/>
-                                      </a:rPr>
-                                      <m:t>9</m:t>
-                                    </m:r>
-                                    <m:r>
-                                      <a:rPr lang="it-IT" sz="2400" b="0" i="1" smtClean="0">
-                                        <a:latin typeface="Cambria Math" panose="02040503050406030204" pitchFamily="18" charset="0"/>
-                                      </a:rPr>
-                                      <m:t>±0.01</m:t>
+                                      <m:t>17.9±0.01</m:t>
                                     </m:r>
                                   </m:e>
                                 </m:d>
@@ -16368,7 +16506,6 @@
                         <a:bodyPr/>
                         <a:lstStyle/>
                         <a:p>
-                          <a:pPr/>
                           <a:endParaRPr dirty="0"/>
                         </a:p>
                       </a:txBody>
@@ -16463,7 +16600,7 @@
             </a:graphic>
           </p:graphicFrame>
         </mc:Choice>
-        <mc:Fallback>
+        <mc:Fallback xmlns="">
           <p:graphicFrame>
             <p:nvGraphicFramePr>
               <p:cNvPr id="11" name="Segnaposto contenuto 10">
@@ -18637,8 +18774,8 @@
             </a:prstGeom>
           </p:spPr>
         </p:pic>
-        <mc:AlternateContent xmlns:mc="http://schemas.openxmlformats.org/markup-compatibility/2006">
-          <mc:Choice xmlns:a14="http://schemas.microsoft.com/office/drawing/2010/main" Requires="a14">
+        <mc:AlternateContent xmlns:mc="http://schemas.openxmlformats.org/markup-compatibility/2006" xmlns:a14="http://schemas.microsoft.com/office/drawing/2010/main">
+          <mc:Choice Requires="a14">
             <p:sp>
               <p:nvSpPr>
                 <p:cNvPr id="11" name="Rettangolo con angoli arrotondati 10">
@@ -18759,7 +18896,7 @@
               </p:txBody>
             </p:sp>
           </mc:Choice>
-          <mc:Fallback>
+          <mc:Fallback xmlns="">
             <p:sp>
               <p:nvSpPr>
                 <p:cNvPr id="11" name="Rettangolo con angoli arrotondati 10">
@@ -18809,8 +18946,8 @@
             </p:sp>
           </mc:Fallback>
         </mc:AlternateContent>
-        <mc:AlternateContent xmlns:mc="http://schemas.openxmlformats.org/markup-compatibility/2006">
-          <mc:Choice xmlns:a14="http://schemas.microsoft.com/office/drawing/2010/main" Requires="a14">
+        <mc:AlternateContent xmlns:mc="http://schemas.openxmlformats.org/markup-compatibility/2006" xmlns:a14="http://schemas.microsoft.com/office/drawing/2010/main">
+          <mc:Choice Requires="a14">
             <p:sp>
               <p:nvSpPr>
                 <p:cNvPr id="15" name="Rettangolo con angoli arrotondati 14">
@@ -18931,7 +19068,7 @@
               </p:txBody>
             </p:sp>
           </mc:Choice>
-          <mc:Fallback>
+          <mc:Fallback xmlns="">
             <p:sp>
               <p:nvSpPr>
                 <p:cNvPr id="15" name="Rettangolo con angoli arrotondati 14">
@@ -19798,8 +19935,8 @@
             </a:fontRef>
           </p:style>
         </p:cxnSp>
-        <mc:AlternateContent xmlns:mc="http://schemas.openxmlformats.org/markup-compatibility/2006">
-          <mc:Choice xmlns:a14="http://schemas.microsoft.com/office/drawing/2010/main" Requires="a14">
+        <mc:AlternateContent xmlns:mc="http://schemas.openxmlformats.org/markup-compatibility/2006" xmlns:a14="http://schemas.microsoft.com/office/drawing/2010/main">
+          <mc:Choice Requires="a14">
             <p:sp>
               <p:nvSpPr>
                 <p:cNvPr id="11" name="Rettangolo con angoli arrotondati 10">
@@ -19943,7 +20080,7 @@
               </p:txBody>
             </p:sp>
           </mc:Choice>
-          <mc:Fallback>
+          <mc:Fallback xmlns="">
             <p:sp>
               <p:nvSpPr>
                 <p:cNvPr id="11" name="Rettangolo con angoli arrotondati 10">
@@ -19994,8 +20131,8 @@
           </mc:Fallback>
         </mc:AlternateContent>
       </p:grpSp>
-      <mc:AlternateContent xmlns:mc="http://schemas.openxmlformats.org/markup-compatibility/2006">
-        <mc:Choice xmlns:a14="http://schemas.microsoft.com/office/drawing/2010/main" Requires="a14">
+      <mc:AlternateContent xmlns:mc="http://schemas.openxmlformats.org/markup-compatibility/2006" xmlns:a14="http://schemas.microsoft.com/office/drawing/2010/main">
+        <mc:Choice Requires="a14">
           <p:sp>
             <p:nvSpPr>
               <p:cNvPr id="12" name="CasellaDiTesto 11">
@@ -20383,7 +20520,7 @@
             </p:txBody>
           </p:sp>
         </mc:Choice>
-        <mc:Fallback>
+        <mc:Fallback xmlns="">
           <p:sp>
             <p:nvSpPr>
               <p:cNvPr id="12" name="CasellaDiTesto 11">
@@ -20899,8 +21036,8 @@
           </a:prstGeom>
         </p:spPr>
       </p:pic>
-      <mc:AlternateContent xmlns:mc="http://schemas.openxmlformats.org/markup-compatibility/2006">
-        <mc:Choice xmlns:a14="http://schemas.microsoft.com/office/drawing/2010/main" Requires="a14">
+      <mc:AlternateContent xmlns:mc="http://schemas.openxmlformats.org/markup-compatibility/2006" xmlns:a14="http://schemas.microsoft.com/office/drawing/2010/main">
+        <mc:Choice Requires="a14">
           <p:sp>
             <p:nvSpPr>
               <p:cNvPr id="12" name="CasellaDiTesto 11">
@@ -21288,7 +21425,7 @@
             </p:txBody>
           </p:sp>
         </mc:Choice>
-        <mc:Fallback>
+        <mc:Fallback xmlns="">
           <p:sp>
             <p:nvSpPr>
               <p:cNvPr id="12" name="CasellaDiTesto 11">
@@ -24297,8 +24434,8 @@
           </a:p>
         </p:txBody>
       </p:sp>
-      <mc:AlternateContent xmlns:mc="http://schemas.openxmlformats.org/markup-compatibility/2006">
-        <mc:Choice xmlns:a14="http://schemas.microsoft.com/office/drawing/2010/main" Requires="a14">
+      <mc:AlternateContent xmlns:mc="http://schemas.openxmlformats.org/markup-compatibility/2006" xmlns:a14="http://schemas.microsoft.com/office/drawing/2010/main">
+        <mc:Choice Requires="a14">
           <p:sp>
             <p:nvSpPr>
               <p:cNvPr id="3" name="Segnaposto contenuto 2">
@@ -24545,7 +24682,7 @@
             </p:txBody>
           </p:sp>
         </mc:Choice>
-        <mc:Fallback>
+        <mc:Fallback xmlns="">
           <p:sp>
             <p:nvSpPr>
               <p:cNvPr id="3" name="Segnaposto contenuto 2">
@@ -24900,8 +25037,8 @@
           </a:p>
         </p:txBody>
       </p:sp>
-      <mc:AlternateContent xmlns:mc="http://schemas.openxmlformats.org/markup-compatibility/2006">
-        <mc:Choice xmlns:a14="http://schemas.microsoft.com/office/drawing/2010/main" Requires="a14">
+      <mc:AlternateContent xmlns:mc="http://schemas.openxmlformats.org/markup-compatibility/2006" xmlns:a14="http://schemas.microsoft.com/office/drawing/2010/main">
+        <mc:Choice Requires="a14">
           <p:sp>
             <p:nvSpPr>
               <p:cNvPr id="3" name="Segnaposto contenuto 2">
@@ -25148,7 +25285,7 @@
             </p:txBody>
           </p:sp>
         </mc:Choice>
-        <mc:Fallback>
+        <mc:Fallback xmlns="">
           <p:sp>
             <p:nvSpPr>
               <p:cNvPr id="3" name="Segnaposto contenuto 2">
@@ -26217,8 +26354,8 @@
           </a:prstGeom>
         </p:spPr>
       </p:pic>
-      <mc:AlternateContent xmlns:mc="http://schemas.openxmlformats.org/markup-compatibility/2006">
-        <mc:Choice xmlns:a14="http://schemas.microsoft.com/office/drawing/2010/main" Requires="a14">
+      <mc:AlternateContent xmlns:mc="http://schemas.openxmlformats.org/markup-compatibility/2006" xmlns:a14="http://schemas.microsoft.com/office/drawing/2010/main">
+        <mc:Choice Requires="a14">
           <p:sp>
             <p:nvSpPr>
               <p:cNvPr id="11" name="Rettangolo con angoli arrotondati 10">
@@ -26276,7 +26413,7 @@
                       <m:sSub>
                         <m:sSubPr>
                           <m:ctrlPr>
-                            <a:rPr lang="it-IT" sz="2000" b="0" i="0" smtClean="0">
+                            <a:rPr lang="it-IT" sz="2000" b="0" i="1" smtClean="0">
                               <a:solidFill>
                                 <a:schemeClr val="tx1"/>
                               </a:solidFill>
@@ -26381,7 +26518,7 @@
             </p:txBody>
           </p:sp>
         </mc:Choice>
-        <mc:Fallback>
+        <mc:Fallback xmlns="">
           <p:sp>
             <p:nvSpPr>
               <p:cNvPr id="11" name="Rettangolo con angoli arrotondati 10">
@@ -26431,8 +26568,8 @@
           </p:sp>
         </mc:Fallback>
       </mc:AlternateContent>
-      <mc:AlternateContent xmlns:mc="http://schemas.openxmlformats.org/markup-compatibility/2006">
-        <mc:Choice xmlns:a14="http://schemas.microsoft.com/office/drawing/2010/main" Requires="a14">
+      <mc:AlternateContent xmlns:mc="http://schemas.openxmlformats.org/markup-compatibility/2006" xmlns:a14="http://schemas.microsoft.com/office/drawing/2010/main">
+        <mc:Choice Requires="a14">
           <p:sp>
             <p:nvSpPr>
               <p:cNvPr id="13" name="Rettangolo con angoli arrotondati 12">
@@ -26531,25 +26668,7 @@
                           </a:solidFill>
                           <a:latin typeface="Cambria Math" panose="02040503050406030204" pitchFamily="18" charset="0"/>
                         </a:rPr>
-                        <m:t>=0.00</m:t>
-                      </m:r>
-                      <m:r>
-                        <a:rPr lang="it-IT" sz="2000" b="0" i="1" smtClean="0">
-                          <a:solidFill>
-                            <a:schemeClr val="tx1"/>
-                          </a:solidFill>
-                          <a:latin typeface="Cambria Math" panose="02040503050406030204" pitchFamily="18" charset="0"/>
-                        </a:rPr>
-                        <m:t>4</m:t>
-                      </m:r>
-                      <m:r>
-                        <a:rPr lang="it-IT" sz="2000" b="0" i="1" smtClean="0">
-                          <a:solidFill>
-                            <a:schemeClr val="tx1"/>
-                          </a:solidFill>
-                          <a:latin typeface="Cambria Math" panose="02040503050406030204" pitchFamily="18" charset="0"/>
-                        </a:rPr>
-                        <m:t> </m:t>
+                        <m:t>=0.004 </m:t>
                       </m:r>
                       <m:r>
                         <m:rPr>
@@ -26613,7 +26732,7 @@
             </p:txBody>
           </p:sp>
         </mc:Choice>
-        <mc:Fallback>
+        <mc:Fallback xmlns="">
           <p:sp>
             <p:nvSpPr>
               <p:cNvPr id="13" name="Rettangolo con angoli arrotondati 12">
@@ -26744,8 +26863,8 @@
           </a:p>
         </p:txBody>
       </p:sp>
-      <mc:AlternateContent xmlns:mc="http://schemas.openxmlformats.org/markup-compatibility/2006">
-        <mc:Choice xmlns:a14="http://schemas.microsoft.com/office/drawing/2010/main" Requires="a14">
+      <mc:AlternateContent xmlns:mc="http://schemas.openxmlformats.org/markup-compatibility/2006" xmlns:a14="http://schemas.microsoft.com/office/drawing/2010/main">
+        <mc:Choice Requires="a14">
           <p:sp>
             <p:nvSpPr>
               <p:cNvPr id="3" name="Segnaposto contenuto 2">
@@ -27293,7 +27412,7 @@
             </p:txBody>
           </p:sp>
         </mc:Choice>
-        <mc:Fallback>
+        <mc:Fallback xmlns="">
           <p:sp>
             <p:nvSpPr>
               <p:cNvPr id="3" name="Segnaposto contenuto 2">
@@ -27641,8 +27760,8 @@
           </a:p>
         </p:txBody>
       </p:sp>
-      <mc:AlternateContent xmlns:mc="http://schemas.openxmlformats.org/markup-compatibility/2006">
-        <mc:Choice xmlns:a14="http://schemas.microsoft.com/office/drawing/2010/main" Requires="a14">
+      <mc:AlternateContent xmlns:mc="http://schemas.openxmlformats.org/markup-compatibility/2006" xmlns:a14="http://schemas.microsoft.com/office/drawing/2010/main">
+        <mc:Choice Requires="a14">
           <p:sp>
             <p:nvSpPr>
               <p:cNvPr id="3" name="Segnaposto contenuto 2">
@@ -27847,7 +27966,7 @@
             </p:txBody>
           </p:sp>
         </mc:Choice>
-        <mc:Fallback>
+        <mc:Fallback xmlns="">
           <p:sp>
             <p:nvSpPr>
               <p:cNvPr id="3" name="Segnaposto contenuto 2">

--- a/slides/week4.pptx
+++ b/slides/week4.pptx
@@ -1359,6 +1359,736 @@
     <p:extLst>
       <p:ext uri="{BB962C8B-B14F-4D97-AF65-F5344CB8AC3E}">
         <p14:creationId xmlns:p14="http://schemas.microsoft.com/office/powerpoint/2010/main" val="2038418374"/>
+      </p:ext>
+    </p:extLst>
+  </p:cSld>
+  <p:clrMapOvr>
+    <a:masterClrMapping/>
+  </p:clrMapOvr>
+</p:notes>
+</file>
+
+<file path=ppt/notesSlides/notesSlide14.xml><?xml version="1.0" encoding="utf-8"?>
+<p:notes xmlns:a="http://schemas.openxmlformats.org/drawingml/2006/main" xmlns:r="http://schemas.openxmlformats.org/officeDocument/2006/relationships" xmlns:p="http://schemas.openxmlformats.org/presentationml/2006/main">
+  <p:cSld>
+    <p:spTree>
+      <p:nvGrpSpPr>
+        <p:cNvPr id="1" name=""/>
+        <p:cNvGrpSpPr/>
+        <p:nvPr/>
+      </p:nvGrpSpPr>
+      <p:grpSpPr>
+        <a:xfrm>
+          <a:off x="0" y="0"/>
+          <a:ext cx="0" cy="0"/>
+          <a:chOff x="0" y="0"/>
+          <a:chExt cx="0" cy="0"/>
+        </a:xfrm>
+      </p:grpSpPr>
+      <p:sp>
+        <p:nvSpPr>
+          <p:cNvPr id="2" name="Segnaposto immagine diapositiva 1"/>
+          <p:cNvSpPr>
+            <a:spLocks noGrp="1" noRot="1" noChangeAspect="1"/>
+          </p:cNvSpPr>
+          <p:nvPr>
+            <p:ph type="sldImg"/>
+          </p:nvPr>
+        </p:nvSpPr>
+        <p:spPr/>
+      </p:sp>
+      <mc:AlternateContent xmlns:mc="http://schemas.openxmlformats.org/markup-compatibility/2006">
+        <mc:Choice xmlns:a14="http://schemas.microsoft.com/office/drawing/2010/main" Requires="a14">
+          <p:sp>
+            <p:nvSpPr>
+              <p:cNvPr id="3" name="Segnaposto note 2"/>
+              <p:cNvSpPr>
+                <a:spLocks noGrp="1"/>
+              </p:cNvSpPr>
+              <p:nvPr>
+                <p:ph type="body" idx="1"/>
+              </p:nvPr>
+            </p:nvSpPr>
+            <p:spPr/>
+            <p:txBody>
+              <a:bodyPr/>
+              <a:lstStyle/>
+              <a:p>
+                <a:r>
+                  <a:rPr lang="it-IT" dirty="0"/>
+                  <a:t>If not </a:t>
+                </a:r>
+                <a:r>
+                  <a:rPr lang="it-IT" dirty="0" err="1"/>
+                  <a:t>considering</a:t>
+                </a:r>
+                <a:r>
+                  <a:rPr lang="it-IT" dirty="0"/>
+                  <a:t> </a:t>
+                </a:r>
+                <a:r>
+                  <a:rPr lang="it-IT" dirty="0" err="1"/>
+                  <a:t>any</a:t>
+                </a:r>
+                <a:r>
+                  <a:rPr lang="it-IT" dirty="0"/>
+                  <a:t> </a:t>
+                </a:r>
+                <a:r>
+                  <a:rPr lang="it-IT" dirty="0" err="1"/>
+                  <a:t>torsion</a:t>
+                </a:r>
+                <a:r>
+                  <a:rPr lang="it-IT" dirty="0"/>
+                  <a:t> </a:t>
+                </a:r>
+                <a:r>
+                  <a:rPr lang="it-IT" dirty="0" err="1"/>
+                  <a:t>correction</a:t>
+                </a:r>
+                <a:r>
+                  <a:rPr lang="it-IT" dirty="0"/>
+                  <a:t>: we </a:t>
+                </a:r>
+                <a:r>
+                  <a:rPr lang="it-IT" dirty="0" err="1"/>
+                  <a:t>would</a:t>
+                </a:r>
+                <a:r>
+                  <a:rPr lang="it-IT" dirty="0"/>
+                  <a:t> just </a:t>
+                </a:r>
+                <a:r>
+                  <a:rPr lang="it-IT" dirty="0" err="1"/>
+                  <a:t>calculate</a:t>
+                </a:r>
+                <a:r>
+                  <a:rPr lang="it-IT" dirty="0"/>
+                  <a:t> the </a:t>
+                </a:r>
+                <a:r>
+                  <a:rPr lang="it-IT" dirty="0" err="1"/>
+                  <a:t>channeling</a:t>
+                </a:r>
+                <a:r>
+                  <a:rPr lang="it-IT" dirty="0"/>
+                  <a:t> </a:t>
+                </a:r>
+                <a:r>
+                  <a:rPr lang="it-IT" dirty="0" err="1"/>
+                  <a:t>efficiency</a:t>
+                </a:r>
+                <a:r>
+                  <a:rPr lang="it-IT" dirty="0"/>
+                  <a:t> </a:t>
+                </a:r>
+                <a:r>
+                  <a:rPr lang="it-IT" dirty="0" err="1"/>
+                  <a:t>through</a:t>
+                </a:r>
+                <a:r>
+                  <a:rPr lang="it-IT" dirty="0"/>
+                  <a:t> </a:t>
+                </a:r>
+                <a:r>
+                  <a:rPr lang="it-IT" dirty="0" err="1"/>
+                  <a:t>several</a:t>
+                </a:r>
+                <a:r>
+                  <a:rPr lang="it-IT" dirty="0"/>
+                  <a:t> </a:t>
+                </a:r>
+                <a:r>
+                  <a:rPr lang="it-IT" dirty="0" err="1"/>
+                  <a:t>iterations</a:t>
+                </a:r>
+                <a:r>
+                  <a:rPr lang="it-IT" dirty="0"/>
+                  <a:t> </a:t>
+                </a:r>
+                <a:r>
+                  <a:rPr lang="it-IT" dirty="0" err="1"/>
+                  <a:t>varying</a:t>
+                </a:r>
+                <a:r>
+                  <a:rPr lang="it-IT" dirty="0"/>
+                  <a:t> </a:t>
+                </a:r>
+                <a14:m>
+                  <m:oMath xmlns:m="http://schemas.openxmlformats.org/officeDocument/2006/math">
+                    <m:sSub>
+                      <m:sSubPr>
+                        <m:ctrlPr>
+                          <a:rPr lang="it-IT" b="0" i="1" smtClean="0">
+                            <a:latin typeface="Cambria Math" panose="02040503050406030204" pitchFamily="18" charset="0"/>
+                          </a:rPr>
+                        </m:ctrlPr>
+                      </m:sSubPr>
+                      <m:e>
+                        <m:r>
+                          <a:rPr lang="it-IT" b="0" i="1" smtClean="0">
+                            <a:latin typeface="Cambria Math" panose="02040503050406030204" pitchFamily="18" charset="0"/>
+                          </a:rPr>
+                          <m:t>𝜃</m:t>
+                        </m:r>
+                      </m:e>
+                      <m:sub>
+                        <m:r>
+                          <a:rPr lang="it-IT" b="0" i="1" smtClean="0">
+                            <a:latin typeface="Cambria Math" panose="02040503050406030204" pitchFamily="18" charset="0"/>
+                          </a:rPr>
+                          <m:t>0</m:t>
+                        </m:r>
+                      </m:sub>
+                    </m:sSub>
+                  </m:oMath>
+                </a14:m>
+                <a:r>
+                  <a:rPr lang="it-IT" dirty="0"/>
+                  <a:t> </a:t>
+                </a:r>
+                <a:r>
+                  <a:rPr lang="it-IT" dirty="0" err="1"/>
+                  <a:t>until</a:t>
+                </a:r>
+                <a:r>
+                  <a:rPr lang="it-IT" dirty="0"/>
+                  <a:t> the </a:t>
+                </a:r>
+                <a:r>
+                  <a:rPr lang="it-IT" dirty="0" err="1"/>
+                  <a:t>highest</a:t>
+                </a:r>
+                <a:r>
+                  <a:rPr lang="it-IT" baseline="0" dirty="0"/>
+                  <a:t> </a:t>
+                </a:r>
+                <a:r>
+                  <a:rPr lang="it-IT" baseline="0" dirty="0" err="1"/>
+                  <a:t>efficiency</a:t>
+                </a:r>
+                <a:r>
+                  <a:rPr lang="it-IT" baseline="0" dirty="0"/>
+                  <a:t> </a:t>
+                </a:r>
+                <a:r>
+                  <a:rPr lang="it-IT" baseline="0" dirty="0" err="1"/>
+                  <a:t>is</a:t>
+                </a:r>
+                <a:r>
+                  <a:rPr lang="it-IT" baseline="0" dirty="0"/>
+                  <a:t> </a:t>
+                </a:r>
+                <a:r>
+                  <a:rPr lang="it-IT" baseline="0" dirty="0" err="1"/>
+                  <a:t>found</a:t>
+                </a:r>
+                <a:r>
+                  <a:rPr lang="it-IT" baseline="0" dirty="0"/>
+                  <a:t>, </a:t>
+                </a:r>
+                <a:r>
+                  <a:rPr lang="it-IT" baseline="0" dirty="0" err="1"/>
+                  <a:t>representing</a:t>
+                </a:r>
+                <a:r>
+                  <a:rPr lang="it-IT" baseline="0" dirty="0"/>
+                  <a:t> the best </a:t>
+                </a:r>
+                <a:r>
+                  <a:rPr lang="it-IT" baseline="0" dirty="0" err="1"/>
+                  <a:t>alignment</a:t>
+                </a:r>
+                <a:r>
+                  <a:rPr lang="it-IT" baseline="0" dirty="0"/>
+                  <a:t> of incoming </a:t>
+                </a:r>
+                <a:r>
+                  <a:rPr lang="it-IT" baseline="0" dirty="0" err="1"/>
+                  <a:t>particles</a:t>
+                </a:r>
+                <a:r>
+                  <a:rPr lang="it-IT" baseline="0" dirty="0"/>
+                  <a:t> with the </a:t>
+                </a:r>
+                <a:r>
+                  <a:rPr lang="it-IT" baseline="0" dirty="0" err="1"/>
+                  <a:t>crystalline</a:t>
+                </a:r>
+                <a:r>
+                  <a:rPr lang="it-IT" baseline="0" dirty="0"/>
+                  <a:t> </a:t>
+                </a:r>
+                <a:r>
+                  <a:rPr lang="it-IT" baseline="0" dirty="0" err="1"/>
+                  <a:t>planes</a:t>
+                </a:r>
+                <a:endParaRPr lang="it-IT" dirty="0"/>
+              </a:p>
+            </p:txBody>
+          </p:sp>
+        </mc:Choice>
+        <mc:Fallback>
+          <p:sp>
+            <p:nvSpPr>
+              <p:cNvPr id="3" name="Segnaposto note 2"/>
+              <p:cNvSpPr>
+                <a:spLocks noGrp="1"/>
+              </p:cNvSpPr>
+              <p:nvPr>
+                <p:ph type="body" idx="1"/>
+              </p:nvPr>
+            </p:nvSpPr>
+            <p:spPr/>
+            <p:txBody>
+              <a:bodyPr/>
+              <a:lstStyle/>
+              <a:p>
+                <a:r>
+                  <a:rPr lang="it-IT" dirty="0"/>
+                  <a:t>If not </a:t>
+                </a:r>
+                <a:r>
+                  <a:rPr lang="it-IT" dirty="0" err="1"/>
+                  <a:t>considering</a:t>
+                </a:r>
+                <a:r>
+                  <a:rPr lang="it-IT" dirty="0"/>
+                  <a:t> </a:t>
+                </a:r>
+                <a:r>
+                  <a:rPr lang="it-IT" dirty="0" err="1"/>
+                  <a:t>any</a:t>
+                </a:r>
+                <a:r>
+                  <a:rPr lang="it-IT" dirty="0"/>
+                  <a:t> </a:t>
+                </a:r>
+                <a:r>
+                  <a:rPr lang="it-IT" dirty="0" err="1"/>
+                  <a:t>torsion</a:t>
+                </a:r>
+                <a:r>
+                  <a:rPr lang="it-IT" dirty="0"/>
+                  <a:t> </a:t>
+                </a:r>
+                <a:r>
+                  <a:rPr lang="it-IT" dirty="0" err="1"/>
+                  <a:t>correction</a:t>
+                </a:r>
+                <a:r>
+                  <a:rPr lang="it-IT" dirty="0"/>
+                  <a:t>: we </a:t>
+                </a:r>
+                <a:r>
+                  <a:rPr lang="it-IT" dirty="0" err="1"/>
+                  <a:t>would</a:t>
+                </a:r>
+                <a:r>
+                  <a:rPr lang="it-IT" dirty="0"/>
+                  <a:t> just </a:t>
+                </a:r>
+                <a:r>
+                  <a:rPr lang="it-IT" dirty="0" err="1"/>
+                  <a:t>calculate</a:t>
+                </a:r>
+                <a:r>
+                  <a:rPr lang="it-IT" dirty="0"/>
+                  <a:t> the </a:t>
+                </a:r>
+                <a:r>
+                  <a:rPr lang="it-IT" dirty="0" err="1"/>
+                  <a:t>channeling</a:t>
+                </a:r>
+                <a:r>
+                  <a:rPr lang="it-IT" dirty="0"/>
+                  <a:t> </a:t>
+                </a:r>
+                <a:r>
+                  <a:rPr lang="it-IT" dirty="0" err="1"/>
+                  <a:t>efficiency</a:t>
+                </a:r>
+                <a:r>
+                  <a:rPr lang="it-IT" dirty="0"/>
+                  <a:t> </a:t>
+                </a:r>
+                <a:r>
+                  <a:rPr lang="it-IT" dirty="0" err="1"/>
+                  <a:t>through</a:t>
+                </a:r>
+                <a:r>
+                  <a:rPr lang="it-IT" dirty="0"/>
+                  <a:t> </a:t>
+                </a:r>
+                <a:r>
+                  <a:rPr lang="it-IT" dirty="0" err="1"/>
+                  <a:t>several</a:t>
+                </a:r>
+                <a:r>
+                  <a:rPr lang="it-IT" dirty="0"/>
+                  <a:t> </a:t>
+                </a:r>
+                <a:r>
+                  <a:rPr lang="it-IT" dirty="0" err="1"/>
+                  <a:t>iterations</a:t>
+                </a:r>
+                <a:r>
+                  <a:rPr lang="it-IT" dirty="0"/>
+                  <a:t> </a:t>
+                </a:r>
+                <a:r>
+                  <a:rPr lang="it-IT" dirty="0" err="1"/>
+                  <a:t>varying</a:t>
+                </a:r>
+                <a:r>
+                  <a:rPr lang="it-IT" dirty="0"/>
+                  <a:t> </a:t>
+                </a:r>
+                <a:r>
+                  <a:rPr lang="it-IT" b="0" i="0">
+                    <a:latin typeface="Cambria Math" panose="02040503050406030204" pitchFamily="18" charset="0"/>
+                  </a:rPr>
+                  <a:t>𝜃_0</a:t>
+                </a:r>
+                <a:r>
+                  <a:rPr lang="it-IT" dirty="0"/>
+                  <a:t> </a:t>
+                </a:r>
+                <a:r>
+                  <a:rPr lang="it-IT" dirty="0" err="1"/>
+                  <a:t>until</a:t>
+                </a:r>
+                <a:r>
+                  <a:rPr lang="it-IT" dirty="0"/>
+                  <a:t> the </a:t>
+                </a:r>
+                <a:r>
+                  <a:rPr lang="it-IT" dirty="0" err="1"/>
+                  <a:t>highest</a:t>
+                </a:r>
+                <a:r>
+                  <a:rPr lang="it-IT" baseline="0" dirty="0"/>
+                  <a:t> </a:t>
+                </a:r>
+                <a:r>
+                  <a:rPr lang="it-IT" baseline="0" dirty="0" err="1"/>
+                  <a:t>efficiency</a:t>
+                </a:r>
+                <a:r>
+                  <a:rPr lang="it-IT" baseline="0" dirty="0"/>
+                  <a:t> </a:t>
+                </a:r>
+                <a:r>
+                  <a:rPr lang="it-IT" baseline="0" dirty="0" err="1"/>
+                  <a:t>is</a:t>
+                </a:r>
+                <a:r>
+                  <a:rPr lang="it-IT" baseline="0" dirty="0"/>
+                  <a:t> </a:t>
+                </a:r>
+                <a:r>
+                  <a:rPr lang="it-IT" baseline="0" dirty="0" err="1"/>
+                  <a:t>found</a:t>
+                </a:r>
+                <a:r>
+                  <a:rPr lang="it-IT" baseline="0" dirty="0"/>
+                  <a:t>, </a:t>
+                </a:r>
+                <a:r>
+                  <a:rPr lang="it-IT" baseline="0" dirty="0" err="1"/>
+                  <a:t>representing</a:t>
+                </a:r>
+                <a:r>
+                  <a:rPr lang="it-IT" baseline="0" dirty="0"/>
+                  <a:t> the best </a:t>
+                </a:r>
+                <a:r>
+                  <a:rPr lang="it-IT" baseline="0" dirty="0" err="1"/>
+                  <a:t>alignment</a:t>
+                </a:r>
+                <a:r>
+                  <a:rPr lang="it-IT" baseline="0" dirty="0"/>
+                  <a:t> of incoming </a:t>
+                </a:r>
+                <a:r>
+                  <a:rPr lang="it-IT" baseline="0" dirty="0" err="1"/>
+                  <a:t>particles</a:t>
+                </a:r>
+                <a:r>
+                  <a:rPr lang="it-IT" baseline="0" dirty="0"/>
+                  <a:t> with the </a:t>
+                </a:r>
+                <a:r>
+                  <a:rPr lang="it-IT" baseline="0" dirty="0" err="1"/>
+                  <a:t>crystalline</a:t>
+                </a:r>
+                <a:r>
+                  <a:rPr lang="it-IT" baseline="0" dirty="0"/>
+                  <a:t> </a:t>
+                </a:r>
+                <a:r>
+                  <a:rPr lang="it-IT" baseline="0" dirty="0" err="1"/>
+                  <a:t>planes</a:t>
+                </a:r>
+                <a:endParaRPr lang="it-IT" dirty="0"/>
+              </a:p>
+            </p:txBody>
+          </p:sp>
+        </mc:Fallback>
+      </mc:AlternateContent>
+      <p:sp>
+        <p:nvSpPr>
+          <p:cNvPr id="4" name="Segnaposto numero diapositiva 3"/>
+          <p:cNvSpPr>
+            <a:spLocks noGrp="1"/>
+          </p:cNvSpPr>
+          <p:nvPr>
+            <p:ph type="sldNum" sz="quarter" idx="5"/>
+          </p:nvPr>
+        </p:nvSpPr>
+        <p:spPr/>
+        <p:txBody>
+          <a:bodyPr/>
+          <a:lstStyle/>
+          <a:p>
+            <a:fld id="{C205392F-55BF-4B8E-AF01-45F81C88C286}" type="slidenum">
+              <a:rPr lang="it-IT" smtClean="0"/>
+              <a:t>22</a:t>
+            </a:fld>
+            <a:endParaRPr lang="it-IT"/>
+          </a:p>
+        </p:txBody>
+      </p:sp>
+    </p:spTree>
+    <p:extLst>
+      <p:ext uri="{BB962C8B-B14F-4D97-AF65-F5344CB8AC3E}">
+        <p14:creationId xmlns:p14="http://schemas.microsoft.com/office/powerpoint/2010/main" val="3133840375"/>
+      </p:ext>
+    </p:extLst>
+  </p:cSld>
+  <p:clrMapOvr>
+    <a:masterClrMapping/>
+  </p:clrMapOvr>
+</p:notes>
+</file>
+
+<file path=ppt/notesSlides/notesSlide15.xml><?xml version="1.0" encoding="utf-8"?>
+<p:notes xmlns:a="http://schemas.openxmlformats.org/drawingml/2006/main" xmlns:r="http://schemas.openxmlformats.org/officeDocument/2006/relationships" xmlns:p="http://schemas.openxmlformats.org/presentationml/2006/main">
+  <p:cSld>
+    <p:spTree>
+      <p:nvGrpSpPr>
+        <p:cNvPr id="1" name=""/>
+        <p:cNvGrpSpPr/>
+        <p:nvPr/>
+      </p:nvGrpSpPr>
+      <p:grpSpPr>
+        <a:xfrm>
+          <a:off x="0" y="0"/>
+          <a:ext cx="0" cy="0"/>
+          <a:chOff x="0" y="0"/>
+          <a:chExt cx="0" cy="0"/>
+        </a:xfrm>
+      </p:grpSpPr>
+      <p:sp>
+        <p:nvSpPr>
+          <p:cNvPr id="2" name="Segnaposto immagine diapositiva 1"/>
+          <p:cNvSpPr>
+            <a:spLocks noGrp="1" noRot="1" noChangeAspect="1"/>
+          </p:cNvSpPr>
+          <p:nvPr>
+            <p:ph type="sldImg"/>
+          </p:nvPr>
+        </p:nvSpPr>
+        <p:spPr/>
+      </p:sp>
+      <p:sp>
+        <p:nvSpPr>
+          <p:cNvPr id="3" name="Segnaposto note 2"/>
+          <p:cNvSpPr>
+            <a:spLocks noGrp="1"/>
+          </p:cNvSpPr>
+          <p:nvPr>
+            <p:ph type="body" idx="1"/>
+          </p:nvPr>
+        </p:nvSpPr>
+        <p:spPr/>
+        <p:txBody>
+          <a:bodyPr/>
+          <a:lstStyle/>
+          <a:p>
+            <a:r>
+              <a:rPr lang="it-IT" dirty="0" err="1"/>
+              <a:t>dividing</a:t>
+            </a:r>
+            <a:r>
+              <a:rPr lang="it-IT" dirty="0"/>
+              <a:t> data </a:t>
+            </a:r>
+            <a:r>
+              <a:rPr lang="it-IT" dirty="0" err="1"/>
+              <a:t>into</a:t>
+            </a:r>
+            <a:r>
+              <a:rPr lang="it-IT" dirty="0"/>
+              <a:t> </a:t>
+            </a:r>
+            <a:r>
+              <a:rPr lang="it-IT" dirty="0" err="1"/>
+              <a:t>subsamples</a:t>
+            </a:r>
+            <a:r>
+              <a:rPr lang="it-IT" dirty="0"/>
+              <a:t> </a:t>
+            </a:r>
+            <a:r>
+              <a:rPr lang="it-IT" dirty="0" err="1"/>
+              <a:t>as</a:t>
+            </a:r>
+            <a:r>
+              <a:rPr lang="it-IT" dirty="0"/>
+              <a:t> a function of the </a:t>
+            </a:r>
+            <a:r>
+              <a:rPr lang="it-IT" dirty="0" err="1"/>
+              <a:t>particle</a:t>
+            </a:r>
+            <a:r>
+              <a:rPr lang="it-IT" dirty="0"/>
+              <a:t> impact position on the </a:t>
+            </a:r>
+            <a:r>
+              <a:rPr lang="it-IT" dirty="0" err="1"/>
+              <a:t>crystal</a:t>
+            </a:r>
+            <a:r>
+              <a:rPr lang="it-IT" dirty="0"/>
+              <a:t> </a:t>
+            </a:r>
+            <a:r>
+              <a:rPr lang="it-IT" dirty="0" err="1"/>
+              <a:t>surface</a:t>
+            </a:r>
+            <a:r>
+              <a:rPr lang="it-IT" dirty="0"/>
+              <a:t>.</a:t>
+            </a:r>
+          </a:p>
+          <a:p>
+            <a:r>
+              <a:rPr lang="it-IT" dirty="0"/>
+              <a:t>this </a:t>
+            </a:r>
+            <a:r>
+              <a:rPr lang="it-IT" dirty="0" err="1"/>
+              <a:t>allows</a:t>
+            </a:r>
+            <a:r>
+              <a:rPr lang="it-IT" dirty="0"/>
+              <a:t> </a:t>
+            </a:r>
+            <a:r>
+              <a:rPr lang="it-IT" dirty="0" err="1"/>
+              <a:t>identifying</a:t>
+            </a:r>
+            <a:r>
+              <a:rPr lang="it-IT" dirty="0"/>
+              <a:t> the </a:t>
+            </a:r>
+            <a:r>
+              <a:rPr lang="it-IT" dirty="0" err="1"/>
+              <a:t>orientation</a:t>
+            </a:r>
+            <a:r>
+              <a:rPr lang="it-IT" dirty="0"/>
+              <a:t> with the maximum </a:t>
+            </a:r>
+            <a:r>
+              <a:rPr lang="it-IT" dirty="0" err="1"/>
+              <a:t>channeling</a:t>
+            </a:r>
+            <a:r>
+              <a:rPr lang="it-IT" dirty="0"/>
+              <a:t> </a:t>
+            </a:r>
+            <a:r>
+              <a:rPr lang="it-IT" dirty="0" err="1"/>
+              <a:t>efficiency</a:t>
+            </a:r>
+            <a:r>
+              <a:rPr lang="it-IT" dirty="0"/>
+              <a:t>, </a:t>
+            </a:r>
+            <a:r>
+              <a:rPr lang="it-IT" dirty="0" err="1"/>
+              <a:t>corresponding</a:t>
+            </a:r>
+            <a:r>
+              <a:rPr lang="it-IT" dirty="0"/>
+              <a:t> to the </a:t>
+            </a:r>
+            <a:r>
+              <a:rPr lang="it-IT" dirty="0" err="1"/>
+              <a:t>orientation</a:t>
+            </a:r>
+            <a:r>
+              <a:rPr lang="it-IT" dirty="0"/>
+              <a:t> of the </a:t>
+            </a:r>
+            <a:r>
+              <a:rPr lang="it-IT" dirty="0" err="1"/>
+              <a:t>channeling</a:t>
+            </a:r>
+            <a:r>
+              <a:rPr lang="it-IT" dirty="0"/>
+              <a:t> </a:t>
+            </a:r>
+            <a:r>
+              <a:rPr lang="it-IT" dirty="0" err="1"/>
+              <a:t>planes</a:t>
+            </a:r>
+            <a:r>
+              <a:rPr lang="it-IT" dirty="0"/>
+              <a:t> of the </a:t>
+            </a:r>
+            <a:r>
+              <a:rPr lang="it-IT" dirty="0" err="1"/>
+              <a:t>crystal</a:t>
+            </a:r>
+            <a:r>
+              <a:rPr lang="it-IT"/>
+              <a:t>.</a:t>
+            </a:r>
+            <a:endParaRPr lang="it-IT" dirty="0"/>
+          </a:p>
+        </p:txBody>
+      </p:sp>
+      <p:sp>
+        <p:nvSpPr>
+          <p:cNvPr id="4" name="Segnaposto numero diapositiva 3"/>
+          <p:cNvSpPr>
+            <a:spLocks noGrp="1"/>
+          </p:cNvSpPr>
+          <p:nvPr>
+            <p:ph type="sldNum" sz="quarter" idx="5"/>
+          </p:nvPr>
+        </p:nvSpPr>
+        <p:spPr/>
+        <p:txBody>
+          <a:bodyPr/>
+          <a:lstStyle/>
+          <a:p>
+            <a:fld id="{C205392F-55BF-4B8E-AF01-45F81C88C286}" type="slidenum">
+              <a:rPr lang="it-IT" smtClean="0"/>
+              <a:t>25</a:t>
+            </a:fld>
+            <a:endParaRPr lang="it-IT"/>
+          </a:p>
+        </p:txBody>
+      </p:sp>
+    </p:spTree>
+    <p:extLst>
+      <p:ext uri="{BB962C8B-B14F-4D97-AF65-F5344CB8AC3E}">
+        <p14:creationId xmlns:p14="http://schemas.microsoft.com/office/powerpoint/2010/main" val="4271900420"/>
       </p:ext>
     </p:extLst>
   </p:cSld>
@@ -8128,8 +8858,8 @@
           </a:p>
         </p:txBody>
       </p:sp>
-      <mc:AlternateContent xmlns:mc="http://schemas.openxmlformats.org/markup-compatibility/2006" xmlns:a14="http://schemas.microsoft.com/office/drawing/2010/main">
-        <mc:Choice Requires="a14">
+      <mc:AlternateContent xmlns:mc="http://schemas.openxmlformats.org/markup-compatibility/2006">
+        <mc:Choice xmlns:a14="http://schemas.microsoft.com/office/drawing/2010/main" Requires="a14">
           <p:sp>
             <p:nvSpPr>
               <p:cNvPr id="3" name="Segnaposto contenuto 2">
@@ -8433,17 +9163,17 @@
                 </a:r>
                 <a14:m>
                   <m:oMath xmlns:m="http://schemas.openxmlformats.org/officeDocument/2006/math">
-                    <m:sSubSup>
-                      <m:sSubSupPr>
+                    <m:sSub>
+                      <m:sSubPr>
                         <m:ctrlPr>
-                          <a:rPr lang="it-IT" i="1">
+                          <a:rPr lang="it-IT" b="0" i="1" smtClean="0">
                             <a:latin typeface="Cambria Math" panose="02040503050406030204" pitchFamily="18" charset="0"/>
                           </a:rPr>
                         </m:ctrlPr>
-                      </m:sSubSupPr>
+                      </m:sSubPr>
                       <m:e>
                         <m:r>
-                          <a:rPr lang="it-IT" i="1">
+                          <a:rPr lang="it-IT" b="0" i="1" smtClean="0">
                             <a:latin typeface="Cambria Math" panose="02040503050406030204" pitchFamily="18" charset="0"/>
                           </a:rPr>
                           <m:t>𝜃</m:t>
@@ -8451,21 +9181,13 @@
                       </m:e>
                       <m:sub>
                         <m:r>
-                          <a:rPr lang="it-IT" i="1">
+                          <a:rPr lang="it-IT" b="0" i="1" smtClean="0">
                             <a:latin typeface="Cambria Math" panose="02040503050406030204" pitchFamily="18" charset="0"/>
                           </a:rPr>
                           <m:t>0</m:t>
                         </m:r>
                       </m:sub>
-                      <m:sup>
-                        <m:r>
-                          <a:rPr lang="it-IT" i="1">
-                            <a:latin typeface="Cambria Math" panose="02040503050406030204" pitchFamily="18" charset="0"/>
-                          </a:rPr>
-                          <m:t>𝑓𝑖𝑡</m:t>
-                        </m:r>
-                      </m:sup>
-                    </m:sSubSup>
+                    </m:sSub>
                     <m:r>
                       <a:rPr lang="it-IT" i="1">
                         <a:latin typeface="Cambria Math" panose="02040503050406030204" pitchFamily="18" charset="0"/>
@@ -8960,7 +9682,7 @@
             </p:txBody>
           </p:sp>
         </mc:Choice>
-        <mc:Fallback xmlns="">
+        <mc:Fallback>
           <p:sp>
             <p:nvSpPr>
               <p:cNvPr id="3" name="Segnaposto contenuto 2">
@@ -19852,7 +20574,7 @@
           <p:nvPr/>
         </p:nvPicPr>
         <p:blipFill>
-          <a:blip r:embed="rId2">
+          <a:blip r:embed="rId3">
             <a:extLst>
               <a:ext uri="{28A0092B-C50C-407E-A947-70E740481C1C}">
                 <a14:useLocalDpi xmlns:a14="http://schemas.microsoft.com/office/drawing/2010/main" val="0"/>
@@ -20104,7 +20826,7 @@
                   <a:avLst/>
                 </a:prstGeom>
                 <a:blipFill>
-                  <a:blip r:embed="rId3"/>
+                  <a:blip r:embed="rId4"/>
                   <a:stretch>
                     <a:fillRect/>
                   </a:stretch>
@@ -20544,7 +21266,7 @@
                 <a:avLst/>
               </a:prstGeom>
               <a:blipFill>
-                <a:blip r:embed="rId4"/>
+                <a:blip r:embed="rId5"/>
                 <a:stretch>
                   <a:fillRect l="-2342" t="-924" b="-2403"/>
                 </a:stretch>
@@ -22039,15 +22761,7 @@
             </a:r>
             <a:r>
               <a:rPr lang="it-IT" sz="2400" dirty="0"/>
-              <a:t> a </a:t>
-            </a:r>
-            <a:r>
-              <a:rPr lang="it-IT" sz="2400" dirty="0" err="1"/>
-              <a:t>fucntion</a:t>
-            </a:r>
-            <a:r>
-              <a:rPr lang="it-IT" sz="2400" dirty="0"/>
-              <a:t> of the incoming angle, after </a:t>
+              <a:t> a function of the incoming angle, after </a:t>
             </a:r>
             <a:r>
               <a:rPr lang="it-IT" sz="2400" dirty="0" err="1"/>
@@ -22439,7 +23153,7 @@
           <p:nvPr/>
         </p:nvPicPr>
         <p:blipFill>
-          <a:blip r:embed="rId2">
+          <a:blip r:embed="rId3">
             <a:extLst>
               <a:ext uri="{28A0092B-C50C-407E-A947-70E740481C1C}">
                 <a14:useLocalDpi xmlns:a14="http://schemas.microsoft.com/office/drawing/2010/main" val="0"/>

--- a/slides/week4.pptx
+++ b/slides/week4.pptx
@@ -5,38 +5,39 @@
     <p:sldMasterId id="2147483648" r:id="rId1"/>
   </p:sldMasterIdLst>
   <p:notesMasterIdLst>
-    <p:notesMasterId r:id="rId31"/>
+    <p:notesMasterId r:id="rId32"/>
   </p:notesMasterIdLst>
   <p:sldIdLst>
     <p:sldId id="256" r:id="rId2"/>
     <p:sldId id="286" r:id="rId3"/>
-    <p:sldId id="288" r:id="rId4"/>
-    <p:sldId id="292" r:id="rId5"/>
-    <p:sldId id="317" r:id="rId6"/>
-    <p:sldId id="289" r:id="rId7"/>
-    <p:sldId id="291" r:id="rId8"/>
-    <p:sldId id="318" r:id="rId9"/>
-    <p:sldId id="316" r:id="rId10"/>
-    <p:sldId id="297" r:id="rId11"/>
-    <p:sldId id="295" r:id="rId12"/>
-    <p:sldId id="299" r:id="rId13"/>
-    <p:sldId id="298" r:id="rId14"/>
-    <p:sldId id="303" r:id="rId15"/>
-    <p:sldId id="314" r:id="rId16"/>
-    <p:sldId id="315" r:id="rId17"/>
-    <p:sldId id="301" r:id="rId18"/>
-    <p:sldId id="308" r:id="rId19"/>
-    <p:sldId id="304" r:id="rId20"/>
-    <p:sldId id="309" r:id="rId21"/>
-    <p:sldId id="305" r:id="rId22"/>
-    <p:sldId id="319" r:id="rId23"/>
-    <p:sldId id="320" r:id="rId24"/>
-    <p:sldId id="311" r:id="rId25"/>
-    <p:sldId id="310" r:id="rId26"/>
-    <p:sldId id="306" r:id="rId27"/>
-    <p:sldId id="307" r:id="rId28"/>
-    <p:sldId id="312" r:id="rId29"/>
-    <p:sldId id="313" r:id="rId30"/>
+    <p:sldId id="319" r:id="rId4"/>
+    <p:sldId id="288" r:id="rId5"/>
+    <p:sldId id="292" r:id="rId6"/>
+    <p:sldId id="317" r:id="rId7"/>
+    <p:sldId id="289" r:id="rId8"/>
+    <p:sldId id="291" r:id="rId9"/>
+    <p:sldId id="318" r:id="rId10"/>
+    <p:sldId id="316" r:id="rId11"/>
+    <p:sldId id="297" r:id="rId12"/>
+    <p:sldId id="295" r:id="rId13"/>
+    <p:sldId id="299" r:id="rId14"/>
+    <p:sldId id="298" r:id="rId15"/>
+    <p:sldId id="303" r:id="rId16"/>
+    <p:sldId id="314" r:id="rId17"/>
+    <p:sldId id="315" r:id="rId18"/>
+    <p:sldId id="301" r:id="rId19"/>
+    <p:sldId id="308" r:id="rId20"/>
+    <p:sldId id="304" r:id="rId21"/>
+    <p:sldId id="321" r:id="rId22"/>
+    <p:sldId id="309" r:id="rId23"/>
+    <p:sldId id="305" r:id="rId24"/>
+    <p:sldId id="320" r:id="rId25"/>
+    <p:sldId id="311" r:id="rId26"/>
+    <p:sldId id="310" r:id="rId27"/>
+    <p:sldId id="306" r:id="rId28"/>
+    <p:sldId id="307" r:id="rId29"/>
+    <p:sldId id="312" r:id="rId30"/>
+    <p:sldId id="313" r:id="rId31"/>
   </p:sldIdLst>
   <p:sldSz cx="12192000" cy="6858000"/>
   <p:notesSz cx="6858000" cy="9144000"/>
@@ -847,7 +848,7 @@
           <a:p>
             <a:fld id="{C205392F-55BF-4B8E-AF01-45F81C88C286}" type="slidenum">
               <a:rPr lang="it-IT" smtClean="0"/>
-              <a:t>14</a:t>
+              <a:t>15</a:t>
             </a:fld>
             <a:endParaRPr lang="it-IT"/>
           </a:p>
@@ -1114,7 +1115,7 @@
           <a:p>
             <a:fld id="{C205392F-55BF-4B8E-AF01-45F81C88C286}" type="slidenum">
               <a:rPr lang="it-IT" smtClean="0"/>
-              <a:t>16</a:t>
+              <a:t>17</a:t>
             </a:fld>
             <a:endParaRPr lang="it-IT"/>
           </a:p>
@@ -1289,7 +1290,7 @@
           <a:p>
             <a:fld id="{C205392F-55BF-4B8E-AF01-45F81C88C286}" type="slidenum">
               <a:rPr lang="it-IT" smtClean="0"/>
-              <a:t>18</a:t>
+              <a:t>19</a:t>
             </a:fld>
             <a:endParaRPr lang="it-IT"/>
           </a:p>
@@ -1376,7 +1377,7 @@
           <a:p>
             <a:fld id="{C205392F-55BF-4B8E-AF01-45F81C88C286}" type="slidenum">
               <a:rPr lang="it-IT" smtClean="0"/>
-              <a:t>19</a:t>
+              <a:t>20</a:t>
             </a:fld>
             <a:endParaRPr lang="it-IT"/>
           </a:p>
@@ -1396,6 +1397,117 @@
 </file>
 
 <file path=ppt/notesSlides/notesSlide14.xml><?xml version="1.0" encoding="utf-8"?>
+<p:notes xmlns:a="http://schemas.openxmlformats.org/drawingml/2006/main" xmlns:r="http://schemas.openxmlformats.org/officeDocument/2006/relationships" xmlns:p="http://schemas.openxmlformats.org/presentationml/2006/main">
+  <p:cSld>
+    <p:spTree>
+      <p:nvGrpSpPr>
+        <p:cNvPr id="1" name="">
+          <a:extLst>
+            <a:ext uri="{FF2B5EF4-FFF2-40B4-BE49-F238E27FC236}">
+              <a16:creationId xmlns:a16="http://schemas.microsoft.com/office/drawing/2014/main" id="{2D63ECBE-E1C4-2681-0ED2-457E14990BEB}"/>
+            </a:ext>
+          </a:extLst>
+        </p:cNvPr>
+        <p:cNvGrpSpPr/>
+        <p:nvPr/>
+      </p:nvGrpSpPr>
+      <p:grpSpPr>
+        <a:xfrm>
+          <a:off x="0" y="0"/>
+          <a:ext cx="0" cy="0"/>
+          <a:chOff x="0" y="0"/>
+          <a:chExt cx="0" cy="0"/>
+        </a:xfrm>
+      </p:grpSpPr>
+      <p:sp>
+        <p:nvSpPr>
+          <p:cNvPr id="2" name="Segnaposto immagine diapositiva 1">
+            <a:extLst>
+              <a:ext uri="{FF2B5EF4-FFF2-40B4-BE49-F238E27FC236}">
+                <a16:creationId xmlns:a16="http://schemas.microsoft.com/office/drawing/2014/main" id="{34C63B2A-68E9-C3B2-E2B6-CBD98CF9C7F7}"/>
+              </a:ext>
+            </a:extLst>
+          </p:cNvPr>
+          <p:cNvSpPr>
+            <a:spLocks noGrp="1" noRot="1" noChangeAspect="1"/>
+          </p:cNvSpPr>
+          <p:nvPr>
+            <p:ph type="sldImg"/>
+          </p:nvPr>
+        </p:nvSpPr>
+        <p:spPr/>
+      </p:sp>
+      <p:sp>
+        <p:nvSpPr>
+          <p:cNvPr id="3" name="Segnaposto note 2">
+            <a:extLst>
+              <a:ext uri="{FF2B5EF4-FFF2-40B4-BE49-F238E27FC236}">
+                <a16:creationId xmlns:a16="http://schemas.microsoft.com/office/drawing/2014/main" id="{F34DB49C-A470-4C4A-C2FF-DBF8A0C42284}"/>
+              </a:ext>
+            </a:extLst>
+          </p:cNvPr>
+          <p:cNvSpPr>
+            <a:spLocks noGrp="1"/>
+          </p:cNvSpPr>
+          <p:nvPr>
+            <p:ph type="body" idx="1"/>
+          </p:nvPr>
+        </p:nvSpPr>
+        <p:spPr/>
+        <p:txBody>
+          <a:bodyPr/>
+          <a:lstStyle/>
+          <a:p>
+            <a:r>
+              <a:rPr lang="it-IT" dirty="0"/>
+              <a:t>CONSISTENT ACROSS DIFFERENT RUNS FOR THE SAME CRYSTALS</a:t>
+            </a:r>
+          </a:p>
+        </p:txBody>
+      </p:sp>
+      <p:sp>
+        <p:nvSpPr>
+          <p:cNvPr id="4" name="Segnaposto numero diapositiva 3">
+            <a:extLst>
+              <a:ext uri="{FF2B5EF4-FFF2-40B4-BE49-F238E27FC236}">
+                <a16:creationId xmlns:a16="http://schemas.microsoft.com/office/drawing/2014/main" id="{1B0A7F6C-8E4A-1933-317C-49B56617A325}"/>
+              </a:ext>
+            </a:extLst>
+          </p:cNvPr>
+          <p:cNvSpPr>
+            <a:spLocks noGrp="1"/>
+          </p:cNvSpPr>
+          <p:nvPr>
+            <p:ph type="sldNum" sz="quarter" idx="5"/>
+          </p:nvPr>
+        </p:nvSpPr>
+        <p:spPr/>
+        <p:txBody>
+          <a:bodyPr/>
+          <a:lstStyle/>
+          <a:p>
+            <a:fld id="{C205392F-55BF-4B8E-AF01-45F81C88C286}" type="slidenum">
+              <a:rPr lang="it-IT" smtClean="0"/>
+              <a:t>21</a:t>
+            </a:fld>
+            <a:endParaRPr lang="it-IT"/>
+          </a:p>
+        </p:txBody>
+      </p:sp>
+    </p:spTree>
+    <p:extLst>
+      <p:ext uri="{BB962C8B-B14F-4D97-AF65-F5344CB8AC3E}">
+        <p14:creationId xmlns:p14="http://schemas.microsoft.com/office/powerpoint/2010/main" val="2925560637"/>
+      </p:ext>
+    </p:extLst>
+  </p:cSld>
+  <p:clrMapOvr>
+    <a:masterClrMapping/>
+  </p:clrMapOvr>
+</p:notes>
+</file>
+
+<file path=ppt/notesSlides/notesSlide15.xml><?xml version="1.0" encoding="utf-8"?>
 <p:notes xmlns:a="http://schemas.openxmlformats.org/drawingml/2006/main" xmlns:r="http://schemas.openxmlformats.org/officeDocument/2006/relationships" xmlns:p="http://schemas.openxmlformats.org/presentationml/2006/main">
   <p:cSld>
     <p:spTree>
@@ -1560,7 +1672,7 @@
           <a:p>
             <a:fld id="{C205392F-55BF-4B8E-AF01-45F81C88C286}" type="slidenum">
               <a:rPr lang="it-IT" smtClean="0"/>
-              <a:t>20</a:t>
+              <a:t>22</a:t>
             </a:fld>
             <a:endParaRPr lang="it-IT"/>
           </a:p>
@@ -1579,7 +1691,7 @@
 </p:notes>
 </file>
 
-<file path=ppt/notesSlides/notesSlide15.xml><?xml version="1.0" encoding="utf-8"?>
+<file path=ppt/notesSlides/notesSlide16.xml><?xml version="1.0" encoding="utf-8"?>
 <p:notes xmlns:a="http://schemas.openxmlformats.org/drawingml/2006/main" xmlns:r="http://schemas.openxmlformats.org/officeDocument/2006/relationships" xmlns:p="http://schemas.openxmlformats.org/presentationml/2006/main">
   <p:cSld>
     <p:spTree>
@@ -2064,7 +2176,7 @@
           <a:p>
             <a:fld id="{C205392F-55BF-4B8E-AF01-45F81C88C286}" type="slidenum">
               <a:rPr lang="it-IT" smtClean="0"/>
-              <a:t>26</a:t>
+              <a:t>27</a:t>
             </a:fld>
             <a:endParaRPr lang="it-IT"/>
           </a:p>
@@ -2083,7 +2195,7 @@
 </p:notes>
 </file>
 
-<file path=ppt/notesSlides/notesSlide16.xml><?xml version="1.0" encoding="utf-8"?>
+<file path=ppt/notesSlides/notesSlide17.xml><?xml version="1.0" encoding="utf-8"?>
 <p:notes xmlns:a="http://schemas.openxmlformats.org/drawingml/2006/main" xmlns:r="http://schemas.openxmlformats.org/officeDocument/2006/relationships" xmlns:p="http://schemas.openxmlformats.org/presentationml/2006/main">
   <p:cSld>
     <p:spTree>
@@ -2290,7 +2402,7 @@
           <a:p>
             <a:fld id="{C205392F-55BF-4B8E-AF01-45F81C88C286}" type="slidenum">
               <a:rPr lang="it-IT" smtClean="0"/>
-              <a:t>29</a:t>
+              <a:t>30</a:t>
             </a:fld>
             <a:endParaRPr lang="it-IT"/>
           </a:p>
@@ -2558,7 +2670,7 @@
           <a:p>
             <a:fld id="{C205392F-55BF-4B8E-AF01-45F81C88C286}" type="slidenum">
               <a:rPr lang="it-IT" smtClean="0"/>
-              <a:t>3</a:t>
+              <a:t>4</a:t>
             </a:fld>
             <a:endParaRPr lang="it-IT"/>
           </a:p>
@@ -2737,7 +2849,7 @@
           <a:p>
             <a:fld id="{C205392F-55BF-4B8E-AF01-45F81C88C286}" type="slidenum">
               <a:rPr lang="it-IT" smtClean="0"/>
-              <a:t>4</a:t>
+              <a:t>5</a:t>
             </a:fld>
             <a:endParaRPr lang="it-IT"/>
           </a:p>
@@ -2971,7 +3083,7 @@
           <a:p>
             <a:fld id="{C205392F-55BF-4B8E-AF01-45F81C88C286}" type="slidenum">
               <a:rPr lang="it-IT" smtClean="0"/>
-              <a:t>6</a:t>
+              <a:t>7</a:t>
             </a:fld>
             <a:endParaRPr lang="it-IT"/>
           </a:p>
@@ -3945,7 +4057,7 @@
           <a:p>
             <a:fld id="{C205392F-55BF-4B8E-AF01-45F81C88C286}" type="slidenum">
               <a:rPr lang="it-IT" smtClean="0"/>
-              <a:t>9</a:t>
+              <a:t>10</a:t>
             </a:fld>
             <a:endParaRPr lang="it-IT"/>
           </a:p>
@@ -4408,7 +4520,7 @@
           <a:p>
             <a:fld id="{C205392F-55BF-4B8E-AF01-45F81C88C286}" type="slidenum">
               <a:rPr lang="it-IT" smtClean="0"/>
-              <a:t>10</a:t>
+              <a:t>11</a:t>
             </a:fld>
             <a:endParaRPr lang="it-IT"/>
           </a:p>
@@ -4688,7 +4800,7 @@
           <a:p>
             <a:fld id="{C205392F-55BF-4B8E-AF01-45F81C88C286}" type="slidenum">
               <a:rPr lang="it-IT" smtClean="0"/>
-              <a:t>11</a:t>
+              <a:t>12</a:t>
             </a:fld>
             <a:endParaRPr lang="it-IT"/>
           </a:p>
@@ -4813,7 +4925,7 @@
           <a:p>
             <a:fld id="{C205392F-55BF-4B8E-AF01-45F81C88C286}" type="slidenum">
               <a:rPr lang="it-IT" smtClean="0"/>
-              <a:t>12</a:t>
+              <a:t>13</a:t>
             </a:fld>
             <a:endParaRPr lang="it-IT"/>
           </a:p>
@@ -5251,7 +5363,7 @@
           <a:p>
             <a:fld id="{C205392F-55BF-4B8E-AF01-45F81C88C286}" type="slidenum">
               <a:rPr lang="it-IT" smtClean="0"/>
-              <a:t>13</a:t>
+              <a:t>14</a:t>
             </a:fld>
             <a:endParaRPr lang="it-IT"/>
           </a:p>
@@ -8666,6 +8778,1345 @@
         <p:cNvPr id="1" name="">
           <a:extLst>
             <a:ext uri="{FF2B5EF4-FFF2-40B4-BE49-F238E27FC236}">
+              <a16:creationId xmlns:a16="http://schemas.microsoft.com/office/drawing/2014/main" id="{EFAE89F9-D1FA-1576-64FD-A2EB689BC090}"/>
+            </a:ext>
+          </a:extLst>
+        </p:cNvPr>
+        <p:cNvGrpSpPr/>
+        <p:nvPr/>
+      </p:nvGrpSpPr>
+      <p:grpSpPr>
+        <a:xfrm>
+          <a:off x="0" y="0"/>
+          <a:ext cx="0" cy="0"/>
+          <a:chOff x="0" y="0"/>
+          <a:chExt cx="0" cy="0"/>
+        </a:xfrm>
+      </p:grpSpPr>
+      <p:pic>
+        <p:nvPicPr>
+          <p:cNvPr id="26" name="Immagine 25">
+            <a:extLst>
+              <a:ext uri="{FF2B5EF4-FFF2-40B4-BE49-F238E27FC236}">
+                <a16:creationId xmlns:a16="http://schemas.microsoft.com/office/drawing/2014/main" id="{8E94EB5A-4F43-6CBD-4C92-4CA9F1757A37}"/>
+              </a:ext>
+            </a:extLst>
+          </p:cNvPr>
+          <p:cNvPicPr>
+            <a:picLocks noChangeAspect="1"/>
+          </p:cNvPicPr>
+          <p:nvPr/>
+        </p:nvPicPr>
+        <p:blipFill>
+          <a:blip r:embed="rId3">
+            <a:extLst>
+              <a:ext uri="{28A0092B-C50C-407E-A947-70E740481C1C}">
+                <a14:useLocalDpi xmlns:a14="http://schemas.microsoft.com/office/drawing/2010/main" val="0"/>
+              </a:ext>
+            </a:extLst>
+          </a:blip>
+          <a:stretch>
+            <a:fillRect/>
+          </a:stretch>
+        </p:blipFill>
+        <p:spPr>
+          <a:xfrm>
+            <a:off x="6651267" y="3241606"/>
+            <a:ext cx="3918670" cy="3420000"/>
+          </a:xfrm>
+          <a:prstGeom prst="rect">
+            <a:avLst/>
+          </a:prstGeom>
+        </p:spPr>
+      </p:pic>
+      <p:pic>
+        <p:nvPicPr>
+          <p:cNvPr id="28" name="Segnaposto contenuto 13">
+            <a:extLst>
+              <a:ext uri="{FF2B5EF4-FFF2-40B4-BE49-F238E27FC236}">
+                <a16:creationId xmlns:a16="http://schemas.microsoft.com/office/drawing/2014/main" id="{F000813B-5FBF-D20E-DACE-03AC95F53943}"/>
+              </a:ext>
+            </a:extLst>
+          </p:cNvPr>
+          <p:cNvPicPr>
+            <a:picLocks noChangeAspect="1"/>
+          </p:cNvPicPr>
+          <p:nvPr/>
+        </p:nvPicPr>
+        <p:blipFill>
+          <a:blip r:embed="rId4">
+            <a:extLst>
+              <a:ext uri="{28A0092B-C50C-407E-A947-70E740481C1C}">
+                <a14:useLocalDpi xmlns:a14="http://schemas.microsoft.com/office/drawing/2010/main" val="0"/>
+              </a:ext>
+            </a:extLst>
+          </a:blip>
+          <a:srcRect/>
+          <a:stretch/>
+        </p:blipFill>
+        <p:spPr>
+          <a:xfrm>
+            <a:off x="1622066" y="3241642"/>
+            <a:ext cx="3918667" cy="3419927"/>
+          </a:xfrm>
+          <a:prstGeom prst="rect">
+            <a:avLst/>
+          </a:prstGeom>
+        </p:spPr>
+      </p:pic>
+      <p:sp>
+        <p:nvSpPr>
+          <p:cNvPr id="2" name="Titolo 1">
+            <a:extLst>
+              <a:ext uri="{FF2B5EF4-FFF2-40B4-BE49-F238E27FC236}">
+                <a16:creationId xmlns:a16="http://schemas.microsoft.com/office/drawing/2014/main" id="{B4565F3B-3ED1-0D04-5BA8-550046893FDE}"/>
+              </a:ext>
+            </a:extLst>
+          </p:cNvPr>
+          <p:cNvSpPr>
+            <a:spLocks noGrp="1"/>
+          </p:cNvSpPr>
+          <p:nvPr>
+            <p:ph type="title"/>
+          </p:nvPr>
+        </p:nvSpPr>
+        <p:spPr>
+          <a:xfrm>
+            <a:off x="38100" y="69651"/>
+            <a:ext cx="12114000" cy="1153094"/>
+          </a:xfrm>
+          <a:prstGeom prst="roundRect">
+            <a:avLst>
+              <a:gd name="adj" fmla="val 36459"/>
+            </a:avLst>
+          </a:prstGeom>
+          <a:noFill/>
+        </p:spPr>
+        <p:txBody>
+          <a:bodyPr>
+            <a:normAutofit/>
+          </a:bodyPr>
+          <a:lstStyle/>
+          <a:p>
+            <a:r>
+              <a:rPr lang="it-IT" b="1" dirty="0">
+                <a:solidFill>
+                  <a:srgbClr val="002060"/>
+                </a:solidFill>
+              </a:rPr>
+              <a:t>	2. PREVIOUS ANALYSIS: CRYSTAL EDGES</a:t>
+            </a:r>
+          </a:p>
+        </p:txBody>
+      </p:sp>
+      <mc:AlternateContent xmlns:mc="http://schemas.openxmlformats.org/markup-compatibility/2006" xmlns:a14="http://schemas.microsoft.com/office/drawing/2010/main">
+        <mc:Choice Requires="a14">
+          <p:sp>
+            <p:nvSpPr>
+              <p:cNvPr id="3" name="Segnaposto contenuto 2">
+                <a:extLst>
+                  <a:ext uri="{FF2B5EF4-FFF2-40B4-BE49-F238E27FC236}">
+                    <a16:creationId xmlns:a16="http://schemas.microsoft.com/office/drawing/2014/main" id="{72EEC9D3-1E73-78F7-9E6A-5F7C3C212E79}"/>
+                  </a:ext>
+                </a:extLst>
+              </p:cNvPr>
+              <p:cNvSpPr>
+                <a:spLocks noGrp="1"/>
+              </p:cNvSpPr>
+              <p:nvPr>
+                <p:ph idx="1"/>
+              </p:nvPr>
+            </p:nvSpPr>
+            <p:spPr>
+              <a:xfrm>
+                <a:off x="838200" y="1401288"/>
+                <a:ext cx="10515600" cy="4776227"/>
+              </a:xfrm>
+            </p:spPr>
+            <p:txBody>
+              <a:bodyPr>
+                <a:noAutofit/>
+              </a:bodyPr>
+              <a:lstStyle/>
+              <a:p>
+                <a:r>
+                  <a:rPr lang="it-IT" sz="2400" dirty="0"/>
+                  <a:t>To </a:t>
+                </a:r>
+                <a:r>
+                  <a:rPr lang="it-IT" sz="2400" dirty="0" err="1"/>
+                  <a:t>define</a:t>
+                </a:r>
+                <a:r>
+                  <a:rPr lang="it-IT" sz="2400" dirty="0"/>
+                  <a:t> the </a:t>
+                </a:r>
+                <a:r>
+                  <a:rPr lang="it-IT" sz="2400" dirty="0" err="1"/>
+                  <a:t>true</a:t>
+                </a:r>
+                <a:r>
+                  <a:rPr lang="it-IT" sz="2400" dirty="0"/>
+                  <a:t> footprint </a:t>
+                </a:r>
+                <a:r>
+                  <a:rPr lang="it-IT" sz="2400" dirty="0" err="1"/>
+                  <a:t>at</a:t>
+                </a:r>
+                <a:r>
+                  <a:rPr lang="it-IT" sz="2400" dirty="0"/>
+                  <a:t> the </a:t>
+                </a:r>
+                <a:r>
+                  <a:rPr lang="it-IT" sz="2400" dirty="0" err="1"/>
+                  <a:t>entrance</a:t>
+                </a:r>
+                <a:r>
+                  <a:rPr lang="it-IT" sz="2400" dirty="0"/>
+                  <a:t> face we must project the downstream </a:t>
+                </a:r>
+                <a:r>
+                  <a:rPr lang="it-IT" sz="2400" dirty="0" err="1"/>
+                  <a:t>edges</a:t>
+                </a:r>
+                <a:r>
+                  <a:rPr lang="it-IT" sz="2400" dirty="0"/>
+                  <a:t> back upstream.</a:t>
+                </a:r>
+              </a:p>
+              <a:p>
+                <a:r>
+                  <a:rPr lang="it-IT" sz="2400" dirty="0"/>
+                  <a:t>We </a:t>
+                </a:r>
+                <a:r>
+                  <a:rPr lang="it-IT" sz="2400" dirty="0" err="1"/>
+                  <a:t>need</a:t>
+                </a:r>
+                <a:r>
+                  <a:rPr lang="it-IT" sz="2400" dirty="0"/>
+                  <a:t> to </a:t>
+                </a:r>
+                <a:r>
+                  <a:rPr lang="it-IT" sz="2400" dirty="0" err="1"/>
+                  <a:t>subtract</a:t>
+                </a:r>
+                <a:r>
+                  <a:rPr lang="it-IT" sz="2400" dirty="0"/>
+                  <a:t> a shift </a:t>
+                </a:r>
+                <a14:m>
+                  <m:oMath xmlns:m="http://schemas.openxmlformats.org/officeDocument/2006/math">
+                    <m:r>
+                      <m:rPr>
+                        <m:sty m:val="p"/>
+                      </m:rPr>
+                      <a:rPr lang="it-IT" sz="2400" b="0" i="0" smtClean="0">
+                        <a:latin typeface="Cambria Math" panose="02040503050406030204" pitchFamily="18" charset="0"/>
+                      </a:rPr>
+                      <m:t>Δ</m:t>
+                    </m:r>
+                    <m:r>
+                      <a:rPr lang="it-IT" sz="2400" b="0" i="1" smtClean="0">
+                        <a:latin typeface="Cambria Math" panose="02040503050406030204" pitchFamily="18" charset="0"/>
+                      </a:rPr>
+                      <m:t>𝑥</m:t>
+                    </m:r>
+                  </m:oMath>
+                </a14:m>
+                <a:r>
+                  <a:rPr lang="it-IT" sz="2400" dirty="0"/>
+                  <a:t> from the downstream </a:t>
+                </a:r>
+                <a:r>
+                  <a:rPr lang="it-IT" sz="2400" dirty="0" err="1"/>
+                  <a:t>edge</a:t>
+                </a:r>
+                <a:r>
+                  <a:rPr lang="it-IT" sz="2400" dirty="0"/>
+                  <a:t> position.</a:t>
+                </a:r>
+              </a:p>
+              <a:p>
+                <a:r>
+                  <a:rPr lang="it-IT" sz="2400" dirty="0" err="1"/>
+                  <a:t>Channeled</a:t>
+                </a:r>
+                <a:r>
+                  <a:rPr lang="it-IT" sz="2400" dirty="0"/>
+                  <a:t> </a:t>
+                </a:r>
+                <a:r>
+                  <a:rPr lang="it-IT" sz="2400" dirty="0" err="1"/>
+                  <a:t>particles</a:t>
+                </a:r>
+                <a:r>
+                  <a:rPr lang="it-IT" sz="2400" dirty="0"/>
+                  <a:t> follow the </a:t>
+                </a:r>
+                <a:r>
+                  <a:rPr lang="it-IT" sz="2400" dirty="0" err="1"/>
+                  <a:t>bent</a:t>
+                </a:r>
+                <a:r>
+                  <a:rPr lang="it-IT" sz="2400" dirty="0"/>
+                  <a:t> lattice </a:t>
+                </a:r>
+                <a:r>
+                  <a:rPr lang="it-IT" sz="2400" dirty="0" err="1"/>
+                  <a:t>planes</a:t>
+                </a:r>
+                <a:r>
+                  <a:rPr lang="it-IT" sz="2400" dirty="0"/>
+                  <a:t>, </a:t>
+                </a:r>
+                <a:r>
+                  <a:rPr lang="it-IT" sz="2400" dirty="0" err="1"/>
+                  <a:t>resulting</a:t>
+                </a:r>
+                <a:r>
+                  <a:rPr lang="it-IT" sz="2400" dirty="0"/>
+                  <a:t> in a </a:t>
+                </a:r>
+                <a:r>
+                  <a:rPr lang="it-IT" sz="2400" dirty="0" err="1"/>
+                  <a:t>lateral</a:t>
+                </a:r>
+                <a:r>
+                  <a:rPr lang="it-IT" sz="2400" dirty="0"/>
+                  <a:t> </a:t>
+                </a:r>
+                <a:r>
+                  <a:rPr lang="it-IT" sz="2400" dirty="0" err="1"/>
+                  <a:t>geometric</a:t>
+                </a:r>
+                <a:r>
+                  <a:rPr lang="it-IT" sz="2400" dirty="0"/>
+                  <a:t> drift </a:t>
+                </a:r>
+                <a:r>
+                  <a:rPr lang="it-IT" sz="2400" dirty="0" err="1"/>
+                  <a:t>along</a:t>
+                </a:r>
+                <a:r>
+                  <a:rPr lang="it-IT" sz="2400" dirty="0"/>
+                  <a:t> the x-</a:t>
+                </a:r>
+                <a:r>
+                  <a:rPr lang="it-IT" sz="2400" dirty="0" err="1"/>
+                  <a:t>axis</a:t>
+                </a:r>
+                <a:r>
+                  <a:rPr lang="it-IT" sz="2400" dirty="0"/>
+                  <a:t> </a:t>
+                </a:r>
+                <a:r>
+                  <a:rPr lang="it-IT" sz="2400" dirty="0" err="1"/>
+                  <a:t>as</a:t>
+                </a:r>
+                <a:r>
+                  <a:rPr lang="it-IT" sz="2400" dirty="0"/>
+                  <a:t> </a:t>
+                </a:r>
+                <a:r>
+                  <a:rPr lang="it-IT" sz="2400" dirty="0" err="1"/>
+                  <a:t>they</a:t>
+                </a:r>
+                <a:r>
+                  <a:rPr lang="it-IT" sz="2400" dirty="0"/>
+                  <a:t> traverse the </a:t>
+                </a:r>
+                <a:r>
+                  <a:rPr lang="it-IT" sz="2400" dirty="0" err="1"/>
+                  <a:t>crystal</a:t>
+                </a:r>
+                <a:r>
+                  <a:rPr lang="it-IT" sz="2400" dirty="0"/>
+                  <a:t>.</a:t>
+                </a:r>
+              </a:p>
+            </p:txBody>
+          </p:sp>
+        </mc:Choice>
+        <mc:Fallback xmlns="">
+          <p:sp>
+            <p:nvSpPr>
+              <p:cNvPr id="3" name="Segnaposto contenuto 2">
+                <a:extLst>
+                  <a:ext uri="{FF2B5EF4-FFF2-40B4-BE49-F238E27FC236}">
+                    <a16:creationId xmlns:a16="http://schemas.microsoft.com/office/drawing/2014/main" id="{72EEC9D3-1E73-78F7-9E6A-5F7C3C212E79}"/>
+                  </a:ext>
+                </a:extLst>
+              </p:cNvPr>
+              <p:cNvSpPr>
+                <a:spLocks noGrp="1" noRot="1" noChangeAspect="1" noMove="1" noResize="1" noEditPoints="1" noAdjustHandles="1" noChangeArrowheads="1" noChangeShapeType="1" noTextEdit="1"/>
+              </p:cNvSpPr>
+              <p:nvPr>
+                <p:ph idx="1"/>
+              </p:nvPr>
+            </p:nvSpPr>
+            <p:spPr>
+              <a:xfrm>
+                <a:off x="838200" y="1401288"/>
+                <a:ext cx="10515600" cy="4776227"/>
+              </a:xfrm>
+              <a:blipFill>
+                <a:blip r:embed="rId5"/>
+                <a:stretch>
+                  <a:fillRect l="-812" t="-1660"/>
+                </a:stretch>
+              </a:blipFill>
+            </p:spPr>
+            <p:txBody>
+              <a:bodyPr/>
+              <a:lstStyle/>
+              <a:p>
+                <a:r>
+                  <a:rPr lang="it-IT">
+                    <a:noFill/>
+                  </a:rPr>
+                  <a:t> </a:t>
+                </a:r>
+              </a:p>
+            </p:txBody>
+          </p:sp>
+        </mc:Fallback>
+      </mc:AlternateContent>
+      <p:sp>
+        <p:nvSpPr>
+          <p:cNvPr id="4" name="Segnaposto data 3">
+            <a:extLst>
+              <a:ext uri="{FF2B5EF4-FFF2-40B4-BE49-F238E27FC236}">
+                <a16:creationId xmlns:a16="http://schemas.microsoft.com/office/drawing/2014/main" id="{AE8817D2-0A9B-0FAF-36DE-4A11DA6A530E}"/>
+              </a:ext>
+            </a:extLst>
+          </p:cNvPr>
+          <p:cNvSpPr>
+            <a:spLocks noGrp="1"/>
+          </p:cNvSpPr>
+          <p:nvPr>
+            <p:ph type="dt" sz="half" idx="10"/>
+          </p:nvPr>
+        </p:nvSpPr>
+        <p:spPr>
+          <a:xfrm>
+            <a:off x="838200" y="6356349"/>
+            <a:ext cx="2743200" cy="432000"/>
+          </a:xfrm>
+        </p:spPr>
+        <p:txBody>
+          <a:bodyPr/>
+          <a:lstStyle/>
+          <a:p>
+            <a:r>
+              <a:rPr lang="it-IT" sz="1500" b="1" dirty="0">
+                <a:solidFill>
+                  <a:srgbClr val="002060"/>
+                </a:solidFill>
+              </a:rPr>
+              <a:t>July 2026</a:t>
+            </a:r>
+          </a:p>
+        </p:txBody>
+      </p:sp>
+      <p:sp>
+        <p:nvSpPr>
+          <p:cNvPr id="5" name="Segnaposto piè di pagina 4">
+            <a:extLst>
+              <a:ext uri="{FF2B5EF4-FFF2-40B4-BE49-F238E27FC236}">
+                <a16:creationId xmlns:a16="http://schemas.microsoft.com/office/drawing/2014/main" id="{968EBD17-4982-87E2-3CDB-90B5380C2171}"/>
+              </a:ext>
+            </a:extLst>
+          </p:cNvPr>
+          <p:cNvSpPr>
+            <a:spLocks noGrp="1"/>
+          </p:cNvSpPr>
+          <p:nvPr>
+            <p:ph type="ftr" sz="quarter" idx="11"/>
+          </p:nvPr>
+        </p:nvSpPr>
+        <p:spPr>
+          <a:xfrm>
+            <a:off x="0" y="6356349"/>
+            <a:ext cx="12192000" cy="432000"/>
+          </a:xfrm>
+        </p:spPr>
+        <p:txBody>
+          <a:bodyPr/>
+          <a:lstStyle/>
+          <a:p>
+            <a:r>
+              <a:rPr lang="it-IT" sz="1500" b="1" dirty="0">
+                <a:solidFill>
+                  <a:srgbClr val="002060"/>
+                </a:solidFill>
+              </a:rPr>
+              <a:t>Anna Sofia Moro</a:t>
+            </a:r>
+          </a:p>
+        </p:txBody>
+      </p:sp>
+      <p:sp>
+        <p:nvSpPr>
+          <p:cNvPr id="6" name="Segnaposto numero diapositiva 5">
+            <a:extLst>
+              <a:ext uri="{FF2B5EF4-FFF2-40B4-BE49-F238E27FC236}">
+                <a16:creationId xmlns:a16="http://schemas.microsoft.com/office/drawing/2014/main" id="{6107B5E3-3B9D-1082-353B-3394C8D104D8}"/>
+              </a:ext>
+            </a:extLst>
+          </p:cNvPr>
+          <p:cNvSpPr>
+            <a:spLocks noGrp="1"/>
+          </p:cNvSpPr>
+          <p:nvPr>
+            <p:ph type="sldNum" sz="quarter" idx="12"/>
+          </p:nvPr>
+        </p:nvSpPr>
+        <p:spPr>
+          <a:xfrm>
+            <a:off x="8610600" y="6356349"/>
+            <a:ext cx="2743200" cy="432000"/>
+          </a:xfrm>
+        </p:spPr>
+        <p:txBody>
+          <a:bodyPr/>
+          <a:lstStyle/>
+          <a:p>
+            <a:fld id="{0A318BD9-CA14-4A83-ACF0-03D5918EB402}" type="slidenum">
+              <a:rPr lang="it-IT" sz="1500" b="1" smtClean="0">
+                <a:solidFill>
+                  <a:srgbClr val="002060"/>
+                </a:solidFill>
+              </a:rPr>
+              <a:t>10</a:t>
+            </a:fld>
+            <a:endParaRPr lang="it-IT" sz="1500" b="1" dirty="0">
+              <a:solidFill>
+                <a:srgbClr val="002060"/>
+              </a:solidFill>
+            </a:endParaRPr>
+          </a:p>
+        </p:txBody>
+      </p:sp>
+      <p:cxnSp>
+        <p:nvCxnSpPr>
+          <p:cNvPr id="10" name="Connettore diritto 9">
+            <a:extLst>
+              <a:ext uri="{FF2B5EF4-FFF2-40B4-BE49-F238E27FC236}">
+                <a16:creationId xmlns:a16="http://schemas.microsoft.com/office/drawing/2014/main" id="{CC47FAF3-C921-892C-9CA4-BE050B1D5E9B}"/>
+              </a:ext>
+            </a:extLst>
+          </p:cNvPr>
+          <p:cNvCxnSpPr>
+            <a:cxnSpLocks/>
+          </p:cNvCxnSpPr>
+          <p:nvPr/>
+        </p:nvCxnSpPr>
+        <p:spPr>
+          <a:xfrm>
+            <a:off x="696000" y="1155368"/>
+            <a:ext cx="10800000" cy="0"/>
+          </a:xfrm>
+          <a:prstGeom prst="line">
+            <a:avLst/>
+          </a:prstGeom>
+          <a:ln w="38100">
+            <a:solidFill>
+              <a:srgbClr val="002060"/>
+            </a:solidFill>
+          </a:ln>
+        </p:spPr>
+        <p:style>
+          <a:lnRef idx="2">
+            <a:schemeClr val="accent1"/>
+          </a:lnRef>
+          <a:fillRef idx="0">
+            <a:schemeClr val="accent1"/>
+          </a:fillRef>
+          <a:effectRef idx="1">
+            <a:schemeClr val="accent1"/>
+          </a:effectRef>
+          <a:fontRef idx="minor">
+            <a:schemeClr val="tx1"/>
+          </a:fontRef>
+        </p:style>
+      </p:cxnSp>
+      <p:sp>
+        <p:nvSpPr>
+          <p:cNvPr id="7" name="Rettangolo 6">
+            <a:extLst>
+              <a:ext uri="{FF2B5EF4-FFF2-40B4-BE49-F238E27FC236}">
+                <a16:creationId xmlns:a16="http://schemas.microsoft.com/office/drawing/2014/main" id="{0188A4B1-7E67-D966-06CE-BDB22631CF37}"/>
+              </a:ext>
+            </a:extLst>
+          </p:cNvPr>
+          <p:cNvSpPr/>
+          <p:nvPr/>
+        </p:nvSpPr>
+        <p:spPr>
+          <a:xfrm>
+            <a:off x="2324100" y="4806951"/>
+            <a:ext cx="1019175" cy="1422618"/>
+          </a:xfrm>
+          <a:prstGeom prst="rect">
+            <a:avLst/>
+          </a:prstGeom>
+          <a:noFill/>
+          <a:ln w="28575">
+            <a:solidFill>
+              <a:srgbClr val="FF0000"/>
+            </a:solidFill>
+          </a:ln>
+        </p:spPr>
+        <p:style>
+          <a:lnRef idx="2">
+            <a:schemeClr val="accent1">
+              <a:shade val="15000"/>
+            </a:schemeClr>
+          </a:lnRef>
+          <a:fillRef idx="1">
+            <a:schemeClr val="accent1"/>
+          </a:fillRef>
+          <a:effectRef idx="0">
+            <a:schemeClr val="accent1"/>
+          </a:effectRef>
+          <a:fontRef idx="minor">
+            <a:schemeClr val="lt1"/>
+          </a:fontRef>
+        </p:style>
+        <p:txBody>
+          <a:bodyPr rtlCol="0" anchor="ctr"/>
+          <a:lstStyle/>
+          <a:p>
+            <a:pPr algn="ctr"/>
+            <a:endParaRPr lang="it-IT"/>
+          </a:p>
+        </p:txBody>
+      </p:sp>
+      <p:sp>
+        <p:nvSpPr>
+          <p:cNvPr id="9" name="Rettangolo 8">
+            <a:extLst>
+              <a:ext uri="{FF2B5EF4-FFF2-40B4-BE49-F238E27FC236}">
+                <a16:creationId xmlns:a16="http://schemas.microsoft.com/office/drawing/2014/main" id="{5637B16E-48F5-279D-9F6C-C63C2AAE3BFD}"/>
+              </a:ext>
+            </a:extLst>
+          </p:cNvPr>
+          <p:cNvSpPr/>
+          <p:nvPr/>
+        </p:nvSpPr>
+        <p:spPr>
+          <a:xfrm>
+            <a:off x="7468317" y="4806951"/>
+            <a:ext cx="1019175" cy="1422618"/>
+          </a:xfrm>
+          <a:prstGeom prst="rect">
+            <a:avLst/>
+          </a:prstGeom>
+          <a:noFill/>
+          <a:ln w="28575">
+            <a:solidFill>
+              <a:srgbClr val="FF0000"/>
+            </a:solidFill>
+          </a:ln>
+        </p:spPr>
+        <p:style>
+          <a:lnRef idx="2">
+            <a:schemeClr val="accent1">
+              <a:shade val="15000"/>
+            </a:schemeClr>
+          </a:lnRef>
+          <a:fillRef idx="1">
+            <a:schemeClr val="accent1"/>
+          </a:fillRef>
+          <a:effectRef idx="0">
+            <a:schemeClr val="accent1"/>
+          </a:effectRef>
+          <a:fontRef idx="minor">
+            <a:schemeClr val="lt1"/>
+          </a:fontRef>
+        </p:style>
+        <p:txBody>
+          <a:bodyPr rtlCol="0" anchor="ctr"/>
+          <a:lstStyle/>
+          <a:p>
+            <a:pPr algn="ctr"/>
+            <a:endParaRPr lang="it-IT"/>
+          </a:p>
+        </p:txBody>
+      </p:sp>
+      <p:cxnSp>
+        <p:nvCxnSpPr>
+          <p:cNvPr id="12" name="Connettore diritto 11">
+            <a:extLst>
+              <a:ext uri="{FF2B5EF4-FFF2-40B4-BE49-F238E27FC236}">
+                <a16:creationId xmlns:a16="http://schemas.microsoft.com/office/drawing/2014/main" id="{FE88FD1A-5454-5AA8-1606-1C9938301A25}"/>
+              </a:ext>
+            </a:extLst>
+          </p:cNvPr>
+          <p:cNvCxnSpPr>
+            <a:cxnSpLocks/>
+          </p:cNvCxnSpPr>
+          <p:nvPr/>
+        </p:nvCxnSpPr>
+        <p:spPr>
+          <a:xfrm>
+            <a:off x="2315634" y="3429000"/>
+            <a:ext cx="0" cy="1038225"/>
+          </a:xfrm>
+          <a:prstGeom prst="line">
+            <a:avLst/>
+          </a:prstGeom>
+          <a:ln>
+            <a:solidFill>
+              <a:srgbClr val="FF0000"/>
+            </a:solidFill>
+            <a:prstDash val="sysDot"/>
+          </a:ln>
+        </p:spPr>
+        <p:style>
+          <a:lnRef idx="2">
+            <a:schemeClr val="accent1"/>
+          </a:lnRef>
+          <a:fillRef idx="0">
+            <a:schemeClr val="accent1"/>
+          </a:fillRef>
+          <a:effectRef idx="1">
+            <a:schemeClr val="accent1"/>
+          </a:effectRef>
+          <a:fontRef idx="minor">
+            <a:schemeClr val="tx1"/>
+          </a:fontRef>
+        </p:style>
+      </p:cxnSp>
+      <p:cxnSp>
+        <p:nvCxnSpPr>
+          <p:cNvPr id="15" name="Connettore diritto 14">
+            <a:extLst>
+              <a:ext uri="{FF2B5EF4-FFF2-40B4-BE49-F238E27FC236}">
+                <a16:creationId xmlns:a16="http://schemas.microsoft.com/office/drawing/2014/main" id="{AE15623F-17A3-2E34-83DC-B4A12FAAEE97}"/>
+              </a:ext>
+            </a:extLst>
+          </p:cNvPr>
+          <p:cNvCxnSpPr>
+            <a:cxnSpLocks/>
+          </p:cNvCxnSpPr>
+          <p:nvPr/>
+        </p:nvCxnSpPr>
+        <p:spPr>
+          <a:xfrm>
+            <a:off x="3343275" y="3440113"/>
+            <a:ext cx="0" cy="1038225"/>
+          </a:xfrm>
+          <a:prstGeom prst="line">
+            <a:avLst/>
+          </a:prstGeom>
+          <a:ln>
+            <a:solidFill>
+              <a:srgbClr val="FF0000"/>
+            </a:solidFill>
+            <a:prstDash val="sysDot"/>
+          </a:ln>
+        </p:spPr>
+        <p:style>
+          <a:lnRef idx="2">
+            <a:schemeClr val="accent1"/>
+          </a:lnRef>
+          <a:fillRef idx="0">
+            <a:schemeClr val="accent1"/>
+          </a:fillRef>
+          <a:effectRef idx="1">
+            <a:schemeClr val="accent1"/>
+          </a:effectRef>
+          <a:fontRef idx="minor">
+            <a:schemeClr val="tx1"/>
+          </a:fontRef>
+        </p:style>
+      </p:cxnSp>
+      <p:cxnSp>
+        <p:nvCxnSpPr>
+          <p:cNvPr id="16" name="Connettore diritto 15">
+            <a:extLst>
+              <a:ext uri="{FF2B5EF4-FFF2-40B4-BE49-F238E27FC236}">
+                <a16:creationId xmlns:a16="http://schemas.microsoft.com/office/drawing/2014/main" id="{D617B793-7839-5993-11C5-7A31728C7F0B}"/>
+              </a:ext>
+            </a:extLst>
+          </p:cNvPr>
+          <p:cNvCxnSpPr>
+            <a:cxnSpLocks/>
+          </p:cNvCxnSpPr>
+          <p:nvPr/>
+        </p:nvCxnSpPr>
+        <p:spPr>
+          <a:xfrm>
+            <a:off x="7474220" y="3440113"/>
+            <a:ext cx="0" cy="1038225"/>
+          </a:xfrm>
+          <a:prstGeom prst="line">
+            <a:avLst/>
+          </a:prstGeom>
+          <a:ln>
+            <a:solidFill>
+              <a:srgbClr val="FF0000"/>
+            </a:solidFill>
+            <a:prstDash val="sysDot"/>
+          </a:ln>
+        </p:spPr>
+        <p:style>
+          <a:lnRef idx="2">
+            <a:schemeClr val="accent1"/>
+          </a:lnRef>
+          <a:fillRef idx="0">
+            <a:schemeClr val="accent1"/>
+          </a:fillRef>
+          <a:effectRef idx="1">
+            <a:schemeClr val="accent1"/>
+          </a:effectRef>
+          <a:fontRef idx="minor">
+            <a:schemeClr val="tx1"/>
+          </a:fontRef>
+        </p:style>
+      </p:cxnSp>
+      <p:cxnSp>
+        <p:nvCxnSpPr>
+          <p:cNvPr id="17" name="Connettore diritto 16">
+            <a:extLst>
+              <a:ext uri="{FF2B5EF4-FFF2-40B4-BE49-F238E27FC236}">
+                <a16:creationId xmlns:a16="http://schemas.microsoft.com/office/drawing/2014/main" id="{A0532A15-704D-DEC0-C721-3894EE9F06A3}"/>
+              </a:ext>
+            </a:extLst>
+          </p:cNvPr>
+          <p:cNvCxnSpPr>
+            <a:cxnSpLocks/>
+          </p:cNvCxnSpPr>
+          <p:nvPr/>
+        </p:nvCxnSpPr>
+        <p:spPr>
+          <a:xfrm>
+            <a:off x="8487492" y="3440113"/>
+            <a:ext cx="0" cy="1038225"/>
+          </a:xfrm>
+          <a:prstGeom prst="line">
+            <a:avLst/>
+          </a:prstGeom>
+          <a:ln>
+            <a:solidFill>
+              <a:srgbClr val="FF0000"/>
+            </a:solidFill>
+            <a:prstDash val="sysDot"/>
+          </a:ln>
+        </p:spPr>
+        <p:style>
+          <a:lnRef idx="2">
+            <a:schemeClr val="accent1"/>
+          </a:lnRef>
+          <a:fillRef idx="0">
+            <a:schemeClr val="accent1"/>
+          </a:fillRef>
+          <a:effectRef idx="1">
+            <a:schemeClr val="accent1"/>
+          </a:effectRef>
+          <a:fontRef idx="minor">
+            <a:schemeClr val="tx1"/>
+          </a:fontRef>
+        </p:style>
+      </p:cxnSp>
+      <p:cxnSp>
+        <p:nvCxnSpPr>
+          <p:cNvPr id="18" name="Connettore diritto 17">
+            <a:extLst>
+              <a:ext uri="{FF2B5EF4-FFF2-40B4-BE49-F238E27FC236}">
+                <a16:creationId xmlns:a16="http://schemas.microsoft.com/office/drawing/2014/main" id="{E1A732FF-C639-A178-1422-EF6F95A240D8}"/>
+              </a:ext>
+            </a:extLst>
+          </p:cNvPr>
+          <p:cNvCxnSpPr>
+            <a:cxnSpLocks/>
+          </p:cNvCxnSpPr>
+          <p:nvPr/>
+        </p:nvCxnSpPr>
+        <p:spPr>
+          <a:xfrm flipH="1">
+            <a:off x="4138613" y="4806951"/>
+            <a:ext cx="1203325" cy="0"/>
+          </a:xfrm>
+          <a:prstGeom prst="line">
+            <a:avLst/>
+          </a:prstGeom>
+          <a:ln>
+            <a:solidFill>
+              <a:srgbClr val="FF0000"/>
+            </a:solidFill>
+            <a:prstDash val="sysDot"/>
+          </a:ln>
+        </p:spPr>
+        <p:style>
+          <a:lnRef idx="2">
+            <a:schemeClr val="accent1"/>
+          </a:lnRef>
+          <a:fillRef idx="0">
+            <a:schemeClr val="accent1"/>
+          </a:fillRef>
+          <a:effectRef idx="1">
+            <a:schemeClr val="accent1"/>
+          </a:effectRef>
+          <a:fontRef idx="minor">
+            <a:schemeClr val="tx1"/>
+          </a:fontRef>
+        </p:style>
+      </p:cxnSp>
+      <p:cxnSp>
+        <p:nvCxnSpPr>
+          <p:cNvPr id="22" name="Connettore diritto 21">
+            <a:extLst>
+              <a:ext uri="{FF2B5EF4-FFF2-40B4-BE49-F238E27FC236}">
+                <a16:creationId xmlns:a16="http://schemas.microsoft.com/office/drawing/2014/main" id="{F694E3CB-E4C0-FA0D-7F1C-B294C58F5FD2}"/>
+              </a:ext>
+            </a:extLst>
+          </p:cNvPr>
+          <p:cNvCxnSpPr>
+            <a:cxnSpLocks/>
+          </p:cNvCxnSpPr>
+          <p:nvPr/>
+        </p:nvCxnSpPr>
+        <p:spPr>
+          <a:xfrm flipH="1">
+            <a:off x="4138613" y="6229569"/>
+            <a:ext cx="1203325" cy="0"/>
+          </a:xfrm>
+          <a:prstGeom prst="line">
+            <a:avLst/>
+          </a:prstGeom>
+          <a:ln>
+            <a:solidFill>
+              <a:srgbClr val="FF0000"/>
+            </a:solidFill>
+            <a:prstDash val="sysDot"/>
+          </a:ln>
+        </p:spPr>
+        <p:style>
+          <a:lnRef idx="2">
+            <a:schemeClr val="accent1"/>
+          </a:lnRef>
+          <a:fillRef idx="0">
+            <a:schemeClr val="accent1"/>
+          </a:fillRef>
+          <a:effectRef idx="1">
+            <a:schemeClr val="accent1"/>
+          </a:effectRef>
+          <a:fontRef idx="minor">
+            <a:schemeClr val="tx1"/>
+          </a:fontRef>
+        </p:style>
+      </p:cxnSp>
+      <p:cxnSp>
+        <p:nvCxnSpPr>
+          <p:cNvPr id="23" name="Connettore diritto 22">
+            <a:extLst>
+              <a:ext uri="{FF2B5EF4-FFF2-40B4-BE49-F238E27FC236}">
+                <a16:creationId xmlns:a16="http://schemas.microsoft.com/office/drawing/2014/main" id="{18D8E68B-77D0-AA37-02A8-F4262A724A74}"/>
+              </a:ext>
+            </a:extLst>
+          </p:cNvPr>
+          <p:cNvCxnSpPr>
+            <a:cxnSpLocks/>
+          </p:cNvCxnSpPr>
+          <p:nvPr/>
+        </p:nvCxnSpPr>
+        <p:spPr>
+          <a:xfrm flipH="1">
+            <a:off x="9164637" y="4806952"/>
+            <a:ext cx="1203325" cy="0"/>
+          </a:xfrm>
+          <a:prstGeom prst="line">
+            <a:avLst/>
+          </a:prstGeom>
+          <a:ln>
+            <a:solidFill>
+              <a:srgbClr val="FF0000"/>
+            </a:solidFill>
+            <a:prstDash val="sysDot"/>
+          </a:ln>
+        </p:spPr>
+        <p:style>
+          <a:lnRef idx="2">
+            <a:schemeClr val="accent1"/>
+          </a:lnRef>
+          <a:fillRef idx="0">
+            <a:schemeClr val="accent1"/>
+          </a:fillRef>
+          <a:effectRef idx="1">
+            <a:schemeClr val="accent1"/>
+          </a:effectRef>
+          <a:fontRef idx="minor">
+            <a:schemeClr val="tx1"/>
+          </a:fontRef>
+        </p:style>
+      </p:cxnSp>
+      <p:cxnSp>
+        <p:nvCxnSpPr>
+          <p:cNvPr id="24" name="Connettore diritto 23">
+            <a:extLst>
+              <a:ext uri="{FF2B5EF4-FFF2-40B4-BE49-F238E27FC236}">
+                <a16:creationId xmlns:a16="http://schemas.microsoft.com/office/drawing/2014/main" id="{A77E9F3B-3C44-D66F-AB92-981082CB6719}"/>
+              </a:ext>
+            </a:extLst>
+          </p:cNvPr>
+          <p:cNvCxnSpPr>
+            <a:cxnSpLocks/>
+          </p:cNvCxnSpPr>
+          <p:nvPr/>
+        </p:nvCxnSpPr>
+        <p:spPr>
+          <a:xfrm flipH="1">
+            <a:off x="9164637" y="6229569"/>
+            <a:ext cx="1203325" cy="0"/>
+          </a:xfrm>
+          <a:prstGeom prst="line">
+            <a:avLst/>
+          </a:prstGeom>
+          <a:ln>
+            <a:solidFill>
+              <a:srgbClr val="FF0000"/>
+            </a:solidFill>
+            <a:prstDash val="sysDot"/>
+          </a:ln>
+        </p:spPr>
+        <p:style>
+          <a:lnRef idx="2">
+            <a:schemeClr val="accent1"/>
+          </a:lnRef>
+          <a:fillRef idx="0">
+            <a:schemeClr val="accent1"/>
+          </a:fillRef>
+          <a:effectRef idx="1">
+            <a:schemeClr val="accent1"/>
+          </a:effectRef>
+          <a:fontRef idx="minor">
+            <a:schemeClr val="tx1"/>
+          </a:fontRef>
+        </p:style>
+      </p:cxnSp>
+      <p:sp>
+        <p:nvSpPr>
+          <p:cNvPr id="11" name="Rettangolo 10">
+            <a:extLst>
+              <a:ext uri="{FF2B5EF4-FFF2-40B4-BE49-F238E27FC236}">
+                <a16:creationId xmlns:a16="http://schemas.microsoft.com/office/drawing/2014/main" id="{4C842739-3CDC-C45E-E714-D97D9BED5D0F}"/>
+              </a:ext>
+            </a:extLst>
+          </p:cNvPr>
+          <p:cNvSpPr/>
+          <p:nvPr/>
+        </p:nvSpPr>
+        <p:spPr>
+          <a:xfrm>
+            <a:off x="7389455" y="4806951"/>
+            <a:ext cx="1019175" cy="1422618"/>
+          </a:xfrm>
+          <a:prstGeom prst="rect">
+            <a:avLst/>
+          </a:prstGeom>
+          <a:noFill/>
+          <a:ln w="28575">
+            <a:solidFill>
+              <a:srgbClr val="FFC000"/>
+            </a:solidFill>
+            <a:prstDash val="dash"/>
+          </a:ln>
+        </p:spPr>
+        <p:style>
+          <a:lnRef idx="2">
+            <a:schemeClr val="accent1">
+              <a:shade val="15000"/>
+            </a:schemeClr>
+          </a:lnRef>
+          <a:fillRef idx="1">
+            <a:schemeClr val="accent1"/>
+          </a:fillRef>
+          <a:effectRef idx="0">
+            <a:schemeClr val="accent1"/>
+          </a:effectRef>
+          <a:fontRef idx="minor">
+            <a:schemeClr val="lt1"/>
+          </a:fontRef>
+        </p:style>
+        <p:txBody>
+          <a:bodyPr rtlCol="0" anchor="ctr"/>
+          <a:lstStyle/>
+          <a:p>
+            <a:pPr algn="ctr"/>
+            <a:endParaRPr lang="it-IT"/>
+          </a:p>
+        </p:txBody>
+      </p:sp>
+      <mc:AlternateContent xmlns:mc="http://schemas.openxmlformats.org/markup-compatibility/2006" xmlns:a14="http://schemas.microsoft.com/office/drawing/2010/main">
+        <mc:Choice Requires="a14">
+          <p:sp>
+            <p:nvSpPr>
+              <p:cNvPr id="13" name="Rettangolo con angoli arrotondati 12">
+                <a:extLst>
+                  <a:ext uri="{FF2B5EF4-FFF2-40B4-BE49-F238E27FC236}">
+                    <a16:creationId xmlns:a16="http://schemas.microsoft.com/office/drawing/2014/main" id="{80D6D794-BEF0-5EB5-B731-DADE666780B1}"/>
+                  </a:ext>
+                </a:extLst>
+              </p:cNvPr>
+              <p:cNvSpPr/>
+              <p:nvPr/>
+            </p:nvSpPr>
+            <p:spPr>
+              <a:xfrm>
+                <a:off x="9164638" y="3332747"/>
+                <a:ext cx="2331362" cy="1134475"/>
+              </a:xfrm>
+              <a:prstGeom prst="roundRect">
+                <a:avLst/>
+              </a:prstGeom>
+              <a:noFill/>
+              <a:ln w="38100">
+                <a:solidFill>
+                  <a:srgbClr val="FFC000"/>
+                </a:solidFill>
+              </a:ln>
+            </p:spPr>
+            <p:style>
+              <a:lnRef idx="2">
+                <a:schemeClr val="accent1">
+                  <a:shade val="15000"/>
+                </a:schemeClr>
+              </a:lnRef>
+              <a:fillRef idx="1">
+                <a:schemeClr val="accent1"/>
+              </a:fillRef>
+              <a:effectRef idx="0">
+                <a:schemeClr val="accent1"/>
+              </a:effectRef>
+              <a:fontRef idx="minor">
+                <a:schemeClr val="lt1"/>
+              </a:fontRef>
+            </p:style>
+            <p:txBody>
+              <a:bodyPr rtlCol="0" anchor="ctr"/>
+              <a:lstStyle/>
+              <a:p>
+                <a:pPr algn="ctr"/>
+                <a14:m>
+                  <m:oMathPara xmlns:m="http://schemas.openxmlformats.org/officeDocument/2006/math">
+                    <m:oMathParaPr>
+                      <m:jc m:val="centerGroup"/>
+                    </m:oMathParaPr>
+                    <m:oMath xmlns:m="http://schemas.openxmlformats.org/officeDocument/2006/math">
+                      <m:r>
+                        <m:rPr>
+                          <m:sty m:val="p"/>
+                        </m:rPr>
+                        <a:rPr lang="it-IT" b="0" i="0" smtClean="0">
+                          <a:solidFill>
+                            <a:schemeClr val="tx1"/>
+                          </a:solidFill>
+                          <a:latin typeface="Cambria Math" panose="02040503050406030204" pitchFamily="18" charset="0"/>
+                        </a:rPr>
+                        <m:t>Δ</m:t>
+                      </m:r>
+                      <m:r>
+                        <a:rPr lang="it-IT" b="0" i="1" smtClean="0">
+                          <a:solidFill>
+                            <a:schemeClr val="tx1"/>
+                          </a:solidFill>
+                          <a:latin typeface="Cambria Math" panose="02040503050406030204" pitchFamily="18" charset="0"/>
+                        </a:rPr>
+                        <m:t>𝑥</m:t>
+                      </m:r>
+                      <m:r>
+                        <a:rPr lang="it-IT" b="0" i="1" smtClean="0">
+                          <a:solidFill>
+                            <a:schemeClr val="tx1"/>
+                          </a:solidFill>
+                          <a:latin typeface="Cambria Math" panose="02040503050406030204" pitchFamily="18" charset="0"/>
+                        </a:rPr>
+                        <m:t>=</m:t>
+                      </m:r>
+                      <m:f>
+                        <m:fPr>
+                          <m:ctrlPr>
+                            <a:rPr lang="it-IT" b="0" i="1" smtClean="0">
+                              <a:solidFill>
+                                <a:schemeClr val="tx1"/>
+                              </a:solidFill>
+                              <a:latin typeface="Cambria Math" panose="02040503050406030204" pitchFamily="18" charset="0"/>
+                            </a:rPr>
+                          </m:ctrlPr>
+                        </m:fPr>
+                        <m:num>
+                          <m:sSub>
+                            <m:sSubPr>
+                              <m:ctrlPr>
+                                <a:rPr lang="it-IT" b="0" i="1" smtClean="0">
+                                  <a:solidFill>
+                                    <a:schemeClr val="tx1"/>
+                                  </a:solidFill>
+                                  <a:latin typeface="Cambria Math" panose="02040503050406030204" pitchFamily="18" charset="0"/>
+                                </a:rPr>
+                              </m:ctrlPr>
+                            </m:sSubPr>
+                            <m:e>
+                              <m:r>
+                                <a:rPr lang="it-IT" b="0" i="1" smtClean="0">
+                                  <a:solidFill>
+                                    <a:schemeClr val="tx1"/>
+                                  </a:solidFill>
+                                  <a:latin typeface="Cambria Math" panose="02040503050406030204" pitchFamily="18" charset="0"/>
+                                </a:rPr>
+                                <m:t>𝜃</m:t>
+                              </m:r>
+                            </m:e>
+                            <m:sub>
+                              <m:r>
+                                <a:rPr lang="it-IT" b="0" i="1" smtClean="0">
+                                  <a:solidFill>
+                                    <a:schemeClr val="tx1"/>
+                                  </a:solidFill>
+                                  <a:latin typeface="Cambria Math" panose="02040503050406030204" pitchFamily="18" charset="0"/>
+                                </a:rPr>
+                                <m:t>𝑏</m:t>
+                              </m:r>
+                            </m:sub>
+                          </m:sSub>
+                          <m:r>
+                            <a:rPr lang="it-IT" b="0" i="1" smtClean="0">
+                              <a:solidFill>
+                                <a:schemeClr val="tx1"/>
+                              </a:solidFill>
+                              <a:latin typeface="Cambria Math" panose="02040503050406030204" pitchFamily="18" charset="0"/>
+                            </a:rPr>
+                            <m:t>⋅</m:t>
+                          </m:r>
+                          <m:r>
+                            <a:rPr lang="it-IT" b="0" i="1" smtClean="0">
+                              <a:solidFill>
+                                <a:schemeClr val="tx1"/>
+                              </a:solidFill>
+                              <a:latin typeface="Cambria Math" panose="02040503050406030204" pitchFamily="18" charset="0"/>
+                            </a:rPr>
+                            <m:t>𝐿</m:t>
+                          </m:r>
+                        </m:num>
+                        <m:den>
+                          <m:r>
+                            <a:rPr lang="it-IT" b="0" i="1" smtClean="0">
+                              <a:solidFill>
+                                <a:schemeClr val="tx1"/>
+                              </a:solidFill>
+                              <a:latin typeface="Cambria Math" panose="02040503050406030204" pitchFamily="18" charset="0"/>
+                            </a:rPr>
+                            <m:t>2</m:t>
+                          </m:r>
+                        </m:den>
+                      </m:f>
+                      <m:r>
+                        <a:rPr lang="it-IT" b="0" i="1" smtClean="0">
+                          <a:solidFill>
+                            <a:schemeClr val="tx1"/>
+                          </a:solidFill>
+                          <a:latin typeface="Cambria Math" panose="02040503050406030204" pitchFamily="18" charset="0"/>
+                        </a:rPr>
+                        <m:t>∼0.22 </m:t>
+                      </m:r>
+                      <m:r>
+                        <m:rPr>
+                          <m:sty m:val="p"/>
+                        </m:rPr>
+                        <a:rPr lang="it-IT" b="0" i="0" smtClean="0">
+                          <a:solidFill>
+                            <a:schemeClr val="tx1"/>
+                          </a:solidFill>
+                          <a:latin typeface="Cambria Math" panose="02040503050406030204" pitchFamily="18" charset="0"/>
+                        </a:rPr>
+                        <m:t>mm</m:t>
+                      </m:r>
+                    </m:oMath>
+                  </m:oMathPara>
+                </a14:m>
+                <a:endParaRPr lang="it-IT" dirty="0">
+                  <a:solidFill>
+                    <a:schemeClr val="tx1"/>
+                  </a:solidFill>
+                </a:endParaRPr>
+              </a:p>
+            </p:txBody>
+          </p:sp>
+        </mc:Choice>
+        <mc:Fallback xmlns="">
+          <p:sp>
+            <p:nvSpPr>
+              <p:cNvPr id="13" name="Rettangolo con angoli arrotondati 12">
+                <a:extLst>
+                  <a:ext uri="{FF2B5EF4-FFF2-40B4-BE49-F238E27FC236}">
+                    <a16:creationId xmlns:a16="http://schemas.microsoft.com/office/drawing/2014/main" id="{80D6D794-BEF0-5EB5-B731-DADE666780B1}"/>
+                  </a:ext>
+                </a:extLst>
+              </p:cNvPr>
+              <p:cNvSpPr>
+                <a:spLocks noRot="1" noChangeAspect="1" noMove="1" noResize="1" noEditPoints="1" noAdjustHandles="1" noChangeArrowheads="1" noChangeShapeType="1" noTextEdit="1"/>
+              </p:cNvSpPr>
+              <p:nvPr/>
+            </p:nvSpPr>
+            <p:spPr>
+              <a:xfrm>
+                <a:off x="9164638" y="3332747"/>
+                <a:ext cx="2331362" cy="1134475"/>
+              </a:xfrm>
+              <a:prstGeom prst="roundRect">
+                <a:avLst/>
+              </a:prstGeom>
+              <a:blipFill>
+                <a:blip r:embed="rId6"/>
+                <a:stretch>
+                  <a:fillRect/>
+                </a:stretch>
+              </a:blipFill>
+              <a:ln w="38100">
+                <a:solidFill>
+                  <a:srgbClr val="FFC000"/>
+                </a:solidFill>
+              </a:ln>
+            </p:spPr>
+            <p:txBody>
+              <a:bodyPr/>
+              <a:lstStyle/>
+              <a:p>
+                <a:r>
+                  <a:rPr lang="it-IT">
+                    <a:noFill/>
+                  </a:rPr>
+                  <a:t> </a:t>
+                </a:r>
+              </a:p>
+            </p:txBody>
+          </p:sp>
+        </mc:Fallback>
+      </mc:AlternateContent>
+    </p:spTree>
+    <p:extLst>
+      <p:ext uri="{BB962C8B-B14F-4D97-AF65-F5344CB8AC3E}">
+        <p14:creationId xmlns:p14="http://schemas.microsoft.com/office/powerpoint/2010/main" val="2772937911"/>
+      </p:ext>
+    </p:extLst>
+  </p:cSld>
+  <p:clrMapOvr>
+    <a:masterClrMapping/>
+  </p:clrMapOvr>
+</p:sld>
+</file>
+
+<file path=ppt/slides/slide11.xml><?xml version="1.0" encoding="utf-8"?>
+<p:sld xmlns:a="http://schemas.openxmlformats.org/drawingml/2006/main" xmlns:r="http://schemas.openxmlformats.org/officeDocument/2006/relationships" xmlns:p="http://schemas.openxmlformats.org/presentationml/2006/main">
+  <p:cSld>
+    <p:spTree>
+      <p:nvGrpSpPr>
+        <p:cNvPr id="1" name="">
+          <a:extLst>
+            <a:ext uri="{FF2B5EF4-FFF2-40B4-BE49-F238E27FC236}">
               <a16:creationId xmlns:a16="http://schemas.microsoft.com/office/drawing/2014/main" id="{6A304D7E-7DE7-B775-85D3-73D2E90112C1}"/>
             </a:ext>
           </a:extLst>
@@ -9425,7 +10876,7 @@
                   <a:srgbClr val="002060"/>
                 </a:solidFill>
               </a:rPr>
-              <a:t>10</a:t>
+              <a:t>11</a:t>
             </a:fld>
             <a:endParaRPr lang="it-IT" sz="1500" b="1" dirty="0">
               <a:solidFill>
@@ -9555,7 +11006,7 @@
 </p:sld>
 </file>
 
-<file path=ppt/slides/slide11.xml><?xml version="1.0" encoding="utf-8"?>
+<file path=ppt/slides/slide12.xml><?xml version="1.0" encoding="utf-8"?>
 <p:sld xmlns:a="http://schemas.openxmlformats.org/drawingml/2006/main" xmlns:r="http://schemas.openxmlformats.org/officeDocument/2006/relationships" xmlns:p="http://schemas.openxmlformats.org/presentationml/2006/main">
   <p:cSld>
     <p:spTree>
@@ -9979,7 +11430,7 @@
                   <a:srgbClr val="002060"/>
                 </a:solidFill>
               </a:rPr>
-              <a:t>11</a:t>
+              <a:t>12</a:t>
             </a:fld>
             <a:endParaRPr lang="it-IT" sz="1500" b="1" dirty="0">
               <a:solidFill>
@@ -10208,7 +11659,7 @@
 </p:sld>
 </file>
 
-<file path=ppt/slides/slide12.xml><?xml version="1.0" encoding="utf-8"?>
+<file path=ppt/slides/slide13.xml><?xml version="1.0" encoding="utf-8"?>
 <p:sld xmlns:a="http://schemas.openxmlformats.org/drawingml/2006/main" xmlns:r="http://schemas.openxmlformats.org/officeDocument/2006/relationships" xmlns:p="http://schemas.openxmlformats.org/presentationml/2006/main">
   <p:cSld>
     <p:spTree>
@@ -10382,7 +11833,7 @@
                   <a:srgbClr val="002060"/>
                 </a:solidFill>
               </a:rPr>
-              <a:t>12</a:t>
+              <a:t>13</a:t>
             </a:fld>
             <a:endParaRPr lang="it-IT" sz="1500" b="1" dirty="0">
               <a:solidFill>
@@ -10648,7 +12099,7 @@
 </p:sld>
 </file>
 
-<file path=ppt/slides/slide13.xml><?xml version="1.0" encoding="utf-8"?>
+<file path=ppt/slides/slide14.xml><?xml version="1.0" encoding="utf-8"?>
 <p:sld xmlns:a="http://schemas.openxmlformats.org/drawingml/2006/main" xmlns:r="http://schemas.openxmlformats.org/officeDocument/2006/relationships" xmlns:p="http://schemas.openxmlformats.org/presentationml/2006/main">
   <p:cSld>
     <p:spTree>
@@ -11152,7 +12603,7 @@
                   <a:srgbClr val="002060"/>
                 </a:solidFill>
               </a:rPr>
-              <a:t>13</a:t>
+              <a:t>14</a:t>
             </a:fld>
             <a:endParaRPr lang="it-IT" sz="1500" b="1" dirty="0">
               <a:solidFill>
@@ -11318,7 +12769,7 @@
 </p:sld>
 </file>
 
-<file path=ppt/slides/slide14.xml><?xml version="1.0" encoding="utf-8"?>
+<file path=ppt/slides/slide15.xml><?xml version="1.0" encoding="utf-8"?>
 <p:sld xmlns:a="http://schemas.openxmlformats.org/drawingml/2006/main" xmlns:r="http://schemas.openxmlformats.org/officeDocument/2006/relationships" xmlns:p="http://schemas.openxmlformats.org/presentationml/2006/main">
   <p:cSld>
     <p:spTree>
@@ -12360,7 +13811,7 @@
                   <a:srgbClr val="002060"/>
                 </a:solidFill>
               </a:rPr>
-              <a:t>14</a:t>
+              <a:t>15</a:t>
             </a:fld>
             <a:endParaRPr lang="it-IT" sz="1500" b="1" dirty="0">
               <a:solidFill>
@@ -12492,7 +13943,7 @@
           <p:nvPr/>
         </p:nvPicPr>
         <p:blipFill>
-          <a:blip r:embed="rId3">
+          <a:blip r:embed="rId4">
             <a:extLst>
               <a:ext uri="{28A0092B-C50C-407E-A947-70E740481C1C}">
                 <a14:useLocalDpi xmlns:a14="http://schemas.microsoft.com/office/drawing/2010/main" val="0"/>
@@ -12526,7 +13977,7 @@
 </p:sld>
 </file>
 
-<file path=ppt/slides/slide15.xml><?xml version="1.0" encoding="utf-8"?>
+<file path=ppt/slides/slide16.xml><?xml version="1.0" encoding="utf-8"?>
 <p:sld xmlns:a="http://schemas.openxmlformats.org/drawingml/2006/main" xmlns:r="http://schemas.openxmlformats.org/officeDocument/2006/relationships" xmlns:p="http://schemas.openxmlformats.org/presentationml/2006/main">
   <p:cSld>
     <p:spTree>
@@ -12700,7 +14151,7 @@
                   <a:srgbClr val="002060"/>
                 </a:solidFill>
               </a:rPr>
-              <a:t>15</a:t>
+              <a:t>16</a:t>
             </a:fld>
             <a:endParaRPr lang="it-IT" sz="1500" b="1" dirty="0">
               <a:solidFill>
@@ -12954,7 +14405,7 @@
 </p:sld>
 </file>
 
-<file path=ppt/slides/slide16.xml><?xml version="1.0" encoding="utf-8"?>
+<file path=ppt/slides/slide17.xml><?xml version="1.0" encoding="utf-8"?>
 <p:sld xmlns:a="http://schemas.openxmlformats.org/drawingml/2006/main" xmlns:r="http://schemas.openxmlformats.org/officeDocument/2006/relationships" xmlns:p="http://schemas.openxmlformats.org/presentationml/2006/main">
   <p:cSld>
     <p:spTree>
@@ -13286,7 +14737,7 @@
                   <a:srgbClr val="002060"/>
                 </a:solidFill>
               </a:rPr>
-              <a:t>16</a:t>
+              <a:t>17</a:t>
             </a:fld>
             <a:endParaRPr lang="it-IT" sz="1500" b="1" dirty="0">
               <a:solidFill>
@@ -13453,7 +14904,7 @@
 </p:sld>
 </file>
 
-<file path=ppt/slides/slide17.xml><?xml version="1.0" encoding="utf-8"?>
+<file path=ppt/slides/slide18.xml><?xml version="1.0" encoding="utf-8"?>
 <p:sld xmlns:a="http://schemas.openxmlformats.org/drawingml/2006/main" xmlns:r="http://schemas.openxmlformats.org/officeDocument/2006/relationships" xmlns:p="http://schemas.openxmlformats.org/presentationml/2006/main">
   <p:cSld>
     <p:spTree>
@@ -13671,7 +15122,7 @@
                   <a:srgbClr val="002060"/>
                 </a:solidFill>
               </a:rPr>
-              <a:t>17</a:t>
+              <a:t>18</a:t>
             </a:fld>
             <a:endParaRPr lang="it-IT" sz="1500" b="1" dirty="0">
               <a:solidFill>
@@ -14176,7 +15627,7 @@
 </p:sld>
 </file>
 
-<file path=ppt/slides/slide18.xml><?xml version="1.0" encoding="utf-8"?>
+<file path=ppt/slides/slide19.xml><?xml version="1.0" encoding="utf-8"?>
 <p:sld xmlns:a="http://schemas.openxmlformats.org/drawingml/2006/main" xmlns:r="http://schemas.openxmlformats.org/officeDocument/2006/relationships" xmlns:p="http://schemas.openxmlformats.org/presentationml/2006/main">
   <p:cSld>
     <p:spTree>
@@ -14509,7 +15960,7 @@
                   <a:srgbClr val="002060"/>
                 </a:solidFill>
               </a:rPr>
-              <a:t>18</a:t>
+              <a:t>19</a:t>
             </a:fld>
             <a:endParaRPr lang="it-IT" sz="1500" b="1" dirty="0">
               <a:solidFill>
@@ -15119,7 +16570,375 @@
 </p:sld>
 </file>
 
-<file path=ppt/slides/slide19.xml><?xml version="1.0" encoding="utf-8"?>
+<file path=ppt/slides/slide2.xml><?xml version="1.0" encoding="utf-8"?>
+<p:sld xmlns:a="http://schemas.openxmlformats.org/drawingml/2006/main" xmlns:r="http://schemas.openxmlformats.org/officeDocument/2006/relationships" xmlns:p="http://schemas.openxmlformats.org/presentationml/2006/main">
+  <p:cSld>
+    <p:spTree>
+      <p:nvGrpSpPr>
+        <p:cNvPr id="1" name=""/>
+        <p:cNvGrpSpPr/>
+        <p:nvPr/>
+      </p:nvGrpSpPr>
+      <p:grpSpPr>
+        <a:xfrm>
+          <a:off x="0" y="0"/>
+          <a:ext cx="0" cy="0"/>
+          <a:chOff x="0" y="0"/>
+          <a:chExt cx="0" cy="0"/>
+        </a:xfrm>
+      </p:grpSpPr>
+      <p:sp>
+        <p:nvSpPr>
+          <p:cNvPr id="2" name="Titolo 1">
+            <a:extLst>
+              <a:ext uri="{FF2B5EF4-FFF2-40B4-BE49-F238E27FC236}">
+                <a16:creationId xmlns:a16="http://schemas.microsoft.com/office/drawing/2014/main" id="{C2EC8513-F988-C98D-D333-B6789C129AFF}"/>
+              </a:ext>
+            </a:extLst>
+          </p:cNvPr>
+          <p:cNvSpPr>
+            <a:spLocks noGrp="1"/>
+          </p:cNvSpPr>
+          <p:nvPr>
+            <p:ph type="title"/>
+          </p:nvPr>
+        </p:nvSpPr>
+        <p:spPr>
+          <a:xfrm>
+            <a:off x="38100" y="69651"/>
+            <a:ext cx="12114000" cy="1153094"/>
+          </a:xfrm>
+          <a:prstGeom prst="roundRect">
+            <a:avLst>
+              <a:gd name="adj" fmla="val 36459"/>
+            </a:avLst>
+          </a:prstGeom>
+          <a:noFill/>
+        </p:spPr>
+        <p:txBody>
+          <a:bodyPr>
+            <a:normAutofit/>
+          </a:bodyPr>
+          <a:lstStyle/>
+          <a:p>
+            <a:r>
+              <a:rPr lang="it-IT" b="1" dirty="0">
+                <a:solidFill>
+                  <a:srgbClr val="002060"/>
+                </a:solidFill>
+              </a:rPr>
+              <a:t>	1. DATA ANALYZED</a:t>
+            </a:r>
+          </a:p>
+        </p:txBody>
+      </p:sp>
+      <p:sp>
+        <p:nvSpPr>
+          <p:cNvPr id="3" name="Segnaposto contenuto 2">
+            <a:extLst>
+              <a:ext uri="{FF2B5EF4-FFF2-40B4-BE49-F238E27FC236}">
+                <a16:creationId xmlns:a16="http://schemas.microsoft.com/office/drawing/2014/main" id="{D705E017-952C-14B0-9906-4510932BCA3F}"/>
+              </a:ext>
+            </a:extLst>
+          </p:cNvPr>
+          <p:cNvSpPr>
+            <a:spLocks noGrp="1"/>
+          </p:cNvSpPr>
+          <p:nvPr>
+            <p:ph idx="1"/>
+          </p:nvPr>
+        </p:nvSpPr>
+        <p:spPr>
+          <a:xfrm>
+            <a:off x="838200" y="1401288"/>
+            <a:ext cx="10515600" cy="4776227"/>
+          </a:xfrm>
+        </p:spPr>
+        <p:txBody>
+          <a:bodyPr>
+            <a:normAutofit/>
+          </a:bodyPr>
+          <a:lstStyle/>
+          <a:p>
+            <a:pPr marL="0" indent="0">
+              <a:buNone/>
+            </a:pPr>
+            <a:endParaRPr lang="it-IT" dirty="0"/>
+          </a:p>
+          <a:p>
+            <a:pPr marL="0" indent="0">
+              <a:buNone/>
+            </a:pPr>
+            <a:r>
+              <a:rPr lang="it-IT" dirty="0"/>
+              <a:t>Analysis of 2024 dataset for </a:t>
+            </a:r>
+            <a:r>
+              <a:rPr lang="it-IT" dirty="0" err="1"/>
+              <a:t>two</a:t>
+            </a:r>
+            <a:r>
+              <a:rPr lang="it-IT" dirty="0"/>
+              <a:t> long </a:t>
+            </a:r>
+            <a:r>
+              <a:rPr lang="it-IT" dirty="0" err="1"/>
+              <a:t>crystals</a:t>
+            </a:r>
+            <a:r>
+              <a:rPr lang="it-IT" dirty="0"/>
+              <a:t>:</a:t>
+            </a:r>
+          </a:p>
+          <a:p>
+            <a:pPr lvl="1"/>
+            <a:r>
+              <a:rPr lang="it-IT" sz="2800" dirty="0"/>
+              <a:t>LHCTBMCP0001-0001: </a:t>
+            </a:r>
+            <a:r>
+              <a:rPr lang="it-IT" sz="2800" dirty="0" err="1"/>
+              <a:t>runs</a:t>
+            </a:r>
+            <a:r>
+              <a:rPr lang="it-IT" sz="2800" dirty="0"/>
+              <a:t> 8430, 8431, 8650</a:t>
+            </a:r>
+          </a:p>
+          <a:p>
+            <a:pPr lvl="1"/>
+            <a:r>
+              <a:rPr lang="it-IT" sz="2800" dirty="0"/>
+              <a:t>LHCTBMCP0001-0002: </a:t>
+            </a:r>
+            <a:r>
+              <a:rPr lang="it-IT" sz="2800" dirty="0" err="1"/>
+              <a:t>runs</a:t>
+            </a:r>
+            <a:r>
+              <a:rPr lang="it-IT" sz="2800" dirty="0"/>
+              <a:t> 8655, 8656</a:t>
+            </a:r>
+          </a:p>
+          <a:p>
+            <a:pPr marL="0" indent="0">
+              <a:buNone/>
+            </a:pPr>
+            <a:endParaRPr lang="it-IT" dirty="0"/>
+          </a:p>
+          <a:p>
+            <a:pPr marL="0" indent="0">
+              <a:buNone/>
+            </a:pPr>
+            <a:r>
+              <a:rPr lang="it-IT" dirty="0" err="1"/>
+              <a:t>Configuration</a:t>
+            </a:r>
+            <a:r>
+              <a:rPr lang="it-IT" dirty="0"/>
+              <a:t>:</a:t>
+            </a:r>
+          </a:p>
+          <a:p>
+            <a:pPr lvl="1"/>
+            <a:r>
+              <a:rPr lang="it-IT" sz="2800" dirty="0"/>
+              <a:t>Central </a:t>
+            </a:r>
+            <a:r>
+              <a:rPr lang="it-IT" sz="2800" dirty="0" err="1"/>
+              <a:t>goniometer</a:t>
+            </a:r>
+            <a:endParaRPr lang="it-IT" sz="2800" dirty="0"/>
+          </a:p>
+          <a:p>
+            <a:pPr lvl="1"/>
+            <a:r>
+              <a:rPr lang="it-IT" sz="2800" dirty="0"/>
+              <a:t>Energy 180 GeV/c</a:t>
+            </a:r>
+          </a:p>
+          <a:p>
+            <a:pPr marL="0" indent="0">
+              <a:buNone/>
+            </a:pPr>
+            <a:endParaRPr lang="it-IT" dirty="0"/>
+          </a:p>
+        </p:txBody>
+      </p:sp>
+      <p:sp>
+        <p:nvSpPr>
+          <p:cNvPr id="4" name="Segnaposto data 3">
+            <a:extLst>
+              <a:ext uri="{FF2B5EF4-FFF2-40B4-BE49-F238E27FC236}">
+                <a16:creationId xmlns:a16="http://schemas.microsoft.com/office/drawing/2014/main" id="{A9CBEBE7-5AD1-2A5D-D796-FC860CFACB62}"/>
+              </a:ext>
+            </a:extLst>
+          </p:cNvPr>
+          <p:cNvSpPr>
+            <a:spLocks noGrp="1"/>
+          </p:cNvSpPr>
+          <p:nvPr>
+            <p:ph type="dt" sz="half" idx="10"/>
+          </p:nvPr>
+        </p:nvSpPr>
+        <p:spPr>
+          <a:xfrm>
+            <a:off x="838200" y="6356349"/>
+            <a:ext cx="2743200" cy="432000"/>
+          </a:xfrm>
+        </p:spPr>
+        <p:txBody>
+          <a:bodyPr/>
+          <a:lstStyle/>
+          <a:p>
+            <a:r>
+              <a:rPr lang="it-IT" sz="1500" b="1" dirty="0">
+                <a:solidFill>
+                  <a:srgbClr val="002060"/>
+                </a:solidFill>
+              </a:rPr>
+              <a:t>July 2026</a:t>
+            </a:r>
+          </a:p>
+        </p:txBody>
+      </p:sp>
+      <p:sp>
+        <p:nvSpPr>
+          <p:cNvPr id="5" name="Segnaposto piè di pagina 4">
+            <a:extLst>
+              <a:ext uri="{FF2B5EF4-FFF2-40B4-BE49-F238E27FC236}">
+                <a16:creationId xmlns:a16="http://schemas.microsoft.com/office/drawing/2014/main" id="{D65DDE3E-B94E-09A0-E6FC-740927746D9E}"/>
+              </a:ext>
+            </a:extLst>
+          </p:cNvPr>
+          <p:cNvSpPr>
+            <a:spLocks noGrp="1"/>
+          </p:cNvSpPr>
+          <p:nvPr>
+            <p:ph type="ftr" sz="quarter" idx="11"/>
+          </p:nvPr>
+        </p:nvSpPr>
+        <p:spPr>
+          <a:xfrm>
+            <a:off x="0" y="6356349"/>
+            <a:ext cx="12192000" cy="432000"/>
+          </a:xfrm>
+        </p:spPr>
+        <p:txBody>
+          <a:bodyPr/>
+          <a:lstStyle/>
+          <a:p>
+            <a:r>
+              <a:rPr lang="it-IT" sz="1500" b="1" dirty="0">
+                <a:solidFill>
+                  <a:srgbClr val="002060"/>
+                </a:solidFill>
+              </a:rPr>
+              <a:t>Anna Sofia Moro</a:t>
+            </a:r>
+          </a:p>
+        </p:txBody>
+      </p:sp>
+      <p:sp>
+        <p:nvSpPr>
+          <p:cNvPr id="6" name="Segnaposto numero diapositiva 5">
+            <a:extLst>
+              <a:ext uri="{FF2B5EF4-FFF2-40B4-BE49-F238E27FC236}">
+                <a16:creationId xmlns:a16="http://schemas.microsoft.com/office/drawing/2014/main" id="{EB429AC5-2B17-3AA7-829E-3FADDA4D07B5}"/>
+              </a:ext>
+            </a:extLst>
+          </p:cNvPr>
+          <p:cNvSpPr>
+            <a:spLocks noGrp="1"/>
+          </p:cNvSpPr>
+          <p:nvPr>
+            <p:ph type="sldNum" sz="quarter" idx="12"/>
+          </p:nvPr>
+        </p:nvSpPr>
+        <p:spPr>
+          <a:xfrm>
+            <a:off x="8610600" y="6356349"/>
+            <a:ext cx="2743200" cy="432000"/>
+          </a:xfrm>
+        </p:spPr>
+        <p:txBody>
+          <a:bodyPr/>
+          <a:lstStyle/>
+          <a:p>
+            <a:fld id="{0A318BD9-CA14-4A83-ACF0-03D5918EB402}" type="slidenum">
+              <a:rPr lang="it-IT" sz="1500" b="1" smtClean="0">
+                <a:solidFill>
+                  <a:srgbClr val="002060"/>
+                </a:solidFill>
+              </a:rPr>
+              <a:t>2</a:t>
+            </a:fld>
+            <a:endParaRPr lang="it-IT" sz="1500" b="1" dirty="0">
+              <a:solidFill>
+                <a:srgbClr val="002060"/>
+              </a:solidFill>
+            </a:endParaRPr>
+          </a:p>
+        </p:txBody>
+      </p:sp>
+      <p:cxnSp>
+        <p:nvCxnSpPr>
+          <p:cNvPr id="10" name="Connettore diritto 9">
+            <a:extLst>
+              <a:ext uri="{FF2B5EF4-FFF2-40B4-BE49-F238E27FC236}">
+                <a16:creationId xmlns:a16="http://schemas.microsoft.com/office/drawing/2014/main" id="{D66CB6E1-F902-FACB-CE04-F0353E6FCF48}"/>
+              </a:ext>
+            </a:extLst>
+          </p:cNvPr>
+          <p:cNvCxnSpPr>
+            <a:cxnSpLocks/>
+          </p:cNvCxnSpPr>
+          <p:nvPr/>
+        </p:nvCxnSpPr>
+        <p:spPr>
+          <a:xfrm>
+            <a:off x="696000" y="1155368"/>
+            <a:ext cx="10800000" cy="0"/>
+          </a:xfrm>
+          <a:prstGeom prst="line">
+            <a:avLst/>
+          </a:prstGeom>
+          <a:ln w="38100">
+            <a:solidFill>
+              <a:srgbClr val="002060"/>
+            </a:solidFill>
+          </a:ln>
+        </p:spPr>
+        <p:style>
+          <a:lnRef idx="2">
+            <a:schemeClr val="accent1"/>
+          </a:lnRef>
+          <a:fillRef idx="0">
+            <a:schemeClr val="accent1"/>
+          </a:fillRef>
+          <a:effectRef idx="1">
+            <a:schemeClr val="accent1"/>
+          </a:effectRef>
+          <a:fontRef idx="minor">
+            <a:schemeClr val="tx1"/>
+          </a:fontRef>
+        </p:style>
+      </p:cxnSp>
+    </p:spTree>
+    <p:extLst>
+      <p:ext uri="{BB962C8B-B14F-4D97-AF65-F5344CB8AC3E}">
+        <p14:creationId xmlns:p14="http://schemas.microsoft.com/office/powerpoint/2010/main" val="3483749309"/>
+      </p:ext>
+    </p:extLst>
+  </p:cSld>
+  <p:clrMapOvr>
+    <a:masterClrMapping/>
+  </p:clrMapOvr>
+</p:sld>
+</file>
+
+<file path=ppt/slides/slide20.xml><?xml version="1.0" encoding="utf-8"?>
 <p:sld xmlns:a="http://schemas.openxmlformats.org/drawingml/2006/main" xmlns:r="http://schemas.openxmlformats.org/officeDocument/2006/relationships" xmlns:p="http://schemas.openxmlformats.org/presentationml/2006/main">
   <p:cSld>
     <p:spTree>
@@ -15293,7 +17112,7 @@
                   <a:srgbClr val="002060"/>
                 </a:solidFill>
               </a:rPr>
-              <a:t>19</a:t>
+              <a:t>20</a:t>
             </a:fld>
             <a:endParaRPr lang="it-IT" sz="1500" b="1" dirty="0">
               <a:solidFill>
@@ -15410,8 +17229,8 @@
           </a:p>
         </p:txBody>
       </p:sp>
-      <mc:AlternateContent xmlns:mc="http://schemas.openxmlformats.org/markup-compatibility/2006" xmlns:a14="http://schemas.microsoft.com/office/drawing/2010/main">
-        <mc:Choice Requires="a14">
+      <mc:AlternateContent xmlns:mc="http://schemas.openxmlformats.org/markup-compatibility/2006">
+        <mc:Choice xmlns:a14="http://schemas.microsoft.com/office/drawing/2010/main" Requires="a14">
           <p:graphicFrame>
             <p:nvGraphicFramePr>
               <p:cNvPr id="11" name="Segnaposto contenuto 10">
@@ -15428,14 +17247,14 @@
                 <p:ph idx="1"/>
                 <p:extLst>
                   <p:ext uri="{D42A27DB-BD31-4B8C-83A1-F6EECF244321}">
-                    <p14:modId xmlns:p14="http://schemas.microsoft.com/office/powerpoint/2010/main" val="1837215706"/>
+                    <p14:modId xmlns:p14="http://schemas.microsoft.com/office/powerpoint/2010/main" val="1089552050"/>
                   </p:ext>
                 </p:extLst>
               </p:nvPr>
             </p:nvGraphicFramePr>
             <p:xfrm>
               <a:off x="838200" y="2059186"/>
-              <a:ext cx="10515600" cy="3142488"/>
+              <a:ext cx="10515600" cy="2776728"/>
             </p:xfrm>
             <a:graphic>
               <a:graphicData uri="http://schemas.openxmlformats.org/drawingml/2006/table">
@@ -15451,21 +17270,21 @@
                         </a:ext>
                       </a:extLst>
                     </a:gridCol>
-                    <a:gridCol w="1893147">
+                    <a:gridCol w="1642712">
                       <a:extLst>
                         <a:ext uri="{9D8B030D-6E8A-4147-A177-3AD203B41FA5}">
                           <a16:colId xmlns:a16="http://schemas.microsoft.com/office/drawing/2014/main" val="1666825536"/>
                         </a:ext>
                       </a:extLst>
                     </a:gridCol>
-                    <a:gridCol w="2192866">
+                    <a:gridCol w="2610852">
                       <a:extLst>
                         <a:ext uri="{9D8B030D-6E8A-4147-A177-3AD203B41FA5}">
                           <a16:colId xmlns:a16="http://schemas.microsoft.com/office/drawing/2014/main" val="1022820918"/>
                         </a:ext>
                       </a:extLst>
                     </a:gridCol>
-                    <a:gridCol w="2074334">
+                    <a:gridCol w="1906783">
                       <a:extLst>
                         <a:ext uri="{9D8B030D-6E8A-4147-A177-3AD203B41FA5}">
                           <a16:colId xmlns:a16="http://schemas.microsoft.com/office/drawing/2014/main" val="2020566626"/>
@@ -15612,21 +17431,12 @@
                                     </m:r>
                                   </m:sub>
                                 </m:sSub>
-                              </m:oMath>
-                            </m:oMathPara>
-                          </a14:m>
-                          <a:endParaRPr lang="it-IT" sz="2400" b="1" i="1" dirty="0">
-                            <a:latin typeface="Cambria Math" panose="02040503050406030204" pitchFamily="18" charset="0"/>
-                          </a:endParaRPr>
-                        </a:p>
-                        <a:p>
-                          <a:pPr algn="ctr"/>
-                          <a14:m>
-                            <m:oMathPara xmlns:m="http://schemas.openxmlformats.org/officeDocument/2006/math">
-                              <m:oMathParaPr>
-                                <m:jc m:val="centerGroup"/>
-                              </m:oMathParaPr>
-                              <m:oMath xmlns:m="http://schemas.openxmlformats.org/officeDocument/2006/math">
+                                <m:r>
+                                  <a:rPr lang="it-IT" sz="2400" b="1" i="1" smtClean="0">
+                                    <a:latin typeface="Cambria Math" panose="02040503050406030204" pitchFamily="18" charset="0"/>
+                                  </a:rPr>
+                                  <m:t> </m:t>
+                                </m:r>
                                 <m:r>
                                   <a:rPr lang="it-IT" sz="2400" b="1" i="1" smtClean="0">
                                     <a:latin typeface="Cambria Math" panose="02040503050406030204" pitchFamily="18" charset="0"/>
@@ -15703,12 +17513,39 @@
                         <a:lstStyle/>
                         <a:p>
                           <a:pPr algn="ctr"/>
-                          <a:r>
-                            <a:rPr lang="it-IT" sz="2400" b="1" dirty="0"/>
-                            <a:t>channeling angle </a:t>
-                          </a:r>
                           <a14:m>
                             <m:oMath xmlns:m="http://schemas.openxmlformats.org/officeDocument/2006/math">
+                              <m:sSub>
+                                <m:sSubPr>
+                                  <m:ctrlPr>
+                                    <a:rPr lang="it-IT" sz="2400" b="1" i="1" smtClean="0">
+                                      <a:latin typeface="Cambria Math" panose="02040503050406030204" pitchFamily="18" charset="0"/>
+                                    </a:rPr>
+                                  </m:ctrlPr>
+                                </m:sSubPr>
+                                <m:e>
+                                  <m:r>
+                                    <a:rPr lang="it-IT" sz="2400" b="1" i="1" smtClean="0">
+                                      <a:latin typeface="Cambria Math" panose="02040503050406030204" pitchFamily="18" charset="0"/>
+                                    </a:rPr>
+                                    <m:t>𝜽</m:t>
+                                  </m:r>
+                                </m:e>
+                                <m:sub>
+                                  <m:r>
+                                    <a:rPr lang="it-IT" sz="2400" b="1" i="1" smtClean="0">
+                                      <a:latin typeface="Cambria Math" panose="02040503050406030204" pitchFamily="18" charset="0"/>
+                                    </a:rPr>
+                                    <m:t>𝒃</m:t>
+                                  </m:r>
+                                </m:sub>
+                              </m:sSub>
+                              <m:r>
+                                <a:rPr lang="it-IT" sz="2400" b="1" i="1" smtClean="0">
+                                  <a:latin typeface="Cambria Math" panose="02040503050406030204" pitchFamily="18" charset="0"/>
+                                </a:rPr>
+                                <m:t> </m:t>
+                              </m:r>
                               <m:r>
                                 <a:rPr lang="it-IT" sz="2400" b="1" i="1" smtClean="0">
                                   <a:latin typeface="Cambria Math" panose="02040503050406030204" pitchFamily="18" charset="0"/>
@@ -15969,7 +17806,7 @@
                                   <a:rPr lang="it-IT" sz="2400" b="0" i="1" smtClean="0">
                                     <a:latin typeface="Cambria Math" panose="02040503050406030204" pitchFamily="18" charset="0"/>
                                   </a:rPr>
-                                  <m:t>3.86</m:t>
+                                  <m:t>3.45</m:t>
                                 </m:r>
                               </m:oMath>
                             </m:oMathPara>
@@ -16014,7 +17851,7 @@
                                   <a:rPr lang="it-IT" sz="2400" b="0" i="1" smtClean="0">
                                     <a:latin typeface="Cambria Math" panose="02040503050406030204" pitchFamily="18" charset="0"/>
                                   </a:rPr>
-                                  <m:t>6010</m:t>
+                                  <m:t>6011</m:t>
                                 </m:r>
                               </m:oMath>
                             </m:oMathPara>
@@ -16059,7 +17896,19 @@
                                       <a:rPr lang="it-IT" sz="2400" b="0" i="1" smtClean="0">
                                         <a:latin typeface="Cambria Math" panose="02040503050406030204" pitchFamily="18" charset="0"/>
                                       </a:rPr>
-                                      <m:t>18.8±0.01</m:t>
+                                      <m:t>18.</m:t>
+                                    </m:r>
+                                    <m:r>
+                                      <a:rPr lang="it-IT" sz="2400" b="0" i="1" smtClean="0">
+                                        <a:latin typeface="Cambria Math" panose="02040503050406030204" pitchFamily="18" charset="0"/>
+                                      </a:rPr>
+                                      <m:t>7</m:t>
+                                    </m:r>
+                                    <m:r>
+                                      <a:rPr lang="it-IT" sz="2400" b="0" i="1" smtClean="0">
+                                        <a:latin typeface="Cambria Math" panose="02040503050406030204" pitchFamily="18" charset="0"/>
+                                      </a:rPr>
+                                      <m:t>±0.01</m:t>
                                     </m:r>
                                   </m:e>
                                 </m:d>
@@ -16182,7 +18031,7 @@
                                   <a:rPr lang="it-IT" sz="2400" b="0" i="1" smtClean="0">
                                     <a:latin typeface="Cambria Math" panose="02040503050406030204" pitchFamily="18" charset="0"/>
                                   </a:rPr>
-                                  <m:t>3.32</m:t>
+                                  <m:t>3.33</m:t>
                                 </m:r>
                               </m:oMath>
                             </m:oMathPara>
@@ -16269,7 +18118,19 @@
                                       <a:rPr lang="it-IT" sz="2400" b="0" i="1" smtClean="0">
                                         <a:latin typeface="Cambria Math" panose="02040503050406030204" pitchFamily="18" charset="0"/>
                                       </a:rPr>
-                                      <m:t>18.4±0.01</m:t>
+                                      <m:t>18.</m:t>
+                                    </m:r>
+                                    <m:r>
+                                      <a:rPr lang="it-IT" sz="2400" b="0" i="1" smtClean="0">
+                                        <a:latin typeface="Cambria Math" panose="02040503050406030204" pitchFamily="18" charset="0"/>
+                                      </a:rPr>
+                                      <m:t>3</m:t>
+                                    </m:r>
+                                    <m:r>
+                                      <a:rPr lang="it-IT" sz="2400" b="0" i="1" smtClean="0">
+                                        <a:latin typeface="Cambria Math" panose="02040503050406030204" pitchFamily="18" charset="0"/>
+                                      </a:rPr>
+                                      <m:t>±0.01</m:t>
                                     </m:r>
                                   </m:e>
                                 </m:d>
@@ -16392,7 +18253,7 @@
                                   <a:rPr lang="it-IT" sz="2400" b="0" i="1" smtClean="0">
                                     <a:latin typeface="Cambria Math" panose="02040503050406030204" pitchFamily="18" charset="0"/>
                                   </a:rPr>
-                                  <m:t>3.74</m:t>
+                                  <m:t>3.72</m:t>
                                 </m:r>
                               </m:oMath>
                             </m:oMathPara>
@@ -16453,7 +18314,7 @@
                                   <a:rPr lang="it-IT" sz="2400" b="0" i="1" smtClean="0">
                                     <a:latin typeface="Cambria Math" panose="02040503050406030204" pitchFamily="18" charset="0"/>
                                   </a:rPr>
-                                  <m:t>6076</m:t>
+                                  <m:t>6077</m:t>
                                 </m:r>
                               </m:oMath>
                             </m:oMathPara>
@@ -16498,7 +18359,19 @@
                                       <a:rPr lang="it-IT" sz="2400" b="0" i="1" smtClean="0">
                                         <a:latin typeface="Cambria Math" panose="02040503050406030204" pitchFamily="18" charset="0"/>
                                       </a:rPr>
-                                      <m:t>17.2±0.01</m:t>
+                                      <m:t>17.</m:t>
+                                    </m:r>
+                                    <m:r>
+                                      <a:rPr lang="it-IT" sz="2400" b="0" i="1" smtClean="0">
+                                        <a:latin typeface="Cambria Math" panose="02040503050406030204" pitchFamily="18" charset="0"/>
+                                      </a:rPr>
+                                      <m:t>1</m:t>
+                                    </m:r>
+                                    <m:r>
+                                      <a:rPr lang="it-IT" sz="2400" b="0" i="1" smtClean="0">
+                                        <a:latin typeface="Cambria Math" panose="02040503050406030204" pitchFamily="18" charset="0"/>
+                                      </a:rPr>
+                                      <m:t>±0.01</m:t>
                                     </m:r>
                                   </m:e>
                                 </m:d>
@@ -16675,7 +18548,13 @@
                                   <a:rPr lang="it-IT" sz="2400" b="0" i="1" smtClean="0">
                                     <a:latin typeface="Cambria Math" panose="02040503050406030204" pitchFamily="18" charset="0"/>
                                   </a:rPr>
-                                  <m:t>2.87</m:t>
+                                  <m:t>2.9</m:t>
+                                </m:r>
+                                <m:r>
+                                  <a:rPr lang="it-IT" sz="2400" b="0" i="1" smtClean="0">
+                                    <a:latin typeface="Cambria Math" panose="02040503050406030204" pitchFamily="18" charset="0"/>
+                                  </a:rPr>
+                                  <m:t>7</m:t>
                                 </m:r>
                               </m:oMath>
                             </m:oMathPara>
@@ -16736,7 +18615,7 @@
                                   <a:rPr lang="it-IT" sz="2400" b="0" i="1" smtClean="0">
                                     <a:latin typeface="Cambria Math" panose="02040503050406030204" pitchFamily="18" charset="0"/>
                                   </a:rPr>
-                                  <m:t>6129</m:t>
+                                  <m:t>6124</m:t>
                                 </m:r>
                               </m:oMath>
                             </m:oMathPara>
@@ -16781,7 +18660,19 @@
                                       <a:rPr lang="it-IT" sz="2400" b="0" i="1" smtClean="0">
                                         <a:latin typeface="Cambria Math" panose="02040503050406030204" pitchFamily="18" charset="0"/>
                                       </a:rPr>
-                                      <m:t>17.8±0.01</m:t>
+                                      <m:t>17.</m:t>
+                                    </m:r>
+                                    <m:r>
+                                      <a:rPr lang="it-IT" sz="2400" b="0" i="1" smtClean="0">
+                                        <a:latin typeface="Cambria Math" panose="02040503050406030204" pitchFamily="18" charset="0"/>
+                                      </a:rPr>
+                                      <m:t>9</m:t>
+                                    </m:r>
+                                    <m:r>
+                                      <a:rPr lang="it-IT" sz="2400" b="0" i="1" smtClean="0">
+                                        <a:latin typeface="Cambria Math" panose="02040503050406030204" pitchFamily="18" charset="0"/>
+                                      </a:rPr>
+                                      <m:t>±0.01</m:t>
                                     </m:r>
                                   </m:e>
                                 </m:d>
@@ -16911,7 +18802,7 @@
                                   <a:rPr lang="it-IT" sz="2400" b="0" i="1" smtClean="0">
                                     <a:latin typeface="Cambria Math" panose="02040503050406030204" pitchFamily="18" charset="0"/>
                                   </a:rPr>
-                                  <m:t>2.91</m:t>
+                                  <m:t>2.83</m:t>
                                 </m:r>
                               </m:oMath>
                             </m:oMathPara>
@@ -16970,7 +18861,7 @@
                                   <a:rPr lang="it-IT" sz="2400" b="0" i="1" smtClean="0">
                                     <a:latin typeface="Cambria Math" panose="02040503050406030204" pitchFamily="18" charset="0"/>
                                   </a:rPr>
-                                  <m:t>6127</m:t>
+                                  <m:t>6123</m:t>
                                 </m:r>
                               </m:oMath>
                             </m:oMathPara>
@@ -17013,7 +18904,31 @@
                                       <a:rPr lang="it-IT" sz="2400" b="0" i="1" smtClean="0">
                                         <a:latin typeface="Cambria Math" panose="02040503050406030204" pitchFamily="18" charset="0"/>
                                       </a:rPr>
-                                      <m:t>18.0±0.01</m:t>
+                                      <m:t>1</m:t>
+                                    </m:r>
+                                    <m:r>
+                                      <a:rPr lang="it-IT" sz="2400" b="0" i="1" smtClean="0">
+                                        <a:latin typeface="Cambria Math" panose="02040503050406030204" pitchFamily="18" charset="0"/>
+                                      </a:rPr>
+                                      <m:t>7</m:t>
+                                    </m:r>
+                                    <m:r>
+                                      <a:rPr lang="it-IT" sz="2400" b="0" i="1" smtClean="0">
+                                        <a:latin typeface="Cambria Math" panose="02040503050406030204" pitchFamily="18" charset="0"/>
+                                      </a:rPr>
+                                      <m:t>.</m:t>
+                                    </m:r>
+                                    <m:r>
+                                      <a:rPr lang="it-IT" sz="2400" b="0" i="1" smtClean="0">
+                                        <a:latin typeface="Cambria Math" panose="02040503050406030204" pitchFamily="18" charset="0"/>
+                                      </a:rPr>
+                                      <m:t>8</m:t>
+                                    </m:r>
+                                    <m:r>
+                                      <a:rPr lang="it-IT" sz="2400" b="0" i="1" smtClean="0">
+                                        <a:latin typeface="Cambria Math" panose="02040503050406030204" pitchFamily="18" charset="0"/>
+                                      </a:rPr>
+                                      <m:t>±0.01</m:t>
                                     </m:r>
                                   </m:e>
                                 </m:d>
@@ -17051,7 +18966,7 @@
             </a:graphic>
           </p:graphicFrame>
         </mc:Choice>
-        <mc:Fallback xmlns="">
+        <mc:Fallback>
           <p:graphicFrame>
             <p:nvGraphicFramePr>
               <p:cNvPr id="11" name="Segnaposto contenuto 10">
@@ -17068,14 +18983,14 @@
                 <p:ph idx="1"/>
                 <p:extLst>
                   <p:ext uri="{D42A27DB-BD31-4B8C-83A1-F6EECF244321}">
-                    <p14:modId xmlns:p14="http://schemas.microsoft.com/office/powerpoint/2010/main" val="1837215706"/>
+                    <p14:modId xmlns:p14="http://schemas.microsoft.com/office/powerpoint/2010/main" val="1089552050"/>
                   </p:ext>
                 </p:extLst>
               </p:nvPr>
             </p:nvGraphicFramePr>
             <p:xfrm>
               <a:off x="838200" y="2059186"/>
-              <a:ext cx="10515600" cy="3142488"/>
+              <a:ext cx="10515600" cy="2776728"/>
             </p:xfrm>
             <a:graphic>
               <a:graphicData uri="http://schemas.openxmlformats.org/drawingml/2006/table">
@@ -17091,21 +19006,21 @@
                         </a:ext>
                       </a:extLst>
                     </a:gridCol>
-                    <a:gridCol w="1893147">
+                    <a:gridCol w="1642712">
                       <a:extLst>
                         <a:ext uri="{9D8B030D-6E8A-4147-A177-3AD203B41FA5}">
                           <a16:colId xmlns:a16="http://schemas.microsoft.com/office/drawing/2014/main" val="1666825536"/>
                         </a:ext>
                       </a:extLst>
                     </a:gridCol>
-                    <a:gridCol w="2192866">
+                    <a:gridCol w="2610852">
                       <a:extLst>
                         <a:ext uri="{9D8B030D-6E8A-4147-A177-3AD203B41FA5}">
                           <a16:colId xmlns:a16="http://schemas.microsoft.com/office/drawing/2014/main" val="1022820918"/>
                         </a:ext>
                       </a:extLst>
                     </a:gridCol>
-                    <a:gridCol w="2074334">
+                    <a:gridCol w="1906783">
                       <a:extLst>
                         <a:ext uri="{9D8B030D-6E8A-4147-A177-3AD203B41FA5}">
                           <a16:colId xmlns:a16="http://schemas.microsoft.com/office/drawing/2014/main" val="2020566626"/>
@@ -17120,7 +19035,7 @@
                       </a:extLst>
                     </a:gridCol>
                   </a:tblGrid>
-                  <a:tr h="856488">
+                  <a:tr h="490728">
                     <a:tc>
                       <a:txBody>
                         <a:bodyPr/>
@@ -17252,7 +19167,7 @@
                         <a:blipFill>
                           <a:blip r:embed="rId3"/>
                           <a:stretch>
-                            <a:fillRect l="-182222" t="-2837" r="-197778" b="-268085"/>
+                            <a:fillRect l="-143692" t="-4938" r="-160047" b="-466667"/>
                           </a:stretch>
                         </a:blipFill>
                       </a:tcPr>
@@ -17285,7 +19200,7 @@
                         <a:blipFill>
                           <a:blip r:embed="rId3"/>
                           <a:stretch>
-                            <a:fillRect l="-298824" t="-2837" r="-109412" b="-268085"/>
+                            <a:fillRect l="-333227" t="-4938" r="-118850" b="-466667"/>
                           </a:stretch>
                         </a:blipFill>
                       </a:tcPr>
@@ -17325,7 +19240,7 @@
                         <a:blipFill>
                           <a:blip r:embed="rId3"/>
                           <a:stretch>
-                            <a:fillRect l="-366486" t="-2837" r="-541" b="-268085"/>
+                            <a:fillRect l="-366486" t="-4938" r="-541" b="-466667"/>
                           </a:stretch>
                         </a:blipFill>
                       </a:tcPr>
@@ -17433,7 +19348,7 @@
                         <a:blipFill>
                           <a:blip r:embed="rId3"/>
                           <a:stretch>
-                            <a:fillRect l="-110932" t="-193333" r="-344695" b="-404000"/>
+                            <a:fillRect l="-127778" t="-113333" r="-412222" b="-404000"/>
                           </a:stretch>
                         </a:blipFill>
                       </a:tcPr>
@@ -17468,7 +19383,7 @@
                         <a:blipFill>
                           <a:blip r:embed="rId3"/>
                           <a:stretch>
-                            <a:fillRect l="-182222" t="-193333" r="-197778" b="-404000"/>
+                            <a:fillRect l="-143692" t="-113333" r="-160047" b="-404000"/>
                           </a:stretch>
                         </a:blipFill>
                       </a:tcPr>
@@ -17494,7 +19409,7 @@
                         <a:blipFill>
                           <a:blip r:embed="rId3"/>
                           <a:stretch>
-                            <a:fillRect l="-298824" t="-193333" r="-109412" b="-404000"/>
+                            <a:fillRect l="-333227" t="-113333" r="-118850" b="-404000"/>
                           </a:stretch>
                         </a:blipFill>
                       </a:tcPr>
@@ -17527,7 +19442,7 @@
                         <a:blipFill>
                           <a:blip r:embed="rId3"/>
                           <a:stretch>
-                            <a:fillRect l="-366486" t="-193333" r="-541" b="-404000"/>
+                            <a:fillRect l="-366486" t="-113333" r="-541" b="-404000"/>
                           </a:stretch>
                         </a:blipFill>
                       </a:tcPr>
@@ -17579,7 +19494,7 @@
                         <a:blipFill>
                           <a:blip r:embed="rId3"/>
                           <a:stretch>
-                            <a:fillRect l="-110932" t="-293333" r="-344695" b="-304000"/>
+                            <a:fillRect l="-127778" t="-213333" r="-412222" b="-304000"/>
                           </a:stretch>
                         </a:blipFill>
                       </a:tcPr>
@@ -17605,7 +19520,7 @@
                         <a:blipFill>
                           <a:blip r:embed="rId3"/>
                           <a:stretch>
-                            <a:fillRect l="-182222" t="-293333" r="-197778" b="-304000"/>
+                            <a:fillRect l="-143692" t="-213333" r="-160047" b="-304000"/>
                           </a:stretch>
                         </a:blipFill>
                       </a:tcPr>
@@ -17622,7 +19537,7 @@
                         <a:blipFill>
                           <a:blip r:embed="rId3"/>
                           <a:stretch>
-                            <a:fillRect l="-298824" t="-293333" r="-109412" b="-304000"/>
+                            <a:fillRect l="-333227" t="-213333" r="-118850" b="-304000"/>
                           </a:stretch>
                         </a:blipFill>
                       </a:tcPr>
@@ -17646,7 +19561,7 @@
                         <a:blipFill>
                           <a:blip r:embed="rId3"/>
                           <a:stretch>
-                            <a:fillRect l="-366486" t="-293333" r="-541" b="-304000"/>
+                            <a:fillRect l="-366486" t="-213333" r="-541" b="-304000"/>
                           </a:stretch>
                         </a:blipFill>
                       </a:tcPr>
@@ -17707,7 +19622,7 @@
                         <a:blipFill>
                           <a:blip r:embed="rId3"/>
                           <a:stretch>
-                            <a:fillRect l="-110932" t="-388158" r="-344695" b="-200000"/>
+                            <a:fillRect l="-127778" t="-309211" r="-412222" b="-200000"/>
                           </a:stretch>
                         </a:blipFill>
                       </a:tcPr>
@@ -17742,7 +19657,7 @@
                         <a:blipFill>
                           <a:blip r:embed="rId3"/>
                           <a:stretch>
-                            <a:fillRect l="-182222" t="-388158" r="-197778" b="-200000"/>
+                            <a:fillRect l="-143692" t="-309211" r="-160047" b="-200000"/>
                           </a:stretch>
                         </a:blipFill>
                       </a:tcPr>
@@ -17768,7 +19683,7 @@
                         <a:blipFill>
                           <a:blip r:embed="rId3"/>
                           <a:stretch>
-                            <a:fillRect l="-298824" t="-388158" r="-109412" b="-200000"/>
+                            <a:fillRect l="-333227" t="-309211" r="-118850" b="-200000"/>
                           </a:stretch>
                         </a:blipFill>
                       </a:tcPr>
@@ -17801,7 +19716,7 @@
                         <a:blipFill>
                           <a:blip r:embed="rId3"/>
                           <a:stretch>
-                            <a:fillRect l="-366486" t="-388158" r="-541" b="-200000"/>
+                            <a:fillRect l="-366486" t="-309211" r="-541" b="-200000"/>
                           </a:stretch>
                         </a:blipFill>
                       </a:tcPr>
@@ -17907,7 +19822,7 @@
                         <a:blipFill>
                           <a:blip r:embed="rId3"/>
                           <a:stretch>
-                            <a:fillRect l="-110932" t="-494667" r="-344695" b="-102667"/>
+                            <a:fillRect l="-127778" t="-414667" r="-412222" b="-102667"/>
                           </a:stretch>
                         </a:blipFill>
                       </a:tcPr>
@@ -17942,7 +19857,7 @@
                         <a:blipFill>
                           <a:blip r:embed="rId3"/>
                           <a:stretch>
-                            <a:fillRect l="-182222" t="-494667" r="-197778" b="-102667"/>
+                            <a:fillRect l="-143692" t="-414667" r="-160047" b="-102667"/>
                           </a:stretch>
                         </a:blipFill>
                       </a:tcPr>
@@ -17968,7 +19883,7 @@
                         <a:blipFill>
                           <a:blip r:embed="rId3"/>
                           <a:stretch>
-                            <a:fillRect l="-298824" t="-494667" r="-109412" b="-102667"/>
+                            <a:fillRect l="-333227" t="-414667" r="-118850" b="-102667"/>
                           </a:stretch>
                         </a:blipFill>
                       </a:tcPr>
@@ -18001,7 +19916,7 @@
                         <a:blipFill>
                           <a:blip r:embed="rId3"/>
                           <a:stretch>
-                            <a:fillRect l="-366486" t="-494667" r="-541" b="-102667"/>
+                            <a:fillRect l="-366486" t="-414667" r="-541" b="-102667"/>
                           </a:stretch>
                         </a:blipFill>
                       </a:tcPr>
@@ -18060,7 +19975,7 @@
                         <a:blipFill>
                           <a:blip r:embed="rId3"/>
                           <a:stretch>
-                            <a:fillRect l="-110932" t="-594667" r="-344695" b="-2667"/>
+                            <a:fillRect l="-127778" t="-514667" r="-412222" b="-2667"/>
                           </a:stretch>
                         </a:blipFill>
                       </a:tcPr>
@@ -18093,7 +20008,7 @@
                         <a:blipFill>
                           <a:blip r:embed="rId3"/>
                           <a:stretch>
-                            <a:fillRect l="-182222" t="-594667" r="-197778" b="-2667"/>
+                            <a:fillRect l="-143692" t="-514667" r="-160047" b="-2667"/>
                           </a:stretch>
                         </a:blipFill>
                       </a:tcPr>
@@ -18117,7 +20032,7 @@
                         <a:blipFill>
                           <a:blip r:embed="rId3"/>
                           <a:stretch>
-                            <a:fillRect l="-298824" t="-594667" r="-109412" b="-2667"/>
+                            <a:fillRect l="-333227" t="-514667" r="-118850" b="-2667"/>
                           </a:stretch>
                         </a:blipFill>
                       </a:tcPr>
@@ -18148,7 +20063,7 @@
                         <a:blipFill>
                           <a:blip r:embed="rId3"/>
                           <a:stretch>
-                            <a:fillRect l="-366486" t="-594667" r="-541" b="-2667"/>
+                            <a:fillRect l="-366486" t="-514667" r="-541" b="-2667"/>
                           </a:stretch>
                         </a:blipFill>
                       </a:tcPr>
@@ -18178,12 +20093,18 @@
 </p:sld>
 </file>
 
-<file path=ppt/slides/slide2.xml><?xml version="1.0" encoding="utf-8"?>
+<file path=ppt/slides/slide21.xml><?xml version="1.0" encoding="utf-8"?>
 <p:sld xmlns:a="http://schemas.openxmlformats.org/drawingml/2006/main" xmlns:r="http://schemas.openxmlformats.org/officeDocument/2006/relationships" xmlns:p="http://schemas.openxmlformats.org/presentationml/2006/main">
   <p:cSld>
     <p:spTree>
       <p:nvGrpSpPr>
-        <p:cNvPr id="1" name=""/>
+        <p:cNvPr id="1" name="">
+          <a:extLst>
+            <a:ext uri="{FF2B5EF4-FFF2-40B4-BE49-F238E27FC236}">
+              <a16:creationId xmlns:a16="http://schemas.microsoft.com/office/drawing/2014/main" id="{C94359CA-8F3C-F47D-9CC6-E91607D47079}"/>
+            </a:ext>
+          </a:extLst>
+        </p:cNvPr>
         <p:cNvGrpSpPr/>
         <p:nvPr/>
       </p:nvGrpSpPr>
@@ -18200,7 +20121,7 @@
           <p:cNvPr id="2" name="Titolo 1">
             <a:extLst>
               <a:ext uri="{FF2B5EF4-FFF2-40B4-BE49-F238E27FC236}">
-                <a16:creationId xmlns:a16="http://schemas.microsoft.com/office/drawing/2014/main" id="{C2EC8513-F988-C98D-D333-B6789C129AFF}"/>
+                <a16:creationId xmlns:a16="http://schemas.microsoft.com/office/drawing/2014/main" id="{102777A8-0606-C7D4-DA80-2BF4646251F8}"/>
               </a:ext>
             </a:extLst>
           </p:cNvPr>
@@ -18235,142 +20156,8 @@
                   <a:srgbClr val="002060"/>
                 </a:solidFill>
               </a:rPr>
-              <a:t>	1. DATA ANALYZED</a:t>
-            </a:r>
-          </a:p>
-        </p:txBody>
-      </p:sp>
-      <p:sp>
-        <p:nvSpPr>
-          <p:cNvPr id="3" name="Segnaposto contenuto 2">
-            <a:extLst>
-              <a:ext uri="{FF2B5EF4-FFF2-40B4-BE49-F238E27FC236}">
-                <a16:creationId xmlns:a16="http://schemas.microsoft.com/office/drawing/2014/main" id="{D705E017-952C-14B0-9906-4510932BCA3F}"/>
-              </a:ext>
-            </a:extLst>
-          </p:cNvPr>
-          <p:cNvSpPr>
-            <a:spLocks noGrp="1"/>
-          </p:cNvSpPr>
-          <p:nvPr>
-            <p:ph idx="1"/>
-          </p:nvPr>
-        </p:nvSpPr>
-        <p:spPr>
-          <a:xfrm>
-            <a:off x="838200" y="1401288"/>
-            <a:ext cx="10515600" cy="4776227"/>
-          </a:xfrm>
-        </p:spPr>
-        <p:txBody>
-          <a:bodyPr>
-            <a:normAutofit/>
-          </a:bodyPr>
-          <a:lstStyle/>
-          <a:p>
-            <a:pPr marL="0" indent="0">
-              <a:buNone/>
-            </a:pPr>
-            <a:endParaRPr lang="it-IT" dirty="0"/>
-          </a:p>
-          <a:p>
-            <a:pPr marL="0" indent="0">
-              <a:buNone/>
-            </a:pPr>
-            <a:r>
-              <a:rPr lang="it-IT" dirty="0"/>
-              <a:t>Analysis of 2024 dataset for </a:t>
-            </a:r>
-            <a:r>
-              <a:rPr lang="it-IT" dirty="0" err="1"/>
-              <a:t>two</a:t>
-            </a:r>
-            <a:r>
-              <a:rPr lang="it-IT" dirty="0"/>
-              <a:t> long </a:t>
-            </a:r>
-            <a:r>
-              <a:rPr lang="it-IT" dirty="0" err="1"/>
-              <a:t>crystals</a:t>
-            </a:r>
-            <a:r>
-              <a:rPr lang="it-IT" dirty="0"/>
-              <a:t>:</a:t>
-            </a:r>
-          </a:p>
-          <a:p>
-            <a:pPr lvl="1"/>
-            <a:r>
-              <a:rPr lang="it-IT" sz="2800" dirty="0"/>
-              <a:t>LHCTBMCP0001-0001: </a:t>
-            </a:r>
-            <a:r>
-              <a:rPr lang="it-IT" sz="2800" dirty="0" err="1"/>
-              <a:t>runs</a:t>
-            </a:r>
-            <a:r>
-              <a:rPr lang="it-IT" sz="2800" dirty="0"/>
-              <a:t> 8430, 8431, 8650</a:t>
-            </a:r>
-          </a:p>
-          <a:p>
-            <a:pPr lvl="1"/>
-            <a:r>
-              <a:rPr lang="it-IT" sz="2800" dirty="0"/>
-              <a:t>LHCTBMCP0001-0002: </a:t>
-            </a:r>
-            <a:r>
-              <a:rPr lang="it-IT" sz="2800" dirty="0" err="1"/>
-              <a:t>runs</a:t>
-            </a:r>
-            <a:r>
-              <a:rPr lang="it-IT" sz="2800" dirty="0"/>
-              <a:t> 8655, 8656</a:t>
-            </a:r>
-          </a:p>
-          <a:p>
-            <a:pPr marL="0" indent="0">
-              <a:buNone/>
-            </a:pPr>
-            <a:endParaRPr lang="it-IT" dirty="0"/>
-          </a:p>
-          <a:p>
-            <a:pPr marL="0" indent="0">
-              <a:buNone/>
-            </a:pPr>
-            <a:r>
-              <a:rPr lang="it-IT" dirty="0" err="1"/>
-              <a:t>Configuration</a:t>
-            </a:r>
-            <a:r>
-              <a:rPr lang="it-IT" dirty="0"/>
-              <a:t>:</a:t>
-            </a:r>
-          </a:p>
-          <a:p>
-            <a:pPr lvl="1"/>
-            <a:r>
-              <a:rPr lang="it-IT" sz="2800" dirty="0"/>
-              <a:t>Central </a:t>
-            </a:r>
-            <a:r>
-              <a:rPr lang="it-IT" sz="2800" dirty="0" err="1"/>
-              <a:t>goniometer</a:t>
-            </a:r>
-            <a:endParaRPr lang="it-IT" sz="2800" dirty="0"/>
-          </a:p>
-          <a:p>
-            <a:pPr lvl="1"/>
-            <a:r>
-              <a:rPr lang="it-IT" sz="2800" dirty="0"/>
-              <a:t>Energy 180 GeV/c</a:t>
-            </a:r>
-          </a:p>
-          <a:p>
-            <a:pPr marL="0" indent="0">
-              <a:buNone/>
-            </a:pPr>
-            <a:endParaRPr lang="it-IT" dirty="0"/>
+              <a:t>	4. RESULTS</a:t>
+            </a:r>
           </a:p>
         </p:txBody>
       </p:sp>
@@ -18379,7 +20166,7 @@
           <p:cNvPr id="4" name="Segnaposto data 3">
             <a:extLst>
               <a:ext uri="{FF2B5EF4-FFF2-40B4-BE49-F238E27FC236}">
-                <a16:creationId xmlns:a16="http://schemas.microsoft.com/office/drawing/2014/main" id="{A9CBEBE7-5AD1-2A5D-D796-FC860CFACB62}"/>
+                <a16:creationId xmlns:a16="http://schemas.microsoft.com/office/drawing/2014/main" id="{7DB9887C-8B3E-41D4-8913-D1B828B523AC}"/>
               </a:ext>
             </a:extLst>
           </p:cNvPr>
@@ -18416,7 +20203,7 @@
           <p:cNvPr id="5" name="Segnaposto piè di pagina 4">
             <a:extLst>
               <a:ext uri="{FF2B5EF4-FFF2-40B4-BE49-F238E27FC236}">
-                <a16:creationId xmlns:a16="http://schemas.microsoft.com/office/drawing/2014/main" id="{D65DDE3E-B94E-09A0-E6FC-740927746D9E}"/>
+                <a16:creationId xmlns:a16="http://schemas.microsoft.com/office/drawing/2014/main" id="{8A33DE58-9D1F-34BC-F288-899277153EB0}"/>
               </a:ext>
             </a:extLst>
           </p:cNvPr>
@@ -18453,7 +20240,7 @@
           <p:cNvPr id="6" name="Segnaposto numero diapositiva 5">
             <a:extLst>
               <a:ext uri="{FF2B5EF4-FFF2-40B4-BE49-F238E27FC236}">
-                <a16:creationId xmlns:a16="http://schemas.microsoft.com/office/drawing/2014/main" id="{EB429AC5-2B17-3AA7-829E-3FADDA4D07B5}"/>
+                <a16:creationId xmlns:a16="http://schemas.microsoft.com/office/drawing/2014/main" id="{06EB685B-DBEC-8BAD-37C3-14449B80FC95}"/>
               </a:ext>
             </a:extLst>
           </p:cNvPr>
@@ -18480,7 +20267,7 @@
                   <a:srgbClr val="002060"/>
                 </a:solidFill>
               </a:rPr>
-              <a:t>2</a:t>
+              <a:t>21</a:t>
             </a:fld>
             <a:endParaRPr lang="it-IT" sz="1500" b="1" dirty="0">
               <a:solidFill>
@@ -18495,7 +20282,7 @@
           <p:cNvPr id="10" name="Connettore diritto 9">
             <a:extLst>
               <a:ext uri="{FF2B5EF4-FFF2-40B4-BE49-F238E27FC236}">
-                <a16:creationId xmlns:a16="http://schemas.microsoft.com/office/drawing/2014/main" id="{D66CB6E1-F902-FACB-CE04-F0353E6FCF48}"/>
+                <a16:creationId xmlns:a16="http://schemas.microsoft.com/office/drawing/2014/main" id="{41A9967D-8A3E-D94E-494C-3C0B0D6206C7}"/>
               </a:ext>
             </a:extLst>
           </p:cNvPr>
@@ -18533,10 +20320,2943 @@
           </a:fontRef>
         </p:style>
       </p:cxnSp>
+      <p:sp>
+        <p:nvSpPr>
+          <p:cNvPr id="13" name="CasellaDiTesto 12">
+            <a:extLst>
+              <a:ext uri="{FF2B5EF4-FFF2-40B4-BE49-F238E27FC236}">
+                <a16:creationId xmlns:a16="http://schemas.microsoft.com/office/drawing/2014/main" id="{2B3AE14D-B9F0-5756-71D0-F0B0014BA346}"/>
+              </a:ext>
+            </a:extLst>
+          </p:cNvPr>
+          <p:cNvSpPr txBox="1"/>
+          <p:nvPr/>
+        </p:nvSpPr>
+        <p:spPr>
+          <a:xfrm>
+            <a:off x="3048886" y="3244334"/>
+            <a:ext cx="6097772" cy="369332"/>
+          </a:xfrm>
+          <a:prstGeom prst="rect">
+            <a:avLst/>
+          </a:prstGeom>
+          <a:noFill/>
+        </p:spPr>
+        <p:txBody>
+          <a:bodyPr wrap="square">
+            <a:spAutoFit/>
+          </a:bodyPr>
+          <a:lstStyle/>
+          <a:p>
+            <a:endParaRPr lang="it-IT" dirty="0"/>
+          </a:p>
+        </p:txBody>
+      </p:sp>
+      <p:sp>
+        <p:nvSpPr>
+          <p:cNvPr id="15" name="CasellaDiTesto 14">
+            <a:extLst>
+              <a:ext uri="{FF2B5EF4-FFF2-40B4-BE49-F238E27FC236}">
+                <a16:creationId xmlns:a16="http://schemas.microsoft.com/office/drawing/2014/main" id="{9D07FC42-4124-01D8-960B-1C35242C0915}"/>
+              </a:ext>
+            </a:extLst>
+          </p:cNvPr>
+          <p:cNvSpPr txBox="1"/>
+          <p:nvPr/>
+        </p:nvSpPr>
+        <p:spPr>
+          <a:xfrm>
+            <a:off x="3048886" y="3244334"/>
+            <a:ext cx="6097772" cy="369332"/>
+          </a:xfrm>
+          <a:prstGeom prst="rect">
+            <a:avLst/>
+          </a:prstGeom>
+          <a:noFill/>
+        </p:spPr>
+        <p:txBody>
+          <a:bodyPr wrap="square">
+            <a:spAutoFit/>
+          </a:bodyPr>
+          <a:lstStyle/>
+          <a:p>
+            <a:endParaRPr lang="it-IT" dirty="0"/>
+          </a:p>
+        </p:txBody>
+      </p:sp>
+      <mc:AlternateContent xmlns:mc="http://schemas.openxmlformats.org/markup-compatibility/2006">
+        <mc:Choice xmlns:a14="http://schemas.microsoft.com/office/drawing/2010/main" Requires="a14">
+          <p:graphicFrame>
+            <p:nvGraphicFramePr>
+              <p:cNvPr id="11" name="Segnaposto contenuto 10">
+                <a:extLst>
+                  <a:ext uri="{FF2B5EF4-FFF2-40B4-BE49-F238E27FC236}">
+                    <a16:creationId xmlns:a16="http://schemas.microsoft.com/office/drawing/2014/main" id="{1073C49C-B456-2C70-0DE1-470F84418F73}"/>
+                  </a:ext>
+                </a:extLst>
+              </p:cNvPr>
+              <p:cNvGraphicFramePr>
+                <a:graphicFrameLocks noGrp="1"/>
+              </p:cNvGraphicFramePr>
+              <p:nvPr>
+                <p:ph idx="1"/>
+                <p:extLst>
+                  <p:ext uri="{D42A27DB-BD31-4B8C-83A1-F6EECF244321}">
+                    <p14:modId xmlns:p14="http://schemas.microsoft.com/office/powerpoint/2010/main" val="430477996"/>
+                  </p:ext>
+                </p:extLst>
+              </p:nvPr>
+            </p:nvGraphicFramePr>
+            <p:xfrm>
+              <a:off x="838200" y="2059186"/>
+              <a:ext cx="10515600" cy="2776728"/>
+            </p:xfrm>
+            <a:graphic>
+              <a:graphicData uri="http://schemas.openxmlformats.org/drawingml/2006/table">
+                <a:tbl>
+                  <a:tblPr firstRow="1" bandRow="1">
+                    <a:tableStyleId>{5940675A-B579-460E-94D1-54222C63F5DA}</a:tableStyleId>
+                  </a:tblPr>
+                  <a:tblGrid>
+                    <a:gridCol w="2103120">
+                      <a:extLst>
+                        <a:ext uri="{9D8B030D-6E8A-4147-A177-3AD203B41FA5}">
+                          <a16:colId xmlns:a16="http://schemas.microsoft.com/office/drawing/2014/main" val="3834650750"/>
+                        </a:ext>
+                      </a:extLst>
+                    </a:gridCol>
+                    <a:gridCol w="1642712">
+                      <a:extLst>
+                        <a:ext uri="{9D8B030D-6E8A-4147-A177-3AD203B41FA5}">
+                          <a16:colId xmlns:a16="http://schemas.microsoft.com/office/drawing/2014/main" val="1666825536"/>
+                        </a:ext>
+                      </a:extLst>
+                    </a:gridCol>
+                    <a:gridCol w="2610852">
+                      <a:extLst>
+                        <a:ext uri="{9D8B030D-6E8A-4147-A177-3AD203B41FA5}">
+                          <a16:colId xmlns:a16="http://schemas.microsoft.com/office/drawing/2014/main" val="1022820918"/>
+                        </a:ext>
+                      </a:extLst>
+                    </a:gridCol>
+                    <a:gridCol w="1906783">
+                      <a:extLst>
+                        <a:ext uri="{9D8B030D-6E8A-4147-A177-3AD203B41FA5}">
+                          <a16:colId xmlns:a16="http://schemas.microsoft.com/office/drawing/2014/main" val="2020566626"/>
+                        </a:ext>
+                      </a:extLst>
+                    </a:gridCol>
+                    <a:gridCol w="2252133">
+                      <a:extLst>
+                        <a:ext uri="{9D8B030D-6E8A-4147-A177-3AD203B41FA5}">
+                          <a16:colId xmlns:a16="http://schemas.microsoft.com/office/drawing/2014/main" val="199116097"/>
+                        </a:ext>
+                      </a:extLst>
+                    </a:gridCol>
+                  </a:tblGrid>
+                  <a:tr h="370840">
+                    <a:tc>
+                      <a:txBody>
+                        <a:bodyPr/>
+                        <a:lstStyle/>
+                        <a:p>
+                          <a:pPr algn="ctr"/>
+                          <a:endParaRPr lang="it-IT" sz="2400" dirty="0"/>
+                        </a:p>
+                      </a:txBody>
+                      <a:tcPr anchor="ctr">
+                        <a:lnL w="12700" cap="flat" cmpd="sng" algn="ctr">
+                          <a:noFill/>
+                          <a:prstDash val="solid"/>
+                          <a:round/>
+                          <a:headEnd type="none" w="med" len="med"/>
+                          <a:tailEnd type="none" w="med" len="med"/>
+                        </a:lnL>
+                        <a:lnR w="28575" cap="flat" cmpd="sng" algn="ctr">
+                          <a:solidFill>
+                            <a:schemeClr val="tx1"/>
+                          </a:solidFill>
+                          <a:prstDash val="solid"/>
+                          <a:round/>
+                          <a:headEnd type="none" w="med" len="med"/>
+                          <a:tailEnd type="none" w="med" len="med"/>
+                        </a:lnR>
+                        <a:lnT w="12700" cap="flat" cmpd="sng" algn="ctr">
+                          <a:noFill/>
+                          <a:prstDash val="solid"/>
+                          <a:round/>
+                          <a:headEnd type="none" w="med" len="med"/>
+                          <a:tailEnd type="none" w="med" len="med"/>
+                        </a:lnT>
+                        <a:lnB w="28575" cap="flat" cmpd="sng" algn="ctr">
+                          <a:solidFill>
+                            <a:schemeClr val="tx1"/>
+                          </a:solidFill>
+                          <a:prstDash val="solid"/>
+                          <a:round/>
+                          <a:headEnd type="none" w="med" len="med"/>
+                          <a:tailEnd type="none" w="med" len="med"/>
+                        </a:lnB>
+                      </a:tcPr>
+                    </a:tc>
+                    <a:tc>
+                      <a:txBody>
+                        <a:bodyPr/>
+                        <a:lstStyle/>
+                        <a:p>
+                          <a:pPr algn="ctr"/>
+                          <a:r>
+                            <a:rPr lang="it-IT" sz="2400" b="1" dirty="0" err="1"/>
+                            <a:t>run</a:t>
+                          </a:r>
+                          <a:endParaRPr lang="it-IT" sz="2400" b="1" dirty="0"/>
+                        </a:p>
+                      </a:txBody>
+                      <a:tcPr anchor="ctr">
+                        <a:lnL w="28575" cap="flat" cmpd="sng" algn="ctr">
+                          <a:solidFill>
+                            <a:schemeClr val="tx1"/>
+                          </a:solidFill>
+                          <a:prstDash val="solid"/>
+                          <a:round/>
+                          <a:headEnd type="none" w="med" len="med"/>
+                          <a:tailEnd type="none" w="med" len="med"/>
+                        </a:lnL>
+                        <a:lnR w="28575" cap="flat" cmpd="sng" algn="ctr">
+                          <a:solidFill>
+                            <a:schemeClr val="tx1"/>
+                          </a:solidFill>
+                          <a:prstDash val="solid"/>
+                          <a:round/>
+                          <a:headEnd type="none" w="med" len="med"/>
+                          <a:tailEnd type="none" w="med" len="med"/>
+                        </a:lnR>
+                        <a:lnT w="12700" cap="flat" cmpd="sng" algn="ctr">
+                          <a:noFill/>
+                          <a:prstDash val="solid"/>
+                          <a:round/>
+                          <a:headEnd type="none" w="med" len="med"/>
+                          <a:tailEnd type="none" w="med" len="med"/>
+                        </a:lnT>
+                        <a:lnB w="28575" cap="flat" cmpd="sng" algn="ctr">
+                          <a:solidFill>
+                            <a:schemeClr val="tx1"/>
+                          </a:solidFill>
+                          <a:prstDash val="solid"/>
+                          <a:round/>
+                          <a:headEnd type="none" w="med" len="med"/>
+                          <a:tailEnd type="none" w="med" len="med"/>
+                        </a:lnB>
+                      </a:tcPr>
+                    </a:tc>
+                    <a:tc>
+                      <a:txBody>
+                        <a:bodyPr/>
+                        <a:lstStyle/>
+                        <a:p>
+                          <a:pPr algn="ctr"/>
+                          <a14:m>
+                            <m:oMathPara xmlns:m="http://schemas.openxmlformats.org/officeDocument/2006/math">
+                              <m:oMathParaPr>
+                                <m:jc m:val="centerGroup"/>
+                              </m:oMathParaPr>
+                              <m:oMath xmlns:m="http://schemas.openxmlformats.org/officeDocument/2006/math">
+                                <m:sSub>
+                                  <m:sSubPr>
+                                    <m:ctrlPr>
+                                      <a:rPr lang="it-IT" sz="2400" b="1" i="1" smtClean="0">
+                                        <a:latin typeface="Cambria Math" panose="02040503050406030204" pitchFamily="18" charset="0"/>
+                                      </a:rPr>
+                                    </m:ctrlPr>
+                                  </m:sSubPr>
+                                  <m:e>
+                                    <m:r>
+                                      <a:rPr lang="it-IT" sz="2400" b="1" i="1" smtClean="0">
+                                        <a:latin typeface="Cambria Math" panose="02040503050406030204" pitchFamily="18" charset="0"/>
+                                      </a:rPr>
+                                      <m:t>𝝉</m:t>
+                                    </m:r>
+                                  </m:e>
+                                  <m:sub>
+                                    <m:r>
+                                      <a:rPr lang="it-IT" sz="2400" b="1" i="1" smtClean="0">
+                                        <a:latin typeface="Cambria Math" panose="02040503050406030204" pitchFamily="18" charset="0"/>
+                                      </a:rPr>
+                                      <m:t>𝒚</m:t>
+                                    </m:r>
+                                  </m:sub>
+                                </m:sSub>
+                                <m:r>
+                                  <a:rPr lang="it-IT" sz="2400" b="1" i="1" smtClean="0">
+                                    <a:latin typeface="Cambria Math" panose="02040503050406030204" pitchFamily="18" charset="0"/>
+                                  </a:rPr>
+                                  <m:t> [</m:t>
+                                </m:r>
+                                <m:r>
+                                  <a:rPr lang="it-IT" sz="2400" b="1" i="1" smtClean="0">
+                                    <a:latin typeface="Cambria Math" panose="02040503050406030204" pitchFamily="18" charset="0"/>
+                                  </a:rPr>
+                                  <m:t>𝝁</m:t>
+                                </m:r>
+                                <m:r>
+                                  <a:rPr lang="it-IT" sz="2400" b="1" i="0" smtClean="0">
+                                    <a:latin typeface="Cambria Math" panose="02040503050406030204" pitchFamily="18" charset="0"/>
+                                  </a:rPr>
+                                  <m:t>𝐫𝐚𝐝</m:t>
+                                </m:r>
+                                <m:r>
+                                  <a:rPr lang="it-IT" sz="2400" b="1" i="0" smtClean="0">
+                                    <a:latin typeface="Cambria Math" panose="02040503050406030204" pitchFamily="18" charset="0"/>
+                                  </a:rPr>
+                                  <m:t>/</m:t>
+                                </m:r>
+                                <m:r>
+                                  <a:rPr lang="it-IT" sz="2400" b="1" i="0" smtClean="0">
+                                    <a:latin typeface="Cambria Math" panose="02040503050406030204" pitchFamily="18" charset="0"/>
+                                  </a:rPr>
+                                  <m:t>𝐦𝐦</m:t>
+                                </m:r>
+                                <m:r>
+                                  <a:rPr lang="it-IT" sz="2400" b="1" i="1" smtClean="0">
+                                    <a:latin typeface="Cambria Math" panose="02040503050406030204" pitchFamily="18" charset="0"/>
+                                  </a:rPr>
+                                  <m:t>]</m:t>
+                                </m:r>
+                              </m:oMath>
+                            </m:oMathPara>
+                          </a14:m>
+                          <a:endParaRPr lang="it-IT" sz="2400" b="1" dirty="0"/>
+                        </a:p>
+                      </a:txBody>
+                      <a:tcPr anchor="ctr">
+                        <a:lnL w="28575" cap="flat" cmpd="sng" algn="ctr">
+                          <a:solidFill>
+                            <a:schemeClr val="tx1"/>
+                          </a:solidFill>
+                          <a:prstDash val="solid"/>
+                          <a:round/>
+                          <a:headEnd type="none" w="med" len="med"/>
+                          <a:tailEnd type="none" w="med" len="med"/>
+                        </a:lnL>
+                        <a:lnT w="12700" cap="flat" cmpd="sng" algn="ctr">
+                          <a:noFill/>
+                          <a:prstDash val="solid"/>
+                          <a:round/>
+                          <a:headEnd type="none" w="med" len="med"/>
+                          <a:tailEnd type="none" w="med" len="med"/>
+                        </a:lnT>
+                        <a:lnB w="28575" cap="flat" cmpd="sng" algn="ctr">
+                          <a:solidFill>
+                            <a:schemeClr val="tx1"/>
+                          </a:solidFill>
+                          <a:prstDash val="solid"/>
+                          <a:round/>
+                          <a:headEnd type="none" w="med" len="med"/>
+                          <a:tailEnd type="none" w="med" len="med"/>
+                        </a:lnB>
+                      </a:tcPr>
+                    </a:tc>
+                    <a:tc>
+                      <a:txBody>
+                        <a:bodyPr/>
+                        <a:lstStyle/>
+                        <a:p>
+                          <a:pPr algn="ctr"/>
+                          <a14:m>
+                            <m:oMath xmlns:m="http://schemas.openxmlformats.org/officeDocument/2006/math">
+                              <m:sSub>
+                                <m:sSubPr>
+                                  <m:ctrlPr>
+                                    <a:rPr lang="it-IT" sz="2400" b="1" i="1" smtClean="0">
+                                      <a:latin typeface="Cambria Math" panose="02040503050406030204" pitchFamily="18" charset="0"/>
+                                    </a:rPr>
+                                  </m:ctrlPr>
+                                </m:sSubPr>
+                                <m:e>
+                                  <m:r>
+                                    <a:rPr lang="it-IT" sz="2400" b="1" i="1" smtClean="0">
+                                      <a:latin typeface="Cambria Math" panose="02040503050406030204" pitchFamily="18" charset="0"/>
+                                    </a:rPr>
+                                    <m:t>𝜽</m:t>
+                                  </m:r>
+                                </m:e>
+                                <m:sub>
+                                  <m:r>
+                                    <a:rPr lang="it-IT" sz="2400" b="1" i="1" smtClean="0">
+                                      <a:latin typeface="Cambria Math" panose="02040503050406030204" pitchFamily="18" charset="0"/>
+                                    </a:rPr>
+                                    <m:t>𝒃</m:t>
+                                  </m:r>
+                                </m:sub>
+                              </m:sSub>
+                              <m:r>
+                                <a:rPr lang="it-IT" sz="2400" b="1" i="1" smtClean="0">
+                                  <a:latin typeface="Cambria Math" panose="02040503050406030204" pitchFamily="18" charset="0"/>
+                                </a:rPr>
+                                <m:t> [</m:t>
+                              </m:r>
+                              <m:r>
+                                <a:rPr lang="it-IT" sz="2400" b="1" i="1" smtClean="0">
+                                  <a:latin typeface="Cambria Math" panose="02040503050406030204" pitchFamily="18" charset="0"/>
+                                </a:rPr>
+                                <m:t>𝝁</m:t>
+                              </m:r>
+                              <m:r>
+                                <a:rPr lang="it-IT" sz="2400" b="1" i="0" smtClean="0">
+                                  <a:latin typeface="Cambria Math" panose="02040503050406030204" pitchFamily="18" charset="0"/>
+                                </a:rPr>
+                                <m:t>𝐫𝐚𝐝</m:t>
+                              </m:r>
+                              <m:r>
+                                <a:rPr lang="it-IT" sz="2400" b="1" i="1" smtClean="0">
+                                  <a:latin typeface="Cambria Math" panose="02040503050406030204" pitchFamily="18" charset="0"/>
+                                </a:rPr>
+                                <m:t>]</m:t>
+                              </m:r>
+                            </m:oMath>
+                          </a14:m>
+                          <a:r>
+                            <a:rPr lang="it-IT" sz="2400" b="1" dirty="0"/>
+                            <a:t> </a:t>
+                          </a:r>
+                        </a:p>
+                      </a:txBody>
+                      <a:tcPr anchor="ctr">
+                        <a:lnT w="12700" cap="flat" cmpd="sng" algn="ctr">
+                          <a:noFill/>
+                          <a:prstDash val="solid"/>
+                          <a:round/>
+                          <a:headEnd type="none" w="med" len="med"/>
+                          <a:tailEnd type="none" w="med" len="med"/>
+                        </a:lnT>
+                        <a:lnB w="28575" cap="flat" cmpd="sng" algn="ctr">
+                          <a:solidFill>
+                            <a:schemeClr val="tx1"/>
+                          </a:solidFill>
+                          <a:prstDash val="solid"/>
+                          <a:round/>
+                          <a:headEnd type="none" w="med" len="med"/>
+                          <a:tailEnd type="none" w="med" len="med"/>
+                        </a:lnB>
+                      </a:tcPr>
+                    </a:tc>
+                    <a:tc>
+                      <a:txBody>
+                        <a:bodyPr/>
+                        <a:lstStyle/>
+                        <a:p>
+                          <a:pPr algn="ctr"/>
+                          <a14:m>
+                            <m:oMathPara xmlns:m="http://schemas.openxmlformats.org/officeDocument/2006/math">
+                              <m:oMathParaPr>
+                                <m:jc m:val="centerGroup"/>
+                              </m:oMathParaPr>
+                              <m:oMath xmlns:m="http://schemas.openxmlformats.org/officeDocument/2006/math">
+                                <m:sSub>
+                                  <m:sSubPr>
+                                    <m:ctrlPr>
+                                      <a:rPr lang="it-IT" sz="2400" b="1" i="1" smtClean="0">
+                                        <a:latin typeface="Cambria Math" panose="02040503050406030204" pitchFamily="18" charset="0"/>
+                                      </a:rPr>
+                                    </m:ctrlPr>
+                                  </m:sSubPr>
+                                  <m:e>
+                                    <m:r>
+                                      <a:rPr lang="it-IT" sz="2400" b="1" i="1" smtClean="0">
+                                        <a:latin typeface="Cambria Math" panose="02040503050406030204" pitchFamily="18" charset="0"/>
+                                      </a:rPr>
+                                      <m:t>𝝐</m:t>
+                                    </m:r>
+                                  </m:e>
+                                  <m:sub>
+                                    <m:r>
+                                      <a:rPr lang="it-IT" sz="2400" b="1" i="1" smtClean="0">
+                                        <a:latin typeface="Cambria Math" panose="02040503050406030204" pitchFamily="18" charset="0"/>
+                                      </a:rPr>
+                                      <m:t>𝒄𝒉</m:t>
+                                    </m:r>
+                                  </m:sub>
+                                </m:sSub>
+                                <m:r>
+                                  <a:rPr lang="it-IT" sz="2400" b="1" i="1" smtClean="0">
+                                    <a:latin typeface="Cambria Math" panose="02040503050406030204" pitchFamily="18" charset="0"/>
+                                  </a:rPr>
+                                  <m:t> [%]</m:t>
+                                </m:r>
+                              </m:oMath>
+                            </m:oMathPara>
+                          </a14:m>
+                          <a:endParaRPr lang="it-IT" sz="2400" b="1" dirty="0"/>
+                        </a:p>
+                      </a:txBody>
+                      <a:tcPr anchor="ctr">
+                        <a:lnR w="12700" cap="flat" cmpd="sng" algn="ctr">
+                          <a:noFill/>
+                          <a:prstDash val="solid"/>
+                          <a:round/>
+                          <a:headEnd type="none" w="med" len="med"/>
+                          <a:tailEnd type="none" w="med" len="med"/>
+                        </a:lnR>
+                        <a:lnT w="12700" cap="flat" cmpd="sng" algn="ctr">
+                          <a:noFill/>
+                          <a:prstDash val="solid"/>
+                          <a:round/>
+                          <a:headEnd type="none" w="med" len="med"/>
+                          <a:tailEnd type="none" w="med" len="med"/>
+                        </a:lnT>
+                        <a:lnB w="28575" cap="flat" cmpd="sng" algn="ctr">
+                          <a:solidFill>
+                            <a:schemeClr val="tx1"/>
+                          </a:solidFill>
+                          <a:prstDash val="solid"/>
+                          <a:round/>
+                          <a:headEnd type="none" w="med" len="med"/>
+                          <a:tailEnd type="none" w="med" len="med"/>
+                        </a:lnB>
+                      </a:tcPr>
+                    </a:tc>
+                    <a:extLst>
+                      <a:ext uri="{0D108BD9-81ED-4DB2-BD59-A6C34878D82A}">
+                        <a16:rowId xmlns:a16="http://schemas.microsoft.com/office/drawing/2014/main" val="2436405646"/>
+                      </a:ext>
+                    </a:extLst>
+                  </a:tr>
+                  <a:tr h="370840">
+                    <a:tc rowSpan="3">
+                      <a:txBody>
+                        <a:bodyPr/>
+                        <a:lstStyle/>
+                        <a:p>
+                          <a:pPr algn="ctr"/>
+                          <a:r>
+                            <a:rPr lang="it-IT" sz="2400" dirty="0"/>
+                            <a:t>Long </a:t>
+                          </a:r>
+                          <a:r>
+                            <a:rPr lang="it-IT" sz="2400" dirty="0" err="1"/>
+                            <a:t>crystal</a:t>
+                          </a:r>
+                          <a:r>
+                            <a:rPr lang="it-IT" sz="2400" dirty="0"/>
+                            <a:t> 1</a:t>
+                          </a:r>
+                        </a:p>
+                      </a:txBody>
+                      <a:tcPr anchor="ctr">
+                        <a:lnL w="12700" cap="flat" cmpd="sng" algn="ctr">
+                          <a:noFill/>
+                          <a:prstDash val="solid"/>
+                          <a:round/>
+                          <a:headEnd type="none" w="med" len="med"/>
+                          <a:tailEnd type="none" w="med" len="med"/>
+                        </a:lnL>
+                        <a:lnR w="28575" cap="flat" cmpd="sng" algn="ctr">
+                          <a:solidFill>
+                            <a:schemeClr val="tx1"/>
+                          </a:solidFill>
+                          <a:prstDash val="solid"/>
+                          <a:round/>
+                          <a:headEnd type="none" w="med" len="med"/>
+                          <a:tailEnd type="none" w="med" len="med"/>
+                        </a:lnR>
+                        <a:lnT w="28575" cap="flat" cmpd="sng" algn="ctr">
+                          <a:solidFill>
+                            <a:schemeClr val="tx1"/>
+                          </a:solidFill>
+                          <a:prstDash val="solid"/>
+                          <a:round/>
+                          <a:headEnd type="none" w="med" len="med"/>
+                          <a:tailEnd type="none" w="med" len="med"/>
+                        </a:lnT>
+                        <a:lnB w="28575" cap="flat" cmpd="sng" algn="ctr">
+                          <a:solidFill>
+                            <a:schemeClr val="tx1"/>
+                          </a:solidFill>
+                          <a:prstDash val="solid"/>
+                          <a:round/>
+                          <a:headEnd type="none" w="med" len="med"/>
+                          <a:tailEnd type="none" w="med" len="med"/>
+                        </a:lnB>
+                      </a:tcPr>
+                    </a:tc>
+                    <a:tc>
+                      <a:txBody>
+                        <a:bodyPr/>
+                        <a:lstStyle/>
+                        <a:p>
+                          <a:pPr algn="ctr"/>
+                          <a14:m>
+                            <m:oMathPara xmlns:m="http://schemas.openxmlformats.org/officeDocument/2006/math">
+                              <m:oMathParaPr>
+                                <m:jc m:val="centerGroup"/>
+                              </m:oMathParaPr>
+                              <m:oMath xmlns:m="http://schemas.openxmlformats.org/officeDocument/2006/math">
+                                <m:r>
+                                  <a:rPr lang="it-IT" sz="2400" i="1" dirty="0" smtClean="0">
+                                    <a:latin typeface="Cambria Math" panose="02040503050406030204" pitchFamily="18" charset="0"/>
+                                  </a:rPr>
+                                  <m:t>8430</m:t>
+                                </m:r>
+                              </m:oMath>
+                            </m:oMathPara>
+                          </a14:m>
+                          <a:endParaRPr lang="it-IT" sz="2400" dirty="0"/>
+                        </a:p>
+                      </a:txBody>
+                      <a:tcPr anchor="ctr">
+                        <a:lnL w="28575" cap="flat" cmpd="sng" algn="ctr">
+                          <a:solidFill>
+                            <a:schemeClr val="tx1"/>
+                          </a:solidFill>
+                          <a:prstDash val="solid"/>
+                          <a:round/>
+                          <a:headEnd type="none" w="med" len="med"/>
+                          <a:tailEnd type="none" w="med" len="med"/>
+                        </a:lnL>
+                        <a:lnR w="28575" cap="flat" cmpd="sng" algn="ctr">
+                          <a:solidFill>
+                            <a:schemeClr val="tx1"/>
+                          </a:solidFill>
+                          <a:prstDash val="solid"/>
+                          <a:round/>
+                          <a:headEnd type="none" w="med" len="med"/>
+                          <a:tailEnd type="none" w="med" len="med"/>
+                        </a:lnR>
+                        <a:lnT w="28575" cap="flat" cmpd="sng" algn="ctr">
+                          <a:solidFill>
+                            <a:schemeClr val="tx1"/>
+                          </a:solidFill>
+                          <a:prstDash val="solid"/>
+                          <a:round/>
+                          <a:headEnd type="none" w="med" len="med"/>
+                          <a:tailEnd type="none" w="med" len="med"/>
+                        </a:lnT>
+                      </a:tcPr>
+                    </a:tc>
+                    <a:tc>
+                      <a:txBody>
+                        <a:bodyPr/>
+                        <a:lstStyle/>
+                        <a:p>
+                          <a:pPr algn="ctr"/>
+                          <a14:m>
+                            <m:oMathPara xmlns:m="http://schemas.openxmlformats.org/officeDocument/2006/math">
+                              <m:oMathParaPr>
+                                <m:jc m:val="centerGroup"/>
+                              </m:oMathParaPr>
+                              <m:oMath xmlns:m="http://schemas.openxmlformats.org/officeDocument/2006/math">
+                                <m:r>
+                                  <a:rPr lang="it-IT" sz="2400" b="0" i="1" smtClean="0">
+                                    <a:latin typeface="Cambria Math" panose="02040503050406030204" pitchFamily="18" charset="0"/>
+                                  </a:rPr>
+                                  <m:t>3.45</m:t>
+                                </m:r>
+                              </m:oMath>
+                            </m:oMathPara>
+                          </a14:m>
+                          <a:endParaRPr lang="it-IT" sz="2400" dirty="0"/>
+                        </a:p>
+                      </a:txBody>
+                      <a:tcPr anchor="ctr">
+                        <a:lnL w="28575" cap="flat" cmpd="sng" algn="ctr">
+                          <a:solidFill>
+                            <a:schemeClr val="tx1"/>
+                          </a:solidFill>
+                          <a:prstDash val="solid"/>
+                          <a:round/>
+                          <a:headEnd type="none" w="med" len="med"/>
+                          <a:tailEnd type="none" w="med" len="med"/>
+                        </a:lnL>
+                        <a:lnT w="28575" cap="flat" cmpd="sng" algn="ctr">
+                          <a:solidFill>
+                            <a:schemeClr val="tx1"/>
+                          </a:solidFill>
+                          <a:prstDash val="solid"/>
+                          <a:round/>
+                          <a:headEnd type="none" w="med" len="med"/>
+                          <a:tailEnd type="none" w="med" len="med"/>
+                        </a:lnT>
+                      </a:tcPr>
+                    </a:tc>
+                    <a:tc>
+                      <a:txBody>
+                        <a:bodyPr/>
+                        <a:lstStyle/>
+                        <a:p>
+                          <a:pPr algn="ctr"/>
+                          <a14:m>
+                            <m:oMathPara xmlns:m="http://schemas.openxmlformats.org/officeDocument/2006/math">
+                              <m:oMathParaPr>
+                                <m:jc m:val="centerGroup"/>
+                              </m:oMathParaPr>
+                              <m:oMath xmlns:m="http://schemas.openxmlformats.org/officeDocument/2006/math">
+                                <m:r>
+                                  <a:rPr lang="it-IT" sz="2400" b="0" i="1" smtClean="0">
+                                    <a:latin typeface="Cambria Math" panose="02040503050406030204" pitchFamily="18" charset="0"/>
+                                  </a:rPr>
+                                  <m:t>6011</m:t>
+                                </m:r>
+                              </m:oMath>
+                            </m:oMathPara>
+                          </a14:m>
+                          <a:endParaRPr lang="it-IT" sz="2400" i="0" dirty="0"/>
+                        </a:p>
+                      </a:txBody>
+                      <a:tcPr anchor="ctr">
+                        <a:lnT w="28575" cap="flat" cmpd="sng" algn="ctr">
+                          <a:solidFill>
+                            <a:schemeClr val="tx1"/>
+                          </a:solidFill>
+                          <a:prstDash val="solid"/>
+                          <a:round/>
+                          <a:headEnd type="none" w="med" len="med"/>
+                          <a:tailEnd type="none" w="med" len="med"/>
+                        </a:lnT>
+                      </a:tcPr>
+                    </a:tc>
+                    <a:tc>
+                      <a:txBody>
+                        <a:bodyPr/>
+                        <a:lstStyle/>
+                        <a:p>
+                          <a:pPr algn="ctr"/>
+                          <a14:m>
+                            <m:oMathPara xmlns:m="http://schemas.openxmlformats.org/officeDocument/2006/math">
+                              <m:oMathParaPr>
+                                <m:jc m:val="centerGroup"/>
+                              </m:oMathParaPr>
+                              <m:oMath xmlns:m="http://schemas.openxmlformats.org/officeDocument/2006/math">
+                                <m:d>
+                                  <m:dPr>
+                                    <m:ctrlPr>
+                                      <a:rPr lang="it-IT" sz="2400" b="0" i="1" smtClean="0">
+                                        <a:latin typeface="Cambria Math" panose="02040503050406030204" pitchFamily="18" charset="0"/>
+                                      </a:rPr>
+                                    </m:ctrlPr>
+                                  </m:dPr>
+                                  <m:e>
+                                    <m:r>
+                                      <a:rPr lang="it-IT" sz="2400" b="0" i="1" smtClean="0">
+                                        <a:latin typeface="Cambria Math" panose="02040503050406030204" pitchFamily="18" charset="0"/>
+                                      </a:rPr>
+                                      <m:t>18.7±0.01</m:t>
+                                    </m:r>
+                                  </m:e>
+                                </m:d>
+                              </m:oMath>
+                            </m:oMathPara>
+                          </a14:m>
+                          <a:endParaRPr lang="it-IT" sz="2400" dirty="0"/>
+                        </a:p>
+                      </a:txBody>
+                      <a:tcPr anchor="ctr">
+                        <a:lnR w="12700" cap="flat" cmpd="sng" algn="ctr">
+                          <a:noFill/>
+                          <a:prstDash val="solid"/>
+                          <a:round/>
+                          <a:headEnd type="none" w="med" len="med"/>
+                          <a:tailEnd type="none" w="med" len="med"/>
+                        </a:lnR>
+                        <a:lnT w="28575" cap="flat" cmpd="sng" algn="ctr">
+                          <a:solidFill>
+                            <a:schemeClr val="tx1"/>
+                          </a:solidFill>
+                          <a:prstDash val="solid"/>
+                          <a:round/>
+                          <a:headEnd type="none" w="med" len="med"/>
+                          <a:tailEnd type="none" w="med" len="med"/>
+                        </a:lnT>
+                      </a:tcPr>
+                    </a:tc>
+                    <a:extLst>
+                      <a:ext uri="{0D108BD9-81ED-4DB2-BD59-A6C34878D82A}">
+                        <a16:rowId xmlns:a16="http://schemas.microsoft.com/office/drawing/2014/main" val="1529356210"/>
+                      </a:ext>
+                    </a:extLst>
+                  </a:tr>
+                  <a:tr h="370840">
+                    <a:tc vMerge="1">
+                      <a:txBody>
+                        <a:bodyPr/>
+                        <a:lstStyle/>
+                        <a:p>
+                          <a:endParaRPr lang="it-IT" dirty="0"/>
+                        </a:p>
+                      </a:txBody>
+                      <a:tcPr/>
+                    </a:tc>
+                    <a:tc>
+                      <a:txBody>
+                        <a:bodyPr/>
+                        <a:lstStyle/>
+                        <a:p>
+                          <a:pPr algn="ctr"/>
+                          <a14:m>
+                            <m:oMathPara xmlns:m="http://schemas.openxmlformats.org/officeDocument/2006/math">
+                              <m:oMathParaPr>
+                                <m:jc m:val="centerGroup"/>
+                              </m:oMathParaPr>
+                              <m:oMath xmlns:m="http://schemas.openxmlformats.org/officeDocument/2006/math">
+                                <m:r>
+                                  <a:rPr lang="it-IT" sz="2400" i="1" dirty="0" smtClean="0">
+                                    <a:latin typeface="Cambria Math" panose="02040503050406030204" pitchFamily="18" charset="0"/>
+                                  </a:rPr>
+                                  <m:t>8431</m:t>
+                                </m:r>
+                              </m:oMath>
+                            </m:oMathPara>
+                          </a14:m>
+                          <a:endParaRPr lang="it-IT" sz="2400" dirty="0"/>
+                        </a:p>
+                      </a:txBody>
+                      <a:tcPr anchor="ctr">
+                        <a:lnL w="28575" cap="flat" cmpd="sng" algn="ctr">
+                          <a:solidFill>
+                            <a:schemeClr val="tx1"/>
+                          </a:solidFill>
+                          <a:prstDash val="solid"/>
+                          <a:round/>
+                          <a:headEnd type="none" w="med" len="med"/>
+                          <a:tailEnd type="none" w="med" len="med"/>
+                        </a:lnL>
+                        <a:lnR w="28575" cap="flat" cmpd="sng" algn="ctr">
+                          <a:solidFill>
+                            <a:schemeClr val="tx1"/>
+                          </a:solidFill>
+                          <a:prstDash val="solid"/>
+                          <a:round/>
+                          <a:headEnd type="none" w="med" len="med"/>
+                          <a:tailEnd type="none" w="med" len="med"/>
+                        </a:lnR>
+                      </a:tcPr>
+                    </a:tc>
+                    <a:tc>
+                      <a:txBody>
+                        <a:bodyPr/>
+                        <a:lstStyle/>
+                        <a:p>
+                          <a:pPr marL="0" marR="0" lvl="0" indent="0" algn="ctr" defTabSz="914400" rtl="0" eaLnBrk="1" fontAlgn="auto" latinLnBrk="0" hangingPunct="1">
+                            <a:lnSpc>
+                              <a:spcPct val="100000"/>
+                            </a:lnSpc>
+                            <a:spcBef>
+                              <a:spcPts val="0"/>
+                            </a:spcBef>
+                            <a:spcAft>
+                              <a:spcPts val="0"/>
+                            </a:spcAft>
+                            <a:buClrTx/>
+                            <a:buSzTx/>
+                            <a:buFontTx/>
+                            <a:buNone/>
+                            <a:tabLst/>
+                            <a:defRPr/>
+                          </a:pPr>
+                          <a14:m>
+                            <m:oMathPara xmlns:m="http://schemas.openxmlformats.org/officeDocument/2006/math">
+                              <m:oMathParaPr>
+                                <m:jc m:val="centerGroup"/>
+                              </m:oMathParaPr>
+                              <m:oMath xmlns:m="http://schemas.openxmlformats.org/officeDocument/2006/math">
+                                <m:r>
+                                  <a:rPr lang="it-IT" sz="2400" b="0" i="1" smtClean="0">
+                                    <a:latin typeface="Cambria Math" panose="02040503050406030204" pitchFamily="18" charset="0"/>
+                                  </a:rPr>
+                                  <m:t>3.33</m:t>
+                                </m:r>
+                              </m:oMath>
+                            </m:oMathPara>
+                          </a14:m>
+                          <a:endParaRPr lang="it-IT" sz="2400" dirty="0"/>
+                        </a:p>
+                      </a:txBody>
+                      <a:tcPr anchor="ctr">
+                        <a:lnL w="28575" cap="flat" cmpd="sng" algn="ctr">
+                          <a:solidFill>
+                            <a:schemeClr val="tx1"/>
+                          </a:solidFill>
+                          <a:prstDash val="solid"/>
+                          <a:round/>
+                          <a:headEnd type="none" w="med" len="med"/>
+                          <a:tailEnd type="none" w="med" len="med"/>
+                        </a:lnL>
+                      </a:tcPr>
+                    </a:tc>
+                    <a:tc>
+                      <a:txBody>
+                        <a:bodyPr/>
+                        <a:lstStyle/>
+                        <a:p>
+                          <a:pPr marL="0" marR="0" lvl="0" indent="0" algn="ctr" defTabSz="914400" rtl="0" eaLnBrk="1" fontAlgn="auto" latinLnBrk="0" hangingPunct="1">
+                            <a:lnSpc>
+                              <a:spcPct val="100000"/>
+                            </a:lnSpc>
+                            <a:spcBef>
+                              <a:spcPts val="0"/>
+                            </a:spcBef>
+                            <a:spcAft>
+                              <a:spcPts val="0"/>
+                            </a:spcAft>
+                            <a:buClrTx/>
+                            <a:buSzTx/>
+                            <a:buFontTx/>
+                            <a:buNone/>
+                            <a:tabLst/>
+                            <a:defRPr/>
+                          </a:pPr>
+                          <a14:m>
+                            <m:oMathPara xmlns:m="http://schemas.openxmlformats.org/officeDocument/2006/math">
+                              <m:oMathParaPr>
+                                <m:jc m:val="centerGroup"/>
+                              </m:oMathParaPr>
+                              <m:oMath xmlns:m="http://schemas.openxmlformats.org/officeDocument/2006/math">
+                                <m:r>
+                                  <a:rPr lang="it-IT" sz="2400" b="0" i="1" smtClean="0">
+                                    <a:latin typeface="Cambria Math" panose="02040503050406030204" pitchFamily="18" charset="0"/>
+                                  </a:rPr>
+                                  <m:t>6011</m:t>
+                                </m:r>
+                              </m:oMath>
+                            </m:oMathPara>
+                          </a14:m>
+                          <a:endParaRPr lang="it-IT" sz="2400" i="0" dirty="0"/>
+                        </a:p>
+                      </a:txBody>
+                      <a:tcPr anchor="ctr"/>
+                    </a:tc>
+                    <a:tc>
+                      <a:txBody>
+                        <a:bodyPr/>
+                        <a:lstStyle/>
+                        <a:p>
+                          <a:pPr algn="ctr"/>
+                          <a14:m>
+                            <m:oMathPara xmlns:m="http://schemas.openxmlformats.org/officeDocument/2006/math">
+                              <m:oMathParaPr>
+                                <m:jc m:val="centerGroup"/>
+                              </m:oMathParaPr>
+                              <m:oMath xmlns:m="http://schemas.openxmlformats.org/officeDocument/2006/math">
+                                <m:d>
+                                  <m:dPr>
+                                    <m:ctrlPr>
+                                      <a:rPr lang="it-IT" sz="2400" b="0" i="1" smtClean="0">
+                                        <a:latin typeface="Cambria Math" panose="02040503050406030204" pitchFamily="18" charset="0"/>
+                                      </a:rPr>
+                                    </m:ctrlPr>
+                                  </m:dPr>
+                                  <m:e>
+                                    <m:r>
+                                      <a:rPr lang="it-IT" sz="2400" b="0" i="1" smtClean="0">
+                                        <a:latin typeface="Cambria Math" panose="02040503050406030204" pitchFamily="18" charset="0"/>
+                                      </a:rPr>
+                                      <m:t>18.3±0.01</m:t>
+                                    </m:r>
+                                  </m:e>
+                                </m:d>
+                              </m:oMath>
+                            </m:oMathPara>
+                          </a14:m>
+                          <a:endParaRPr lang="it-IT" sz="2400" dirty="0"/>
+                        </a:p>
+                      </a:txBody>
+                      <a:tcPr anchor="ctr">
+                        <a:lnR w="12700" cap="flat" cmpd="sng" algn="ctr">
+                          <a:noFill/>
+                          <a:prstDash val="solid"/>
+                          <a:round/>
+                          <a:headEnd type="none" w="med" len="med"/>
+                          <a:tailEnd type="none" w="med" len="med"/>
+                        </a:lnR>
+                      </a:tcPr>
+                    </a:tc>
+                    <a:extLst>
+                      <a:ext uri="{0D108BD9-81ED-4DB2-BD59-A6C34878D82A}">
+                        <a16:rowId xmlns:a16="http://schemas.microsoft.com/office/drawing/2014/main" val="348010959"/>
+                      </a:ext>
+                    </a:extLst>
+                  </a:tr>
+                  <a:tr h="370840">
+                    <a:tc vMerge="1">
+                      <a:txBody>
+                        <a:bodyPr/>
+                        <a:lstStyle/>
+                        <a:p>
+                          <a:endParaRPr lang="it-IT" dirty="0"/>
+                        </a:p>
+                      </a:txBody>
+                      <a:tcPr/>
+                    </a:tc>
+                    <a:tc>
+                      <a:txBody>
+                        <a:bodyPr/>
+                        <a:lstStyle/>
+                        <a:p>
+                          <a:pPr algn="ctr"/>
+                          <a14:m>
+                            <m:oMathPara xmlns:m="http://schemas.openxmlformats.org/officeDocument/2006/math">
+                              <m:oMathParaPr>
+                                <m:jc m:val="centerGroup"/>
+                              </m:oMathParaPr>
+                              <m:oMath xmlns:m="http://schemas.openxmlformats.org/officeDocument/2006/math">
+                                <m:r>
+                                  <a:rPr lang="it-IT" sz="2400" i="1" dirty="0" smtClean="0">
+                                    <a:solidFill>
+                                      <a:srgbClr val="FFC000"/>
+                                    </a:solidFill>
+                                    <a:latin typeface="Cambria Math" panose="02040503050406030204" pitchFamily="18" charset="0"/>
+                                  </a:rPr>
+                                  <m:t>8650</m:t>
+                                </m:r>
+                              </m:oMath>
+                            </m:oMathPara>
+                          </a14:m>
+                          <a:endParaRPr lang="it-IT" sz="2400" dirty="0">
+                            <a:solidFill>
+                              <a:srgbClr val="FFC000"/>
+                            </a:solidFill>
+                          </a:endParaRPr>
+                        </a:p>
+                      </a:txBody>
+                      <a:tcPr anchor="ctr">
+                        <a:lnL w="28575" cap="flat" cmpd="sng" algn="ctr">
+                          <a:solidFill>
+                            <a:schemeClr val="tx1"/>
+                          </a:solidFill>
+                          <a:prstDash val="solid"/>
+                          <a:round/>
+                          <a:headEnd type="none" w="med" len="med"/>
+                          <a:tailEnd type="none" w="med" len="med"/>
+                        </a:lnL>
+                        <a:lnR w="28575" cap="flat" cmpd="sng" algn="ctr">
+                          <a:solidFill>
+                            <a:schemeClr val="tx1"/>
+                          </a:solidFill>
+                          <a:prstDash val="solid"/>
+                          <a:round/>
+                          <a:headEnd type="none" w="med" len="med"/>
+                          <a:tailEnd type="none" w="med" len="med"/>
+                        </a:lnR>
+                        <a:lnB w="28575" cap="flat" cmpd="sng" algn="ctr">
+                          <a:solidFill>
+                            <a:schemeClr val="tx1"/>
+                          </a:solidFill>
+                          <a:prstDash val="solid"/>
+                          <a:round/>
+                          <a:headEnd type="none" w="med" len="med"/>
+                          <a:tailEnd type="none" w="med" len="med"/>
+                        </a:lnB>
+                      </a:tcPr>
+                    </a:tc>
+                    <a:tc>
+                      <a:txBody>
+                        <a:bodyPr/>
+                        <a:lstStyle/>
+                        <a:p>
+                          <a:pPr marL="0" marR="0" lvl="0" indent="0" algn="ctr" defTabSz="914400" rtl="0" eaLnBrk="1" fontAlgn="auto" latinLnBrk="0" hangingPunct="1">
+                            <a:lnSpc>
+                              <a:spcPct val="100000"/>
+                            </a:lnSpc>
+                            <a:spcBef>
+                              <a:spcPts val="0"/>
+                            </a:spcBef>
+                            <a:spcAft>
+                              <a:spcPts val="0"/>
+                            </a:spcAft>
+                            <a:buClrTx/>
+                            <a:buSzTx/>
+                            <a:buFontTx/>
+                            <a:buNone/>
+                            <a:tabLst/>
+                            <a:defRPr/>
+                          </a:pPr>
+                          <a14:m>
+                            <m:oMathPara xmlns:m="http://schemas.openxmlformats.org/officeDocument/2006/math">
+                              <m:oMathParaPr>
+                                <m:jc m:val="centerGroup"/>
+                              </m:oMathParaPr>
+                              <m:oMath xmlns:m="http://schemas.openxmlformats.org/officeDocument/2006/math">
+                                <m:r>
+                                  <a:rPr lang="it-IT" sz="2400" b="0" i="1" smtClean="0">
+                                    <a:solidFill>
+                                      <a:srgbClr val="FFC000"/>
+                                    </a:solidFill>
+                                    <a:latin typeface="Cambria Math" panose="02040503050406030204" pitchFamily="18" charset="0"/>
+                                  </a:rPr>
+                                  <m:t>3.72</m:t>
+                                </m:r>
+                              </m:oMath>
+                            </m:oMathPara>
+                          </a14:m>
+                          <a:endParaRPr lang="it-IT" sz="2400" dirty="0">
+                            <a:solidFill>
+                              <a:srgbClr val="FFC000"/>
+                            </a:solidFill>
+                          </a:endParaRPr>
+                        </a:p>
+                      </a:txBody>
+                      <a:tcPr anchor="ctr">
+                        <a:lnL w="28575" cap="flat" cmpd="sng" algn="ctr">
+                          <a:solidFill>
+                            <a:schemeClr val="tx1"/>
+                          </a:solidFill>
+                          <a:prstDash val="solid"/>
+                          <a:round/>
+                          <a:headEnd type="none" w="med" len="med"/>
+                          <a:tailEnd type="none" w="med" len="med"/>
+                        </a:lnL>
+                        <a:lnB w="28575" cap="flat" cmpd="sng" algn="ctr">
+                          <a:solidFill>
+                            <a:schemeClr val="tx1"/>
+                          </a:solidFill>
+                          <a:prstDash val="solid"/>
+                          <a:round/>
+                          <a:headEnd type="none" w="med" len="med"/>
+                          <a:tailEnd type="none" w="med" len="med"/>
+                        </a:lnB>
+                      </a:tcPr>
+                    </a:tc>
+                    <a:tc>
+                      <a:txBody>
+                        <a:bodyPr/>
+                        <a:lstStyle/>
+                        <a:p>
+                          <a:pPr marL="0" marR="0" lvl="0" indent="0" algn="ctr" defTabSz="914400" rtl="0" eaLnBrk="1" fontAlgn="auto" latinLnBrk="0" hangingPunct="1">
+                            <a:lnSpc>
+                              <a:spcPct val="100000"/>
+                            </a:lnSpc>
+                            <a:spcBef>
+                              <a:spcPts val="0"/>
+                            </a:spcBef>
+                            <a:spcAft>
+                              <a:spcPts val="0"/>
+                            </a:spcAft>
+                            <a:buClrTx/>
+                            <a:buSzTx/>
+                            <a:buFontTx/>
+                            <a:buNone/>
+                            <a:tabLst/>
+                            <a:defRPr/>
+                          </a:pPr>
+                          <a14:m>
+                            <m:oMathPara xmlns:m="http://schemas.openxmlformats.org/officeDocument/2006/math">
+                              <m:oMathParaPr>
+                                <m:jc m:val="centerGroup"/>
+                              </m:oMathParaPr>
+                              <m:oMath xmlns:m="http://schemas.openxmlformats.org/officeDocument/2006/math">
+                                <m:r>
+                                  <a:rPr lang="it-IT" sz="2400" b="0" i="1" smtClean="0">
+                                    <a:solidFill>
+                                      <a:srgbClr val="FFC000"/>
+                                    </a:solidFill>
+                                    <a:latin typeface="Cambria Math" panose="02040503050406030204" pitchFamily="18" charset="0"/>
+                                  </a:rPr>
+                                  <m:t>6077</m:t>
+                                </m:r>
+                              </m:oMath>
+                            </m:oMathPara>
+                          </a14:m>
+                          <a:endParaRPr lang="it-IT" sz="2400" i="0" dirty="0">
+                            <a:solidFill>
+                              <a:srgbClr val="FFC000"/>
+                            </a:solidFill>
+                          </a:endParaRPr>
+                        </a:p>
+                      </a:txBody>
+                      <a:tcPr anchor="ctr">
+                        <a:lnB w="28575" cap="flat" cmpd="sng" algn="ctr">
+                          <a:solidFill>
+                            <a:schemeClr val="tx1"/>
+                          </a:solidFill>
+                          <a:prstDash val="solid"/>
+                          <a:round/>
+                          <a:headEnd type="none" w="med" len="med"/>
+                          <a:tailEnd type="none" w="med" len="med"/>
+                        </a:lnB>
+                      </a:tcPr>
+                    </a:tc>
+                    <a:tc>
+                      <a:txBody>
+                        <a:bodyPr/>
+                        <a:lstStyle/>
+                        <a:p>
+                          <a:pPr algn="ctr"/>
+                          <a14:m>
+                            <m:oMathPara xmlns:m="http://schemas.openxmlformats.org/officeDocument/2006/math">
+                              <m:oMathParaPr>
+                                <m:jc m:val="centerGroup"/>
+                              </m:oMathParaPr>
+                              <m:oMath xmlns:m="http://schemas.openxmlformats.org/officeDocument/2006/math">
+                                <m:d>
+                                  <m:dPr>
+                                    <m:ctrlPr>
+                                      <a:rPr lang="it-IT" sz="2400" b="0" i="1" smtClean="0">
+                                        <a:solidFill>
+                                          <a:srgbClr val="FFC000"/>
+                                        </a:solidFill>
+                                        <a:latin typeface="Cambria Math" panose="02040503050406030204" pitchFamily="18" charset="0"/>
+                                      </a:rPr>
+                                    </m:ctrlPr>
+                                  </m:dPr>
+                                  <m:e>
+                                    <m:r>
+                                      <a:rPr lang="it-IT" sz="2400" b="0" i="1" smtClean="0">
+                                        <a:solidFill>
+                                          <a:srgbClr val="FFC000"/>
+                                        </a:solidFill>
+                                        <a:latin typeface="Cambria Math" panose="02040503050406030204" pitchFamily="18" charset="0"/>
+                                      </a:rPr>
+                                      <m:t>17.1±0.01</m:t>
+                                    </m:r>
+                                  </m:e>
+                                </m:d>
+                              </m:oMath>
+                            </m:oMathPara>
+                          </a14:m>
+                          <a:endParaRPr lang="it-IT" sz="2400" dirty="0">
+                            <a:solidFill>
+                              <a:srgbClr val="FFC000"/>
+                            </a:solidFill>
+                          </a:endParaRPr>
+                        </a:p>
+                      </a:txBody>
+                      <a:tcPr anchor="ctr">
+                        <a:lnR w="12700" cap="flat" cmpd="sng" algn="ctr">
+                          <a:noFill/>
+                          <a:prstDash val="solid"/>
+                          <a:round/>
+                          <a:headEnd type="none" w="med" len="med"/>
+                          <a:tailEnd type="none" w="med" len="med"/>
+                        </a:lnR>
+                        <a:lnB w="28575" cap="flat" cmpd="sng" algn="ctr">
+                          <a:solidFill>
+                            <a:schemeClr val="tx1"/>
+                          </a:solidFill>
+                          <a:prstDash val="solid"/>
+                          <a:round/>
+                          <a:headEnd type="none" w="med" len="med"/>
+                          <a:tailEnd type="none" w="med" len="med"/>
+                        </a:lnB>
+                      </a:tcPr>
+                    </a:tc>
+                    <a:extLst>
+                      <a:ext uri="{0D108BD9-81ED-4DB2-BD59-A6C34878D82A}">
+                        <a16:rowId xmlns:a16="http://schemas.microsoft.com/office/drawing/2014/main" val="3053670846"/>
+                      </a:ext>
+                    </a:extLst>
+                  </a:tr>
+                  <a:tr h="370840">
+                    <a:tc rowSpan="2">
+                      <a:txBody>
+                        <a:bodyPr/>
+                        <a:lstStyle/>
+                        <a:p>
+                          <a:pPr algn="ctr"/>
+                          <a:r>
+                            <a:rPr lang="it-IT" sz="2400" dirty="0"/>
+                            <a:t>Long </a:t>
+                          </a:r>
+                          <a:r>
+                            <a:rPr lang="it-IT" sz="2400" dirty="0" err="1"/>
+                            <a:t>crystal</a:t>
+                          </a:r>
+                          <a:r>
+                            <a:rPr lang="it-IT" sz="2400" dirty="0"/>
+                            <a:t> 2</a:t>
+                          </a:r>
+                        </a:p>
+                      </a:txBody>
+                      <a:tcPr anchor="ctr">
+                        <a:lnL w="12700" cap="flat" cmpd="sng" algn="ctr">
+                          <a:noFill/>
+                          <a:prstDash val="solid"/>
+                          <a:round/>
+                          <a:headEnd type="none" w="med" len="med"/>
+                          <a:tailEnd type="none" w="med" len="med"/>
+                        </a:lnL>
+                        <a:lnR w="28575" cap="flat" cmpd="sng" algn="ctr">
+                          <a:solidFill>
+                            <a:schemeClr val="tx1"/>
+                          </a:solidFill>
+                          <a:prstDash val="solid"/>
+                          <a:round/>
+                          <a:headEnd type="none" w="med" len="med"/>
+                          <a:tailEnd type="none" w="med" len="med"/>
+                        </a:lnR>
+                        <a:lnT w="28575" cap="flat" cmpd="sng" algn="ctr">
+                          <a:solidFill>
+                            <a:schemeClr val="tx1"/>
+                          </a:solidFill>
+                          <a:prstDash val="solid"/>
+                          <a:round/>
+                          <a:headEnd type="none" w="med" len="med"/>
+                          <a:tailEnd type="none" w="med" len="med"/>
+                        </a:lnT>
+                        <a:lnB w="12700" cap="flat" cmpd="sng" algn="ctr">
+                          <a:noFill/>
+                          <a:prstDash val="solid"/>
+                          <a:round/>
+                          <a:headEnd type="none" w="med" len="med"/>
+                          <a:tailEnd type="none" w="med" len="med"/>
+                        </a:lnB>
+                      </a:tcPr>
+                    </a:tc>
+                    <a:tc>
+                      <a:txBody>
+                        <a:bodyPr/>
+                        <a:lstStyle/>
+                        <a:p>
+                          <a:pPr algn="ctr"/>
+                          <a14:m>
+                            <m:oMathPara xmlns:m="http://schemas.openxmlformats.org/officeDocument/2006/math">
+                              <m:oMathParaPr>
+                                <m:jc m:val="centerGroup"/>
+                              </m:oMathParaPr>
+                              <m:oMath xmlns:m="http://schemas.openxmlformats.org/officeDocument/2006/math">
+                                <m:r>
+                                  <a:rPr lang="it-IT" sz="2400" i="1" dirty="0" smtClean="0">
+                                    <a:latin typeface="Cambria Math" panose="02040503050406030204" pitchFamily="18" charset="0"/>
+                                  </a:rPr>
+                                  <m:t>8655</m:t>
+                                </m:r>
+                              </m:oMath>
+                            </m:oMathPara>
+                          </a14:m>
+                          <a:endParaRPr lang="it-IT" sz="2400" dirty="0"/>
+                        </a:p>
+                      </a:txBody>
+                      <a:tcPr anchor="ctr">
+                        <a:lnL w="28575" cap="flat" cmpd="sng" algn="ctr">
+                          <a:solidFill>
+                            <a:schemeClr val="tx1"/>
+                          </a:solidFill>
+                          <a:prstDash val="solid"/>
+                          <a:round/>
+                          <a:headEnd type="none" w="med" len="med"/>
+                          <a:tailEnd type="none" w="med" len="med"/>
+                        </a:lnL>
+                        <a:lnR w="28575" cap="flat" cmpd="sng" algn="ctr">
+                          <a:solidFill>
+                            <a:schemeClr val="tx1"/>
+                          </a:solidFill>
+                          <a:prstDash val="solid"/>
+                          <a:round/>
+                          <a:headEnd type="none" w="med" len="med"/>
+                          <a:tailEnd type="none" w="med" len="med"/>
+                        </a:lnR>
+                        <a:lnT w="28575" cap="flat" cmpd="sng" algn="ctr">
+                          <a:solidFill>
+                            <a:schemeClr val="tx1"/>
+                          </a:solidFill>
+                          <a:prstDash val="solid"/>
+                          <a:round/>
+                          <a:headEnd type="none" w="med" len="med"/>
+                          <a:tailEnd type="none" w="med" len="med"/>
+                        </a:lnT>
+                      </a:tcPr>
+                    </a:tc>
+                    <a:tc>
+                      <a:txBody>
+                        <a:bodyPr/>
+                        <a:lstStyle/>
+                        <a:p>
+                          <a:pPr marL="0" marR="0" lvl="0" indent="0" algn="ctr" defTabSz="914400" rtl="0" eaLnBrk="1" fontAlgn="auto" latinLnBrk="0" hangingPunct="1">
+                            <a:lnSpc>
+                              <a:spcPct val="100000"/>
+                            </a:lnSpc>
+                            <a:spcBef>
+                              <a:spcPts val="0"/>
+                            </a:spcBef>
+                            <a:spcAft>
+                              <a:spcPts val="0"/>
+                            </a:spcAft>
+                            <a:buClrTx/>
+                            <a:buSzTx/>
+                            <a:buFontTx/>
+                            <a:buNone/>
+                            <a:tabLst/>
+                            <a:defRPr/>
+                          </a:pPr>
+                          <a14:m>
+                            <m:oMathPara xmlns:m="http://schemas.openxmlformats.org/officeDocument/2006/math">
+                              <m:oMathParaPr>
+                                <m:jc m:val="centerGroup"/>
+                              </m:oMathParaPr>
+                              <m:oMath xmlns:m="http://schemas.openxmlformats.org/officeDocument/2006/math">
+                                <m:r>
+                                  <a:rPr lang="it-IT" sz="2400" b="0" i="1" smtClean="0">
+                                    <a:latin typeface="Cambria Math" panose="02040503050406030204" pitchFamily="18" charset="0"/>
+                                  </a:rPr>
+                                  <m:t>2.97</m:t>
+                                </m:r>
+                              </m:oMath>
+                            </m:oMathPara>
+                          </a14:m>
+                          <a:endParaRPr lang="it-IT" sz="2400" dirty="0"/>
+                        </a:p>
+                      </a:txBody>
+                      <a:tcPr anchor="ctr">
+                        <a:lnL w="28575" cap="flat" cmpd="sng" algn="ctr">
+                          <a:solidFill>
+                            <a:schemeClr val="tx1"/>
+                          </a:solidFill>
+                          <a:prstDash val="solid"/>
+                          <a:round/>
+                          <a:headEnd type="none" w="med" len="med"/>
+                          <a:tailEnd type="none" w="med" len="med"/>
+                        </a:lnL>
+                        <a:lnT w="28575" cap="flat" cmpd="sng" algn="ctr">
+                          <a:solidFill>
+                            <a:schemeClr val="tx1"/>
+                          </a:solidFill>
+                          <a:prstDash val="solid"/>
+                          <a:round/>
+                          <a:headEnd type="none" w="med" len="med"/>
+                          <a:tailEnd type="none" w="med" len="med"/>
+                        </a:lnT>
+                      </a:tcPr>
+                    </a:tc>
+                    <a:tc>
+                      <a:txBody>
+                        <a:bodyPr/>
+                        <a:lstStyle/>
+                        <a:p>
+                          <a:pPr marL="0" marR="0" lvl="0" indent="0" algn="ctr" defTabSz="914400" rtl="0" eaLnBrk="1" fontAlgn="auto" latinLnBrk="0" hangingPunct="1">
+                            <a:lnSpc>
+                              <a:spcPct val="100000"/>
+                            </a:lnSpc>
+                            <a:spcBef>
+                              <a:spcPts val="0"/>
+                            </a:spcBef>
+                            <a:spcAft>
+                              <a:spcPts val="0"/>
+                            </a:spcAft>
+                            <a:buClrTx/>
+                            <a:buSzTx/>
+                            <a:buFontTx/>
+                            <a:buNone/>
+                            <a:tabLst/>
+                            <a:defRPr/>
+                          </a:pPr>
+                          <a14:m>
+                            <m:oMathPara xmlns:m="http://schemas.openxmlformats.org/officeDocument/2006/math">
+                              <m:oMathParaPr>
+                                <m:jc m:val="centerGroup"/>
+                              </m:oMathParaPr>
+                              <m:oMath xmlns:m="http://schemas.openxmlformats.org/officeDocument/2006/math">
+                                <m:r>
+                                  <a:rPr lang="it-IT" sz="2400" b="0" i="1" smtClean="0">
+                                    <a:latin typeface="Cambria Math" panose="02040503050406030204" pitchFamily="18" charset="0"/>
+                                  </a:rPr>
+                                  <m:t>6124</m:t>
+                                </m:r>
+                              </m:oMath>
+                            </m:oMathPara>
+                          </a14:m>
+                          <a:endParaRPr lang="it-IT" sz="2400" i="0" dirty="0"/>
+                        </a:p>
+                      </a:txBody>
+                      <a:tcPr anchor="ctr">
+                        <a:lnT w="28575" cap="flat" cmpd="sng" algn="ctr">
+                          <a:solidFill>
+                            <a:schemeClr val="tx1"/>
+                          </a:solidFill>
+                          <a:prstDash val="solid"/>
+                          <a:round/>
+                          <a:headEnd type="none" w="med" len="med"/>
+                          <a:tailEnd type="none" w="med" len="med"/>
+                        </a:lnT>
+                      </a:tcPr>
+                    </a:tc>
+                    <a:tc>
+                      <a:txBody>
+                        <a:bodyPr/>
+                        <a:lstStyle/>
+                        <a:p>
+                          <a:pPr algn="ctr"/>
+                          <a14:m>
+                            <m:oMathPara xmlns:m="http://schemas.openxmlformats.org/officeDocument/2006/math">
+                              <m:oMathParaPr>
+                                <m:jc m:val="centerGroup"/>
+                              </m:oMathParaPr>
+                              <m:oMath xmlns:m="http://schemas.openxmlformats.org/officeDocument/2006/math">
+                                <m:d>
+                                  <m:dPr>
+                                    <m:ctrlPr>
+                                      <a:rPr lang="it-IT" sz="2400" b="0" i="1" smtClean="0">
+                                        <a:latin typeface="Cambria Math" panose="02040503050406030204" pitchFamily="18" charset="0"/>
+                                      </a:rPr>
+                                    </m:ctrlPr>
+                                  </m:dPr>
+                                  <m:e>
+                                    <m:r>
+                                      <a:rPr lang="it-IT" sz="2400" b="0" i="1" smtClean="0">
+                                        <a:latin typeface="Cambria Math" panose="02040503050406030204" pitchFamily="18" charset="0"/>
+                                      </a:rPr>
+                                      <m:t>17.9±0.01</m:t>
+                                    </m:r>
+                                  </m:e>
+                                </m:d>
+                              </m:oMath>
+                            </m:oMathPara>
+                          </a14:m>
+                          <a:endParaRPr lang="it-IT" sz="2400" dirty="0"/>
+                        </a:p>
+                      </a:txBody>
+                      <a:tcPr anchor="ctr">
+                        <a:lnR w="12700" cap="flat" cmpd="sng" algn="ctr">
+                          <a:noFill/>
+                          <a:prstDash val="solid"/>
+                          <a:round/>
+                          <a:headEnd type="none" w="med" len="med"/>
+                          <a:tailEnd type="none" w="med" len="med"/>
+                        </a:lnR>
+                        <a:lnT w="28575" cap="flat" cmpd="sng" algn="ctr">
+                          <a:solidFill>
+                            <a:schemeClr val="tx1"/>
+                          </a:solidFill>
+                          <a:prstDash val="solid"/>
+                          <a:round/>
+                          <a:headEnd type="none" w="med" len="med"/>
+                          <a:tailEnd type="none" w="med" len="med"/>
+                        </a:lnT>
+                      </a:tcPr>
+                    </a:tc>
+                    <a:extLst>
+                      <a:ext uri="{0D108BD9-81ED-4DB2-BD59-A6C34878D82A}">
+                        <a16:rowId xmlns:a16="http://schemas.microsoft.com/office/drawing/2014/main" val="3544524089"/>
+                      </a:ext>
+                    </a:extLst>
+                  </a:tr>
+                  <a:tr h="370840">
+                    <a:tc vMerge="1">
+                      <a:txBody>
+                        <a:bodyPr/>
+                        <a:lstStyle/>
+                        <a:p>
+                          <a:endParaRPr lang="it-IT" dirty="0"/>
+                        </a:p>
+                      </a:txBody>
+                      <a:tcPr/>
+                    </a:tc>
+                    <a:tc>
+                      <a:txBody>
+                        <a:bodyPr/>
+                        <a:lstStyle/>
+                        <a:p>
+                          <a:pPr algn="ctr"/>
+                          <a14:m>
+                            <m:oMathPara xmlns:m="http://schemas.openxmlformats.org/officeDocument/2006/math">
+                              <m:oMathParaPr>
+                                <m:jc m:val="centerGroup"/>
+                              </m:oMathParaPr>
+                              <m:oMath xmlns:m="http://schemas.openxmlformats.org/officeDocument/2006/math">
+                                <m:r>
+                                  <a:rPr lang="it-IT" sz="2400" i="1" dirty="0" smtClean="0">
+                                    <a:latin typeface="Cambria Math" panose="02040503050406030204" pitchFamily="18" charset="0"/>
+                                  </a:rPr>
+                                  <m:t>8656</m:t>
+                                </m:r>
+                              </m:oMath>
+                            </m:oMathPara>
+                          </a14:m>
+                          <a:endParaRPr lang="it-IT" sz="2400" dirty="0"/>
+                        </a:p>
+                      </a:txBody>
+                      <a:tcPr anchor="ctr">
+                        <a:lnL w="28575" cap="flat" cmpd="sng" algn="ctr">
+                          <a:solidFill>
+                            <a:schemeClr val="tx1"/>
+                          </a:solidFill>
+                          <a:prstDash val="solid"/>
+                          <a:round/>
+                          <a:headEnd type="none" w="med" len="med"/>
+                          <a:tailEnd type="none" w="med" len="med"/>
+                        </a:lnL>
+                        <a:lnR w="28575" cap="flat" cmpd="sng" algn="ctr">
+                          <a:solidFill>
+                            <a:schemeClr val="tx1"/>
+                          </a:solidFill>
+                          <a:prstDash val="solid"/>
+                          <a:round/>
+                          <a:headEnd type="none" w="med" len="med"/>
+                          <a:tailEnd type="none" w="med" len="med"/>
+                        </a:lnR>
+                        <a:lnB w="12700" cap="flat" cmpd="sng" algn="ctr">
+                          <a:noFill/>
+                          <a:prstDash val="solid"/>
+                          <a:round/>
+                          <a:headEnd type="none" w="med" len="med"/>
+                          <a:tailEnd type="none" w="med" len="med"/>
+                        </a:lnB>
+                      </a:tcPr>
+                    </a:tc>
+                    <a:tc>
+                      <a:txBody>
+                        <a:bodyPr/>
+                        <a:lstStyle/>
+                        <a:p>
+                          <a:pPr marL="0" marR="0" lvl="0" indent="0" algn="ctr" defTabSz="914400" rtl="0" eaLnBrk="1" fontAlgn="auto" latinLnBrk="0" hangingPunct="1">
+                            <a:lnSpc>
+                              <a:spcPct val="100000"/>
+                            </a:lnSpc>
+                            <a:spcBef>
+                              <a:spcPts val="0"/>
+                            </a:spcBef>
+                            <a:spcAft>
+                              <a:spcPts val="0"/>
+                            </a:spcAft>
+                            <a:buClrTx/>
+                            <a:buSzTx/>
+                            <a:buFontTx/>
+                            <a:buNone/>
+                            <a:tabLst/>
+                            <a:defRPr/>
+                          </a:pPr>
+                          <a14:m>
+                            <m:oMathPara xmlns:m="http://schemas.openxmlformats.org/officeDocument/2006/math">
+                              <m:oMathParaPr>
+                                <m:jc m:val="centerGroup"/>
+                              </m:oMathParaPr>
+                              <m:oMath xmlns:m="http://schemas.openxmlformats.org/officeDocument/2006/math">
+                                <m:r>
+                                  <a:rPr lang="it-IT" sz="2400" b="0" i="1" smtClean="0">
+                                    <a:latin typeface="Cambria Math" panose="02040503050406030204" pitchFamily="18" charset="0"/>
+                                  </a:rPr>
+                                  <m:t>2.83</m:t>
+                                </m:r>
+                              </m:oMath>
+                            </m:oMathPara>
+                          </a14:m>
+                          <a:endParaRPr lang="it-IT" sz="2400" dirty="0"/>
+                        </a:p>
+                      </a:txBody>
+                      <a:tcPr anchor="ctr">
+                        <a:lnL w="28575" cap="flat" cmpd="sng" algn="ctr">
+                          <a:solidFill>
+                            <a:schemeClr val="tx1"/>
+                          </a:solidFill>
+                          <a:prstDash val="solid"/>
+                          <a:round/>
+                          <a:headEnd type="none" w="med" len="med"/>
+                          <a:tailEnd type="none" w="med" len="med"/>
+                        </a:lnL>
+                        <a:lnB w="12700" cap="flat" cmpd="sng" algn="ctr">
+                          <a:noFill/>
+                          <a:prstDash val="solid"/>
+                          <a:round/>
+                          <a:headEnd type="none" w="med" len="med"/>
+                          <a:tailEnd type="none" w="med" len="med"/>
+                        </a:lnB>
+                      </a:tcPr>
+                    </a:tc>
+                    <a:tc>
+                      <a:txBody>
+                        <a:bodyPr/>
+                        <a:lstStyle/>
+                        <a:p>
+                          <a:pPr marL="0" marR="0" lvl="0" indent="0" algn="ctr" defTabSz="914400" rtl="0" eaLnBrk="1" fontAlgn="auto" latinLnBrk="0" hangingPunct="1">
+                            <a:lnSpc>
+                              <a:spcPct val="100000"/>
+                            </a:lnSpc>
+                            <a:spcBef>
+                              <a:spcPts val="0"/>
+                            </a:spcBef>
+                            <a:spcAft>
+                              <a:spcPts val="0"/>
+                            </a:spcAft>
+                            <a:buClrTx/>
+                            <a:buSzTx/>
+                            <a:buFontTx/>
+                            <a:buNone/>
+                            <a:tabLst/>
+                            <a:defRPr/>
+                          </a:pPr>
+                          <a14:m>
+                            <m:oMathPara xmlns:m="http://schemas.openxmlformats.org/officeDocument/2006/math">
+                              <m:oMathParaPr>
+                                <m:jc m:val="centerGroup"/>
+                              </m:oMathParaPr>
+                              <m:oMath xmlns:m="http://schemas.openxmlformats.org/officeDocument/2006/math">
+                                <m:r>
+                                  <a:rPr lang="it-IT" sz="2400" b="0" i="1" smtClean="0">
+                                    <a:latin typeface="Cambria Math" panose="02040503050406030204" pitchFamily="18" charset="0"/>
+                                  </a:rPr>
+                                  <m:t>6123</m:t>
+                                </m:r>
+                              </m:oMath>
+                            </m:oMathPara>
+                          </a14:m>
+                          <a:endParaRPr lang="it-IT" sz="2400" i="0" dirty="0"/>
+                        </a:p>
+                      </a:txBody>
+                      <a:tcPr anchor="ctr">
+                        <a:lnB w="12700" cap="flat" cmpd="sng" algn="ctr">
+                          <a:noFill/>
+                          <a:prstDash val="solid"/>
+                          <a:round/>
+                          <a:headEnd type="none" w="med" len="med"/>
+                          <a:tailEnd type="none" w="med" len="med"/>
+                        </a:lnB>
+                      </a:tcPr>
+                    </a:tc>
+                    <a:tc>
+                      <a:txBody>
+                        <a:bodyPr/>
+                        <a:lstStyle/>
+                        <a:p>
+                          <a:pPr algn="ctr"/>
+                          <a14:m>
+                            <m:oMathPara xmlns:m="http://schemas.openxmlformats.org/officeDocument/2006/math">
+                              <m:oMathParaPr>
+                                <m:jc m:val="centerGroup"/>
+                              </m:oMathParaPr>
+                              <m:oMath xmlns:m="http://schemas.openxmlformats.org/officeDocument/2006/math">
+                                <m:d>
+                                  <m:dPr>
+                                    <m:ctrlPr>
+                                      <a:rPr lang="it-IT" sz="2400" b="0" i="1" smtClean="0">
+                                        <a:latin typeface="Cambria Math" panose="02040503050406030204" pitchFamily="18" charset="0"/>
+                                      </a:rPr>
+                                    </m:ctrlPr>
+                                  </m:dPr>
+                                  <m:e>
+                                    <m:r>
+                                      <a:rPr lang="it-IT" sz="2400" b="0" i="1" smtClean="0">
+                                        <a:latin typeface="Cambria Math" panose="02040503050406030204" pitchFamily="18" charset="0"/>
+                                      </a:rPr>
+                                      <m:t>17.8±0.01</m:t>
+                                    </m:r>
+                                  </m:e>
+                                </m:d>
+                              </m:oMath>
+                            </m:oMathPara>
+                          </a14:m>
+                          <a:endParaRPr lang="it-IT" sz="2400" dirty="0"/>
+                        </a:p>
+                      </a:txBody>
+                      <a:tcPr anchor="ctr">
+                        <a:lnR w="12700" cap="flat" cmpd="sng" algn="ctr">
+                          <a:noFill/>
+                          <a:prstDash val="solid"/>
+                          <a:round/>
+                          <a:headEnd type="none" w="med" len="med"/>
+                          <a:tailEnd type="none" w="med" len="med"/>
+                        </a:lnR>
+                        <a:lnB w="12700" cap="flat" cmpd="sng" algn="ctr">
+                          <a:noFill/>
+                          <a:prstDash val="solid"/>
+                          <a:round/>
+                          <a:headEnd type="none" w="med" len="med"/>
+                          <a:tailEnd type="none" w="med" len="med"/>
+                        </a:lnB>
+                      </a:tcPr>
+                    </a:tc>
+                    <a:extLst>
+                      <a:ext uri="{0D108BD9-81ED-4DB2-BD59-A6C34878D82A}">
+                        <a16:rowId xmlns:a16="http://schemas.microsoft.com/office/drawing/2014/main" val="842738182"/>
+                      </a:ext>
+                    </a:extLst>
+                  </a:tr>
+                </a:tbl>
+              </a:graphicData>
+            </a:graphic>
+          </p:graphicFrame>
+        </mc:Choice>
+        <mc:Fallback>
+          <p:graphicFrame>
+            <p:nvGraphicFramePr>
+              <p:cNvPr id="11" name="Segnaposto contenuto 10">
+                <a:extLst>
+                  <a:ext uri="{FF2B5EF4-FFF2-40B4-BE49-F238E27FC236}">
+                    <a16:creationId xmlns:a16="http://schemas.microsoft.com/office/drawing/2014/main" id="{1073C49C-B456-2C70-0DE1-470F84418F73}"/>
+                  </a:ext>
+                </a:extLst>
+              </p:cNvPr>
+              <p:cNvGraphicFramePr>
+                <a:graphicFrameLocks noGrp="1"/>
+              </p:cNvGraphicFramePr>
+              <p:nvPr>
+                <p:ph idx="1"/>
+                <p:extLst>
+                  <p:ext uri="{D42A27DB-BD31-4B8C-83A1-F6EECF244321}">
+                    <p14:modId xmlns:p14="http://schemas.microsoft.com/office/powerpoint/2010/main" val="430477996"/>
+                  </p:ext>
+                </p:extLst>
+              </p:nvPr>
+            </p:nvGraphicFramePr>
+            <p:xfrm>
+              <a:off x="838200" y="2059186"/>
+              <a:ext cx="10515600" cy="2776728"/>
+            </p:xfrm>
+            <a:graphic>
+              <a:graphicData uri="http://schemas.openxmlformats.org/drawingml/2006/table">
+                <a:tbl>
+                  <a:tblPr firstRow="1" bandRow="1">
+                    <a:tableStyleId>{5940675A-B579-460E-94D1-54222C63F5DA}</a:tableStyleId>
+                  </a:tblPr>
+                  <a:tblGrid>
+                    <a:gridCol w="2103120">
+                      <a:extLst>
+                        <a:ext uri="{9D8B030D-6E8A-4147-A177-3AD203B41FA5}">
+                          <a16:colId xmlns:a16="http://schemas.microsoft.com/office/drawing/2014/main" val="3834650750"/>
+                        </a:ext>
+                      </a:extLst>
+                    </a:gridCol>
+                    <a:gridCol w="1642712">
+                      <a:extLst>
+                        <a:ext uri="{9D8B030D-6E8A-4147-A177-3AD203B41FA5}">
+                          <a16:colId xmlns:a16="http://schemas.microsoft.com/office/drawing/2014/main" val="1666825536"/>
+                        </a:ext>
+                      </a:extLst>
+                    </a:gridCol>
+                    <a:gridCol w="2610852">
+                      <a:extLst>
+                        <a:ext uri="{9D8B030D-6E8A-4147-A177-3AD203B41FA5}">
+                          <a16:colId xmlns:a16="http://schemas.microsoft.com/office/drawing/2014/main" val="1022820918"/>
+                        </a:ext>
+                      </a:extLst>
+                    </a:gridCol>
+                    <a:gridCol w="1906783">
+                      <a:extLst>
+                        <a:ext uri="{9D8B030D-6E8A-4147-A177-3AD203B41FA5}">
+                          <a16:colId xmlns:a16="http://schemas.microsoft.com/office/drawing/2014/main" val="2020566626"/>
+                        </a:ext>
+                      </a:extLst>
+                    </a:gridCol>
+                    <a:gridCol w="2252133">
+                      <a:extLst>
+                        <a:ext uri="{9D8B030D-6E8A-4147-A177-3AD203B41FA5}">
+                          <a16:colId xmlns:a16="http://schemas.microsoft.com/office/drawing/2014/main" val="199116097"/>
+                        </a:ext>
+                      </a:extLst>
+                    </a:gridCol>
+                  </a:tblGrid>
+                  <a:tr h="490728">
+                    <a:tc>
+                      <a:txBody>
+                        <a:bodyPr/>
+                        <a:lstStyle/>
+                        <a:p>
+                          <a:pPr algn="ctr"/>
+                          <a:endParaRPr lang="it-IT" sz="2400" dirty="0"/>
+                        </a:p>
+                      </a:txBody>
+                      <a:tcPr anchor="ctr">
+                        <a:lnL w="12700" cap="flat" cmpd="sng" algn="ctr">
+                          <a:noFill/>
+                          <a:prstDash val="solid"/>
+                          <a:round/>
+                          <a:headEnd type="none" w="med" len="med"/>
+                          <a:tailEnd type="none" w="med" len="med"/>
+                        </a:lnL>
+                        <a:lnR w="28575" cap="flat" cmpd="sng" algn="ctr">
+                          <a:solidFill>
+                            <a:schemeClr val="tx1"/>
+                          </a:solidFill>
+                          <a:prstDash val="solid"/>
+                          <a:round/>
+                          <a:headEnd type="none" w="med" len="med"/>
+                          <a:tailEnd type="none" w="med" len="med"/>
+                        </a:lnR>
+                        <a:lnT w="12700" cap="flat" cmpd="sng" algn="ctr">
+                          <a:noFill/>
+                          <a:prstDash val="solid"/>
+                          <a:round/>
+                          <a:headEnd type="none" w="med" len="med"/>
+                          <a:tailEnd type="none" w="med" len="med"/>
+                        </a:lnT>
+                        <a:lnB w="28575" cap="flat" cmpd="sng" algn="ctr">
+                          <a:solidFill>
+                            <a:schemeClr val="tx1"/>
+                          </a:solidFill>
+                          <a:prstDash val="solid"/>
+                          <a:round/>
+                          <a:headEnd type="none" w="med" len="med"/>
+                          <a:tailEnd type="none" w="med" len="med"/>
+                        </a:lnB>
+                      </a:tcPr>
+                    </a:tc>
+                    <a:tc>
+                      <a:txBody>
+                        <a:bodyPr/>
+                        <a:lstStyle/>
+                        <a:p>
+                          <a:pPr algn="ctr"/>
+                          <a:r>
+                            <a:rPr lang="it-IT" sz="2400" b="1" dirty="0" err="1"/>
+                            <a:t>run</a:t>
+                          </a:r>
+                          <a:endParaRPr lang="it-IT" sz="2400" b="1" dirty="0"/>
+                        </a:p>
+                      </a:txBody>
+                      <a:tcPr anchor="ctr">
+                        <a:lnL w="28575" cap="flat" cmpd="sng" algn="ctr">
+                          <a:solidFill>
+                            <a:schemeClr val="tx1"/>
+                          </a:solidFill>
+                          <a:prstDash val="solid"/>
+                          <a:round/>
+                          <a:headEnd type="none" w="med" len="med"/>
+                          <a:tailEnd type="none" w="med" len="med"/>
+                        </a:lnL>
+                        <a:lnR w="28575" cap="flat" cmpd="sng" algn="ctr">
+                          <a:solidFill>
+                            <a:schemeClr val="tx1"/>
+                          </a:solidFill>
+                          <a:prstDash val="solid"/>
+                          <a:round/>
+                          <a:headEnd type="none" w="med" len="med"/>
+                          <a:tailEnd type="none" w="med" len="med"/>
+                        </a:lnR>
+                        <a:lnT w="12700" cap="flat" cmpd="sng" algn="ctr">
+                          <a:noFill/>
+                          <a:prstDash val="solid"/>
+                          <a:round/>
+                          <a:headEnd type="none" w="med" len="med"/>
+                          <a:tailEnd type="none" w="med" len="med"/>
+                        </a:lnT>
+                        <a:lnB w="28575" cap="flat" cmpd="sng" algn="ctr">
+                          <a:solidFill>
+                            <a:schemeClr val="tx1"/>
+                          </a:solidFill>
+                          <a:prstDash val="solid"/>
+                          <a:round/>
+                          <a:headEnd type="none" w="med" len="med"/>
+                          <a:tailEnd type="none" w="med" len="med"/>
+                        </a:lnB>
+                      </a:tcPr>
+                    </a:tc>
+                    <a:tc>
+                      <a:txBody>
+                        <a:bodyPr/>
+                        <a:lstStyle/>
+                        <a:p>
+                          <a:endParaRPr lang="it-IT"/>
+                        </a:p>
+                      </a:txBody>
+                      <a:tcPr anchor="ctr">
+                        <a:lnL w="28575" cap="flat" cmpd="sng" algn="ctr">
+                          <a:solidFill>
+                            <a:schemeClr val="tx1"/>
+                          </a:solidFill>
+                          <a:prstDash val="solid"/>
+                          <a:round/>
+                          <a:headEnd type="none" w="med" len="med"/>
+                          <a:tailEnd type="none" w="med" len="med"/>
+                        </a:lnL>
+                        <a:lnT w="12700" cap="flat" cmpd="sng" algn="ctr">
+                          <a:noFill/>
+                          <a:prstDash val="solid"/>
+                          <a:round/>
+                          <a:headEnd type="none" w="med" len="med"/>
+                          <a:tailEnd type="none" w="med" len="med"/>
+                        </a:lnT>
+                        <a:lnB w="28575" cap="flat" cmpd="sng" algn="ctr">
+                          <a:solidFill>
+                            <a:schemeClr val="tx1"/>
+                          </a:solidFill>
+                          <a:prstDash val="solid"/>
+                          <a:round/>
+                          <a:headEnd type="none" w="med" len="med"/>
+                          <a:tailEnd type="none" w="med" len="med"/>
+                        </a:lnB>
+                        <a:blipFill>
+                          <a:blip r:embed="rId3"/>
+                          <a:stretch>
+                            <a:fillRect l="-143692" t="-4938" r="-160047" b="-466667"/>
+                          </a:stretch>
+                        </a:blipFill>
+                      </a:tcPr>
+                    </a:tc>
+                    <a:tc>
+                      <a:txBody>
+                        <a:bodyPr/>
+                        <a:lstStyle/>
+                        <a:p>
+                          <a:endParaRPr lang="it-IT"/>
+                        </a:p>
+                      </a:txBody>
+                      <a:tcPr anchor="ctr">
+                        <a:lnT w="12700" cap="flat" cmpd="sng" algn="ctr">
+                          <a:noFill/>
+                          <a:prstDash val="solid"/>
+                          <a:round/>
+                          <a:headEnd type="none" w="med" len="med"/>
+                          <a:tailEnd type="none" w="med" len="med"/>
+                        </a:lnT>
+                        <a:lnB w="28575" cap="flat" cmpd="sng" algn="ctr">
+                          <a:solidFill>
+                            <a:schemeClr val="tx1"/>
+                          </a:solidFill>
+                          <a:prstDash val="solid"/>
+                          <a:round/>
+                          <a:headEnd type="none" w="med" len="med"/>
+                          <a:tailEnd type="none" w="med" len="med"/>
+                        </a:lnB>
+                        <a:blipFill>
+                          <a:blip r:embed="rId3"/>
+                          <a:stretch>
+                            <a:fillRect l="-333227" t="-4938" r="-118850" b="-466667"/>
+                          </a:stretch>
+                        </a:blipFill>
+                      </a:tcPr>
+                    </a:tc>
+                    <a:tc>
+                      <a:txBody>
+                        <a:bodyPr/>
+                        <a:lstStyle/>
+                        <a:p>
+                          <a:endParaRPr lang="it-IT"/>
+                        </a:p>
+                      </a:txBody>
+                      <a:tcPr anchor="ctr">
+                        <a:lnR w="12700" cap="flat" cmpd="sng" algn="ctr">
+                          <a:noFill/>
+                          <a:prstDash val="solid"/>
+                          <a:round/>
+                          <a:headEnd type="none" w="med" len="med"/>
+                          <a:tailEnd type="none" w="med" len="med"/>
+                        </a:lnR>
+                        <a:lnT w="12700" cap="flat" cmpd="sng" algn="ctr">
+                          <a:noFill/>
+                          <a:prstDash val="solid"/>
+                          <a:round/>
+                          <a:headEnd type="none" w="med" len="med"/>
+                          <a:tailEnd type="none" w="med" len="med"/>
+                        </a:lnT>
+                        <a:lnB w="28575" cap="flat" cmpd="sng" algn="ctr">
+                          <a:solidFill>
+                            <a:schemeClr val="tx1"/>
+                          </a:solidFill>
+                          <a:prstDash val="solid"/>
+                          <a:round/>
+                          <a:headEnd type="none" w="med" len="med"/>
+                          <a:tailEnd type="none" w="med" len="med"/>
+                        </a:lnB>
+                        <a:blipFill>
+                          <a:blip r:embed="rId3"/>
+                          <a:stretch>
+                            <a:fillRect l="-366486" t="-4938" r="-541" b="-466667"/>
+                          </a:stretch>
+                        </a:blipFill>
+                      </a:tcPr>
+                    </a:tc>
+                    <a:extLst>
+                      <a:ext uri="{0D108BD9-81ED-4DB2-BD59-A6C34878D82A}">
+                        <a16:rowId xmlns:a16="http://schemas.microsoft.com/office/drawing/2014/main" val="2436405646"/>
+                      </a:ext>
+                    </a:extLst>
+                  </a:tr>
+                  <a:tr h="457200">
+                    <a:tc rowSpan="3">
+                      <a:txBody>
+                        <a:bodyPr/>
+                        <a:lstStyle/>
+                        <a:p>
+                          <a:pPr algn="ctr"/>
+                          <a:r>
+                            <a:rPr lang="it-IT" sz="2400" dirty="0"/>
+                            <a:t>Long </a:t>
+                          </a:r>
+                          <a:r>
+                            <a:rPr lang="it-IT" sz="2400" dirty="0" err="1"/>
+                            <a:t>crystal</a:t>
+                          </a:r>
+                          <a:r>
+                            <a:rPr lang="it-IT" sz="2400" dirty="0"/>
+                            <a:t> 1</a:t>
+                          </a:r>
+                        </a:p>
+                      </a:txBody>
+                      <a:tcPr anchor="ctr">
+                        <a:lnL w="12700" cap="flat" cmpd="sng" algn="ctr">
+                          <a:noFill/>
+                          <a:prstDash val="solid"/>
+                          <a:round/>
+                          <a:headEnd type="none" w="med" len="med"/>
+                          <a:tailEnd type="none" w="med" len="med"/>
+                        </a:lnL>
+                        <a:lnR w="28575" cap="flat" cmpd="sng" algn="ctr">
+                          <a:solidFill>
+                            <a:schemeClr val="tx1"/>
+                          </a:solidFill>
+                          <a:prstDash val="solid"/>
+                          <a:round/>
+                          <a:headEnd type="none" w="med" len="med"/>
+                          <a:tailEnd type="none" w="med" len="med"/>
+                        </a:lnR>
+                        <a:lnT w="28575" cap="flat" cmpd="sng" algn="ctr">
+                          <a:solidFill>
+                            <a:schemeClr val="tx1"/>
+                          </a:solidFill>
+                          <a:prstDash val="solid"/>
+                          <a:round/>
+                          <a:headEnd type="none" w="med" len="med"/>
+                          <a:tailEnd type="none" w="med" len="med"/>
+                        </a:lnT>
+                        <a:lnB w="28575" cap="flat" cmpd="sng" algn="ctr">
+                          <a:solidFill>
+                            <a:schemeClr val="tx1"/>
+                          </a:solidFill>
+                          <a:prstDash val="solid"/>
+                          <a:round/>
+                          <a:headEnd type="none" w="med" len="med"/>
+                          <a:tailEnd type="none" w="med" len="med"/>
+                        </a:lnB>
+                      </a:tcPr>
+                    </a:tc>
+                    <a:tc>
+                      <a:txBody>
+                        <a:bodyPr/>
+                        <a:lstStyle/>
+                        <a:p>
+                          <a:endParaRPr lang="it-IT"/>
+                        </a:p>
+                      </a:txBody>
+                      <a:tcPr anchor="ctr">
+                        <a:lnL w="28575" cap="flat" cmpd="sng" algn="ctr">
+                          <a:solidFill>
+                            <a:schemeClr val="tx1"/>
+                          </a:solidFill>
+                          <a:prstDash val="solid"/>
+                          <a:round/>
+                          <a:headEnd type="none" w="med" len="med"/>
+                          <a:tailEnd type="none" w="med" len="med"/>
+                        </a:lnL>
+                        <a:lnR w="28575" cap="flat" cmpd="sng" algn="ctr">
+                          <a:solidFill>
+                            <a:schemeClr val="tx1"/>
+                          </a:solidFill>
+                          <a:prstDash val="solid"/>
+                          <a:round/>
+                          <a:headEnd type="none" w="med" len="med"/>
+                          <a:tailEnd type="none" w="med" len="med"/>
+                        </a:lnR>
+                        <a:lnT w="28575" cap="flat" cmpd="sng" algn="ctr">
+                          <a:solidFill>
+                            <a:schemeClr val="tx1"/>
+                          </a:solidFill>
+                          <a:prstDash val="solid"/>
+                          <a:round/>
+                          <a:headEnd type="none" w="med" len="med"/>
+                          <a:tailEnd type="none" w="med" len="med"/>
+                        </a:lnT>
+                        <a:blipFill>
+                          <a:blip r:embed="rId3"/>
+                          <a:stretch>
+                            <a:fillRect l="-127778" t="-113333" r="-412222" b="-404000"/>
+                          </a:stretch>
+                        </a:blipFill>
+                      </a:tcPr>
+                    </a:tc>
+                    <a:tc>
+                      <a:txBody>
+                        <a:bodyPr/>
+                        <a:lstStyle/>
+                        <a:p>
+                          <a:endParaRPr lang="it-IT"/>
+                        </a:p>
+                      </a:txBody>
+                      <a:tcPr anchor="ctr">
+                        <a:lnL w="28575" cap="flat" cmpd="sng" algn="ctr">
+                          <a:solidFill>
+                            <a:schemeClr val="tx1"/>
+                          </a:solidFill>
+                          <a:prstDash val="solid"/>
+                          <a:round/>
+                          <a:headEnd type="none" w="med" len="med"/>
+                          <a:tailEnd type="none" w="med" len="med"/>
+                        </a:lnL>
+                        <a:lnT w="28575" cap="flat" cmpd="sng" algn="ctr">
+                          <a:solidFill>
+                            <a:schemeClr val="tx1"/>
+                          </a:solidFill>
+                          <a:prstDash val="solid"/>
+                          <a:round/>
+                          <a:headEnd type="none" w="med" len="med"/>
+                          <a:tailEnd type="none" w="med" len="med"/>
+                        </a:lnT>
+                        <a:blipFill>
+                          <a:blip r:embed="rId3"/>
+                          <a:stretch>
+                            <a:fillRect l="-143692" t="-113333" r="-160047" b="-404000"/>
+                          </a:stretch>
+                        </a:blipFill>
+                      </a:tcPr>
+                    </a:tc>
+                    <a:tc>
+                      <a:txBody>
+                        <a:bodyPr/>
+                        <a:lstStyle/>
+                        <a:p>
+                          <a:endParaRPr lang="it-IT"/>
+                        </a:p>
+                      </a:txBody>
+                      <a:tcPr anchor="ctr">
+                        <a:lnT w="28575" cap="flat" cmpd="sng" algn="ctr">
+                          <a:solidFill>
+                            <a:schemeClr val="tx1"/>
+                          </a:solidFill>
+                          <a:prstDash val="solid"/>
+                          <a:round/>
+                          <a:headEnd type="none" w="med" len="med"/>
+                          <a:tailEnd type="none" w="med" len="med"/>
+                        </a:lnT>
+                        <a:blipFill>
+                          <a:blip r:embed="rId3"/>
+                          <a:stretch>
+                            <a:fillRect l="-333227" t="-113333" r="-118850" b="-404000"/>
+                          </a:stretch>
+                        </a:blipFill>
+                      </a:tcPr>
+                    </a:tc>
+                    <a:tc>
+                      <a:txBody>
+                        <a:bodyPr/>
+                        <a:lstStyle/>
+                        <a:p>
+                          <a:endParaRPr lang="it-IT"/>
+                        </a:p>
+                      </a:txBody>
+                      <a:tcPr anchor="ctr">
+                        <a:lnR w="12700" cap="flat" cmpd="sng" algn="ctr">
+                          <a:noFill/>
+                          <a:prstDash val="solid"/>
+                          <a:round/>
+                          <a:headEnd type="none" w="med" len="med"/>
+                          <a:tailEnd type="none" w="med" len="med"/>
+                        </a:lnR>
+                        <a:lnT w="28575" cap="flat" cmpd="sng" algn="ctr">
+                          <a:solidFill>
+                            <a:schemeClr val="tx1"/>
+                          </a:solidFill>
+                          <a:prstDash val="solid"/>
+                          <a:round/>
+                          <a:headEnd type="none" w="med" len="med"/>
+                          <a:tailEnd type="none" w="med" len="med"/>
+                        </a:lnT>
+                        <a:blipFill>
+                          <a:blip r:embed="rId3"/>
+                          <a:stretch>
+                            <a:fillRect l="-366486" t="-113333" r="-541" b="-404000"/>
+                          </a:stretch>
+                        </a:blipFill>
+                      </a:tcPr>
+                    </a:tc>
+                    <a:extLst>
+                      <a:ext uri="{0D108BD9-81ED-4DB2-BD59-A6C34878D82A}">
+                        <a16:rowId xmlns:a16="http://schemas.microsoft.com/office/drawing/2014/main" val="1529356210"/>
+                      </a:ext>
+                    </a:extLst>
+                  </a:tr>
+                  <a:tr h="457200">
+                    <a:tc vMerge="1">
+                      <a:txBody>
+                        <a:bodyPr/>
+                        <a:lstStyle/>
+                        <a:p>
+                          <a:endParaRPr lang="it-IT" dirty="0"/>
+                        </a:p>
+                      </a:txBody>
+                      <a:tcPr/>
+                    </a:tc>
+                    <a:tc>
+                      <a:txBody>
+                        <a:bodyPr/>
+                        <a:lstStyle/>
+                        <a:p>
+                          <a:endParaRPr lang="it-IT"/>
+                        </a:p>
+                      </a:txBody>
+                      <a:tcPr anchor="ctr">
+                        <a:lnL w="28575" cap="flat" cmpd="sng" algn="ctr">
+                          <a:solidFill>
+                            <a:schemeClr val="tx1"/>
+                          </a:solidFill>
+                          <a:prstDash val="solid"/>
+                          <a:round/>
+                          <a:headEnd type="none" w="med" len="med"/>
+                          <a:tailEnd type="none" w="med" len="med"/>
+                        </a:lnL>
+                        <a:lnR w="28575" cap="flat" cmpd="sng" algn="ctr">
+                          <a:solidFill>
+                            <a:schemeClr val="tx1"/>
+                          </a:solidFill>
+                          <a:prstDash val="solid"/>
+                          <a:round/>
+                          <a:headEnd type="none" w="med" len="med"/>
+                          <a:tailEnd type="none" w="med" len="med"/>
+                        </a:lnR>
+                        <a:blipFill>
+                          <a:blip r:embed="rId3"/>
+                          <a:stretch>
+                            <a:fillRect l="-127778" t="-213333" r="-412222" b="-304000"/>
+                          </a:stretch>
+                        </a:blipFill>
+                      </a:tcPr>
+                    </a:tc>
+                    <a:tc>
+                      <a:txBody>
+                        <a:bodyPr/>
+                        <a:lstStyle/>
+                        <a:p>
+                          <a:endParaRPr lang="it-IT"/>
+                        </a:p>
+                      </a:txBody>
+                      <a:tcPr anchor="ctr">
+                        <a:lnL w="28575" cap="flat" cmpd="sng" algn="ctr">
+                          <a:solidFill>
+                            <a:schemeClr val="tx1"/>
+                          </a:solidFill>
+                          <a:prstDash val="solid"/>
+                          <a:round/>
+                          <a:headEnd type="none" w="med" len="med"/>
+                          <a:tailEnd type="none" w="med" len="med"/>
+                        </a:lnL>
+                        <a:blipFill>
+                          <a:blip r:embed="rId3"/>
+                          <a:stretch>
+                            <a:fillRect l="-143692" t="-213333" r="-160047" b="-304000"/>
+                          </a:stretch>
+                        </a:blipFill>
+                      </a:tcPr>
+                    </a:tc>
+                    <a:tc>
+                      <a:txBody>
+                        <a:bodyPr/>
+                        <a:lstStyle/>
+                        <a:p>
+                          <a:endParaRPr lang="it-IT"/>
+                        </a:p>
+                      </a:txBody>
+                      <a:tcPr anchor="ctr">
+                        <a:blipFill>
+                          <a:blip r:embed="rId3"/>
+                          <a:stretch>
+                            <a:fillRect l="-333227" t="-213333" r="-118850" b="-304000"/>
+                          </a:stretch>
+                        </a:blipFill>
+                      </a:tcPr>
+                    </a:tc>
+                    <a:tc>
+                      <a:txBody>
+                        <a:bodyPr/>
+                        <a:lstStyle/>
+                        <a:p>
+                          <a:endParaRPr lang="it-IT"/>
+                        </a:p>
+                      </a:txBody>
+                      <a:tcPr anchor="ctr">
+                        <a:lnR w="12700" cap="flat" cmpd="sng" algn="ctr">
+                          <a:noFill/>
+                          <a:prstDash val="solid"/>
+                          <a:round/>
+                          <a:headEnd type="none" w="med" len="med"/>
+                          <a:tailEnd type="none" w="med" len="med"/>
+                        </a:lnR>
+                        <a:blipFill>
+                          <a:blip r:embed="rId3"/>
+                          <a:stretch>
+                            <a:fillRect l="-366486" t="-213333" r="-541" b="-304000"/>
+                          </a:stretch>
+                        </a:blipFill>
+                      </a:tcPr>
+                    </a:tc>
+                    <a:extLst>
+                      <a:ext uri="{0D108BD9-81ED-4DB2-BD59-A6C34878D82A}">
+                        <a16:rowId xmlns:a16="http://schemas.microsoft.com/office/drawing/2014/main" val="348010959"/>
+                      </a:ext>
+                    </a:extLst>
+                  </a:tr>
+                  <a:tr h="457200">
+                    <a:tc vMerge="1">
+                      <a:txBody>
+                        <a:bodyPr/>
+                        <a:lstStyle/>
+                        <a:p>
+                          <a:endParaRPr lang="it-IT" dirty="0"/>
+                        </a:p>
+                      </a:txBody>
+                      <a:tcPr/>
+                    </a:tc>
+                    <a:tc>
+                      <a:txBody>
+                        <a:bodyPr/>
+                        <a:lstStyle/>
+                        <a:p>
+                          <a:endParaRPr lang="it-IT"/>
+                        </a:p>
+                      </a:txBody>
+                      <a:tcPr anchor="ctr">
+                        <a:lnL w="28575" cap="flat" cmpd="sng" algn="ctr">
+                          <a:solidFill>
+                            <a:schemeClr val="tx1"/>
+                          </a:solidFill>
+                          <a:prstDash val="solid"/>
+                          <a:round/>
+                          <a:headEnd type="none" w="med" len="med"/>
+                          <a:tailEnd type="none" w="med" len="med"/>
+                        </a:lnL>
+                        <a:lnR w="28575" cap="flat" cmpd="sng" algn="ctr">
+                          <a:solidFill>
+                            <a:schemeClr val="tx1"/>
+                          </a:solidFill>
+                          <a:prstDash val="solid"/>
+                          <a:round/>
+                          <a:headEnd type="none" w="med" len="med"/>
+                          <a:tailEnd type="none" w="med" len="med"/>
+                        </a:lnR>
+                        <a:lnB w="28575" cap="flat" cmpd="sng" algn="ctr">
+                          <a:solidFill>
+                            <a:schemeClr val="tx1"/>
+                          </a:solidFill>
+                          <a:prstDash val="solid"/>
+                          <a:round/>
+                          <a:headEnd type="none" w="med" len="med"/>
+                          <a:tailEnd type="none" w="med" len="med"/>
+                        </a:lnB>
+                        <a:blipFill>
+                          <a:blip r:embed="rId3"/>
+                          <a:stretch>
+                            <a:fillRect l="-127778" t="-309211" r="-412222" b="-200000"/>
+                          </a:stretch>
+                        </a:blipFill>
+                      </a:tcPr>
+                    </a:tc>
+                    <a:tc>
+                      <a:txBody>
+                        <a:bodyPr/>
+                        <a:lstStyle/>
+                        <a:p>
+                          <a:endParaRPr lang="it-IT"/>
+                        </a:p>
+                      </a:txBody>
+                      <a:tcPr anchor="ctr">
+                        <a:lnL w="28575" cap="flat" cmpd="sng" algn="ctr">
+                          <a:solidFill>
+                            <a:schemeClr val="tx1"/>
+                          </a:solidFill>
+                          <a:prstDash val="solid"/>
+                          <a:round/>
+                          <a:headEnd type="none" w="med" len="med"/>
+                          <a:tailEnd type="none" w="med" len="med"/>
+                        </a:lnL>
+                        <a:lnB w="28575" cap="flat" cmpd="sng" algn="ctr">
+                          <a:solidFill>
+                            <a:schemeClr val="tx1"/>
+                          </a:solidFill>
+                          <a:prstDash val="solid"/>
+                          <a:round/>
+                          <a:headEnd type="none" w="med" len="med"/>
+                          <a:tailEnd type="none" w="med" len="med"/>
+                        </a:lnB>
+                        <a:blipFill>
+                          <a:blip r:embed="rId3"/>
+                          <a:stretch>
+                            <a:fillRect l="-143692" t="-309211" r="-160047" b="-200000"/>
+                          </a:stretch>
+                        </a:blipFill>
+                      </a:tcPr>
+                    </a:tc>
+                    <a:tc>
+                      <a:txBody>
+                        <a:bodyPr/>
+                        <a:lstStyle/>
+                        <a:p>
+                          <a:endParaRPr lang="it-IT"/>
+                        </a:p>
+                      </a:txBody>
+                      <a:tcPr anchor="ctr">
+                        <a:lnB w="28575" cap="flat" cmpd="sng" algn="ctr">
+                          <a:solidFill>
+                            <a:schemeClr val="tx1"/>
+                          </a:solidFill>
+                          <a:prstDash val="solid"/>
+                          <a:round/>
+                          <a:headEnd type="none" w="med" len="med"/>
+                          <a:tailEnd type="none" w="med" len="med"/>
+                        </a:lnB>
+                        <a:blipFill>
+                          <a:blip r:embed="rId3"/>
+                          <a:stretch>
+                            <a:fillRect l="-333227" t="-309211" r="-118850" b="-200000"/>
+                          </a:stretch>
+                        </a:blipFill>
+                      </a:tcPr>
+                    </a:tc>
+                    <a:tc>
+                      <a:txBody>
+                        <a:bodyPr/>
+                        <a:lstStyle/>
+                        <a:p>
+                          <a:endParaRPr lang="it-IT"/>
+                        </a:p>
+                      </a:txBody>
+                      <a:tcPr anchor="ctr">
+                        <a:lnR w="12700" cap="flat" cmpd="sng" algn="ctr">
+                          <a:noFill/>
+                          <a:prstDash val="solid"/>
+                          <a:round/>
+                          <a:headEnd type="none" w="med" len="med"/>
+                          <a:tailEnd type="none" w="med" len="med"/>
+                        </a:lnR>
+                        <a:lnB w="28575" cap="flat" cmpd="sng" algn="ctr">
+                          <a:solidFill>
+                            <a:schemeClr val="tx1"/>
+                          </a:solidFill>
+                          <a:prstDash val="solid"/>
+                          <a:round/>
+                          <a:headEnd type="none" w="med" len="med"/>
+                          <a:tailEnd type="none" w="med" len="med"/>
+                        </a:lnB>
+                        <a:blipFill>
+                          <a:blip r:embed="rId3"/>
+                          <a:stretch>
+                            <a:fillRect l="-366486" t="-309211" r="-541" b="-200000"/>
+                          </a:stretch>
+                        </a:blipFill>
+                      </a:tcPr>
+                    </a:tc>
+                    <a:extLst>
+                      <a:ext uri="{0D108BD9-81ED-4DB2-BD59-A6C34878D82A}">
+                        <a16:rowId xmlns:a16="http://schemas.microsoft.com/office/drawing/2014/main" val="3053670846"/>
+                      </a:ext>
+                    </a:extLst>
+                  </a:tr>
+                  <a:tr h="457200">
+                    <a:tc rowSpan="2">
+                      <a:txBody>
+                        <a:bodyPr/>
+                        <a:lstStyle/>
+                        <a:p>
+                          <a:pPr algn="ctr"/>
+                          <a:r>
+                            <a:rPr lang="it-IT" sz="2400" dirty="0"/>
+                            <a:t>Long </a:t>
+                          </a:r>
+                          <a:r>
+                            <a:rPr lang="it-IT" sz="2400" dirty="0" err="1"/>
+                            <a:t>crystal</a:t>
+                          </a:r>
+                          <a:r>
+                            <a:rPr lang="it-IT" sz="2400" dirty="0"/>
+                            <a:t> 2</a:t>
+                          </a:r>
+                        </a:p>
+                      </a:txBody>
+                      <a:tcPr anchor="ctr">
+                        <a:lnL w="12700" cap="flat" cmpd="sng" algn="ctr">
+                          <a:noFill/>
+                          <a:prstDash val="solid"/>
+                          <a:round/>
+                          <a:headEnd type="none" w="med" len="med"/>
+                          <a:tailEnd type="none" w="med" len="med"/>
+                        </a:lnL>
+                        <a:lnR w="28575" cap="flat" cmpd="sng" algn="ctr">
+                          <a:solidFill>
+                            <a:schemeClr val="tx1"/>
+                          </a:solidFill>
+                          <a:prstDash val="solid"/>
+                          <a:round/>
+                          <a:headEnd type="none" w="med" len="med"/>
+                          <a:tailEnd type="none" w="med" len="med"/>
+                        </a:lnR>
+                        <a:lnT w="28575" cap="flat" cmpd="sng" algn="ctr">
+                          <a:solidFill>
+                            <a:schemeClr val="tx1"/>
+                          </a:solidFill>
+                          <a:prstDash val="solid"/>
+                          <a:round/>
+                          <a:headEnd type="none" w="med" len="med"/>
+                          <a:tailEnd type="none" w="med" len="med"/>
+                        </a:lnT>
+                        <a:lnB w="12700" cap="flat" cmpd="sng" algn="ctr">
+                          <a:noFill/>
+                          <a:prstDash val="solid"/>
+                          <a:round/>
+                          <a:headEnd type="none" w="med" len="med"/>
+                          <a:tailEnd type="none" w="med" len="med"/>
+                        </a:lnB>
+                      </a:tcPr>
+                    </a:tc>
+                    <a:tc>
+                      <a:txBody>
+                        <a:bodyPr/>
+                        <a:lstStyle/>
+                        <a:p>
+                          <a:endParaRPr lang="it-IT"/>
+                        </a:p>
+                      </a:txBody>
+                      <a:tcPr anchor="ctr">
+                        <a:lnL w="28575" cap="flat" cmpd="sng" algn="ctr">
+                          <a:solidFill>
+                            <a:schemeClr val="tx1"/>
+                          </a:solidFill>
+                          <a:prstDash val="solid"/>
+                          <a:round/>
+                          <a:headEnd type="none" w="med" len="med"/>
+                          <a:tailEnd type="none" w="med" len="med"/>
+                        </a:lnL>
+                        <a:lnR w="28575" cap="flat" cmpd="sng" algn="ctr">
+                          <a:solidFill>
+                            <a:schemeClr val="tx1"/>
+                          </a:solidFill>
+                          <a:prstDash val="solid"/>
+                          <a:round/>
+                          <a:headEnd type="none" w="med" len="med"/>
+                          <a:tailEnd type="none" w="med" len="med"/>
+                        </a:lnR>
+                        <a:lnT w="28575" cap="flat" cmpd="sng" algn="ctr">
+                          <a:solidFill>
+                            <a:schemeClr val="tx1"/>
+                          </a:solidFill>
+                          <a:prstDash val="solid"/>
+                          <a:round/>
+                          <a:headEnd type="none" w="med" len="med"/>
+                          <a:tailEnd type="none" w="med" len="med"/>
+                        </a:lnT>
+                        <a:blipFill>
+                          <a:blip r:embed="rId3"/>
+                          <a:stretch>
+                            <a:fillRect l="-127778" t="-414667" r="-412222" b="-102667"/>
+                          </a:stretch>
+                        </a:blipFill>
+                      </a:tcPr>
+                    </a:tc>
+                    <a:tc>
+                      <a:txBody>
+                        <a:bodyPr/>
+                        <a:lstStyle/>
+                        <a:p>
+                          <a:endParaRPr lang="it-IT"/>
+                        </a:p>
+                      </a:txBody>
+                      <a:tcPr anchor="ctr">
+                        <a:lnL w="28575" cap="flat" cmpd="sng" algn="ctr">
+                          <a:solidFill>
+                            <a:schemeClr val="tx1"/>
+                          </a:solidFill>
+                          <a:prstDash val="solid"/>
+                          <a:round/>
+                          <a:headEnd type="none" w="med" len="med"/>
+                          <a:tailEnd type="none" w="med" len="med"/>
+                        </a:lnL>
+                        <a:lnT w="28575" cap="flat" cmpd="sng" algn="ctr">
+                          <a:solidFill>
+                            <a:schemeClr val="tx1"/>
+                          </a:solidFill>
+                          <a:prstDash val="solid"/>
+                          <a:round/>
+                          <a:headEnd type="none" w="med" len="med"/>
+                          <a:tailEnd type="none" w="med" len="med"/>
+                        </a:lnT>
+                        <a:blipFill>
+                          <a:blip r:embed="rId3"/>
+                          <a:stretch>
+                            <a:fillRect l="-143692" t="-414667" r="-160047" b="-102667"/>
+                          </a:stretch>
+                        </a:blipFill>
+                      </a:tcPr>
+                    </a:tc>
+                    <a:tc>
+                      <a:txBody>
+                        <a:bodyPr/>
+                        <a:lstStyle/>
+                        <a:p>
+                          <a:endParaRPr lang="it-IT"/>
+                        </a:p>
+                      </a:txBody>
+                      <a:tcPr anchor="ctr">
+                        <a:lnT w="28575" cap="flat" cmpd="sng" algn="ctr">
+                          <a:solidFill>
+                            <a:schemeClr val="tx1"/>
+                          </a:solidFill>
+                          <a:prstDash val="solid"/>
+                          <a:round/>
+                          <a:headEnd type="none" w="med" len="med"/>
+                          <a:tailEnd type="none" w="med" len="med"/>
+                        </a:lnT>
+                        <a:blipFill>
+                          <a:blip r:embed="rId3"/>
+                          <a:stretch>
+                            <a:fillRect l="-333227" t="-414667" r="-118850" b="-102667"/>
+                          </a:stretch>
+                        </a:blipFill>
+                      </a:tcPr>
+                    </a:tc>
+                    <a:tc>
+                      <a:txBody>
+                        <a:bodyPr/>
+                        <a:lstStyle/>
+                        <a:p>
+                          <a:endParaRPr lang="it-IT"/>
+                        </a:p>
+                      </a:txBody>
+                      <a:tcPr anchor="ctr">
+                        <a:lnR w="12700" cap="flat" cmpd="sng" algn="ctr">
+                          <a:noFill/>
+                          <a:prstDash val="solid"/>
+                          <a:round/>
+                          <a:headEnd type="none" w="med" len="med"/>
+                          <a:tailEnd type="none" w="med" len="med"/>
+                        </a:lnR>
+                        <a:lnT w="28575" cap="flat" cmpd="sng" algn="ctr">
+                          <a:solidFill>
+                            <a:schemeClr val="tx1"/>
+                          </a:solidFill>
+                          <a:prstDash val="solid"/>
+                          <a:round/>
+                          <a:headEnd type="none" w="med" len="med"/>
+                          <a:tailEnd type="none" w="med" len="med"/>
+                        </a:lnT>
+                        <a:blipFill>
+                          <a:blip r:embed="rId3"/>
+                          <a:stretch>
+                            <a:fillRect l="-366486" t="-414667" r="-541" b="-102667"/>
+                          </a:stretch>
+                        </a:blipFill>
+                      </a:tcPr>
+                    </a:tc>
+                    <a:extLst>
+                      <a:ext uri="{0D108BD9-81ED-4DB2-BD59-A6C34878D82A}">
+                        <a16:rowId xmlns:a16="http://schemas.microsoft.com/office/drawing/2014/main" val="3544524089"/>
+                      </a:ext>
+                    </a:extLst>
+                  </a:tr>
+                  <a:tr h="457200">
+                    <a:tc vMerge="1">
+                      <a:txBody>
+                        <a:bodyPr/>
+                        <a:lstStyle/>
+                        <a:p>
+                          <a:endParaRPr lang="it-IT" dirty="0"/>
+                        </a:p>
+                      </a:txBody>
+                      <a:tcPr/>
+                    </a:tc>
+                    <a:tc>
+                      <a:txBody>
+                        <a:bodyPr/>
+                        <a:lstStyle/>
+                        <a:p>
+                          <a:endParaRPr lang="it-IT"/>
+                        </a:p>
+                      </a:txBody>
+                      <a:tcPr anchor="ctr">
+                        <a:lnL w="28575" cap="flat" cmpd="sng" algn="ctr">
+                          <a:solidFill>
+                            <a:schemeClr val="tx1"/>
+                          </a:solidFill>
+                          <a:prstDash val="solid"/>
+                          <a:round/>
+                          <a:headEnd type="none" w="med" len="med"/>
+                          <a:tailEnd type="none" w="med" len="med"/>
+                        </a:lnL>
+                        <a:lnR w="28575" cap="flat" cmpd="sng" algn="ctr">
+                          <a:solidFill>
+                            <a:schemeClr val="tx1"/>
+                          </a:solidFill>
+                          <a:prstDash val="solid"/>
+                          <a:round/>
+                          <a:headEnd type="none" w="med" len="med"/>
+                          <a:tailEnd type="none" w="med" len="med"/>
+                        </a:lnR>
+                        <a:lnB w="12700" cap="flat" cmpd="sng" algn="ctr">
+                          <a:noFill/>
+                          <a:prstDash val="solid"/>
+                          <a:round/>
+                          <a:headEnd type="none" w="med" len="med"/>
+                          <a:tailEnd type="none" w="med" len="med"/>
+                        </a:lnB>
+                        <a:blipFill>
+                          <a:blip r:embed="rId3"/>
+                          <a:stretch>
+                            <a:fillRect l="-127778" t="-514667" r="-412222" b="-2667"/>
+                          </a:stretch>
+                        </a:blipFill>
+                      </a:tcPr>
+                    </a:tc>
+                    <a:tc>
+                      <a:txBody>
+                        <a:bodyPr/>
+                        <a:lstStyle/>
+                        <a:p>
+                          <a:endParaRPr lang="it-IT"/>
+                        </a:p>
+                      </a:txBody>
+                      <a:tcPr anchor="ctr">
+                        <a:lnL w="28575" cap="flat" cmpd="sng" algn="ctr">
+                          <a:solidFill>
+                            <a:schemeClr val="tx1"/>
+                          </a:solidFill>
+                          <a:prstDash val="solid"/>
+                          <a:round/>
+                          <a:headEnd type="none" w="med" len="med"/>
+                          <a:tailEnd type="none" w="med" len="med"/>
+                        </a:lnL>
+                        <a:lnB w="12700" cap="flat" cmpd="sng" algn="ctr">
+                          <a:noFill/>
+                          <a:prstDash val="solid"/>
+                          <a:round/>
+                          <a:headEnd type="none" w="med" len="med"/>
+                          <a:tailEnd type="none" w="med" len="med"/>
+                        </a:lnB>
+                        <a:blipFill>
+                          <a:blip r:embed="rId3"/>
+                          <a:stretch>
+                            <a:fillRect l="-143692" t="-514667" r="-160047" b="-2667"/>
+                          </a:stretch>
+                        </a:blipFill>
+                      </a:tcPr>
+                    </a:tc>
+                    <a:tc>
+                      <a:txBody>
+                        <a:bodyPr/>
+                        <a:lstStyle/>
+                        <a:p>
+                          <a:endParaRPr lang="it-IT"/>
+                        </a:p>
+                      </a:txBody>
+                      <a:tcPr anchor="ctr">
+                        <a:lnB w="12700" cap="flat" cmpd="sng" algn="ctr">
+                          <a:noFill/>
+                          <a:prstDash val="solid"/>
+                          <a:round/>
+                          <a:headEnd type="none" w="med" len="med"/>
+                          <a:tailEnd type="none" w="med" len="med"/>
+                        </a:lnB>
+                        <a:blipFill>
+                          <a:blip r:embed="rId3"/>
+                          <a:stretch>
+                            <a:fillRect l="-333227" t="-514667" r="-118850" b="-2667"/>
+                          </a:stretch>
+                        </a:blipFill>
+                      </a:tcPr>
+                    </a:tc>
+                    <a:tc>
+                      <a:txBody>
+                        <a:bodyPr/>
+                        <a:lstStyle/>
+                        <a:p>
+                          <a:endParaRPr lang="it-IT"/>
+                        </a:p>
+                      </a:txBody>
+                      <a:tcPr anchor="ctr">
+                        <a:lnR w="12700" cap="flat" cmpd="sng" algn="ctr">
+                          <a:noFill/>
+                          <a:prstDash val="solid"/>
+                          <a:round/>
+                          <a:headEnd type="none" w="med" len="med"/>
+                          <a:tailEnd type="none" w="med" len="med"/>
+                        </a:lnR>
+                        <a:lnB w="12700" cap="flat" cmpd="sng" algn="ctr">
+                          <a:noFill/>
+                          <a:prstDash val="solid"/>
+                          <a:round/>
+                          <a:headEnd type="none" w="med" len="med"/>
+                          <a:tailEnd type="none" w="med" len="med"/>
+                        </a:lnB>
+                        <a:blipFill>
+                          <a:blip r:embed="rId3"/>
+                          <a:stretch>
+                            <a:fillRect l="-366486" t="-514667" r="-541" b="-2667"/>
+                          </a:stretch>
+                        </a:blipFill>
+                      </a:tcPr>
+                    </a:tc>
+                    <a:extLst>
+                      <a:ext uri="{0D108BD9-81ED-4DB2-BD59-A6C34878D82A}">
+                        <a16:rowId xmlns:a16="http://schemas.microsoft.com/office/drawing/2014/main" val="842738182"/>
+                      </a:ext>
+                    </a:extLst>
+                  </a:tr>
+                </a:tbl>
+              </a:graphicData>
+            </a:graphic>
+          </p:graphicFrame>
+        </mc:Fallback>
+      </mc:AlternateContent>
+      <p:sp>
+        <p:nvSpPr>
+          <p:cNvPr id="3" name="CasellaDiTesto 2">
+            <a:extLst>
+              <a:ext uri="{FF2B5EF4-FFF2-40B4-BE49-F238E27FC236}">
+                <a16:creationId xmlns:a16="http://schemas.microsoft.com/office/drawing/2014/main" id="{2B32705D-8552-3530-4E06-5003A605D7F5}"/>
+              </a:ext>
+            </a:extLst>
+          </p:cNvPr>
+          <p:cNvSpPr txBox="1"/>
+          <p:nvPr/>
+        </p:nvSpPr>
+        <p:spPr>
+          <a:xfrm>
+            <a:off x="696000" y="5210690"/>
+            <a:ext cx="10800000" cy="461665"/>
+          </a:xfrm>
+          <a:prstGeom prst="rect">
+            <a:avLst/>
+          </a:prstGeom>
+          <a:noFill/>
+        </p:spPr>
+        <p:txBody>
+          <a:bodyPr wrap="square" rtlCol="0">
+            <a:spAutoFit/>
+          </a:bodyPr>
+          <a:lstStyle/>
+          <a:p>
+            <a:pPr algn="ctr"/>
+            <a:r>
+              <a:rPr lang="it-IT" sz="2400" i="1" u="sng" dirty="0" err="1"/>
+              <a:t>Consistent</a:t>
+            </a:r>
+            <a:r>
+              <a:rPr lang="it-IT" sz="2400" i="1" u="sng" dirty="0"/>
+              <a:t> </a:t>
+            </a:r>
+            <a:r>
+              <a:rPr lang="it-IT" sz="2400" i="1" u="sng" dirty="0" err="1"/>
+              <a:t>across</a:t>
+            </a:r>
+            <a:r>
+              <a:rPr lang="it-IT" sz="2400" i="1" u="sng" dirty="0"/>
+              <a:t> </a:t>
+            </a:r>
+            <a:r>
+              <a:rPr lang="it-IT" sz="2400" i="1" u="sng" dirty="0" err="1"/>
+              <a:t>different</a:t>
+            </a:r>
+            <a:r>
+              <a:rPr lang="it-IT" sz="2400" i="1" u="sng" dirty="0"/>
+              <a:t> </a:t>
+            </a:r>
+            <a:r>
+              <a:rPr lang="it-IT" sz="2400" i="1" u="sng" dirty="0" err="1"/>
+              <a:t>runs</a:t>
+            </a:r>
+            <a:r>
+              <a:rPr lang="it-IT" sz="2400" i="1" u="sng" dirty="0"/>
+              <a:t> for the </a:t>
+            </a:r>
+            <a:r>
+              <a:rPr lang="it-IT" sz="2400" i="1" u="sng" dirty="0" err="1"/>
+              <a:t>same</a:t>
+            </a:r>
+            <a:r>
+              <a:rPr lang="it-IT" sz="2400" i="1" u="sng" dirty="0"/>
+              <a:t> </a:t>
+            </a:r>
+            <a:r>
+              <a:rPr lang="it-IT" sz="2400" i="1" u="sng" dirty="0" err="1"/>
+              <a:t>crytsal</a:t>
+            </a:r>
+            <a:endParaRPr lang="it-IT" sz="2400" i="1" u="sng" dirty="0"/>
+          </a:p>
+        </p:txBody>
+      </p:sp>
     </p:spTree>
     <p:extLst>
       <p:ext uri="{BB962C8B-B14F-4D97-AF65-F5344CB8AC3E}">
-        <p14:creationId xmlns:p14="http://schemas.microsoft.com/office/powerpoint/2010/main" val="3483749309"/>
+        <p14:creationId xmlns:p14="http://schemas.microsoft.com/office/powerpoint/2010/main" val="2360650049"/>
       </p:ext>
     </p:extLst>
   </p:cSld>
@@ -18546,7 +23266,7 @@
 </p:sld>
 </file>
 
-<file path=ppt/slides/slide20.xml><?xml version="1.0" encoding="utf-8"?>
+<file path=ppt/slides/slide22.xml><?xml version="1.0" encoding="utf-8"?>
 <p:sld xmlns:a="http://schemas.openxmlformats.org/drawingml/2006/main" xmlns:r="http://schemas.openxmlformats.org/officeDocument/2006/relationships" xmlns:p="http://schemas.openxmlformats.org/presentationml/2006/main">
   <p:cSld>
     <p:spTree>
@@ -18720,7 +23440,7 @@
                   <a:srgbClr val="002060"/>
                 </a:solidFill>
               </a:rPr>
-              <a:t>20</a:t>
+              <a:t>22</a:t>
             </a:fld>
             <a:endParaRPr lang="it-IT" sz="1500" b="1" dirty="0">
               <a:solidFill>
@@ -18837,8 +23557,8 @@
           </a:p>
         </p:txBody>
       </p:sp>
-      <mc:AlternateContent xmlns:mc="http://schemas.openxmlformats.org/markup-compatibility/2006" xmlns:a14="http://schemas.microsoft.com/office/drawing/2010/main">
-        <mc:Choice Requires="a14">
+      <mc:AlternateContent xmlns:mc="http://schemas.openxmlformats.org/markup-compatibility/2006">
+        <mc:Choice xmlns:a14="http://schemas.microsoft.com/office/drawing/2010/main" Requires="a14">
           <p:graphicFrame>
             <p:nvGraphicFramePr>
               <p:cNvPr id="11" name="Segnaposto contenuto 10">
@@ -18855,7 +23575,7 @@
                 <p:ph idx="1"/>
                 <p:extLst>
                   <p:ext uri="{D42A27DB-BD31-4B8C-83A1-F6EECF244321}">
-                    <p14:modId xmlns:p14="http://schemas.microsoft.com/office/powerpoint/2010/main" val="3886627778"/>
+                    <p14:modId xmlns:p14="http://schemas.microsoft.com/office/powerpoint/2010/main" val="1712724804"/>
                   </p:ext>
                 </p:extLst>
               </p:nvPr>
@@ -19290,7 +24010,13 @@
                                   <a:rPr lang="it-IT" sz="2400" b="0" i="1" smtClean="0">
                                     <a:latin typeface="Cambria Math" panose="02040503050406030204" pitchFamily="18" charset="0"/>
                                   </a:rPr>
-                                  <m:t>3.64 </m:t>
+                                  <m:t>3.50</m:t>
+                                </m:r>
+                                <m:r>
+                                  <a:rPr lang="it-IT" sz="2400" b="0" i="1" smtClean="0">
+                                    <a:latin typeface="Cambria Math" panose="02040503050406030204" pitchFamily="18" charset="0"/>
+                                  </a:rPr>
+                                  <m:t> </m:t>
                                 </m:r>
                                 <m:r>
                                   <a:rPr lang="it-IT" sz="2400" b="0" i="1" smtClean="0">
@@ -19374,7 +24100,13 @@
                                   <a:rPr lang="it-IT" sz="2400" b="0" i="1" smtClean="0">
                                     <a:latin typeface="Cambria Math" panose="02040503050406030204" pitchFamily="18" charset="0"/>
                                   </a:rPr>
-                                  <m:t>6039 </m:t>
+                                  <m:t>6033</m:t>
+                                </m:r>
+                                <m:r>
+                                  <a:rPr lang="it-IT" sz="2400" b="0" i="1" smtClean="0">
+                                    <a:latin typeface="Cambria Math" panose="02040503050406030204" pitchFamily="18" charset="0"/>
+                                  </a:rPr>
+                                  <m:t> </m:t>
                                 </m:r>
                                 <m:r>
                                   <a:rPr lang="it-IT" sz="2400" b="0" i="1" smtClean="0">
@@ -19854,7 +24586,13 @@
                                   <a:rPr lang="it-IT" sz="2400" b="0" i="1" smtClean="0">
                                     <a:latin typeface="Cambria Math" panose="02040503050406030204" pitchFamily="18" charset="0"/>
                                   </a:rPr>
-                                  <m:t>2.89 </m:t>
+                                  <m:t>2.90</m:t>
+                                </m:r>
+                                <m:r>
+                                  <a:rPr lang="it-IT" sz="2400" b="0" i="1" smtClean="0">
+                                    <a:latin typeface="Cambria Math" panose="02040503050406030204" pitchFamily="18" charset="0"/>
+                                  </a:rPr>
+                                  <m:t> </m:t>
                                 </m:r>
                                 <m:r>
                                   <a:rPr lang="it-IT" sz="2400" b="0" i="1" smtClean="0">
@@ -19952,7 +24690,13 @@
                                   <a:rPr lang="it-IT" sz="2400" b="0" i="1" smtClean="0">
                                     <a:latin typeface="Cambria Math" panose="02040503050406030204" pitchFamily="18" charset="0"/>
                                   </a:rPr>
-                                  <m:t>6128 </m:t>
+                                  <m:t>6124</m:t>
+                                </m:r>
+                                <m:r>
+                                  <a:rPr lang="it-IT" sz="2400" b="0" i="1" smtClean="0">
+                                    <a:latin typeface="Cambria Math" panose="02040503050406030204" pitchFamily="18" charset="0"/>
+                                  </a:rPr>
+                                  <m:t> </m:t>
                                 </m:r>
                                 <m:r>
                                   <a:rPr lang="it-IT" sz="2400" b="0" i="1" smtClean="0">
@@ -20085,10 +24829,9 @@
                         <a:p>
                           <a:pPr algn="ctr"/>
                           <a:r>
-                            <a:rPr lang="it-IT" sz="2400"/>
+                            <a:rPr lang="it-IT" sz="2400" dirty="0"/>
                             <a:t>Run 8656</a:t>
                           </a:r>
-                          <a:endParaRPr lang="it-IT" sz="2400" dirty="0"/>
                         </a:p>
                       </a:txBody>
                       <a:tcPr anchor="ctr">
@@ -20218,7 +24961,7 @@
             </a:graphic>
           </p:graphicFrame>
         </mc:Choice>
-        <mc:Fallback xmlns="">
+        <mc:Fallback>
           <p:graphicFrame>
             <p:nvGraphicFramePr>
               <p:cNvPr id="11" name="Segnaposto contenuto 10">
@@ -20235,7 +24978,7 @@
                 <p:ph idx="1"/>
                 <p:extLst>
                   <p:ext uri="{D42A27DB-BD31-4B8C-83A1-F6EECF244321}">
-                    <p14:modId xmlns:p14="http://schemas.microsoft.com/office/powerpoint/2010/main" val="3886627778"/>
+                    <p14:modId xmlns:p14="http://schemas.microsoft.com/office/powerpoint/2010/main" val="1712724804"/>
                   </p:ext>
                 </p:extLst>
               </p:nvPr>
@@ -20773,7 +25516,6 @@
                         <a:bodyPr/>
                         <a:lstStyle/>
                         <a:p>
-                          <a:pPr/>
                           <a:endParaRPr/>
                         </a:p>
                       </a:txBody>
@@ -20794,7 +25536,6 @@
                         <a:bodyPr/>
                         <a:lstStyle/>
                         <a:p>
-                          <a:pPr/>
                           <a:endParaRPr/>
                         </a:p>
                       </a:txBody>
@@ -20884,7 +25625,6 @@
                         <a:bodyPr/>
                         <a:lstStyle/>
                         <a:p>
-                          <a:pPr/>
                           <a:endParaRPr dirty="0"/>
                         </a:p>
                       </a:txBody>
@@ -20914,7 +25654,6 @@
                         <a:bodyPr/>
                         <a:lstStyle/>
                         <a:p>
-                          <a:pPr/>
                           <a:endParaRPr dirty="0"/>
                         </a:p>
                       </a:txBody>
@@ -21195,10 +25934,9 @@
                         <a:p>
                           <a:pPr algn="ctr"/>
                           <a:r>
-                            <a:rPr lang="it-IT" sz="2400"/>
+                            <a:rPr lang="it-IT" sz="2400" dirty="0"/>
                             <a:t>Run 8656</a:t>
                           </a:r>
-                          <a:endParaRPr lang="it-IT" sz="2400" dirty="0"/>
                         </a:p>
                       </a:txBody>
                       <a:tcPr anchor="ctr">
@@ -21234,7 +25972,6 @@
                         <a:bodyPr/>
                         <a:lstStyle/>
                         <a:p>
-                          <a:pPr/>
                           <a:endParaRPr dirty="0"/>
                         </a:p>
                       </a:txBody>
@@ -21343,7 +26080,7 @@
 </p:sld>
 </file>
 
-<file path=ppt/slides/slide21.xml><?xml version="1.0" encoding="utf-8"?>
+<file path=ppt/slides/slide23.xml><?xml version="1.0" encoding="utf-8"?>
 <p:sld xmlns:a="http://schemas.openxmlformats.org/drawingml/2006/main" xmlns:r="http://schemas.openxmlformats.org/officeDocument/2006/relationships" xmlns:p="http://schemas.openxmlformats.org/presentationml/2006/main">
   <p:cSld>
     <p:spTree>
@@ -21517,7 +26254,7 @@
                   <a:srgbClr val="002060"/>
                 </a:solidFill>
               </a:rPr>
-              <a:t>21</a:t>
+              <a:t>23</a:t>
             </a:fld>
             <a:endParaRPr lang="it-IT" sz="1500" b="1" dirty="0">
               <a:solidFill>
@@ -21647,341 +26384,7 @@
 </p:sld>
 </file>
 
-<file path=ppt/slides/slide22.xml><?xml version="1.0" encoding="utf-8"?>
-<p:sld xmlns:a="http://schemas.openxmlformats.org/drawingml/2006/main" xmlns:r="http://schemas.openxmlformats.org/officeDocument/2006/relationships" xmlns:p="http://schemas.openxmlformats.org/presentationml/2006/main">
-  <p:cSld>
-    <p:spTree>
-      <p:nvGrpSpPr>
-        <p:cNvPr id="1" name="">
-          <a:extLst>
-            <a:ext uri="{FF2B5EF4-FFF2-40B4-BE49-F238E27FC236}">
-              <a16:creationId xmlns:a16="http://schemas.microsoft.com/office/drawing/2014/main" id="{29C1A478-2C97-10B4-34B5-10A734949A4E}"/>
-            </a:ext>
-          </a:extLst>
-        </p:cNvPr>
-        <p:cNvGrpSpPr/>
-        <p:nvPr/>
-      </p:nvGrpSpPr>
-      <p:grpSpPr>
-        <a:xfrm>
-          <a:off x="0" y="0"/>
-          <a:ext cx="0" cy="0"/>
-          <a:chOff x="0" y="0"/>
-          <a:chExt cx="0" cy="0"/>
-        </a:xfrm>
-      </p:grpSpPr>
-      <p:sp>
-        <p:nvSpPr>
-          <p:cNvPr id="2" name="Titolo 1">
-            <a:extLst>
-              <a:ext uri="{FF2B5EF4-FFF2-40B4-BE49-F238E27FC236}">
-                <a16:creationId xmlns:a16="http://schemas.microsoft.com/office/drawing/2014/main" id="{A0AC2323-4074-7D2D-42E4-448B5D17288B}"/>
-              </a:ext>
-            </a:extLst>
-          </p:cNvPr>
-          <p:cNvSpPr>
-            <a:spLocks noGrp="1"/>
-          </p:cNvSpPr>
-          <p:nvPr>
-            <p:ph type="title"/>
-          </p:nvPr>
-        </p:nvSpPr>
-        <p:spPr>
-          <a:xfrm>
-            <a:off x="38100" y="69651"/>
-            <a:ext cx="12114000" cy="1153094"/>
-          </a:xfrm>
-          <a:prstGeom prst="roundRect">
-            <a:avLst>
-              <a:gd name="adj" fmla="val 36459"/>
-            </a:avLst>
-          </a:prstGeom>
-          <a:noFill/>
-        </p:spPr>
-        <p:txBody>
-          <a:bodyPr>
-            <a:normAutofit/>
-          </a:bodyPr>
-          <a:lstStyle/>
-          <a:p>
-            <a:r>
-              <a:rPr lang="it-IT" b="1" dirty="0">
-                <a:solidFill>
-                  <a:srgbClr val="002060"/>
-                </a:solidFill>
-              </a:rPr>
-              <a:t>	BACKUP SLIDES: SCHEMATIC LAYOUT 1</a:t>
-            </a:r>
-          </a:p>
-        </p:txBody>
-      </p:sp>
-      <p:sp>
-        <p:nvSpPr>
-          <p:cNvPr id="4" name="Segnaposto data 3">
-            <a:extLst>
-              <a:ext uri="{FF2B5EF4-FFF2-40B4-BE49-F238E27FC236}">
-                <a16:creationId xmlns:a16="http://schemas.microsoft.com/office/drawing/2014/main" id="{C8305303-D450-DE41-FD4D-E965DB4B9962}"/>
-              </a:ext>
-            </a:extLst>
-          </p:cNvPr>
-          <p:cNvSpPr>
-            <a:spLocks noGrp="1"/>
-          </p:cNvSpPr>
-          <p:nvPr>
-            <p:ph type="dt" sz="half" idx="10"/>
-          </p:nvPr>
-        </p:nvSpPr>
-        <p:spPr>
-          <a:xfrm>
-            <a:off x="838200" y="6356349"/>
-            <a:ext cx="2743200" cy="432000"/>
-          </a:xfrm>
-        </p:spPr>
-        <p:txBody>
-          <a:bodyPr/>
-          <a:lstStyle/>
-          <a:p>
-            <a:r>
-              <a:rPr lang="it-IT" sz="1500" b="1" dirty="0">
-                <a:solidFill>
-                  <a:srgbClr val="002060"/>
-                </a:solidFill>
-              </a:rPr>
-              <a:t>July 2026</a:t>
-            </a:r>
-          </a:p>
-        </p:txBody>
-      </p:sp>
-      <p:sp>
-        <p:nvSpPr>
-          <p:cNvPr id="5" name="Segnaposto piè di pagina 4">
-            <a:extLst>
-              <a:ext uri="{FF2B5EF4-FFF2-40B4-BE49-F238E27FC236}">
-                <a16:creationId xmlns:a16="http://schemas.microsoft.com/office/drawing/2014/main" id="{B932D726-6862-785A-B00C-19309D53BB9C}"/>
-              </a:ext>
-            </a:extLst>
-          </p:cNvPr>
-          <p:cNvSpPr>
-            <a:spLocks noGrp="1"/>
-          </p:cNvSpPr>
-          <p:nvPr>
-            <p:ph type="ftr" sz="quarter" idx="11"/>
-          </p:nvPr>
-        </p:nvSpPr>
-        <p:spPr>
-          <a:xfrm>
-            <a:off x="0" y="6356349"/>
-            <a:ext cx="12192000" cy="432000"/>
-          </a:xfrm>
-        </p:spPr>
-        <p:txBody>
-          <a:bodyPr/>
-          <a:lstStyle/>
-          <a:p>
-            <a:r>
-              <a:rPr lang="it-IT" sz="1500" b="1" dirty="0">
-                <a:solidFill>
-                  <a:srgbClr val="002060"/>
-                </a:solidFill>
-              </a:rPr>
-              <a:t>Anna Sofia Moro</a:t>
-            </a:r>
-          </a:p>
-        </p:txBody>
-      </p:sp>
-      <p:sp>
-        <p:nvSpPr>
-          <p:cNvPr id="6" name="Segnaposto numero diapositiva 5">
-            <a:extLst>
-              <a:ext uri="{FF2B5EF4-FFF2-40B4-BE49-F238E27FC236}">
-                <a16:creationId xmlns:a16="http://schemas.microsoft.com/office/drawing/2014/main" id="{1318A926-43E2-8B1A-948C-DD69E1680453}"/>
-              </a:ext>
-            </a:extLst>
-          </p:cNvPr>
-          <p:cNvSpPr>
-            <a:spLocks noGrp="1"/>
-          </p:cNvSpPr>
-          <p:nvPr>
-            <p:ph type="sldNum" sz="quarter" idx="12"/>
-          </p:nvPr>
-        </p:nvSpPr>
-        <p:spPr>
-          <a:xfrm>
-            <a:off x="8610600" y="6356349"/>
-            <a:ext cx="2743200" cy="432000"/>
-          </a:xfrm>
-        </p:spPr>
-        <p:txBody>
-          <a:bodyPr/>
-          <a:lstStyle/>
-          <a:p>
-            <a:fld id="{0A318BD9-CA14-4A83-ACF0-03D5918EB402}" type="slidenum">
-              <a:rPr lang="it-IT" sz="1500" b="1" smtClean="0">
-                <a:solidFill>
-                  <a:srgbClr val="002060"/>
-                </a:solidFill>
-              </a:rPr>
-              <a:t>22</a:t>
-            </a:fld>
-            <a:endParaRPr lang="it-IT" sz="1500" b="1" dirty="0">
-              <a:solidFill>
-                <a:srgbClr val="002060"/>
-              </a:solidFill>
-            </a:endParaRPr>
-          </a:p>
-        </p:txBody>
-      </p:sp>
-      <p:cxnSp>
-        <p:nvCxnSpPr>
-          <p:cNvPr id="10" name="Connettore diritto 9">
-            <a:extLst>
-              <a:ext uri="{FF2B5EF4-FFF2-40B4-BE49-F238E27FC236}">
-                <a16:creationId xmlns:a16="http://schemas.microsoft.com/office/drawing/2014/main" id="{2EB45A51-E901-915B-0293-EC5A0957C2FE}"/>
-              </a:ext>
-            </a:extLst>
-          </p:cNvPr>
-          <p:cNvCxnSpPr>
-            <a:cxnSpLocks/>
-          </p:cNvCxnSpPr>
-          <p:nvPr/>
-        </p:nvCxnSpPr>
-        <p:spPr>
-          <a:xfrm>
-            <a:off x="696000" y="1155368"/>
-            <a:ext cx="10800000" cy="0"/>
-          </a:xfrm>
-          <a:prstGeom prst="line">
-            <a:avLst/>
-          </a:prstGeom>
-          <a:ln w="38100">
-            <a:solidFill>
-              <a:srgbClr val="002060"/>
-            </a:solidFill>
-          </a:ln>
-        </p:spPr>
-        <p:style>
-          <a:lnRef idx="2">
-            <a:schemeClr val="accent1"/>
-          </a:lnRef>
-          <a:fillRef idx="0">
-            <a:schemeClr val="accent1"/>
-          </a:fillRef>
-          <a:effectRef idx="1">
-            <a:schemeClr val="accent1"/>
-          </a:effectRef>
-          <a:fontRef idx="minor">
-            <a:schemeClr val="tx1"/>
-          </a:fontRef>
-        </p:style>
-      </p:cxnSp>
-      <p:sp>
-        <p:nvSpPr>
-          <p:cNvPr id="13" name="CasellaDiTesto 12">
-            <a:extLst>
-              <a:ext uri="{FF2B5EF4-FFF2-40B4-BE49-F238E27FC236}">
-                <a16:creationId xmlns:a16="http://schemas.microsoft.com/office/drawing/2014/main" id="{523A421A-CF34-DE89-C38E-406198ECC43D}"/>
-              </a:ext>
-            </a:extLst>
-          </p:cNvPr>
-          <p:cNvSpPr txBox="1"/>
-          <p:nvPr/>
-        </p:nvSpPr>
-        <p:spPr>
-          <a:xfrm>
-            <a:off x="3048886" y="3244334"/>
-            <a:ext cx="6097772" cy="369332"/>
-          </a:xfrm>
-          <a:prstGeom prst="rect">
-            <a:avLst/>
-          </a:prstGeom>
-          <a:noFill/>
-        </p:spPr>
-        <p:txBody>
-          <a:bodyPr wrap="square">
-            <a:spAutoFit/>
-          </a:bodyPr>
-          <a:lstStyle/>
-          <a:p>
-            <a:endParaRPr lang="it-IT" dirty="0"/>
-          </a:p>
-        </p:txBody>
-      </p:sp>
-      <p:sp>
-        <p:nvSpPr>
-          <p:cNvPr id="15" name="CasellaDiTesto 14">
-            <a:extLst>
-              <a:ext uri="{FF2B5EF4-FFF2-40B4-BE49-F238E27FC236}">
-                <a16:creationId xmlns:a16="http://schemas.microsoft.com/office/drawing/2014/main" id="{5A3A2D6F-A325-D7E7-DEFD-6EE799EFE079}"/>
-              </a:ext>
-            </a:extLst>
-          </p:cNvPr>
-          <p:cNvSpPr txBox="1"/>
-          <p:nvPr/>
-        </p:nvSpPr>
-        <p:spPr>
-          <a:xfrm>
-            <a:off x="3048886" y="3244334"/>
-            <a:ext cx="6097772" cy="369332"/>
-          </a:xfrm>
-          <a:prstGeom prst="rect">
-            <a:avLst/>
-          </a:prstGeom>
-          <a:noFill/>
-        </p:spPr>
-        <p:txBody>
-          <a:bodyPr wrap="square">
-            <a:spAutoFit/>
-          </a:bodyPr>
-          <a:lstStyle/>
-          <a:p>
-            <a:endParaRPr lang="it-IT" dirty="0"/>
-          </a:p>
-        </p:txBody>
-      </p:sp>
-      <p:pic>
-        <p:nvPicPr>
-          <p:cNvPr id="7" name="Immagine 6">
-            <a:extLst>
-              <a:ext uri="{FF2B5EF4-FFF2-40B4-BE49-F238E27FC236}">
-                <a16:creationId xmlns:a16="http://schemas.microsoft.com/office/drawing/2014/main" id="{3F38F614-6004-D72E-11CB-6711FB5ABE56}"/>
-              </a:ext>
-            </a:extLst>
-          </p:cNvPr>
-          <p:cNvPicPr>
-            <a:picLocks noChangeAspect="1"/>
-          </p:cNvPicPr>
-          <p:nvPr/>
-        </p:nvPicPr>
-        <p:blipFill>
-          <a:blip r:embed="rId2"/>
-          <a:stretch>
-            <a:fillRect/>
-          </a:stretch>
-        </p:blipFill>
-        <p:spPr>
-          <a:xfrm>
-            <a:off x="1898357" y="1546325"/>
-            <a:ext cx="8759602" cy="4165439"/>
-          </a:xfrm>
-          <a:prstGeom prst="rect">
-            <a:avLst/>
-          </a:prstGeom>
-        </p:spPr>
-      </p:pic>
-    </p:spTree>
-    <p:extLst>
-      <p:ext uri="{BB962C8B-B14F-4D97-AF65-F5344CB8AC3E}">
-        <p14:creationId xmlns:p14="http://schemas.microsoft.com/office/powerpoint/2010/main" val="1879365236"/>
-      </p:ext>
-    </p:extLst>
-  </p:cSld>
-  <p:clrMapOvr>
-    <a:masterClrMapping/>
-  </p:clrMapOvr>
-</p:sld>
-</file>
-
-<file path=ppt/slides/slide23.xml><?xml version="1.0" encoding="utf-8"?>
+<file path=ppt/slides/slide24.xml><?xml version="1.0" encoding="utf-8"?>
 <p:sld xmlns:a="http://schemas.openxmlformats.org/drawingml/2006/main" xmlns:r="http://schemas.openxmlformats.org/officeDocument/2006/relationships" xmlns:p="http://schemas.openxmlformats.org/presentationml/2006/main">
   <p:cSld>
     <p:spTree>
@@ -22155,7 +26558,7 @@
                   <a:srgbClr val="002060"/>
                 </a:solidFill>
               </a:rPr>
-              <a:t>23</a:t>
+              <a:t>24</a:t>
             </a:fld>
             <a:endParaRPr lang="it-IT" sz="1500" b="1" dirty="0">
               <a:solidFill>
@@ -22315,7 +26718,7 @@
 </p:sld>
 </file>
 
-<file path=ppt/slides/slide24.xml><?xml version="1.0" encoding="utf-8"?>
+<file path=ppt/slides/slide25.xml><?xml version="1.0" encoding="utf-8"?>
 <p:sld xmlns:a="http://schemas.openxmlformats.org/drawingml/2006/main" xmlns:r="http://schemas.openxmlformats.org/officeDocument/2006/relationships" xmlns:p="http://schemas.openxmlformats.org/presentationml/2006/main">
   <p:cSld>
     <p:spTree>
@@ -22583,7 +26986,7 @@
                   <a:srgbClr val="002060"/>
                 </a:solidFill>
               </a:rPr>
-              <a:t>24</a:t>
+              <a:t>25</a:t>
             </a:fld>
             <a:endParaRPr lang="it-IT" sz="1500" b="1" dirty="0">
               <a:solidFill>
@@ -23050,7 +27453,7 @@
 </p:sld>
 </file>
 
-<file path=ppt/slides/slide25.xml><?xml version="1.0" encoding="utf-8"?>
+<file path=ppt/slides/slide26.xml><?xml version="1.0" encoding="utf-8"?>
 <p:sld xmlns:a="http://schemas.openxmlformats.org/drawingml/2006/main" xmlns:r="http://schemas.openxmlformats.org/officeDocument/2006/relationships" xmlns:p="http://schemas.openxmlformats.org/presentationml/2006/main">
   <p:cSld>
     <p:spTree>
@@ -23224,7 +27627,7 @@
                   <a:srgbClr val="002060"/>
                 </a:solidFill>
               </a:rPr>
-              <a:t>25</a:t>
+              <a:t>26</a:t>
             </a:fld>
             <a:endParaRPr lang="it-IT" sz="1500" b="1" dirty="0">
               <a:solidFill>
@@ -23464,7 +27867,7 @@
 </p:sld>
 </file>
 
-<file path=ppt/slides/slide26.xml><?xml version="1.0" encoding="utf-8"?>
+<file path=ppt/slides/slide27.xml><?xml version="1.0" encoding="utf-8"?>
 <p:sld xmlns:a="http://schemas.openxmlformats.org/drawingml/2006/main" xmlns:r="http://schemas.openxmlformats.org/officeDocument/2006/relationships" xmlns:p="http://schemas.openxmlformats.org/presentationml/2006/main">
   <p:cSld>
     <p:spTree>
@@ -23638,7 +28041,7 @@
                   <a:srgbClr val="002060"/>
                 </a:solidFill>
               </a:rPr>
-              <a:t>26</a:t>
+              <a:t>27</a:t>
             </a:fld>
             <a:endParaRPr lang="it-IT" sz="1500" b="1" dirty="0">
               <a:solidFill>
@@ -24628,7 +29031,7 @@
 </p:sld>
 </file>
 
-<file path=ppt/slides/slide27.xml><?xml version="1.0" encoding="utf-8"?>
+<file path=ppt/slides/slide28.xml><?xml version="1.0" encoding="utf-8"?>
 <p:sld xmlns:a="http://schemas.openxmlformats.org/drawingml/2006/main" xmlns:r="http://schemas.openxmlformats.org/officeDocument/2006/relationships" xmlns:p="http://schemas.openxmlformats.org/presentationml/2006/main">
   <p:cSld>
     <p:spTree>
@@ -24802,7 +29205,7 @@
                   <a:srgbClr val="002060"/>
                 </a:solidFill>
               </a:rPr>
-              <a:t>27</a:t>
+              <a:t>28</a:t>
             </a:fld>
             <a:endParaRPr lang="it-IT" sz="1500" b="1" dirty="0">
               <a:solidFill>
@@ -25455,7 +29858,7 @@
 </p:sld>
 </file>
 
-<file path=ppt/slides/slide28.xml><?xml version="1.0" encoding="utf-8"?>
+<file path=ppt/slides/slide29.xml><?xml version="1.0" encoding="utf-8"?>
 <p:sld xmlns:a="http://schemas.openxmlformats.org/drawingml/2006/main" xmlns:r="http://schemas.openxmlformats.org/officeDocument/2006/relationships" xmlns:p="http://schemas.openxmlformats.org/presentationml/2006/main">
   <p:cSld>
     <p:spTree>
@@ -25629,7 +30032,7 @@
                   <a:srgbClr val="002060"/>
                 </a:solidFill>
               </a:rPr>
-              <a:t>28</a:t>
+              <a:t>29</a:t>
             </a:fld>
             <a:endParaRPr lang="it-IT" sz="1500" b="1" dirty="0">
               <a:solidFill>
@@ -25885,7 +30288,563 @@
 </p:sld>
 </file>
 
-<file path=ppt/slides/slide29.xml><?xml version="1.0" encoding="utf-8"?>
+<file path=ppt/slides/slide3.xml><?xml version="1.0" encoding="utf-8"?>
+<p:sld xmlns:a="http://schemas.openxmlformats.org/drawingml/2006/main" xmlns:r="http://schemas.openxmlformats.org/officeDocument/2006/relationships" xmlns:p="http://schemas.openxmlformats.org/presentationml/2006/main">
+  <p:cSld>
+    <p:spTree>
+      <p:nvGrpSpPr>
+        <p:cNvPr id="1" name="">
+          <a:extLst>
+            <a:ext uri="{FF2B5EF4-FFF2-40B4-BE49-F238E27FC236}">
+              <a16:creationId xmlns:a16="http://schemas.microsoft.com/office/drawing/2014/main" id="{29C1A478-2C97-10B4-34B5-10A734949A4E}"/>
+            </a:ext>
+          </a:extLst>
+        </p:cNvPr>
+        <p:cNvGrpSpPr/>
+        <p:nvPr/>
+      </p:nvGrpSpPr>
+      <p:grpSpPr>
+        <a:xfrm>
+          <a:off x="0" y="0"/>
+          <a:ext cx="0" cy="0"/>
+          <a:chOff x="0" y="0"/>
+          <a:chExt cx="0" cy="0"/>
+        </a:xfrm>
+      </p:grpSpPr>
+      <p:sp>
+        <p:nvSpPr>
+          <p:cNvPr id="2" name="Titolo 1">
+            <a:extLst>
+              <a:ext uri="{FF2B5EF4-FFF2-40B4-BE49-F238E27FC236}">
+                <a16:creationId xmlns:a16="http://schemas.microsoft.com/office/drawing/2014/main" id="{A0AC2323-4074-7D2D-42E4-448B5D17288B}"/>
+              </a:ext>
+            </a:extLst>
+          </p:cNvPr>
+          <p:cNvSpPr>
+            <a:spLocks noGrp="1"/>
+          </p:cNvSpPr>
+          <p:nvPr>
+            <p:ph type="title"/>
+          </p:nvPr>
+        </p:nvSpPr>
+        <p:spPr>
+          <a:xfrm>
+            <a:off x="38100" y="69651"/>
+            <a:ext cx="12114000" cy="1153094"/>
+          </a:xfrm>
+          <a:prstGeom prst="roundRect">
+            <a:avLst>
+              <a:gd name="adj" fmla="val 36459"/>
+            </a:avLst>
+          </a:prstGeom>
+          <a:noFill/>
+        </p:spPr>
+        <p:txBody>
+          <a:bodyPr>
+            <a:normAutofit/>
+          </a:bodyPr>
+          <a:lstStyle/>
+          <a:p>
+            <a:r>
+              <a:rPr lang="it-IT" b="1" dirty="0">
+                <a:solidFill>
+                  <a:srgbClr val="002060"/>
+                </a:solidFill>
+              </a:rPr>
+              <a:t>	1. SCHEMATIC LAYOUT</a:t>
+            </a:r>
+          </a:p>
+        </p:txBody>
+      </p:sp>
+      <p:sp>
+        <p:nvSpPr>
+          <p:cNvPr id="4" name="Segnaposto data 3">
+            <a:extLst>
+              <a:ext uri="{FF2B5EF4-FFF2-40B4-BE49-F238E27FC236}">
+                <a16:creationId xmlns:a16="http://schemas.microsoft.com/office/drawing/2014/main" id="{C8305303-D450-DE41-FD4D-E965DB4B9962}"/>
+              </a:ext>
+            </a:extLst>
+          </p:cNvPr>
+          <p:cNvSpPr>
+            <a:spLocks noGrp="1"/>
+          </p:cNvSpPr>
+          <p:nvPr>
+            <p:ph type="dt" sz="half" idx="10"/>
+          </p:nvPr>
+        </p:nvSpPr>
+        <p:spPr>
+          <a:xfrm>
+            <a:off x="838200" y="6356349"/>
+            <a:ext cx="2743200" cy="432000"/>
+          </a:xfrm>
+        </p:spPr>
+        <p:txBody>
+          <a:bodyPr/>
+          <a:lstStyle/>
+          <a:p>
+            <a:r>
+              <a:rPr lang="it-IT" sz="1500" b="1" dirty="0">
+                <a:solidFill>
+                  <a:srgbClr val="002060"/>
+                </a:solidFill>
+              </a:rPr>
+              <a:t>July 2026</a:t>
+            </a:r>
+          </a:p>
+        </p:txBody>
+      </p:sp>
+      <p:sp>
+        <p:nvSpPr>
+          <p:cNvPr id="5" name="Segnaposto piè di pagina 4">
+            <a:extLst>
+              <a:ext uri="{FF2B5EF4-FFF2-40B4-BE49-F238E27FC236}">
+                <a16:creationId xmlns:a16="http://schemas.microsoft.com/office/drawing/2014/main" id="{B932D726-6862-785A-B00C-19309D53BB9C}"/>
+              </a:ext>
+            </a:extLst>
+          </p:cNvPr>
+          <p:cNvSpPr>
+            <a:spLocks noGrp="1"/>
+          </p:cNvSpPr>
+          <p:nvPr>
+            <p:ph type="ftr" sz="quarter" idx="11"/>
+          </p:nvPr>
+        </p:nvSpPr>
+        <p:spPr>
+          <a:xfrm>
+            <a:off x="0" y="6356349"/>
+            <a:ext cx="12192000" cy="432000"/>
+          </a:xfrm>
+        </p:spPr>
+        <p:txBody>
+          <a:bodyPr/>
+          <a:lstStyle/>
+          <a:p>
+            <a:r>
+              <a:rPr lang="it-IT" sz="1500" b="1" dirty="0">
+                <a:solidFill>
+                  <a:srgbClr val="002060"/>
+                </a:solidFill>
+              </a:rPr>
+              <a:t>Anna Sofia Moro</a:t>
+            </a:r>
+          </a:p>
+        </p:txBody>
+      </p:sp>
+      <p:sp>
+        <p:nvSpPr>
+          <p:cNvPr id="6" name="Segnaposto numero diapositiva 5">
+            <a:extLst>
+              <a:ext uri="{FF2B5EF4-FFF2-40B4-BE49-F238E27FC236}">
+                <a16:creationId xmlns:a16="http://schemas.microsoft.com/office/drawing/2014/main" id="{1318A926-43E2-8B1A-948C-DD69E1680453}"/>
+              </a:ext>
+            </a:extLst>
+          </p:cNvPr>
+          <p:cNvSpPr>
+            <a:spLocks noGrp="1"/>
+          </p:cNvSpPr>
+          <p:nvPr>
+            <p:ph type="sldNum" sz="quarter" idx="12"/>
+          </p:nvPr>
+        </p:nvSpPr>
+        <p:spPr>
+          <a:xfrm>
+            <a:off x="8610600" y="6356349"/>
+            <a:ext cx="2743200" cy="432000"/>
+          </a:xfrm>
+        </p:spPr>
+        <p:txBody>
+          <a:bodyPr/>
+          <a:lstStyle/>
+          <a:p>
+            <a:fld id="{0A318BD9-CA14-4A83-ACF0-03D5918EB402}" type="slidenum">
+              <a:rPr lang="it-IT" sz="1500" b="1" smtClean="0">
+                <a:solidFill>
+                  <a:srgbClr val="002060"/>
+                </a:solidFill>
+              </a:rPr>
+              <a:t>3</a:t>
+            </a:fld>
+            <a:endParaRPr lang="it-IT" sz="1500" b="1" dirty="0">
+              <a:solidFill>
+                <a:srgbClr val="002060"/>
+              </a:solidFill>
+            </a:endParaRPr>
+          </a:p>
+        </p:txBody>
+      </p:sp>
+      <p:cxnSp>
+        <p:nvCxnSpPr>
+          <p:cNvPr id="10" name="Connettore diritto 9">
+            <a:extLst>
+              <a:ext uri="{FF2B5EF4-FFF2-40B4-BE49-F238E27FC236}">
+                <a16:creationId xmlns:a16="http://schemas.microsoft.com/office/drawing/2014/main" id="{2EB45A51-E901-915B-0293-EC5A0957C2FE}"/>
+              </a:ext>
+            </a:extLst>
+          </p:cNvPr>
+          <p:cNvCxnSpPr>
+            <a:cxnSpLocks/>
+          </p:cNvCxnSpPr>
+          <p:nvPr/>
+        </p:nvCxnSpPr>
+        <p:spPr>
+          <a:xfrm>
+            <a:off x="696000" y="1155368"/>
+            <a:ext cx="10800000" cy="0"/>
+          </a:xfrm>
+          <a:prstGeom prst="line">
+            <a:avLst/>
+          </a:prstGeom>
+          <a:ln w="38100">
+            <a:solidFill>
+              <a:srgbClr val="002060"/>
+            </a:solidFill>
+          </a:ln>
+        </p:spPr>
+        <p:style>
+          <a:lnRef idx="2">
+            <a:schemeClr val="accent1"/>
+          </a:lnRef>
+          <a:fillRef idx="0">
+            <a:schemeClr val="accent1"/>
+          </a:fillRef>
+          <a:effectRef idx="1">
+            <a:schemeClr val="accent1"/>
+          </a:effectRef>
+          <a:fontRef idx="minor">
+            <a:schemeClr val="tx1"/>
+          </a:fontRef>
+        </p:style>
+      </p:cxnSp>
+      <p:sp>
+        <p:nvSpPr>
+          <p:cNvPr id="13" name="CasellaDiTesto 12">
+            <a:extLst>
+              <a:ext uri="{FF2B5EF4-FFF2-40B4-BE49-F238E27FC236}">
+                <a16:creationId xmlns:a16="http://schemas.microsoft.com/office/drawing/2014/main" id="{523A421A-CF34-DE89-C38E-406198ECC43D}"/>
+              </a:ext>
+            </a:extLst>
+          </p:cNvPr>
+          <p:cNvSpPr txBox="1"/>
+          <p:nvPr/>
+        </p:nvSpPr>
+        <p:spPr>
+          <a:xfrm>
+            <a:off x="3048886" y="3244334"/>
+            <a:ext cx="6097772" cy="369332"/>
+          </a:xfrm>
+          <a:prstGeom prst="rect">
+            <a:avLst/>
+          </a:prstGeom>
+          <a:noFill/>
+        </p:spPr>
+        <p:txBody>
+          <a:bodyPr wrap="square">
+            <a:spAutoFit/>
+          </a:bodyPr>
+          <a:lstStyle/>
+          <a:p>
+            <a:endParaRPr lang="it-IT" dirty="0"/>
+          </a:p>
+        </p:txBody>
+      </p:sp>
+      <p:sp>
+        <p:nvSpPr>
+          <p:cNvPr id="15" name="CasellaDiTesto 14">
+            <a:extLst>
+              <a:ext uri="{FF2B5EF4-FFF2-40B4-BE49-F238E27FC236}">
+                <a16:creationId xmlns:a16="http://schemas.microsoft.com/office/drawing/2014/main" id="{5A3A2D6F-A325-D7E7-DEFD-6EE799EFE079}"/>
+              </a:ext>
+            </a:extLst>
+          </p:cNvPr>
+          <p:cNvSpPr txBox="1"/>
+          <p:nvPr/>
+        </p:nvSpPr>
+        <p:spPr>
+          <a:xfrm>
+            <a:off x="3048886" y="3244334"/>
+            <a:ext cx="6097772" cy="369332"/>
+          </a:xfrm>
+          <a:prstGeom prst="rect">
+            <a:avLst/>
+          </a:prstGeom>
+          <a:noFill/>
+        </p:spPr>
+        <p:txBody>
+          <a:bodyPr wrap="square">
+            <a:spAutoFit/>
+          </a:bodyPr>
+          <a:lstStyle/>
+          <a:p>
+            <a:endParaRPr lang="it-IT" dirty="0"/>
+          </a:p>
+        </p:txBody>
+      </p:sp>
+      <p:pic>
+        <p:nvPicPr>
+          <p:cNvPr id="7" name="Immagine 6">
+            <a:extLst>
+              <a:ext uri="{FF2B5EF4-FFF2-40B4-BE49-F238E27FC236}">
+                <a16:creationId xmlns:a16="http://schemas.microsoft.com/office/drawing/2014/main" id="{3F38F614-6004-D72E-11CB-6711FB5ABE56}"/>
+              </a:ext>
+            </a:extLst>
+          </p:cNvPr>
+          <p:cNvPicPr>
+            <a:picLocks noChangeAspect="1"/>
+          </p:cNvPicPr>
+          <p:nvPr/>
+        </p:nvPicPr>
+        <p:blipFill>
+          <a:blip r:embed="rId2">
+            <a:extLst>
+              <a:ext uri="{28A0092B-C50C-407E-A947-70E740481C1C}">
+                <a14:useLocalDpi xmlns:a14="http://schemas.microsoft.com/office/drawing/2010/main" val="0"/>
+              </a:ext>
+            </a:extLst>
+          </a:blip>
+          <a:srcRect/>
+          <a:stretch/>
+        </p:blipFill>
+        <p:spPr>
+          <a:xfrm>
+            <a:off x="1899247" y="1546325"/>
+            <a:ext cx="8757821" cy="4165439"/>
+          </a:xfrm>
+          <a:prstGeom prst="rect">
+            <a:avLst/>
+          </a:prstGeom>
+        </p:spPr>
+      </p:pic>
+      <p:sp>
+        <p:nvSpPr>
+          <p:cNvPr id="14" name="CasellaDiTesto 13">
+            <a:extLst>
+              <a:ext uri="{FF2B5EF4-FFF2-40B4-BE49-F238E27FC236}">
+                <a16:creationId xmlns:a16="http://schemas.microsoft.com/office/drawing/2014/main" id="{8761CFF4-1AA7-7DBA-C7AD-C4C417735B36}"/>
+              </a:ext>
+            </a:extLst>
+          </p:cNvPr>
+          <p:cNvSpPr txBox="1"/>
+          <p:nvPr/>
+        </p:nvSpPr>
+        <p:spPr>
+          <a:xfrm>
+            <a:off x="2819400" y="1671629"/>
+            <a:ext cx="679450" cy="400110"/>
+          </a:xfrm>
+          <a:prstGeom prst="rect">
+            <a:avLst/>
+          </a:prstGeom>
+          <a:noFill/>
+        </p:spPr>
+        <p:txBody>
+          <a:bodyPr wrap="square" rtlCol="0">
+            <a:spAutoFit/>
+          </a:bodyPr>
+          <a:lstStyle/>
+          <a:p>
+            <a:pPr algn="ctr"/>
+            <a:r>
+              <a:rPr lang="it-IT" sz="2000" dirty="0"/>
+              <a:t>T1</a:t>
+            </a:r>
+          </a:p>
+        </p:txBody>
+      </p:sp>
+      <p:sp>
+        <p:nvSpPr>
+          <p:cNvPr id="17" name="CasellaDiTesto 16">
+            <a:extLst>
+              <a:ext uri="{FF2B5EF4-FFF2-40B4-BE49-F238E27FC236}">
+                <a16:creationId xmlns:a16="http://schemas.microsoft.com/office/drawing/2014/main" id="{D3769F19-49FA-6A86-4E43-EE9B9FCF5335}"/>
+              </a:ext>
+            </a:extLst>
+          </p:cNvPr>
+          <p:cNvSpPr txBox="1"/>
+          <p:nvPr/>
+        </p:nvSpPr>
+        <p:spPr>
+          <a:xfrm>
+            <a:off x="3498850" y="1671629"/>
+            <a:ext cx="679450" cy="400110"/>
+          </a:xfrm>
+          <a:prstGeom prst="rect">
+            <a:avLst/>
+          </a:prstGeom>
+          <a:noFill/>
+        </p:spPr>
+        <p:txBody>
+          <a:bodyPr wrap="square" rtlCol="0">
+            <a:spAutoFit/>
+          </a:bodyPr>
+          <a:lstStyle/>
+          <a:p>
+            <a:pPr algn="ctr"/>
+            <a:r>
+              <a:rPr lang="it-IT" sz="2000" dirty="0"/>
+              <a:t>T2</a:t>
+            </a:r>
+          </a:p>
+        </p:txBody>
+      </p:sp>
+      <p:sp>
+        <p:nvSpPr>
+          <p:cNvPr id="19" name="CasellaDiTesto 18">
+            <a:extLst>
+              <a:ext uri="{FF2B5EF4-FFF2-40B4-BE49-F238E27FC236}">
+                <a16:creationId xmlns:a16="http://schemas.microsoft.com/office/drawing/2014/main" id="{E6613190-54C0-7766-BE53-A88A0928D029}"/>
+              </a:ext>
+            </a:extLst>
+          </p:cNvPr>
+          <p:cNvSpPr txBox="1"/>
+          <p:nvPr/>
+        </p:nvSpPr>
+        <p:spPr>
+          <a:xfrm>
+            <a:off x="6146800" y="1671629"/>
+            <a:ext cx="679450" cy="400110"/>
+          </a:xfrm>
+          <a:prstGeom prst="rect">
+            <a:avLst/>
+          </a:prstGeom>
+          <a:noFill/>
+        </p:spPr>
+        <p:txBody>
+          <a:bodyPr wrap="square" rtlCol="0">
+            <a:spAutoFit/>
+          </a:bodyPr>
+          <a:lstStyle/>
+          <a:p>
+            <a:pPr algn="ctr"/>
+            <a:r>
+              <a:rPr lang="it-IT" sz="2000" dirty="0"/>
+              <a:t>T3</a:t>
+            </a:r>
+          </a:p>
+        </p:txBody>
+      </p:sp>
+      <p:sp>
+        <p:nvSpPr>
+          <p:cNvPr id="21" name="CasellaDiTesto 20">
+            <a:extLst>
+              <a:ext uri="{FF2B5EF4-FFF2-40B4-BE49-F238E27FC236}">
+                <a16:creationId xmlns:a16="http://schemas.microsoft.com/office/drawing/2014/main" id="{91ABB6A2-0253-F61C-3A3B-B5D48ED67530}"/>
+              </a:ext>
+            </a:extLst>
+          </p:cNvPr>
+          <p:cNvSpPr txBox="1"/>
+          <p:nvPr/>
+        </p:nvSpPr>
+        <p:spPr>
+          <a:xfrm>
+            <a:off x="8455025" y="1671629"/>
+            <a:ext cx="679450" cy="400110"/>
+          </a:xfrm>
+          <a:prstGeom prst="rect">
+            <a:avLst/>
+          </a:prstGeom>
+          <a:noFill/>
+        </p:spPr>
+        <p:txBody>
+          <a:bodyPr wrap="square" rtlCol="0">
+            <a:spAutoFit/>
+          </a:bodyPr>
+          <a:lstStyle/>
+          <a:p>
+            <a:pPr algn="ctr"/>
+            <a:r>
+              <a:rPr lang="it-IT" sz="2000" dirty="0"/>
+              <a:t>C4</a:t>
+            </a:r>
+          </a:p>
+        </p:txBody>
+      </p:sp>
+      <p:sp>
+        <p:nvSpPr>
+          <p:cNvPr id="23" name="CasellaDiTesto 22">
+            <a:extLst>
+              <a:ext uri="{FF2B5EF4-FFF2-40B4-BE49-F238E27FC236}">
+                <a16:creationId xmlns:a16="http://schemas.microsoft.com/office/drawing/2014/main" id="{5EF31BC2-B06C-C19F-8B82-234E7051B99F}"/>
+              </a:ext>
+            </a:extLst>
+          </p:cNvPr>
+          <p:cNvSpPr txBox="1"/>
+          <p:nvPr/>
+        </p:nvSpPr>
+        <p:spPr>
+          <a:xfrm>
+            <a:off x="4914900" y="4911565"/>
+            <a:ext cx="1047750" cy="400110"/>
+          </a:xfrm>
+          <a:prstGeom prst="rect">
+            <a:avLst/>
+          </a:prstGeom>
+          <a:noFill/>
+        </p:spPr>
+        <p:txBody>
+          <a:bodyPr wrap="square" rtlCol="0">
+            <a:spAutoFit/>
+          </a:bodyPr>
+          <a:lstStyle/>
+          <a:p>
+            <a:pPr algn="ctr"/>
+            <a:r>
+              <a:rPr lang="it-IT" sz="2000" dirty="0" err="1"/>
+              <a:t>crystal</a:t>
+            </a:r>
+            <a:endParaRPr lang="it-IT" sz="2000" dirty="0"/>
+          </a:p>
+        </p:txBody>
+      </p:sp>
+      <p:sp>
+        <p:nvSpPr>
+          <p:cNvPr id="25" name="CasellaDiTesto 24">
+            <a:extLst>
+              <a:ext uri="{FF2B5EF4-FFF2-40B4-BE49-F238E27FC236}">
+                <a16:creationId xmlns:a16="http://schemas.microsoft.com/office/drawing/2014/main" id="{DC516CBA-691F-320E-81BE-67B07E92F0CB}"/>
+              </a:ext>
+            </a:extLst>
+          </p:cNvPr>
+          <p:cNvSpPr txBox="1"/>
+          <p:nvPr/>
+        </p:nvSpPr>
+        <p:spPr>
+          <a:xfrm>
+            <a:off x="10402009" y="4315824"/>
+            <a:ext cx="679450" cy="369332"/>
+          </a:xfrm>
+          <a:prstGeom prst="rect">
+            <a:avLst/>
+          </a:prstGeom>
+          <a:noFill/>
+        </p:spPr>
+        <p:txBody>
+          <a:bodyPr wrap="square" rtlCol="0">
+            <a:spAutoFit/>
+          </a:bodyPr>
+          <a:lstStyle/>
+          <a:p>
+            <a:pPr algn="ctr"/>
+            <a:r>
+              <a:rPr lang="it-IT" dirty="0"/>
+              <a:t>[m]</a:t>
+            </a:r>
+          </a:p>
+        </p:txBody>
+      </p:sp>
+    </p:spTree>
+    <p:extLst>
+      <p:ext uri="{BB962C8B-B14F-4D97-AF65-F5344CB8AC3E}">
+        <p14:creationId xmlns:p14="http://schemas.microsoft.com/office/powerpoint/2010/main" val="1879365236"/>
+      </p:ext>
+    </p:extLst>
+  </p:cSld>
+  <p:clrMapOvr>
+    <a:masterClrMapping/>
+  </p:clrMapOvr>
+</p:sld>
+</file>
+
+<file path=ppt/slides/slide30.xml><?xml version="1.0" encoding="utf-8"?>
 <p:sld xmlns:a="http://schemas.openxmlformats.org/drawingml/2006/main" xmlns:r="http://schemas.openxmlformats.org/officeDocument/2006/relationships" xmlns:p="http://schemas.openxmlformats.org/presentationml/2006/main">
   <p:cSld>
     <p:spTree>
@@ -26217,7 +31176,7 @@
                   <a:srgbClr val="002060"/>
                 </a:solidFill>
               </a:rPr>
-              <a:t>29</a:t>
+              <a:t>30</a:t>
             </a:fld>
             <a:endParaRPr lang="it-IT" sz="1500" b="1" dirty="0">
               <a:solidFill>
@@ -26384,7 +31343,7 @@
 </p:sld>
 </file>
 
-<file path=ppt/slides/slide3.xml><?xml version="1.0" encoding="utf-8"?>
+<file path=ppt/slides/slide4.xml><?xml version="1.0" encoding="utf-8"?>
 <p:sld xmlns:a="http://schemas.openxmlformats.org/drawingml/2006/main" xmlns:r="http://schemas.openxmlformats.org/officeDocument/2006/relationships" xmlns:p="http://schemas.openxmlformats.org/presentationml/2006/main">
   <p:cSld>
     <p:spTree>
@@ -26558,7 +31517,7 @@
                   <a:srgbClr val="002060"/>
                 </a:solidFill>
               </a:rPr>
-              <a:t>3</a:t>
+              <a:t>4</a:t>
             </a:fld>
             <a:endParaRPr lang="it-IT" sz="1500" b="1" dirty="0">
               <a:solidFill>
@@ -27140,7 +32099,7 @@
 </p:sld>
 </file>
 
-<file path=ppt/slides/slide4.xml><?xml version="1.0" encoding="utf-8"?>
+<file path=ppt/slides/slide5.xml><?xml version="1.0" encoding="utf-8"?>
 <p:sld xmlns:a="http://schemas.openxmlformats.org/drawingml/2006/main" xmlns:r="http://schemas.openxmlformats.org/officeDocument/2006/relationships" xmlns:p="http://schemas.openxmlformats.org/presentationml/2006/main">
   <p:cSld>
     <p:spTree>
@@ -27448,7 +32407,7 @@
                   <a:srgbClr val="002060"/>
                 </a:solidFill>
               </a:rPr>
-              <a:t>4</a:t>
+              <a:t>5</a:t>
             </a:fld>
             <a:endParaRPr lang="it-IT" sz="1500" b="1" dirty="0">
               <a:solidFill>
@@ -27978,7 +32937,7 @@
 </p:sld>
 </file>
 
-<file path=ppt/slides/slide5.xml><?xml version="1.0" encoding="utf-8"?>
+<file path=ppt/slides/slide6.xml><?xml version="1.0" encoding="utf-8"?>
 <p:sld xmlns:a="http://schemas.openxmlformats.org/drawingml/2006/main" xmlns:r="http://schemas.openxmlformats.org/officeDocument/2006/relationships" xmlns:p="http://schemas.openxmlformats.org/presentationml/2006/main">
   <p:cSld>
     <p:spTree>
@@ -28246,7 +33205,7 @@
                   <a:srgbClr val="002060"/>
                 </a:solidFill>
               </a:rPr>
-              <a:t>5</a:t>
+              <a:t>6</a:t>
             </a:fld>
             <a:endParaRPr lang="it-IT" sz="1500" b="1" dirty="0">
               <a:solidFill>
@@ -28713,7 +33672,7 @@
 </p:sld>
 </file>
 
-<file path=ppt/slides/slide6.xml><?xml version="1.0" encoding="utf-8"?>
+<file path=ppt/slides/slide7.xml><?xml version="1.0" encoding="utf-8"?>
 <p:sld xmlns:a="http://schemas.openxmlformats.org/drawingml/2006/main" xmlns:r="http://schemas.openxmlformats.org/officeDocument/2006/relationships" xmlns:p="http://schemas.openxmlformats.org/presentationml/2006/main">
   <p:cSld>
     <p:spTree>
@@ -29172,7 +34131,7 @@
                   <a:srgbClr val="002060"/>
                 </a:solidFill>
               </a:rPr>
-              <a:t>6</a:t>
+              <a:t>7</a:t>
             </a:fld>
             <a:endParaRPr lang="it-IT" sz="1500" b="1" dirty="0">
               <a:solidFill>
@@ -29788,7 +34747,7 @@
 </p:sld>
 </file>
 
-<file path=ppt/slides/slide7.xml><?xml version="1.0" encoding="utf-8"?>
+<file path=ppt/slides/slide8.xml><?xml version="1.0" encoding="utf-8"?>
 <p:sld xmlns:a="http://schemas.openxmlformats.org/drawingml/2006/main" xmlns:r="http://schemas.openxmlformats.org/officeDocument/2006/relationships" xmlns:p="http://schemas.openxmlformats.org/presentationml/2006/main">
   <p:cSld>
     <p:spTree>
@@ -29928,8 +34887,8 @@
           </a:p>
         </p:txBody>
       </p:sp>
-      <mc:AlternateContent xmlns:mc="http://schemas.openxmlformats.org/markup-compatibility/2006">
-        <mc:Choice xmlns:a14="http://schemas.microsoft.com/office/drawing/2010/main" Requires="a14">
+      <mc:AlternateContent xmlns:mc="http://schemas.openxmlformats.org/markup-compatibility/2006" xmlns:a14="http://schemas.microsoft.com/office/drawing/2010/main">
+        <mc:Choice Requires="a14">
           <p:sp>
             <p:nvSpPr>
               <p:cNvPr id="3" name="Segnaposto contenuto 2">
@@ -30170,7 +35129,7 @@
             </p:txBody>
           </p:sp>
         </mc:Choice>
-        <mc:Fallback>
+        <mc:Fallback xmlns="">
           <p:sp>
             <p:nvSpPr>
               <p:cNvPr id="3" name="Segnaposto contenuto 2">
@@ -30320,7 +35279,7 @@
                   <a:srgbClr val="002060"/>
                 </a:solidFill>
               </a:rPr>
-              <a:t>7</a:t>
+              <a:t>8</a:t>
             </a:fld>
             <a:endParaRPr lang="it-IT" sz="1500" b="1" dirty="0">
               <a:solidFill>
@@ -30386,7 +35345,7 @@
 </p:sld>
 </file>
 
-<file path=ppt/slides/slide8.xml><?xml version="1.0" encoding="utf-8"?>
+<file path=ppt/slides/slide9.xml><?xml version="1.0" encoding="utf-8"?>
 <p:sld xmlns:a="http://schemas.openxmlformats.org/drawingml/2006/main" xmlns:r="http://schemas.openxmlformats.org/officeDocument/2006/relationships" xmlns:p="http://schemas.openxmlformats.org/presentationml/2006/main">
   <p:cSld>
     <p:spTree>
@@ -30490,8 +35449,8 @@
           </a:p>
         </p:txBody>
       </p:sp>
-      <mc:AlternateContent xmlns:mc="http://schemas.openxmlformats.org/markup-compatibility/2006">
-        <mc:Choice xmlns:a14="http://schemas.microsoft.com/office/drawing/2010/main" Requires="a14">
+      <mc:AlternateContent xmlns:mc="http://schemas.openxmlformats.org/markup-compatibility/2006" xmlns:a14="http://schemas.microsoft.com/office/drawing/2010/main">
+        <mc:Choice Requires="a14">
           <p:sp>
             <p:nvSpPr>
               <p:cNvPr id="3" name="Segnaposto contenuto 2">
@@ -30808,7 +35767,7 @@
             </p:txBody>
           </p:sp>
         </mc:Choice>
-        <mc:Fallback>
+        <mc:Fallback xmlns="">
           <p:sp>
             <p:nvSpPr>
               <p:cNvPr id="3" name="Segnaposto contenuto 2">
@@ -30958,7 +35917,7 @@
                   <a:srgbClr val="002060"/>
                 </a:solidFill>
               </a:rPr>
-              <a:t>8</a:t>
+              <a:t>9</a:t>
             </a:fld>
             <a:endParaRPr lang="it-IT" sz="1500" b="1" dirty="0">
               <a:solidFill>
@@ -31243,1345 +36202,6 @@
     <p:extLst>
       <p:ext uri="{BB962C8B-B14F-4D97-AF65-F5344CB8AC3E}">
         <p14:creationId xmlns:p14="http://schemas.microsoft.com/office/powerpoint/2010/main" val="3036113469"/>
-      </p:ext>
-    </p:extLst>
-  </p:cSld>
-  <p:clrMapOvr>
-    <a:masterClrMapping/>
-  </p:clrMapOvr>
-</p:sld>
-</file>
-
-<file path=ppt/slides/slide9.xml><?xml version="1.0" encoding="utf-8"?>
-<p:sld xmlns:a="http://schemas.openxmlformats.org/drawingml/2006/main" xmlns:r="http://schemas.openxmlformats.org/officeDocument/2006/relationships" xmlns:p="http://schemas.openxmlformats.org/presentationml/2006/main">
-  <p:cSld>
-    <p:spTree>
-      <p:nvGrpSpPr>
-        <p:cNvPr id="1" name="">
-          <a:extLst>
-            <a:ext uri="{FF2B5EF4-FFF2-40B4-BE49-F238E27FC236}">
-              <a16:creationId xmlns:a16="http://schemas.microsoft.com/office/drawing/2014/main" id="{EFAE89F9-D1FA-1576-64FD-A2EB689BC090}"/>
-            </a:ext>
-          </a:extLst>
-        </p:cNvPr>
-        <p:cNvGrpSpPr/>
-        <p:nvPr/>
-      </p:nvGrpSpPr>
-      <p:grpSpPr>
-        <a:xfrm>
-          <a:off x="0" y="0"/>
-          <a:ext cx="0" cy="0"/>
-          <a:chOff x="0" y="0"/>
-          <a:chExt cx="0" cy="0"/>
-        </a:xfrm>
-      </p:grpSpPr>
-      <p:pic>
-        <p:nvPicPr>
-          <p:cNvPr id="26" name="Immagine 25">
-            <a:extLst>
-              <a:ext uri="{FF2B5EF4-FFF2-40B4-BE49-F238E27FC236}">
-                <a16:creationId xmlns:a16="http://schemas.microsoft.com/office/drawing/2014/main" id="{8E94EB5A-4F43-6CBD-4C92-4CA9F1757A37}"/>
-              </a:ext>
-            </a:extLst>
-          </p:cNvPr>
-          <p:cNvPicPr>
-            <a:picLocks noChangeAspect="1"/>
-          </p:cNvPicPr>
-          <p:nvPr/>
-        </p:nvPicPr>
-        <p:blipFill>
-          <a:blip r:embed="rId3">
-            <a:extLst>
-              <a:ext uri="{28A0092B-C50C-407E-A947-70E740481C1C}">
-                <a14:useLocalDpi xmlns:a14="http://schemas.microsoft.com/office/drawing/2010/main" val="0"/>
-              </a:ext>
-            </a:extLst>
-          </a:blip>
-          <a:stretch>
-            <a:fillRect/>
-          </a:stretch>
-        </p:blipFill>
-        <p:spPr>
-          <a:xfrm>
-            <a:off x="6651267" y="3241606"/>
-            <a:ext cx="3918670" cy="3420000"/>
-          </a:xfrm>
-          <a:prstGeom prst="rect">
-            <a:avLst/>
-          </a:prstGeom>
-        </p:spPr>
-      </p:pic>
-      <p:pic>
-        <p:nvPicPr>
-          <p:cNvPr id="28" name="Segnaposto contenuto 13">
-            <a:extLst>
-              <a:ext uri="{FF2B5EF4-FFF2-40B4-BE49-F238E27FC236}">
-                <a16:creationId xmlns:a16="http://schemas.microsoft.com/office/drawing/2014/main" id="{F000813B-5FBF-D20E-DACE-03AC95F53943}"/>
-              </a:ext>
-            </a:extLst>
-          </p:cNvPr>
-          <p:cNvPicPr>
-            <a:picLocks noChangeAspect="1"/>
-          </p:cNvPicPr>
-          <p:nvPr/>
-        </p:nvPicPr>
-        <p:blipFill>
-          <a:blip r:embed="rId4">
-            <a:extLst>
-              <a:ext uri="{28A0092B-C50C-407E-A947-70E740481C1C}">
-                <a14:useLocalDpi xmlns:a14="http://schemas.microsoft.com/office/drawing/2010/main" val="0"/>
-              </a:ext>
-            </a:extLst>
-          </a:blip>
-          <a:srcRect/>
-          <a:stretch/>
-        </p:blipFill>
-        <p:spPr>
-          <a:xfrm>
-            <a:off x="1622066" y="3241642"/>
-            <a:ext cx="3918667" cy="3419927"/>
-          </a:xfrm>
-          <a:prstGeom prst="rect">
-            <a:avLst/>
-          </a:prstGeom>
-        </p:spPr>
-      </p:pic>
-      <p:sp>
-        <p:nvSpPr>
-          <p:cNvPr id="2" name="Titolo 1">
-            <a:extLst>
-              <a:ext uri="{FF2B5EF4-FFF2-40B4-BE49-F238E27FC236}">
-                <a16:creationId xmlns:a16="http://schemas.microsoft.com/office/drawing/2014/main" id="{B4565F3B-3ED1-0D04-5BA8-550046893FDE}"/>
-              </a:ext>
-            </a:extLst>
-          </p:cNvPr>
-          <p:cNvSpPr>
-            <a:spLocks noGrp="1"/>
-          </p:cNvSpPr>
-          <p:nvPr>
-            <p:ph type="title"/>
-          </p:nvPr>
-        </p:nvSpPr>
-        <p:spPr>
-          <a:xfrm>
-            <a:off x="38100" y="69651"/>
-            <a:ext cx="12114000" cy="1153094"/>
-          </a:xfrm>
-          <a:prstGeom prst="roundRect">
-            <a:avLst>
-              <a:gd name="adj" fmla="val 36459"/>
-            </a:avLst>
-          </a:prstGeom>
-          <a:noFill/>
-        </p:spPr>
-        <p:txBody>
-          <a:bodyPr>
-            <a:normAutofit/>
-          </a:bodyPr>
-          <a:lstStyle/>
-          <a:p>
-            <a:r>
-              <a:rPr lang="it-IT" b="1" dirty="0">
-                <a:solidFill>
-                  <a:srgbClr val="002060"/>
-                </a:solidFill>
-              </a:rPr>
-              <a:t>	2. PREVIOUS ANALYSIS: CRYSTAL EDGES</a:t>
-            </a:r>
-          </a:p>
-        </p:txBody>
-      </p:sp>
-      <mc:AlternateContent xmlns:mc="http://schemas.openxmlformats.org/markup-compatibility/2006">
-        <mc:Choice xmlns:a14="http://schemas.microsoft.com/office/drawing/2010/main" Requires="a14">
-          <p:sp>
-            <p:nvSpPr>
-              <p:cNvPr id="3" name="Segnaposto contenuto 2">
-                <a:extLst>
-                  <a:ext uri="{FF2B5EF4-FFF2-40B4-BE49-F238E27FC236}">
-                    <a16:creationId xmlns:a16="http://schemas.microsoft.com/office/drawing/2014/main" id="{72EEC9D3-1E73-78F7-9E6A-5F7C3C212E79}"/>
-                  </a:ext>
-                </a:extLst>
-              </p:cNvPr>
-              <p:cNvSpPr>
-                <a:spLocks noGrp="1"/>
-              </p:cNvSpPr>
-              <p:nvPr>
-                <p:ph idx="1"/>
-              </p:nvPr>
-            </p:nvSpPr>
-            <p:spPr>
-              <a:xfrm>
-                <a:off x="838200" y="1401288"/>
-                <a:ext cx="10515600" cy="4776227"/>
-              </a:xfrm>
-            </p:spPr>
-            <p:txBody>
-              <a:bodyPr>
-                <a:noAutofit/>
-              </a:bodyPr>
-              <a:lstStyle/>
-              <a:p>
-                <a:r>
-                  <a:rPr lang="it-IT" sz="2400" dirty="0"/>
-                  <a:t>To </a:t>
-                </a:r>
-                <a:r>
-                  <a:rPr lang="it-IT" sz="2400" dirty="0" err="1"/>
-                  <a:t>define</a:t>
-                </a:r>
-                <a:r>
-                  <a:rPr lang="it-IT" sz="2400" dirty="0"/>
-                  <a:t> the </a:t>
-                </a:r>
-                <a:r>
-                  <a:rPr lang="it-IT" sz="2400" dirty="0" err="1"/>
-                  <a:t>true</a:t>
-                </a:r>
-                <a:r>
-                  <a:rPr lang="it-IT" sz="2400" dirty="0"/>
-                  <a:t> footprint </a:t>
-                </a:r>
-                <a:r>
-                  <a:rPr lang="it-IT" sz="2400" dirty="0" err="1"/>
-                  <a:t>at</a:t>
-                </a:r>
-                <a:r>
-                  <a:rPr lang="it-IT" sz="2400" dirty="0"/>
-                  <a:t> the </a:t>
-                </a:r>
-                <a:r>
-                  <a:rPr lang="it-IT" sz="2400" dirty="0" err="1"/>
-                  <a:t>entrance</a:t>
-                </a:r>
-                <a:r>
-                  <a:rPr lang="it-IT" sz="2400" dirty="0"/>
-                  <a:t> face we must project the downstream </a:t>
-                </a:r>
-                <a:r>
-                  <a:rPr lang="it-IT" sz="2400" dirty="0" err="1"/>
-                  <a:t>edges</a:t>
-                </a:r>
-                <a:r>
-                  <a:rPr lang="it-IT" sz="2400" dirty="0"/>
-                  <a:t> back upstream.</a:t>
-                </a:r>
-              </a:p>
-              <a:p>
-                <a:r>
-                  <a:rPr lang="it-IT" sz="2400" dirty="0"/>
-                  <a:t>We </a:t>
-                </a:r>
-                <a:r>
-                  <a:rPr lang="it-IT" sz="2400" dirty="0" err="1"/>
-                  <a:t>need</a:t>
-                </a:r>
-                <a:r>
-                  <a:rPr lang="it-IT" sz="2400" dirty="0"/>
-                  <a:t> to </a:t>
-                </a:r>
-                <a:r>
-                  <a:rPr lang="it-IT" sz="2400" dirty="0" err="1"/>
-                  <a:t>subtract</a:t>
-                </a:r>
-                <a:r>
-                  <a:rPr lang="it-IT" sz="2400" dirty="0"/>
-                  <a:t> a shift </a:t>
-                </a:r>
-                <a14:m>
-                  <m:oMath xmlns:m="http://schemas.openxmlformats.org/officeDocument/2006/math">
-                    <m:r>
-                      <m:rPr>
-                        <m:sty m:val="p"/>
-                      </m:rPr>
-                      <a:rPr lang="it-IT" sz="2400" b="0" i="0" smtClean="0">
-                        <a:latin typeface="Cambria Math" panose="02040503050406030204" pitchFamily="18" charset="0"/>
-                      </a:rPr>
-                      <m:t>Δ</m:t>
-                    </m:r>
-                    <m:r>
-                      <a:rPr lang="it-IT" sz="2400" b="0" i="1" smtClean="0">
-                        <a:latin typeface="Cambria Math" panose="02040503050406030204" pitchFamily="18" charset="0"/>
-                      </a:rPr>
-                      <m:t>𝑥</m:t>
-                    </m:r>
-                  </m:oMath>
-                </a14:m>
-                <a:r>
-                  <a:rPr lang="it-IT" sz="2400" dirty="0"/>
-                  <a:t> from the downstream </a:t>
-                </a:r>
-                <a:r>
-                  <a:rPr lang="it-IT" sz="2400" dirty="0" err="1"/>
-                  <a:t>edge</a:t>
-                </a:r>
-                <a:r>
-                  <a:rPr lang="it-IT" sz="2400" dirty="0"/>
-                  <a:t> position.</a:t>
-                </a:r>
-              </a:p>
-              <a:p>
-                <a:r>
-                  <a:rPr lang="it-IT" sz="2400" dirty="0" err="1"/>
-                  <a:t>Channeled</a:t>
-                </a:r>
-                <a:r>
-                  <a:rPr lang="it-IT" sz="2400" dirty="0"/>
-                  <a:t> </a:t>
-                </a:r>
-                <a:r>
-                  <a:rPr lang="it-IT" sz="2400" dirty="0" err="1"/>
-                  <a:t>particles</a:t>
-                </a:r>
-                <a:r>
-                  <a:rPr lang="it-IT" sz="2400" dirty="0"/>
-                  <a:t> follow the </a:t>
-                </a:r>
-                <a:r>
-                  <a:rPr lang="it-IT" sz="2400" dirty="0" err="1"/>
-                  <a:t>bent</a:t>
-                </a:r>
-                <a:r>
-                  <a:rPr lang="it-IT" sz="2400" dirty="0"/>
-                  <a:t> lattice </a:t>
-                </a:r>
-                <a:r>
-                  <a:rPr lang="it-IT" sz="2400" dirty="0" err="1"/>
-                  <a:t>planes</a:t>
-                </a:r>
-                <a:r>
-                  <a:rPr lang="it-IT" sz="2400" dirty="0"/>
-                  <a:t>, </a:t>
-                </a:r>
-                <a:r>
-                  <a:rPr lang="it-IT" sz="2400" dirty="0" err="1"/>
-                  <a:t>resulting</a:t>
-                </a:r>
-                <a:r>
-                  <a:rPr lang="it-IT" sz="2400" dirty="0"/>
-                  <a:t> in a </a:t>
-                </a:r>
-                <a:r>
-                  <a:rPr lang="it-IT" sz="2400" dirty="0" err="1"/>
-                  <a:t>lateral</a:t>
-                </a:r>
-                <a:r>
-                  <a:rPr lang="it-IT" sz="2400" dirty="0"/>
-                  <a:t> </a:t>
-                </a:r>
-                <a:r>
-                  <a:rPr lang="it-IT" sz="2400" dirty="0" err="1"/>
-                  <a:t>geometric</a:t>
-                </a:r>
-                <a:r>
-                  <a:rPr lang="it-IT" sz="2400" dirty="0"/>
-                  <a:t> drift </a:t>
-                </a:r>
-                <a:r>
-                  <a:rPr lang="it-IT" sz="2400" dirty="0" err="1"/>
-                  <a:t>along</a:t>
-                </a:r>
-                <a:r>
-                  <a:rPr lang="it-IT" sz="2400" dirty="0"/>
-                  <a:t> the x-</a:t>
-                </a:r>
-                <a:r>
-                  <a:rPr lang="it-IT" sz="2400" dirty="0" err="1"/>
-                  <a:t>axis</a:t>
-                </a:r>
-                <a:r>
-                  <a:rPr lang="it-IT" sz="2400" dirty="0"/>
-                  <a:t> </a:t>
-                </a:r>
-                <a:r>
-                  <a:rPr lang="it-IT" sz="2400" dirty="0" err="1"/>
-                  <a:t>as</a:t>
-                </a:r>
-                <a:r>
-                  <a:rPr lang="it-IT" sz="2400" dirty="0"/>
-                  <a:t> </a:t>
-                </a:r>
-                <a:r>
-                  <a:rPr lang="it-IT" sz="2400" dirty="0" err="1"/>
-                  <a:t>they</a:t>
-                </a:r>
-                <a:r>
-                  <a:rPr lang="it-IT" sz="2400" dirty="0"/>
-                  <a:t> traverse the </a:t>
-                </a:r>
-                <a:r>
-                  <a:rPr lang="it-IT" sz="2400" dirty="0" err="1"/>
-                  <a:t>crystal</a:t>
-                </a:r>
-                <a:r>
-                  <a:rPr lang="it-IT" sz="2400" dirty="0"/>
-                  <a:t>.</a:t>
-                </a:r>
-              </a:p>
-            </p:txBody>
-          </p:sp>
-        </mc:Choice>
-        <mc:Fallback>
-          <p:sp>
-            <p:nvSpPr>
-              <p:cNvPr id="3" name="Segnaposto contenuto 2">
-                <a:extLst>
-                  <a:ext uri="{FF2B5EF4-FFF2-40B4-BE49-F238E27FC236}">
-                    <a16:creationId xmlns:a16="http://schemas.microsoft.com/office/drawing/2014/main" id="{72EEC9D3-1E73-78F7-9E6A-5F7C3C212E79}"/>
-                  </a:ext>
-                </a:extLst>
-              </p:cNvPr>
-              <p:cNvSpPr>
-                <a:spLocks noGrp="1" noRot="1" noChangeAspect="1" noMove="1" noResize="1" noEditPoints="1" noAdjustHandles="1" noChangeArrowheads="1" noChangeShapeType="1" noTextEdit="1"/>
-              </p:cNvSpPr>
-              <p:nvPr>
-                <p:ph idx="1"/>
-              </p:nvPr>
-            </p:nvSpPr>
-            <p:spPr>
-              <a:xfrm>
-                <a:off x="838200" y="1401288"/>
-                <a:ext cx="10515600" cy="4776227"/>
-              </a:xfrm>
-              <a:blipFill>
-                <a:blip r:embed="rId5"/>
-                <a:stretch>
-                  <a:fillRect l="-812" t="-1660"/>
-                </a:stretch>
-              </a:blipFill>
-            </p:spPr>
-            <p:txBody>
-              <a:bodyPr/>
-              <a:lstStyle/>
-              <a:p>
-                <a:r>
-                  <a:rPr lang="it-IT">
-                    <a:noFill/>
-                  </a:rPr>
-                  <a:t> </a:t>
-                </a:r>
-              </a:p>
-            </p:txBody>
-          </p:sp>
-        </mc:Fallback>
-      </mc:AlternateContent>
-      <p:sp>
-        <p:nvSpPr>
-          <p:cNvPr id="4" name="Segnaposto data 3">
-            <a:extLst>
-              <a:ext uri="{FF2B5EF4-FFF2-40B4-BE49-F238E27FC236}">
-                <a16:creationId xmlns:a16="http://schemas.microsoft.com/office/drawing/2014/main" id="{AE8817D2-0A9B-0FAF-36DE-4A11DA6A530E}"/>
-              </a:ext>
-            </a:extLst>
-          </p:cNvPr>
-          <p:cNvSpPr>
-            <a:spLocks noGrp="1"/>
-          </p:cNvSpPr>
-          <p:nvPr>
-            <p:ph type="dt" sz="half" idx="10"/>
-          </p:nvPr>
-        </p:nvSpPr>
-        <p:spPr>
-          <a:xfrm>
-            <a:off x="838200" y="6356349"/>
-            <a:ext cx="2743200" cy="432000"/>
-          </a:xfrm>
-        </p:spPr>
-        <p:txBody>
-          <a:bodyPr/>
-          <a:lstStyle/>
-          <a:p>
-            <a:r>
-              <a:rPr lang="it-IT" sz="1500" b="1" dirty="0">
-                <a:solidFill>
-                  <a:srgbClr val="002060"/>
-                </a:solidFill>
-              </a:rPr>
-              <a:t>July 2026</a:t>
-            </a:r>
-          </a:p>
-        </p:txBody>
-      </p:sp>
-      <p:sp>
-        <p:nvSpPr>
-          <p:cNvPr id="5" name="Segnaposto piè di pagina 4">
-            <a:extLst>
-              <a:ext uri="{FF2B5EF4-FFF2-40B4-BE49-F238E27FC236}">
-                <a16:creationId xmlns:a16="http://schemas.microsoft.com/office/drawing/2014/main" id="{968EBD17-4982-87E2-3CDB-90B5380C2171}"/>
-              </a:ext>
-            </a:extLst>
-          </p:cNvPr>
-          <p:cNvSpPr>
-            <a:spLocks noGrp="1"/>
-          </p:cNvSpPr>
-          <p:nvPr>
-            <p:ph type="ftr" sz="quarter" idx="11"/>
-          </p:nvPr>
-        </p:nvSpPr>
-        <p:spPr>
-          <a:xfrm>
-            <a:off x="0" y="6356349"/>
-            <a:ext cx="12192000" cy="432000"/>
-          </a:xfrm>
-        </p:spPr>
-        <p:txBody>
-          <a:bodyPr/>
-          <a:lstStyle/>
-          <a:p>
-            <a:r>
-              <a:rPr lang="it-IT" sz="1500" b="1" dirty="0">
-                <a:solidFill>
-                  <a:srgbClr val="002060"/>
-                </a:solidFill>
-              </a:rPr>
-              <a:t>Anna Sofia Moro</a:t>
-            </a:r>
-          </a:p>
-        </p:txBody>
-      </p:sp>
-      <p:sp>
-        <p:nvSpPr>
-          <p:cNvPr id="6" name="Segnaposto numero diapositiva 5">
-            <a:extLst>
-              <a:ext uri="{FF2B5EF4-FFF2-40B4-BE49-F238E27FC236}">
-                <a16:creationId xmlns:a16="http://schemas.microsoft.com/office/drawing/2014/main" id="{6107B5E3-3B9D-1082-353B-3394C8D104D8}"/>
-              </a:ext>
-            </a:extLst>
-          </p:cNvPr>
-          <p:cNvSpPr>
-            <a:spLocks noGrp="1"/>
-          </p:cNvSpPr>
-          <p:nvPr>
-            <p:ph type="sldNum" sz="quarter" idx="12"/>
-          </p:nvPr>
-        </p:nvSpPr>
-        <p:spPr>
-          <a:xfrm>
-            <a:off x="8610600" y="6356349"/>
-            <a:ext cx="2743200" cy="432000"/>
-          </a:xfrm>
-        </p:spPr>
-        <p:txBody>
-          <a:bodyPr/>
-          <a:lstStyle/>
-          <a:p>
-            <a:fld id="{0A318BD9-CA14-4A83-ACF0-03D5918EB402}" type="slidenum">
-              <a:rPr lang="it-IT" sz="1500" b="1" smtClean="0">
-                <a:solidFill>
-                  <a:srgbClr val="002060"/>
-                </a:solidFill>
-              </a:rPr>
-              <a:t>9</a:t>
-            </a:fld>
-            <a:endParaRPr lang="it-IT" sz="1500" b="1" dirty="0">
-              <a:solidFill>
-                <a:srgbClr val="002060"/>
-              </a:solidFill>
-            </a:endParaRPr>
-          </a:p>
-        </p:txBody>
-      </p:sp>
-      <p:cxnSp>
-        <p:nvCxnSpPr>
-          <p:cNvPr id="10" name="Connettore diritto 9">
-            <a:extLst>
-              <a:ext uri="{FF2B5EF4-FFF2-40B4-BE49-F238E27FC236}">
-                <a16:creationId xmlns:a16="http://schemas.microsoft.com/office/drawing/2014/main" id="{CC47FAF3-C921-892C-9CA4-BE050B1D5E9B}"/>
-              </a:ext>
-            </a:extLst>
-          </p:cNvPr>
-          <p:cNvCxnSpPr>
-            <a:cxnSpLocks/>
-          </p:cNvCxnSpPr>
-          <p:nvPr/>
-        </p:nvCxnSpPr>
-        <p:spPr>
-          <a:xfrm>
-            <a:off x="696000" y="1155368"/>
-            <a:ext cx="10800000" cy="0"/>
-          </a:xfrm>
-          <a:prstGeom prst="line">
-            <a:avLst/>
-          </a:prstGeom>
-          <a:ln w="38100">
-            <a:solidFill>
-              <a:srgbClr val="002060"/>
-            </a:solidFill>
-          </a:ln>
-        </p:spPr>
-        <p:style>
-          <a:lnRef idx="2">
-            <a:schemeClr val="accent1"/>
-          </a:lnRef>
-          <a:fillRef idx="0">
-            <a:schemeClr val="accent1"/>
-          </a:fillRef>
-          <a:effectRef idx="1">
-            <a:schemeClr val="accent1"/>
-          </a:effectRef>
-          <a:fontRef idx="minor">
-            <a:schemeClr val="tx1"/>
-          </a:fontRef>
-        </p:style>
-      </p:cxnSp>
-      <p:sp>
-        <p:nvSpPr>
-          <p:cNvPr id="7" name="Rettangolo 6">
-            <a:extLst>
-              <a:ext uri="{FF2B5EF4-FFF2-40B4-BE49-F238E27FC236}">
-                <a16:creationId xmlns:a16="http://schemas.microsoft.com/office/drawing/2014/main" id="{0188A4B1-7E67-D966-06CE-BDB22631CF37}"/>
-              </a:ext>
-            </a:extLst>
-          </p:cNvPr>
-          <p:cNvSpPr/>
-          <p:nvPr/>
-        </p:nvSpPr>
-        <p:spPr>
-          <a:xfrm>
-            <a:off x="2324100" y="4806951"/>
-            <a:ext cx="1019175" cy="1422618"/>
-          </a:xfrm>
-          <a:prstGeom prst="rect">
-            <a:avLst/>
-          </a:prstGeom>
-          <a:noFill/>
-          <a:ln w="28575">
-            <a:solidFill>
-              <a:srgbClr val="FF0000"/>
-            </a:solidFill>
-          </a:ln>
-        </p:spPr>
-        <p:style>
-          <a:lnRef idx="2">
-            <a:schemeClr val="accent1">
-              <a:shade val="15000"/>
-            </a:schemeClr>
-          </a:lnRef>
-          <a:fillRef idx="1">
-            <a:schemeClr val="accent1"/>
-          </a:fillRef>
-          <a:effectRef idx="0">
-            <a:schemeClr val="accent1"/>
-          </a:effectRef>
-          <a:fontRef idx="minor">
-            <a:schemeClr val="lt1"/>
-          </a:fontRef>
-        </p:style>
-        <p:txBody>
-          <a:bodyPr rtlCol="0" anchor="ctr"/>
-          <a:lstStyle/>
-          <a:p>
-            <a:pPr algn="ctr"/>
-            <a:endParaRPr lang="it-IT"/>
-          </a:p>
-        </p:txBody>
-      </p:sp>
-      <p:sp>
-        <p:nvSpPr>
-          <p:cNvPr id="9" name="Rettangolo 8">
-            <a:extLst>
-              <a:ext uri="{FF2B5EF4-FFF2-40B4-BE49-F238E27FC236}">
-                <a16:creationId xmlns:a16="http://schemas.microsoft.com/office/drawing/2014/main" id="{5637B16E-48F5-279D-9F6C-C63C2AAE3BFD}"/>
-              </a:ext>
-            </a:extLst>
-          </p:cNvPr>
-          <p:cNvSpPr/>
-          <p:nvPr/>
-        </p:nvSpPr>
-        <p:spPr>
-          <a:xfrm>
-            <a:off x="7468317" y="4806951"/>
-            <a:ext cx="1019175" cy="1422618"/>
-          </a:xfrm>
-          <a:prstGeom prst="rect">
-            <a:avLst/>
-          </a:prstGeom>
-          <a:noFill/>
-          <a:ln w="28575">
-            <a:solidFill>
-              <a:srgbClr val="FF0000"/>
-            </a:solidFill>
-          </a:ln>
-        </p:spPr>
-        <p:style>
-          <a:lnRef idx="2">
-            <a:schemeClr val="accent1">
-              <a:shade val="15000"/>
-            </a:schemeClr>
-          </a:lnRef>
-          <a:fillRef idx="1">
-            <a:schemeClr val="accent1"/>
-          </a:fillRef>
-          <a:effectRef idx="0">
-            <a:schemeClr val="accent1"/>
-          </a:effectRef>
-          <a:fontRef idx="minor">
-            <a:schemeClr val="lt1"/>
-          </a:fontRef>
-        </p:style>
-        <p:txBody>
-          <a:bodyPr rtlCol="0" anchor="ctr"/>
-          <a:lstStyle/>
-          <a:p>
-            <a:pPr algn="ctr"/>
-            <a:endParaRPr lang="it-IT"/>
-          </a:p>
-        </p:txBody>
-      </p:sp>
-      <p:cxnSp>
-        <p:nvCxnSpPr>
-          <p:cNvPr id="12" name="Connettore diritto 11">
-            <a:extLst>
-              <a:ext uri="{FF2B5EF4-FFF2-40B4-BE49-F238E27FC236}">
-                <a16:creationId xmlns:a16="http://schemas.microsoft.com/office/drawing/2014/main" id="{FE88FD1A-5454-5AA8-1606-1C9938301A25}"/>
-              </a:ext>
-            </a:extLst>
-          </p:cNvPr>
-          <p:cNvCxnSpPr>
-            <a:cxnSpLocks/>
-          </p:cNvCxnSpPr>
-          <p:nvPr/>
-        </p:nvCxnSpPr>
-        <p:spPr>
-          <a:xfrm>
-            <a:off x="2315634" y="3429000"/>
-            <a:ext cx="0" cy="1038225"/>
-          </a:xfrm>
-          <a:prstGeom prst="line">
-            <a:avLst/>
-          </a:prstGeom>
-          <a:ln>
-            <a:solidFill>
-              <a:srgbClr val="FF0000"/>
-            </a:solidFill>
-            <a:prstDash val="sysDot"/>
-          </a:ln>
-        </p:spPr>
-        <p:style>
-          <a:lnRef idx="2">
-            <a:schemeClr val="accent1"/>
-          </a:lnRef>
-          <a:fillRef idx="0">
-            <a:schemeClr val="accent1"/>
-          </a:fillRef>
-          <a:effectRef idx="1">
-            <a:schemeClr val="accent1"/>
-          </a:effectRef>
-          <a:fontRef idx="minor">
-            <a:schemeClr val="tx1"/>
-          </a:fontRef>
-        </p:style>
-      </p:cxnSp>
-      <p:cxnSp>
-        <p:nvCxnSpPr>
-          <p:cNvPr id="15" name="Connettore diritto 14">
-            <a:extLst>
-              <a:ext uri="{FF2B5EF4-FFF2-40B4-BE49-F238E27FC236}">
-                <a16:creationId xmlns:a16="http://schemas.microsoft.com/office/drawing/2014/main" id="{AE15623F-17A3-2E34-83DC-B4A12FAAEE97}"/>
-              </a:ext>
-            </a:extLst>
-          </p:cNvPr>
-          <p:cNvCxnSpPr>
-            <a:cxnSpLocks/>
-          </p:cNvCxnSpPr>
-          <p:nvPr/>
-        </p:nvCxnSpPr>
-        <p:spPr>
-          <a:xfrm>
-            <a:off x="3343275" y="3440113"/>
-            <a:ext cx="0" cy="1038225"/>
-          </a:xfrm>
-          <a:prstGeom prst="line">
-            <a:avLst/>
-          </a:prstGeom>
-          <a:ln>
-            <a:solidFill>
-              <a:srgbClr val="FF0000"/>
-            </a:solidFill>
-            <a:prstDash val="sysDot"/>
-          </a:ln>
-        </p:spPr>
-        <p:style>
-          <a:lnRef idx="2">
-            <a:schemeClr val="accent1"/>
-          </a:lnRef>
-          <a:fillRef idx="0">
-            <a:schemeClr val="accent1"/>
-          </a:fillRef>
-          <a:effectRef idx="1">
-            <a:schemeClr val="accent1"/>
-          </a:effectRef>
-          <a:fontRef idx="minor">
-            <a:schemeClr val="tx1"/>
-          </a:fontRef>
-        </p:style>
-      </p:cxnSp>
-      <p:cxnSp>
-        <p:nvCxnSpPr>
-          <p:cNvPr id="16" name="Connettore diritto 15">
-            <a:extLst>
-              <a:ext uri="{FF2B5EF4-FFF2-40B4-BE49-F238E27FC236}">
-                <a16:creationId xmlns:a16="http://schemas.microsoft.com/office/drawing/2014/main" id="{D617B793-7839-5993-11C5-7A31728C7F0B}"/>
-              </a:ext>
-            </a:extLst>
-          </p:cNvPr>
-          <p:cNvCxnSpPr>
-            <a:cxnSpLocks/>
-          </p:cNvCxnSpPr>
-          <p:nvPr/>
-        </p:nvCxnSpPr>
-        <p:spPr>
-          <a:xfrm>
-            <a:off x="7474220" y="3440113"/>
-            <a:ext cx="0" cy="1038225"/>
-          </a:xfrm>
-          <a:prstGeom prst="line">
-            <a:avLst/>
-          </a:prstGeom>
-          <a:ln>
-            <a:solidFill>
-              <a:srgbClr val="FF0000"/>
-            </a:solidFill>
-            <a:prstDash val="sysDot"/>
-          </a:ln>
-        </p:spPr>
-        <p:style>
-          <a:lnRef idx="2">
-            <a:schemeClr val="accent1"/>
-          </a:lnRef>
-          <a:fillRef idx="0">
-            <a:schemeClr val="accent1"/>
-          </a:fillRef>
-          <a:effectRef idx="1">
-            <a:schemeClr val="accent1"/>
-          </a:effectRef>
-          <a:fontRef idx="minor">
-            <a:schemeClr val="tx1"/>
-          </a:fontRef>
-        </p:style>
-      </p:cxnSp>
-      <p:cxnSp>
-        <p:nvCxnSpPr>
-          <p:cNvPr id="17" name="Connettore diritto 16">
-            <a:extLst>
-              <a:ext uri="{FF2B5EF4-FFF2-40B4-BE49-F238E27FC236}">
-                <a16:creationId xmlns:a16="http://schemas.microsoft.com/office/drawing/2014/main" id="{A0532A15-704D-DEC0-C721-3894EE9F06A3}"/>
-              </a:ext>
-            </a:extLst>
-          </p:cNvPr>
-          <p:cNvCxnSpPr>
-            <a:cxnSpLocks/>
-          </p:cNvCxnSpPr>
-          <p:nvPr/>
-        </p:nvCxnSpPr>
-        <p:spPr>
-          <a:xfrm>
-            <a:off x="8487492" y="3440113"/>
-            <a:ext cx="0" cy="1038225"/>
-          </a:xfrm>
-          <a:prstGeom prst="line">
-            <a:avLst/>
-          </a:prstGeom>
-          <a:ln>
-            <a:solidFill>
-              <a:srgbClr val="FF0000"/>
-            </a:solidFill>
-            <a:prstDash val="sysDot"/>
-          </a:ln>
-        </p:spPr>
-        <p:style>
-          <a:lnRef idx="2">
-            <a:schemeClr val="accent1"/>
-          </a:lnRef>
-          <a:fillRef idx="0">
-            <a:schemeClr val="accent1"/>
-          </a:fillRef>
-          <a:effectRef idx="1">
-            <a:schemeClr val="accent1"/>
-          </a:effectRef>
-          <a:fontRef idx="minor">
-            <a:schemeClr val="tx1"/>
-          </a:fontRef>
-        </p:style>
-      </p:cxnSp>
-      <p:cxnSp>
-        <p:nvCxnSpPr>
-          <p:cNvPr id="18" name="Connettore diritto 17">
-            <a:extLst>
-              <a:ext uri="{FF2B5EF4-FFF2-40B4-BE49-F238E27FC236}">
-                <a16:creationId xmlns:a16="http://schemas.microsoft.com/office/drawing/2014/main" id="{E1A732FF-C639-A178-1422-EF6F95A240D8}"/>
-              </a:ext>
-            </a:extLst>
-          </p:cNvPr>
-          <p:cNvCxnSpPr>
-            <a:cxnSpLocks/>
-          </p:cNvCxnSpPr>
-          <p:nvPr/>
-        </p:nvCxnSpPr>
-        <p:spPr>
-          <a:xfrm flipH="1">
-            <a:off x="4138613" y="4806951"/>
-            <a:ext cx="1203325" cy="0"/>
-          </a:xfrm>
-          <a:prstGeom prst="line">
-            <a:avLst/>
-          </a:prstGeom>
-          <a:ln>
-            <a:solidFill>
-              <a:srgbClr val="FF0000"/>
-            </a:solidFill>
-            <a:prstDash val="sysDot"/>
-          </a:ln>
-        </p:spPr>
-        <p:style>
-          <a:lnRef idx="2">
-            <a:schemeClr val="accent1"/>
-          </a:lnRef>
-          <a:fillRef idx="0">
-            <a:schemeClr val="accent1"/>
-          </a:fillRef>
-          <a:effectRef idx="1">
-            <a:schemeClr val="accent1"/>
-          </a:effectRef>
-          <a:fontRef idx="minor">
-            <a:schemeClr val="tx1"/>
-          </a:fontRef>
-        </p:style>
-      </p:cxnSp>
-      <p:cxnSp>
-        <p:nvCxnSpPr>
-          <p:cNvPr id="22" name="Connettore diritto 21">
-            <a:extLst>
-              <a:ext uri="{FF2B5EF4-FFF2-40B4-BE49-F238E27FC236}">
-                <a16:creationId xmlns:a16="http://schemas.microsoft.com/office/drawing/2014/main" id="{F694E3CB-E4C0-FA0D-7F1C-B294C58F5FD2}"/>
-              </a:ext>
-            </a:extLst>
-          </p:cNvPr>
-          <p:cNvCxnSpPr>
-            <a:cxnSpLocks/>
-          </p:cNvCxnSpPr>
-          <p:nvPr/>
-        </p:nvCxnSpPr>
-        <p:spPr>
-          <a:xfrm flipH="1">
-            <a:off x="4138613" y="6229569"/>
-            <a:ext cx="1203325" cy="0"/>
-          </a:xfrm>
-          <a:prstGeom prst="line">
-            <a:avLst/>
-          </a:prstGeom>
-          <a:ln>
-            <a:solidFill>
-              <a:srgbClr val="FF0000"/>
-            </a:solidFill>
-            <a:prstDash val="sysDot"/>
-          </a:ln>
-        </p:spPr>
-        <p:style>
-          <a:lnRef idx="2">
-            <a:schemeClr val="accent1"/>
-          </a:lnRef>
-          <a:fillRef idx="0">
-            <a:schemeClr val="accent1"/>
-          </a:fillRef>
-          <a:effectRef idx="1">
-            <a:schemeClr val="accent1"/>
-          </a:effectRef>
-          <a:fontRef idx="minor">
-            <a:schemeClr val="tx1"/>
-          </a:fontRef>
-        </p:style>
-      </p:cxnSp>
-      <p:cxnSp>
-        <p:nvCxnSpPr>
-          <p:cNvPr id="23" name="Connettore diritto 22">
-            <a:extLst>
-              <a:ext uri="{FF2B5EF4-FFF2-40B4-BE49-F238E27FC236}">
-                <a16:creationId xmlns:a16="http://schemas.microsoft.com/office/drawing/2014/main" id="{18D8E68B-77D0-AA37-02A8-F4262A724A74}"/>
-              </a:ext>
-            </a:extLst>
-          </p:cNvPr>
-          <p:cNvCxnSpPr>
-            <a:cxnSpLocks/>
-          </p:cNvCxnSpPr>
-          <p:nvPr/>
-        </p:nvCxnSpPr>
-        <p:spPr>
-          <a:xfrm flipH="1">
-            <a:off x="9164637" y="4806952"/>
-            <a:ext cx="1203325" cy="0"/>
-          </a:xfrm>
-          <a:prstGeom prst="line">
-            <a:avLst/>
-          </a:prstGeom>
-          <a:ln>
-            <a:solidFill>
-              <a:srgbClr val="FF0000"/>
-            </a:solidFill>
-            <a:prstDash val="sysDot"/>
-          </a:ln>
-        </p:spPr>
-        <p:style>
-          <a:lnRef idx="2">
-            <a:schemeClr val="accent1"/>
-          </a:lnRef>
-          <a:fillRef idx="0">
-            <a:schemeClr val="accent1"/>
-          </a:fillRef>
-          <a:effectRef idx="1">
-            <a:schemeClr val="accent1"/>
-          </a:effectRef>
-          <a:fontRef idx="minor">
-            <a:schemeClr val="tx1"/>
-          </a:fontRef>
-        </p:style>
-      </p:cxnSp>
-      <p:cxnSp>
-        <p:nvCxnSpPr>
-          <p:cNvPr id="24" name="Connettore diritto 23">
-            <a:extLst>
-              <a:ext uri="{FF2B5EF4-FFF2-40B4-BE49-F238E27FC236}">
-                <a16:creationId xmlns:a16="http://schemas.microsoft.com/office/drawing/2014/main" id="{A77E9F3B-3C44-D66F-AB92-981082CB6719}"/>
-              </a:ext>
-            </a:extLst>
-          </p:cNvPr>
-          <p:cNvCxnSpPr>
-            <a:cxnSpLocks/>
-          </p:cNvCxnSpPr>
-          <p:nvPr/>
-        </p:nvCxnSpPr>
-        <p:spPr>
-          <a:xfrm flipH="1">
-            <a:off x="9164637" y="6229569"/>
-            <a:ext cx="1203325" cy="0"/>
-          </a:xfrm>
-          <a:prstGeom prst="line">
-            <a:avLst/>
-          </a:prstGeom>
-          <a:ln>
-            <a:solidFill>
-              <a:srgbClr val="FF0000"/>
-            </a:solidFill>
-            <a:prstDash val="sysDot"/>
-          </a:ln>
-        </p:spPr>
-        <p:style>
-          <a:lnRef idx="2">
-            <a:schemeClr val="accent1"/>
-          </a:lnRef>
-          <a:fillRef idx="0">
-            <a:schemeClr val="accent1"/>
-          </a:fillRef>
-          <a:effectRef idx="1">
-            <a:schemeClr val="accent1"/>
-          </a:effectRef>
-          <a:fontRef idx="minor">
-            <a:schemeClr val="tx1"/>
-          </a:fontRef>
-        </p:style>
-      </p:cxnSp>
-      <p:sp>
-        <p:nvSpPr>
-          <p:cNvPr id="11" name="Rettangolo 10">
-            <a:extLst>
-              <a:ext uri="{FF2B5EF4-FFF2-40B4-BE49-F238E27FC236}">
-                <a16:creationId xmlns:a16="http://schemas.microsoft.com/office/drawing/2014/main" id="{4C842739-3CDC-C45E-E714-D97D9BED5D0F}"/>
-              </a:ext>
-            </a:extLst>
-          </p:cNvPr>
-          <p:cNvSpPr/>
-          <p:nvPr/>
-        </p:nvSpPr>
-        <p:spPr>
-          <a:xfrm>
-            <a:off x="7389455" y="4806951"/>
-            <a:ext cx="1019175" cy="1422618"/>
-          </a:xfrm>
-          <a:prstGeom prst="rect">
-            <a:avLst/>
-          </a:prstGeom>
-          <a:noFill/>
-          <a:ln w="28575">
-            <a:solidFill>
-              <a:srgbClr val="FFC000"/>
-            </a:solidFill>
-            <a:prstDash val="dash"/>
-          </a:ln>
-        </p:spPr>
-        <p:style>
-          <a:lnRef idx="2">
-            <a:schemeClr val="accent1">
-              <a:shade val="15000"/>
-            </a:schemeClr>
-          </a:lnRef>
-          <a:fillRef idx="1">
-            <a:schemeClr val="accent1"/>
-          </a:fillRef>
-          <a:effectRef idx="0">
-            <a:schemeClr val="accent1"/>
-          </a:effectRef>
-          <a:fontRef idx="minor">
-            <a:schemeClr val="lt1"/>
-          </a:fontRef>
-        </p:style>
-        <p:txBody>
-          <a:bodyPr rtlCol="0" anchor="ctr"/>
-          <a:lstStyle/>
-          <a:p>
-            <a:pPr algn="ctr"/>
-            <a:endParaRPr lang="it-IT"/>
-          </a:p>
-        </p:txBody>
-      </p:sp>
-      <mc:AlternateContent xmlns:mc="http://schemas.openxmlformats.org/markup-compatibility/2006">
-        <mc:Choice xmlns:a14="http://schemas.microsoft.com/office/drawing/2010/main" Requires="a14">
-          <p:sp>
-            <p:nvSpPr>
-              <p:cNvPr id="13" name="Rettangolo con angoli arrotondati 12">
-                <a:extLst>
-                  <a:ext uri="{FF2B5EF4-FFF2-40B4-BE49-F238E27FC236}">
-                    <a16:creationId xmlns:a16="http://schemas.microsoft.com/office/drawing/2014/main" id="{80D6D794-BEF0-5EB5-B731-DADE666780B1}"/>
-                  </a:ext>
-                </a:extLst>
-              </p:cNvPr>
-              <p:cNvSpPr/>
-              <p:nvPr/>
-            </p:nvSpPr>
-            <p:spPr>
-              <a:xfrm>
-                <a:off x="9164638" y="3332747"/>
-                <a:ext cx="2331362" cy="1134475"/>
-              </a:xfrm>
-              <a:prstGeom prst="roundRect">
-                <a:avLst/>
-              </a:prstGeom>
-              <a:noFill/>
-              <a:ln w="38100">
-                <a:solidFill>
-                  <a:srgbClr val="FFC000"/>
-                </a:solidFill>
-              </a:ln>
-            </p:spPr>
-            <p:style>
-              <a:lnRef idx="2">
-                <a:schemeClr val="accent1">
-                  <a:shade val="15000"/>
-                </a:schemeClr>
-              </a:lnRef>
-              <a:fillRef idx="1">
-                <a:schemeClr val="accent1"/>
-              </a:fillRef>
-              <a:effectRef idx="0">
-                <a:schemeClr val="accent1"/>
-              </a:effectRef>
-              <a:fontRef idx="minor">
-                <a:schemeClr val="lt1"/>
-              </a:fontRef>
-            </p:style>
-            <p:txBody>
-              <a:bodyPr rtlCol="0" anchor="ctr"/>
-              <a:lstStyle/>
-              <a:p>
-                <a:pPr algn="ctr"/>
-                <a14:m>
-                  <m:oMathPara xmlns:m="http://schemas.openxmlformats.org/officeDocument/2006/math">
-                    <m:oMathParaPr>
-                      <m:jc m:val="centerGroup"/>
-                    </m:oMathParaPr>
-                    <m:oMath xmlns:m="http://schemas.openxmlformats.org/officeDocument/2006/math">
-                      <m:r>
-                        <m:rPr>
-                          <m:sty m:val="p"/>
-                        </m:rPr>
-                        <a:rPr lang="it-IT" b="0" i="0" smtClean="0">
-                          <a:solidFill>
-                            <a:schemeClr val="tx1"/>
-                          </a:solidFill>
-                          <a:latin typeface="Cambria Math" panose="02040503050406030204" pitchFamily="18" charset="0"/>
-                        </a:rPr>
-                        <m:t>Δ</m:t>
-                      </m:r>
-                      <m:r>
-                        <a:rPr lang="it-IT" b="0" i="1" smtClean="0">
-                          <a:solidFill>
-                            <a:schemeClr val="tx1"/>
-                          </a:solidFill>
-                          <a:latin typeface="Cambria Math" panose="02040503050406030204" pitchFamily="18" charset="0"/>
-                        </a:rPr>
-                        <m:t>𝑥</m:t>
-                      </m:r>
-                      <m:r>
-                        <a:rPr lang="it-IT" b="0" i="1" smtClean="0">
-                          <a:solidFill>
-                            <a:schemeClr val="tx1"/>
-                          </a:solidFill>
-                          <a:latin typeface="Cambria Math" panose="02040503050406030204" pitchFamily="18" charset="0"/>
-                        </a:rPr>
-                        <m:t>=</m:t>
-                      </m:r>
-                      <m:f>
-                        <m:fPr>
-                          <m:ctrlPr>
-                            <a:rPr lang="it-IT" b="0" i="1" smtClean="0">
-                              <a:solidFill>
-                                <a:schemeClr val="tx1"/>
-                              </a:solidFill>
-                              <a:latin typeface="Cambria Math" panose="02040503050406030204" pitchFamily="18" charset="0"/>
-                            </a:rPr>
-                          </m:ctrlPr>
-                        </m:fPr>
-                        <m:num>
-                          <m:sSub>
-                            <m:sSubPr>
-                              <m:ctrlPr>
-                                <a:rPr lang="it-IT" b="0" i="1" smtClean="0">
-                                  <a:solidFill>
-                                    <a:schemeClr val="tx1"/>
-                                  </a:solidFill>
-                                  <a:latin typeface="Cambria Math" panose="02040503050406030204" pitchFamily="18" charset="0"/>
-                                </a:rPr>
-                              </m:ctrlPr>
-                            </m:sSubPr>
-                            <m:e>
-                              <m:r>
-                                <a:rPr lang="it-IT" b="0" i="1" smtClean="0">
-                                  <a:solidFill>
-                                    <a:schemeClr val="tx1"/>
-                                  </a:solidFill>
-                                  <a:latin typeface="Cambria Math" panose="02040503050406030204" pitchFamily="18" charset="0"/>
-                                </a:rPr>
-                                <m:t>𝜃</m:t>
-                              </m:r>
-                            </m:e>
-                            <m:sub>
-                              <m:r>
-                                <a:rPr lang="it-IT" b="0" i="1" smtClean="0">
-                                  <a:solidFill>
-                                    <a:schemeClr val="tx1"/>
-                                  </a:solidFill>
-                                  <a:latin typeface="Cambria Math" panose="02040503050406030204" pitchFamily="18" charset="0"/>
-                                </a:rPr>
-                                <m:t>𝑏</m:t>
-                              </m:r>
-                            </m:sub>
-                          </m:sSub>
-                          <m:r>
-                            <a:rPr lang="it-IT" b="0" i="1" smtClean="0">
-                              <a:solidFill>
-                                <a:schemeClr val="tx1"/>
-                              </a:solidFill>
-                              <a:latin typeface="Cambria Math" panose="02040503050406030204" pitchFamily="18" charset="0"/>
-                            </a:rPr>
-                            <m:t>⋅</m:t>
-                          </m:r>
-                          <m:r>
-                            <a:rPr lang="it-IT" b="0" i="1" smtClean="0">
-                              <a:solidFill>
-                                <a:schemeClr val="tx1"/>
-                              </a:solidFill>
-                              <a:latin typeface="Cambria Math" panose="02040503050406030204" pitchFamily="18" charset="0"/>
-                            </a:rPr>
-                            <m:t>𝐿</m:t>
-                          </m:r>
-                        </m:num>
-                        <m:den>
-                          <m:r>
-                            <a:rPr lang="it-IT" b="0" i="1" smtClean="0">
-                              <a:solidFill>
-                                <a:schemeClr val="tx1"/>
-                              </a:solidFill>
-                              <a:latin typeface="Cambria Math" panose="02040503050406030204" pitchFamily="18" charset="0"/>
-                            </a:rPr>
-                            <m:t>2</m:t>
-                          </m:r>
-                        </m:den>
-                      </m:f>
-                      <m:r>
-                        <a:rPr lang="it-IT" b="0" i="1" smtClean="0">
-                          <a:solidFill>
-                            <a:schemeClr val="tx1"/>
-                          </a:solidFill>
-                          <a:latin typeface="Cambria Math" panose="02040503050406030204" pitchFamily="18" charset="0"/>
-                        </a:rPr>
-                        <m:t>∼0.22 </m:t>
-                      </m:r>
-                      <m:r>
-                        <m:rPr>
-                          <m:sty m:val="p"/>
-                        </m:rPr>
-                        <a:rPr lang="it-IT" b="0" i="0" smtClean="0">
-                          <a:solidFill>
-                            <a:schemeClr val="tx1"/>
-                          </a:solidFill>
-                          <a:latin typeface="Cambria Math" panose="02040503050406030204" pitchFamily="18" charset="0"/>
-                        </a:rPr>
-                        <m:t>mm</m:t>
-                      </m:r>
-                    </m:oMath>
-                  </m:oMathPara>
-                </a14:m>
-                <a:endParaRPr lang="it-IT" dirty="0">
-                  <a:solidFill>
-                    <a:schemeClr val="tx1"/>
-                  </a:solidFill>
-                </a:endParaRPr>
-              </a:p>
-            </p:txBody>
-          </p:sp>
-        </mc:Choice>
-        <mc:Fallback>
-          <p:sp>
-            <p:nvSpPr>
-              <p:cNvPr id="13" name="Rettangolo con angoli arrotondati 12">
-                <a:extLst>
-                  <a:ext uri="{FF2B5EF4-FFF2-40B4-BE49-F238E27FC236}">
-                    <a16:creationId xmlns:a16="http://schemas.microsoft.com/office/drawing/2014/main" id="{80D6D794-BEF0-5EB5-B731-DADE666780B1}"/>
-                  </a:ext>
-                </a:extLst>
-              </p:cNvPr>
-              <p:cNvSpPr>
-                <a:spLocks noRot="1" noChangeAspect="1" noMove="1" noResize="1" noEditPoints="1" noAdjustHandles="1" noChangeArrowheads="1" noChangeShapeType="1" noTextEdit="1"/>
-              </p:cNvSpPr>
-              <p:nvPr/>
-            </p:nvSpPr>
-            <p:spPr>
-              <a:xfrm>
-                <a:off x="9164638" y="3332747"/>
-                <a:ext cx="2331362" cy="1134475"/>
-              </a:xfrm>
-              <a:prstGeom prst="roundRect">
-                <a:avLst/>
-              </a:prstGeom>
-              <a:blipFill>
-                <a:blip r:embed="rId6"/>
-                <a:stretch>
-                  <a:fillRect/>
-                </a:stretch>
-              </a:blipFill>
-              <a:ln w="38100">
-                <a:solidFill>
-                  <a:srgbClr val="FFC000"/>
-                </a:solidFill>
-              </a:ln>
-            </p:spPr>
-            <p:txBody>
-              <a:bodyPr/>
-              <a:lstStyle/>
-              <a:p>
-                <a:r>
-                  <a:rPr lang="it-IT">
-                    <a:noFill/>
-                  </a:rPr>
-                  <a:t> </a:t>
-                </a:r>
-              </a:p>
-            </p:txBody>
-          </p:sp>
-        </mc:Fallback>
-      </mc:AlternateContent>
-    </p:spTree>
-    <p:extLst>
-      <p:ext uri="{BB962C8B-B14F-4D97-AF65-F5344CB8AC3E}">
-        <p14:creationId xmlns:p14="http://schemas.microsoft.com/office/powerpoint/2010/main" val="2772937911"/>
       </p:ext>
     </p:extLst>
   </p:cSld>

--- a/slides/week4.pptx
+++ b/slides/week4.pptx
@@ -13950,14 +13950,13 @@
               </a:ext>
             </a:extLst>
           </a:blip>
-          <a:stretch>
-            <a:fillRect/>
-          </a:stretch>
+          <a:srcRect/>
+          <a:stretch/>
         </p:blipFill>
         <p:spPr>
           <a:xfrm>
-            <a:off x="9151391" y="1222454"/>
-            <a:ext cx="2873709" cy="2147282"/>
+            <a:off x="9153500" y="1222454"/>
+            <a:ext cx="2869490" cy="2147282"/>
           </a:xfrm>
           <a:prstGeom prst="rect">
             <a:avLst/>
@@ -17229,8 +17228,8 @@
           </a:p>
         </p:txBody>
       </p:sp>
-      <mc:AlternateContent xmlns:mc="http://schemas.openxmlformats.org/markup-compatibility/2006">
-        <mc:Choice xmlns:a14="http://schemas.microsoft.com/office/drawing/2010/main" Requires="a14">
+      <mc:AlternateContent xmlns:mc="http://schemas.openxmlformats.org/markup-compatibility/2006" xmlns:a14="http://schemas.microsoft.com/office/drawing/2010/main">
+        <mc:Choice Requires="a14">
           <p:graphicFrame>
             <p:nvGraphicFramePr>
               <p:cNvPr id="11" name="Segnaposto contenuto 10">
@@ -17435,13 +17434,7 @@
                                   <a:rPr lang="it-IT" sz="2400" b="1" i="1" smtClean="0">
                                     <a:latin typeface="Cambria Math" panose="02040503050406030204" pitchFamily="18" charset="0"/>
                                   </a:rPr>
-                                  <m:t> </m:t>
-                                </m:r>
-                                <m:r>
-                                  <a:rPr lang="it-IT" sz="2400" b="1" i="1" smtClean="0">
-                                    <a:latin typeface="Cambria Math" panose="02040503050406030204" pitchFamily="18" charset="0"/>
-                                  </a:rPr>
-                                  <m:t>[</m:t>
+                                  <m:t> [</m:t>
                                 </m:r>
                                 <m:r>
                                   <a:rPr lang="it-IT" sz="2400" b="1" i="1" smtClean="0">
@@ -17544,13 +17537,7 @@
                                 <a:rPr lang="it-IT" sz="2400" b="1" i="1" smtClean="0">
                                   <a:latin typeface="Cambria Math" panose="02040503050406030204" pitchFamily="18" charset="0"/>
                                 </a:rPr>
-                                <m:t> </m:t>
-                              </m:r>
-                              <m:r>
-                                <a:rPr lang="it-IT" sz="2400" b="1" i="1" smtClean="0">
-                                  <a:latin typeface="Cambria Math" panose="02040503050406030204" pitchFamily="18" charset="0"/>
-                                </a:rPr>
-                                <m:t>[</m:t>
+                                <m:t> [</m:t>
                               </m:r>
                               <m:r>
                                 <a:rPr lang="it-IT" sz="2400" b="1" i="1" smtClean="0">
@@ -17896,19 +17883,7 @@
                                       <a:rPr lang="it-IT" sz="2400" b="0" i="1" smtClean="0">
                                         <a:latin typeface="Cambria Math" panose="02040503050406030204" pitchFamily="18" charset="0"/>
                                       </a:rPr>
-                                      <m:t>18.</m:t>
-                                    </m:r>
-                                    <m:r>
-                                      <a:rPr lang="it-IT" sz="2400" b="0" i="1" smtClean="0">
-                                        <a:latin typeface="Cambria Math" panose="02040503050406030204" pitchFamily="18" charset="0"/>
-                                      </a:rPr>
-                                      <m:t>7</m:t>
-                                    </m:r>
-                                    <m:r>
-                                      <a:rPr lang="it-IT" sz="2400" b="0" i="1" smtClean="0">
-                                        <a:latin typeface="Cambria Math" panose="02040503050406030204" pitchFamily="18" charset="0"/>
-                                      </a:rPr>
-                                      <m:t>±0.01</m:t>
+                                      <m:t>18.7±0.01</m:t>
                                     </m:r>
                                   </m:e>
                                 </m:d>
@@ -18118,19 +18093,7 @@
                                       <a:rPr lang="it-IT" sz="2400" b="0" i="1" smtClean="0">
                                         <a:latin typeface="Cambria Math" panose="02040503050406030204" pitchFamily="18" charset="0"/>
                                       </a:rPr>
-                                      <m:t>18.</m:t>
-                                    </m:r>
-                                    <m:r>
-                                      <a:rPr lang="it-IT" sz="2400" b="0" i="1" smtClean="0">
-                                        <a:latin typeface="Cambria Math" panose="02040503050406030204" pitchFamily="18" charset="0"/>
-                                      </a:rPr>
-                                      <m:t>3</m:t>
-                                    </m:r>
-                                    <m:r>
-                                      <a:rPr lang="it-IT" sz="2400" b="0" i="1" smtClean="0">
-                                        <a:latin typeface="Cambria Math" panose="02040503050406030204" pitchFamily="18" charset="0"/>
-                                      </a:rPr>
-                                      <m:t>±0.01</m:t>
+                                      <m:t>18.3±0.01</m:t>
                                     </m:r>
                                   </m:e>
                                 </m:d>
@@ -18359,19 +18322,7 @@
                                       <a:rPr lang="it-IT" sz="2400" b="0" i="1" smtClean="0">
                                         <a:latin typeface="Cambria Math" panose="02040503050406030204" pitchFamily="18" charset="0"/>
                                       </a:rPr>
-                                      <m:t>17.</m:t>
-                                    </m:r>
-                                    <m:r>
-                                      <a:rPr lang="it-IT" sz="2400" b="0" i="1" smtClean="0">
-                                        <a:latin typeface="Cambria Math" panose="02040503050406030204" pitchFamily="18" charset="0"/>
-                                      </a:rPr>
-                                      <m:t>1</m:t>
-                                    </m:r>
-                                    <m:r>
-                                      <a:rPr lang="it-IT" sz="2400" b="0" i="1" smtClean="0">
-                                        <a:latin typeface="Cambria Math" panose="02040503050406030204" pitchFamily="18" charset="0"/>
-                                      </a:rPr>
-                                      <m:t>±0.01</m:t>
+                                      <m:t>17.1±0.01</m:t>
                                     </m:r>
                                   </m:e>
                                 </m:d>
@@ -18548,13 +18499,7 @@
                                   <a:rPr lang="it-IT" sz="2400" b="0" i="1" smtClean="0">
                                     <a:latin typeface="Cambria Math" panose="02040503050406030204" pitchFamily="18" charset="0"/>
                                   </a:rPr>
-                                  <m:t>2.9</m:t>
-                                </m:r>
-                                <m:r>
-                                  <a:rPr lang="it-IT" sz="2400" b="0" i="1" smtClean="0">
-                                    <a:latin typeface="Cambria Math" panose="02040503050406030204" pitchFamily="18" charset="0"/>
-                                  </a:rPr>
-                                  <m:t>7</m:t>
+                                  <m:t>2.97</m:t>
                                 </m:r>
                               </m:oMath>
                             </m:oMathPara>
@@ -18660,19 +18605,7 @@
                                       <a:rPr lang="it-IT" sz="2400" b="0" i="1" smtClean="0">
                                         <a:latin typeface="Cambria Math" panose="02040503050406030204" pitchFamily="18" charset="0"/>
                                       </a:rPr>
-                                      <m:t>17.</m:t>
-                                    </m:r>
-                                    <m:r>
-                                      <a:rPr lang="it-IT" sz="2400" b="0" i="1" smtClean="0">
-                                        <a:latin typeface="Cambria Math" panose="02040503050406030204" pitchFamily="18" charset="0"/>
-                                      </a:rPr>
-                                      <m:t>9</m:t>
-                                    </m:r>
-                                    <m:r>
-                                      <a:rPr lang="it-IT" sz="2400" b="0" i="1" smtClean="0">
-                                        <a:latin typeface="Cambria Math" panose="02040503050406030204" pitchFamily="18" charset="0"/>
-                                      </a:rPr>
-                                      <m:t>±0.01</m:t>
+                                      <m:t>17.9±0.01</m:t>
                                     </m:r>
                                   </m:e>
                                 </m:d>
@@ -18904,31 +18837,7 @@
                                       <a:rPr lang="it-IT" sz="2400" b="0" i="1" smtClean="0">
                                         <a:latin typeface="Cambria Math" panose="02040503050406030204" pitchFamily="18" charset="0"/>
                                       </a:rPr>
-                                      <m:t>1</m:t>
-                                    </m:r>
-                                    <m:r>
-                                      <a:rPr lang="it-IT" sz="2400" b="0" i="1" smtClean="0">
-                                        <a:latin typeface="Cambria Math" panose="02040503050406030204" pitchFamily="18" charset="0"/>
-                                      </a:rPr>
-                                      <m:t>7</m:t>
-                                    </m:r>
-                                    <m:r>
-                                      <a:rPr lang="it-IT" sz="2400" b="0" i="1" smtClean="0">
-                                        <a:latin typeface="Cambria Math" panose="02040503050406030204" pitchFamily="18" charset="0"/>
-                                      </a:rPr>
-                                      <m:t>.</m:t>
-                                    </m:r>
-                                    <m:r>
-                                      <a:rPr lang="it-IT" sz="2400" b="0" i="1" smtClean="0">
-                                        <a:latin typeface="Cambria Math" panose="02040503050406030204" pitchFamily="18" charset="0"/>
-                                      </a:rPr>
-                                      <m:t>8</m:t>
-                                    </m:r>
-                                    <m:r>
-                                      <a:rPr lang="it-IT" sz="2400" b="0" i="1" smtClean="0">
-                                        <a:latin typeface="Cambria Math" panose="02040503050406030204" pitchFamily="18" charset="0"/>
-                                      </a:rPr>
-                                      <m:t>±0.01</m:t>
+                                      <m:t>17.8±0.01</m:t>
                                     </m:r>
                                   </m:e>
                                 </m:d>
@@ -18966,7 +18875,7 @@
             </a:graphic>
           </p:graphicFrame>
         </mc:Choice>
-        <mc:Fallback>
+        <mc:Fallback xmlns="">
           <p:graphicFrame>
             <p:nvGraphicFramePr>
               <p:cNvPr id="11" name="Segnaposto contenuto 10">
@@ -20384,8 +20293,8 @@
           </a:p>
         </p:txBody>
       </p:sp>
-      <mc:AlternateContent xmlns:mc="http://schemas.openxmlformats.org/markup-compatibility/2006">
-        <mc:Choice xmlns:a14="http://schemas.microsoft.com/office/drawing/2010/main" Requires="a14">
+      <mc:AlternateContent xmlns:mc="http://schemas.openxmlformats.org/markup-compatibility/2006" xmlns:a14="http://schemas.microsoft.com/office/drawing/2010/main">
+        <mc:Choice Requires="a14">
           <p:graphicFrame>
             <p:nvGraphicFramePr>
               <p:cNvPr id="11" name="Segnaposto contenuto 10">
@@ -22062,7 +21971,7 @@
             </a:graphic>
           </p:graphicFrame>
         </mc:Choice>
-        <mc:Fallback>
+        <mc:Fallback xmlns="">
           <p:graphicFrame>
             <p:nvGraphicFramePr>
               <p:cNvPr id="11" name="Segnaposto contenuto 10">
@@ -23557,8 +23466,8 @@
           </a:p>
         </p:txBody>
       </p:sp>
-      <mc:AlternateContent xmlns:mc="http://schemas.openxmlformats.org/markup-compatibility/2006">
-        <mc:Choice xmlns:a14="http://schemas.microsoft.com/office/drawing/2010/main" Requires="a14">
+      <mc:AlternateContent xmlns:mc="http://schemas.openxmlformats.org/markup-compatibility/2006" xmlns:a14="http://schemas.microsoft.com/office/drawing/2010/main">
+        <mc:Choice Requires="a14">
           <p:graphicFrame>
             <p:nvGraphicFramePr>
               <p:cNvPr id="11" name="Segnaposto contenuto 10">
@@ -24010,13 +23919,7 @@
                                   <a:rPr lang="it-IT" sz="2400" b="0" i="1" smtClean="0">
                                     <a:latin typeface="Cambria Math" panose="02040503050406030204" pitchFamily="18" charset="0"/>
                                   </a:rPr>
-                                  <m:t>3.50</m:t>
-                                </m:r>
-                                <m:r>
-                                  <a:rPr lang="it-IT" sz="2400" b="0" i="1" smtClean="0">
-                                    <a:latin typeface="Cambria Math" panose="02040503050406030204" pitchFamily="18" charset="0"/>
-                                  </a:rPr>
-                                  <m:t> </m:t>
+                                  <m:t>3.50 </m:t>
                                 </m:r>
                                 <m:r>
                                   <a:rPr lang="it-IT" sz="2400" b="0" i="1" smtClean="0">
@@ -24100,13 +24003,7 @@
                                   <a:rPr lang="it-IT" sz="2400" b="0" i="1" smtClean="0">
                                     <a:latin typeface="Cambria Math" panose="02040503050406030204" pitchFamily="18" charset="0"/>
                                   </a:rPr>
-                                  <m:t>6033</m:t>
-                                </m:r>
-                                <m:r>
-                                  <a:rPr lang="it-IT" sz="2400" b="0" i="1" smtClean="0">
-                                    <a:latin typeface="Cambria Math" panose="02040503050406030204" pitchFamily="18" charset="0"/>
-                                  </a:rPr>
-                                  <m:t> </m:t>
+                                  <m:t>6033 </m:t>
                                 </m:r>
                                 <m:r>
                                   <a:rPr lang="it-IT" sz="2400" b="0" i="1" smtClean="0">
@@ -24586,13 +24483,7 @@
                                   <a:rPr lang="it-IT" sz="2400" b="0" i="1" smtClean="0">
                                     <a:latin typeface="Cambria Math" panose="02040503050406030204" pitchFamily="18" charset="0"/>
                                   </a:rPr>
-                                  <m:t>2.90</m:t>
-                                </m:r>
-                                <m:r>
-                                  <a:rPr lang="it-IT" sz="2400" b="0" i="1" smtClean="0">
-                                    <a:latin typeface="Cambria Math" panose="02040503050406030204" pitchFamily="18" charset="0"/>
-                                  </a:rPr>
-                                  <m:t> </m:t>
+                                  <m:t>2.90 </m:t>
                                 </m:r>
                                 <m:r>
                                   <a:rPr lang="it-IT" sz="2400" b="0" i="1" smtClean="0">
@@ -24690,13 +24581,7 @@
                                   <a:rPr lang="it-IT" sz="2400" b="0" i="1" smtClean="0">
                                     <a:latin typeface="Cambria Math" panose="02040503050406030204" pitchFamily="18" charset="0"/>
                                   </a:rPr>
-                                  <m:t>6124</m:t>
-                                </m:r>
-                                <m:r>
-                                  <a:rPr lang="it-IT" sz="2400" b="0" i="1" smtClean="0">
-                                    <a:latin typeface="Cambria Math" panose="02040503050406030204" pitchFamily="18" charset="0"/>
-                                  </a:rPr>
-                                  <m:t> </m:t>
+                                  <m:t>6124 </m:t>
                                 </m:r>
                                 <m:r>
                                   <a:rPr lang="it-IT" sz="2400" b="0" i="1" smtClean="0">
@@ -24961,7 +24846,7 @@
             </a:graphic>
           </p:graphicFrame>
         </mc:Choice>
-        <mc:Fallback>
+        <mc:Fallback xmlns="">
           <p:graphicFrame>
             <p:nvGraphicFramePr>
               <p:cNvPr id="11" name="Segnaposto contenuto 10">

--- a/slides/week4.pptx
+++ b/slides/week4.pptx
@@ -23156,7 +23156,7 @@
             </a:r>
             <a:r>
               <a:rPr lang="it-IT" sz="2400" i="1" u="sng" dirty="0" err="1"/>
-              <a:t>crytsal</a:t>
+              <a:t>crystal</a:t>
             </a:r>
             <a:endParaRPr lang="it-IT" sz="2400" i="1" u="sng" dirty="0"/>
           </a:p>
@@ -26332,7 +26332,7 @@
                   <a:srgbClr val="002060"/>
                 </a:solidFill>
               </a:rPr>
-              <a:t>	BACKUP SLIDES: SCHEMATIC LAYOUT 2</a:t>
+              <a:t>	BACKUP SLIDES: SCHEMATIC LAYOUT</a:t>
             </a:r>
           </a:p>
         </p:txBody>
